--- a/DOC/論文撰寫/口試簡報_鋰電池SOC估測.pptx
+++ b/DOC/論文撰寫/口試簡報_鋰電池SOC估測.pptx
@@ -3466,7 +3466,7 @@
                 </a:solidFill>
                 <a:latin typeface="Microsoft JhengHei"/>
               </a:rPr>
-              <a:t>[ 研究生姓名 ]</a:t>
+              <a:t>洪大甲</a:t>
             </a:r>
           </a:p>
           <a:p>
@@ -3491,7 +3491,7 @@
                 </a:solidFill>
                 <a:latin typeface="Microsoft JhengHei"/>
               </a:rPr>
-              <a:t>[ 指導教授 ] 博士</a:t>
+              <a:t>鄭維凱</a:t>
             </a:r>
           </a:p>
           <a:p>
@@ -8271,7 +8271,7 @@
                 </a:solidFill>
                 <a:latin typeface="Microsoft JhengHei"/>
               </a:rPr>
-              <a:t>OCV–SOC 由 GITT 標準協定建 pseudo-OCV 表，1% 細網格平滑使雅可比連續</a:t>
+              <a:t>OCV 表由 GITT 實測建立（2026-07-05；20 點 → 平滑成 21 點單調表）；R₀/R₁/τ₁ 由脈衝鬆弛最小平方辨識</a:t>
             </a:r>
           </a:p>
           <a:p>
@@ -8312,14 +8312,14 @@
         </p:nvSpPr>
         <p:spPr>
           <a:xfrm>
-            <a:off x="4754880" y="4023360"/>
-            <a:ext cx="6949440" cy="2194560"/>
+            <a:off x="4754880" y="3886200"/>
+            <a:ext cx="6949440" cy="2331720"/>
           </a:xfrm>
           <a:prstGeom prst="rect">
             <a:avLst/>
           </a:prstGeom>
           <a:solidFill>
-            <a:srgbClr val="FDF3E0"/>
+            <a:srgbClr val="E6F4EA"/>
           </a:solidFill>
           <a:ln>
             <a:noFill/>
@@ -8356,8 +8356,8 @@
         </p:nvSpPr>
         <p:spPr>
           <a:xfrm>
-            <a:off x="4754880" y="4023360"/>
-            <a:ext cx="82296" cy="2194560"/>
+            <a:off x="4754880" y="3886200"/>
+            <a:ext cx="82296" cy="2331720"/>
           </a:xfrm>
           <a:prstGeom prst="rect">
             <a:avLst/>
@@ -8400,8 +8400,8 @@
         </p:nvSpPr>
         <p:spPr>
           <a:xfrm>
-            <a:off x="4956048" y="4133088"/>
-            <a:ext cx="6629400" cy="2011680"/>
+            <a:off x="4956048" y="3995928"/>
+            <a:ext cx="6629400" cy="2148840"/>
           </a:xfrm>
           <a:prstGeom prst="rect">
             <a:avLst/>
@@ -8422,11 +8422,11 @@
             <a:r>
               <a:rPr sz="1400" b="1" i="0">
                 <a:solidFill>
-                  <a:srgbClr val="C08A2B"/>
-                </a:solidFill>
-                <a:latin typeface="Microsoft JhengHei"/>
-              </a:rPr>
-              <a:t>代價與現況</a:t>
+                  <a:srgbClr val="2E7D32"/>
+                </a:solidFill>
+                <a:latin typeface="Microsoft JhengHei"/>
+              </a:rPr>
+              <a:t>實測結果（實測）</a:t>
             </a:r>
           </a:p>
           <a:p>
@@ -8442,7 +8442,7 @@
                 </a:solidFill>
                 <a:latin typeface="Microsoft JhengHei"/>
               </a:rPr>
-              <a:t>• 兼具庫倫的良好動態 + OCV 的絕對校正</a:t>
+              <a:t>• PC 重放 RMSE 0.60%；板端整輪四倍率 RMSE 0.22–0.90%（全 &lt;1%）→ 三法最佳</a:t>
             </a:r>
           </a:p>
           <a:p>
@@ -8458,7 +8458,7 @@
                 </a:solidFill>
                 <a:latin typeface="Microsoft JhengHei"/>
               </a:rPr>
-              <a:t>• MCU 無硬體 FPU → 軟浮點模擬，單次更新最耗時、Flash/RAM 最大</a:t>
+              <a:t>• +25% 錯誤初值 → 單步量測更新即拉回（自我修正，庫倫做不到）</a:t>
             </a:r>
           </a:p>
           <a:p>
@@ -8474,7 +8474,23 @@
                 </a:solidFill>
                 <a:latin typeface="Microsoft JhengHei"/>
               </a:rPr>
-              <a:t>• 4.2.5 精度為 [待測]（依賴 GITT 表 + PC 原型 + STM32 移植）</a:t>
+              <a:t>• MCU 無 FPU → 軟浮點；單次更新 15,187 cycles（237 µs）、Flash +2.3 KB 最大</a:t>
+            </a:r>
+          </a:p>
+          <a:p>
+            <a:pPr>
+              <a:spcAft>
+                <a:spcPts val="400"/>
+              </a:spcAft>
+            </a:pPr>
+            <a:r>
+              <a:rPr sz="1300" b="0" i="0">
+                <a:solidFill>
+                  <a:srgbClr val="404040"/>
+                </a:solidFill>
+                <a:latin typeface="Microsoft JhengHei"/>
+              </a:rPr>
+              <a:t>• 首輪隨倍率正偏 → 追出量測域錯位（見次頁）→ R₀ 改電池端域後全倍率 &lt;1%</a:t>
             </a:r>
           </a:p>
         </p:txBody>
@@ -9249,7 +9265,7 @@
                 </a:solidFill>
                 <a:latin typeface="Microsoft JhengHei"/>
               </a:rPr>
-              <a:t>六、動態阻抗實測結果（fresh-cell rounds 1–3）</a:t>
+              <a:t>六、動態阻抗實測與量測域發現</a:t>
             </a:r>
           </a:p>
           <a:p>
@@ -9260,7 +9276,7 @@
                 </a:solidFill>
                 <a:latin typeface="Microsoft JhengHei"/>
               </a:rPr>
-              <a:t>二次擬合 + 以擬合反推 SOC 之逐點精度</a:t>
+              <a:t>離線可擬合拋物線，但線上單獨反推不可行 — 量測域錯位 + 反問題病態</a:t>
             </a:r>
           </a:p>
         </p:txBody>
@@ -9294,7 +9310,7 @@
                 </a:solidFill>
                 <a:latin typeface="Microsoft JhengHei"/>
               </a:rPr>
-              <a:t>鋰電池 SOC 估測方法之比較與嵌入式實作　|　實測：動態阻抗</a:t>
+              <a:t>鋰電池 SOC 估測方法之比較與嵌入式實作　|　動態阻抗與量測域發現</a:t>
             </a:r>
           </a:p>
         </p:txBody>
@@ -9342,8 +9358,8 @@
         </p:nvSpPr>
         <p:spPr>
           <a:xfrm>
-            <a:off x="807335" y="1242060"/>
-            <a:ext cx="4420369" cy="2819400"/>
+            <a:off x="1026417" y="1196340"/>
+            <a:ext cx="4347966" cy="2773680"/>
           </a:xfrm>
           <a:prstGeom prst="rect">
             <a:avLst/>
@@ -9396,8 +9412,8 @@
         </p:blipFill>
         <p:spPr>
           <a:xfrm>
-            <a:off x="845435" y="1280160"/>
-            <a:ext cx="4344169" cy="2743200"/>
+            <a:off x="1064517" y="1234440"/>
+            <a:ext cx="4271766" cy="2697480"/>
           </a:xfrm>
           <a:prstGeom prst="rect">
             <a:avLst/>
@@ -9412,8 +9428,8 @@
         </p:nvSpPr>
         <p:spPr>
           <a:xfrm>
-            <a:off x="457200" y="4114800"/>
-            <a:ext cx="5120640" cy="320040"/>
+            <a:off x="502920" y="3931920"/>
+            <a:ext cx="5394960" cy="320040"/>
           </a:xfrm>
           <a:prstGeom prst="rect">
             <a:avLst/>
@@ -9434,1030 +9450,91 @@
                 </a:solidFill>
                 <a:latin typeface="Microsoft JhengHei"/>
               </a:rPr>
-              <a:t>圖 4-4　|ΔV/ΔI|–SOC 實測散點與二次擬合（四種放電倍率）</a:t>
-            </a:r>
-          </a:p>
-        </p:txBody>
-      </p:sp>
-      <p:graphicFrame>
-        <p:nvGraphicFramePr>
-          <p:cNvPr id="10" name="Table 9"/>
-          <p:cNvGraphicFramePr>
-            <a:graphicFrameLocks noGrp="1"/>
-          </p:cNvGraphicFramePr>
-          <p:nvPr/>
-        </p:nvGraphicFramePr>
-        <p:xfrm>
-          <a:off x="5760720" y="1417320"/>
-          <a:ext cx="5943600" cy="2377440"/>
-        </p:xfrm>
-        <a:graphic>
-          <a:graphicData uri="http://schemas.openxmlformats.org/drawingml/2006/table">
-            <a:tbl>
-              <a:tblPr firstRow="1" bandRow="1">
-                <a:tableStyleId>{5C22544A-7EE6-4342-B048-85BDC9FD1C3A}</a:tableStyleId>
-              </a:tblPr>
-              <a:tblGrid>
-                <a:gridCol w="825500"/>
-                <a:gridCol w="825500"/>
-                <a:gridCol w="825500"/>
-                <a:gridCol w="825500"/>
-                <a:gridCol w="908050"/>
-                <a:gridCol w="742950"/>
-                <a:gridCol w="990600"/>
-              </a:tblGrid>
-              <a:tr h="396240">
-                <a:tc>
-                  <a:txBody>
-                    <a:bodyPr wrap="square"/>
-                    <a:lstStyle/>
-                    <a:p>
-                      <a:pPr algn="ctr"/>
-                      <a:r>
-                        <a:rPr sz="1300" b="1" i="0">
-                          <a:solidFill>
-                            <a:srgbClr val="FFFFFF"/>
-                          </a:solidFill>
-                          <a:latin typeface="Microsoft JhengHei"/>
-                        </a:rPr>
-                        <a:t>倍率</a:t>
-                      </a:r>
-                    </a:p>
-                  </a:txBody>
-                  <a:tcPr marL="63500" marR="50800" marT="25400" marB="25400" anchor="ctr">
-                    <a:solidFill>
-                      <a:srgbClr val="1F3864"/>
-                    </a:solidFill>
-                  </a:tcPr>
-                </a:tc>
-                <a:tc>
-                  <a:txBody>
-                    <a:bodyPr wrap="square"/>
-                    <a:lstStyle/>
-                    <a:p>
-                      <a:pPr algn="ctr"/>
-                      <a:r>
-                        <a:rPr sz="1300" b="1" i="0">
-                          <a:solidFill>
-                            <a:srgbClr val="FFFFFF"/>
-                          </a:solidFill>
-                          <a:latin typeface="Microsoft JhengHei"/>
-                        </a:rPr>
-                        <a:t>a (mΩ)</a:t>
-                      </a:r>
-                    </a:p>
-                  </a:txBody>
-                  <a:tcPr marL="63500" marR="50800" marT="25400" marB="25400" anchor="ctr">
-                    <a:solidFill>
-                      <a:srgbClr val="1F3864"/>
-                    </a:solidFill>
-                  </a:tcPr>
-                </a:tc>
-                <a:tc>
-                  <a:txBody>
-                    <a:bodyPr wrap="square"/>
-                    <a:lstStyle/>
-                    <a:p>
-                      <a:pPr algn="ctr"/>
-                      <a:r>
-                        <a:rPr sz="1300" b="1" i="0">
-                          <a:solidFill>
-                            <a:srgbClr val="FFFFFF"/>
-                          </a:solidFill>
-                          <a:latin typeface="Microsoft JhengHei"/>
-                        </a:rPr>
-                        <a:t>b (mΩ)</a:t>
-                      </a:r>
-                    </a:p>
-                  </a:txBody>
-                  <a:tcPr marL="63500" marR="50800" marT="25400" marB="25400" anchor="ctr">
-                    <a:solidFill>
-                      <a:srgbClr val="1F3864"/>
-                    </a:solidFill>
-                  </a:tcPr>
-                </a:tc>
-                <a:tc>
-                  <a:txBody>
-                    <a:bodyPr wrap="square"/>
-                    <a:lstStyle/>
-                    <a:p>
-                      <a:pPr algn="ctr"/>
-                      <a:r>
-                        <a:rPr sz="1300" b="1" i="0">
-                          <a:solidFill>
-                            <a:srgbClr val="FFFFFF"/>
-                          </a:solidFill>
-                          <a:latin typeface="Microsoft JhengHei"/>
-                        </a:rPr>
-                        <a:t>c (mΩ)</a:t>
-                      </a:r>
-                    </a:p>
-                  </a:txBody>
-                  <a:tcPr marL="63500" marR="50800" marT="25400" marB="25400" anchor="ctr">
-                    <a:solidFill>
-                      <a:srgbClr val="1F3864"/>
-                    </a:solidFill>
-                  </a:tcPr>
-                </a:tc>
-                <a:tc>
-                  <a:txBody>
-                    <a:bodyPr wrap="square"/>
-                    <a:lstStyle/>
-                    <a:p>
-                      <a:pPr algn="ctr"/>
-                      <a:r>
-                        <a:rPr sz="1300" b="1" i="0">
-                          <a:solidFill>
-                            <a:srgbClr val="FFFFFF"/>
-                          </a:solidFill>
-                          <a:latin typeface="Microsoft JhengHei"/>
-                        </a:rPr>
-                        <a:t>最低點</a:t>
-                      </a:r>
-                    </a:p>
-                  </a:txBody>
-                  <a:tcPr marL="63500" marR="50800" marT="25400" marB="25400" anchor="ctr">
-                    <a:solidFill>
-                      <a:srgbClr val="1F3864"/>
-                    </a:solidFill>
-                  </a:tcPr>
-                </a:tc>
-                <a:tc>
-                  <a:txBody>
-                    <a:bodyPr wrap="square"/>
-                    <a:lstStyle/>
-                    <a:p>
-                      <a:pPr algn="ctr"/>
-                      <a:r>
-                        <a:rPr sz="1300" b="1" i="0">
-                          <a:solidFill>
-                            <a:srgbClr val="FFFFFF"/>
-                          </a:solidFill>
-                          <a:latin typeface="Microsoft JhengHei"/>
-                        </a:rPr>
-                        <a:t>殘差</a:t>
-                      </a:r>
-                    </a:p>
-                  </a:txBody>
-                  <a:tcPr marL="63500" marR="50800" marT="25400" marB="25400" anchor="ctr">
-                    <a:solidFill>
-                      <a:srgbClr val="1F3864"/>
-                    </a:solidFill>
-                  </a:tcPr>
-                </a:tc>
-                <a:tc>
-                  <a:txBody>
-                    <a:bodyPr wrap="square"/>
-                    <a:lstStyle/>
-                    <a:p>
-                      <a:pPr algn="ctr"/>
-                      <a:r>
-                        <a:rPr sz="1300" b="1" i="0">
-                          <a:solidFill>
-                            <a:srgbClr val="FFFFFF"/>
-                          </a:solidFill>
-                          <a:latin typeface="Microsoft JhengHei"/>
-                        </a:rPr>
-                        <a:t>反推RMSE</a:t>
-                      </a:r>
-                    </a:p>
-                  </a:txBody>
-                  <a:tcPr marL="63500" marR="50800" marT="25400" marB="25400" anchor="ctr">
-                    <a:solidFill>
-                      <a:srgbClr val="1F3864"/>
-                    </a:solidFill>
-                  </a:tcPr>
-                </a:tc>
-              </a:tr>
-              <a:tr h="396240">
-                <a:tc>
-                  <a:txBody>
-                    <a:bodyPr wrap="square"/>
-                    <a:lstStyle/>
-                    <a:p>
-                      <a:pPr algn="ctr"/>
-                      <a:r>
-                        <a:rPr sz="1250" b="0" i="0">
-                          <a:solidFill>
-                            <a:srgbClr val="404040"/>
-                          </a:solidFill>
-                          <a:latin typeface="Microsoft JhengHei"/>
-                        </a:rPr>
-                        <a:t>0.5C</a:t>
-                      </a:r>
-                    </a:p>
-                  </a:txBody>
-                  <a:tcPr marL="63500" marR="50800" marT="25400" marB="25400" anchor="ctr">
-                    <a:solidFill>
-                      <a:srgbClr val="FFFFFF"/>
-                    </a:solidFill>
-                  </a:tcPr>
-                </a:tc>
-                <a:tc>
-                  <a:txBody>
-                    <a:bodyPr wrap="square"/>
-                    <a:lstStyle/>
-                    <a:p>
-                      <a:pPr algn="ctr"/>
-                      <a:r>
-                        <a:rPr sz="1250" b="0" i="0">
-                          <a:solidFill>
-                            <a:srgbClr val="404040"/>
-                          </a:solidFill>
-                          <a:latin typeface="Microsoft JhengHei"/>
-                        </a:rPr>
-                        <a:t>24.5</a:t>
-                      </a:r>
-                    </a:p>
-                  </a:txBody>
-                  <a:tcPr marL="63500" marR="50800" marT="25400" marB="25400" anchor="ctr">
-                    <a:solidFill>
-                      <a:srgbClr val="FFFFFF"/>
-                    </a:solidFill>
-                  </a:tcPr>
-                </a:tc>
-                <a:tc>
-                  <a:txBody>
-                    <a:bodyPr wrap="square"/>
-                    <a:lstStyle/>
-                    <a:p>
-                      <a:pPr algn="ctr"/>
-                      <a:r>
-                        <a:rPr sz="1250" b="0" i="0">
-                          <a:solidFill>
-                            <a:srgbClr val="404040"/>
-                          </a:solidFill>
-                          <a:latin typeface="Microsoft JhengHei"/>
-                        </a:rPr>
-                        <a:t>−27.9</a:t>
-                      </a:r>
-                    </a:p>
-                  </a:txBody>
-                  <a:tcPr marL="63500" marR="50800" marT="25400" marB="25400" anchor="ctr">
-                    <a:solidFill>
-                      <a:srgbClr val="FFFFFF"/>
-                    </a:solidFill>
-                  </a:tcPr>
-                </a:tc>
-                <a:tc>
-                  <a:txBody>
-                    <a:bodyPr wrap="square"/>
-                    <a:lstStyle/>
-                    <a:p>
-                      <a:pPr algn="ctr"/>
-                      <a:r>
-                        <a:rPr sz="1250" b="0" i="0">
-                          <a:solidFill>
-                            <a:srgbClr val="404040"/>
-                          </a:solidFill>
-                          <a:latin typeface="Microsoft JhengHei"/>
-                        </a:rPr>
-                        <a:t>66.6</a:t>
-                      </a:r>
-                    </a:p>
-                  </a:txBody>
-                  <a:tcPr marL="63500" marR="50800" marT="25400" marB="25400" anchor="ctr">
-                    <a:solidFill>
-                      <a:srgbClr val="FFFFFF"/>
-                    </a:solidFill>
-                  </a:tcPr>
-                </a:tc>
-                <a:tc>
-                  <a:txBody>
-                    <a:bodyPr wrap="square"/>
-                    <a:lstStyle/>
-                    <a:p>
-                      <a:pPr algn="ctr"/>
-                      <a:r>
-                        <a:rPr sz="1250" b="0" i="0">
-                          <a:solidFill>
-                            <a:srgbClr val="404040"/>
-                          </a:solidFill>
-                          <a:latin typeface="Microsoft JhengHei"/>
-                        </a:rPr>
-                        <a:t>56.9%</a:t>
-                      </a:r>
-                    </a:p>
-                  </a:txBody>
-                  <a:tcPr marL="63500" marR="50800" marT="25400" marB="25400" anchor="ctr">
-                    <a:solidFill>
-                      <a:srgbClr val="FFFFFF"/>
-                    </a:solidFill>
-                  </a:tcPr>
-                </a:tc>
-                <a:tc>
-                  <a:txBody>
-                    <a:bodyPr wrap="square"/>
-                    <a:lstStyle/>
-                    <a:p>
-                      <a:pPr algn="ctr"/>
-                      <a:r>
-                        <a:rPr sz="1250" b="0" i="0">
-                          <a:solidFill>
-                            <a:srgbClr val="404040"/>
-                          </a:solidFill>
-                          <a:latin typeface="Microsoft JhengHei"/>
-                        </a:rPr>
-                        <a:t>3.54</a:t>
-                      </a:r>
-                    </a:p>
-                  </a:txBody>
-                  <a:tcPr marL="63500" marR="50800" marT="25400" marB="25400" anchor="ctr">
-                    <a:solidFill>
-                      <a:srgbClr val="FFFFFF"/>
-                    </a:solidFill>
-                  </a:tcPr>
-                </a:tc>
-                <a:tc>
-                  <a:txBody>
-                    <a:bodyPr wrap="square"/>
-                    <a:lstStyle/>
-                    <a:p>
-                      <a:pPr algn="ctr"/>
-                      <a:r>
-                        <a:rPr sz="1250" b="0" i="0">
-                          <a:solidFill>
-                            <a:srgbClr val="404040"/>
-                          </a:solidFill>
-                          <a:latin typeface="Microsoft JhengHei"/>
-                        </a:rPr>
-                        <a:t>9.7%</a:t>
-                      </a:r>
-                    </a:p>
-                  </a:txBody>
-                  <a:tcPr marL="63500" marR="50800" marT="25400" marB="25400" anchor="ctr">
-                    <a:solidFill>
-                      <a:srgbClr val="FFFFFF"/>
-                    </a:solidFill>
-                  </a:tcPr>
-                </a:tc>
-              </a:tr>
-              <a:tr h="396240">
-                <a:tc>
-                  <a:txBody>
-                    <a:bodyPr wrap="square"/>
-                    <a:lstStyle/>
-                    <a:p>
-                      <a:pPr algn="ctr"/>
-                      <a:r>
-                        <a:rPr sz="1250" b="0" i="0">
-                          <a:solidFill>
-                            <a:srgbClr val="404040"/>
-                          </a:solidFill>
-                          <a:latin typeface="Microsoft JhengHei"/>
-                        </a:rPr>
-                        <a:t>1.0C</a:t>
-                      </a:r>
-                    </a:p>
-                  </a:txBody>
-                  <a:tcPr marL="63500" marR="50800" marT="25400" marB="25400" anchor="ctr">
-                    <a:solidFill>
-                      <a:srgbClr val="DEEBF7"/>
-                    </a:solidFill>
-                  </a:tcPr>
-                </a:tc>
-                <a:tc>
-                  <a:txBody>
-                    <a:bodyPr wrap="square"/>
-                    <a:lstStyle/>
-                    <a:p>
-                      <a:pPr algn="ctr"/>
-                      <a:r>
-                        <a:rPr sz="1250" b="0" i="0">
-                          <a:solidFill>
-                            <a:srgbClr val="404040"/>
-                          </a:solidFill>
-                          <a:latin typeface="Microsoft JhengHei"/>
-                        </a:rPr>
-                        <a:t>14.9</a:t>
-                      </a:r>
-                    </a:p>
-                  </a:txBody>
-                  <a:tcPr marL="63500" marR="50800" marT="25400" marB="25400" anchor="ctr">
-                    <a:solidFill>
-                      <a:srgbClr val="DEEBF7"/>
-                    </a:solidFill>
-                  </a:tcPr>
-                </a:tc>
-                <a:tc>
-                  <a:txBody>
-                    <a:bodyPr wrap="square"/>
-                    <a:lstStyle/>
-                    <a:p>
-                      <a:pPr algn="ctr"/>
-                      <a:r>
-                        <a:rPr sz="1250" b="0" i="0">
-                          <a:solidFill>
-                            <a:srgbClr val="404040"/>
-                          </a:solidFill>
-                          <a:latin typeface="Microsoft JhengHei"/>
-                        </a:rPr>
-                        <a:t>−15.4</a:t>
-                      </a:r>
-                    </a:p>
-                  </a:txBody>
-                  <a:tcPr marL="63500" marR="50800" marT="25400" marB="25400" anchor="ctr">
-                    <a:solidFill>
-                      <a:srgbClr val="DEEBF7"/>
-                    </a:solidFill>
-                  </a:tcPr>
-                </a:tc>
-                <a:tc>
-                  <a:txBody>
-                    <a:bodyPr wrap="square"/>
-                    <a:lstStyle/>
-                    <a:p>
-                      <a:pPr algn="ctr"/>
-                      <a:r>
-                        <a:rPr sz="1250" b="0" i="0">
-                          <a:solidFill>
-                            <a:srgbClr val="404040"/>
-                          </a:solidFill>
-                          <a:latin typeface="Microsoft JhengHei"/>
-                        </a:rPr>
-                        <a:t>61.8</a:t>
-                      </a:r>
-                    </a:p>
-                  </a:txBody>
-                  <a:tcPr marL="63500" marR="50800" marT="25400" marB="25400" anchor="ctr">
-                    <a:solidFill>
-                      <a:srgbClr val="DEEBF7"/>
-                    </a:solidFill>
-                  </a:tcPr>
-                </a:tc>
-                <a:tc>
-                  <a:txBody>
-                    <a:bodyPr wrap="square"/>
-                    <a:lstStyle/>
-                    <a:p>
-                      <a:pPr algn="ctr"/>
-                      <a:r>
-                        <a:rPr sz="1250" b="0" i="0">
-                          <a:solidFill>
-                            <a:srgbClr val="404040"/>
-                          </a:solidFill>
-                          <a:latin typeface="Microsoft JhengHei"/>
-                        </a:rPr>
-                        <a:t>51.7%</a:t>
-                      </a:r>
-                    </a:p>
-                  </a:txBody>
-                  <a:tcPr marL="63500" marR="50800" marT="25400" marB="25400" anchor="ctr">
-                    <a:solidFill>
-                      <a:srgbClr val="DEEBF7"/>
-                    </a:solidFill>
-                  </a:tcPr>
-                </a:tc>
-                <a:tc>
-                  <a:txBody>
-                    <a:bodyPr wrap="square"/>
-                    <a:lstStyle/>
-                    <a:p>
-                      <a:pPr algn="ctr"/>
-                      <a:r>
-                        <a:rPr sz="1250" b="0" i="0">
-                          <a:solidFill>
-                            <a:srgbClr val="404040"/>
-                          </a:solidFill>
-                          <a:latin typeface="Microsoft JhengHei"/>
-                        </a:rPr>
-                        <a:t>0.62</a:t>
-                      </a:r>
-                    </a:p>
-                  </a:txBody>
-                  <a:tcPr marL="63500" marR="50800" marT="25400" marB="25400" anchor="ctr">
-                    <a:solidFill>
-                      <a:srgbClr val="DEEBF7"/>
-                    </a:solidFill>
-                  </a:tcPr>
-                </a:tc>
-                <a:tc>
-                  <a:txBody>
-                    <a:bodyPr wrap="square"/>
-                    <a:lstStyle/>
-                    <a:p>
-                      <a:pPr algn="ctr"/>
-                      <a:r>
-                        <a:rPr sz="1250" b="0" i="0">
-                          <a:solidFill>
-                            <a:srgbClr val="404040"/>
-                          </a:solidFill>
-                          <a:latin typeface="Microsoft JhengHei"/>
-                        </a:rPr>
-                        <a:t>6.6%</a:t>
-                      </a:r>
-                    </a:p>
-                  </a:txBody>
-                  <a:tcPr marL="63500" marR="50800" marT="25400" marB="25400" anchor="ctr">
-                    <a:solidFill>
-                      <a:srgbClr val="DEEBF7"/>
-                    </a:solidFill>
-                  </a:tcPr>
-                </a:tc>
-              </a:tr>
-              <a:tr h="396240">
-                <a:tc>
-                  <a:txBody>
-                    <a:bodyPr wrap="square"/>
-                    <a:lstStyle/>
-                    <a:p>
-                      <a:pPr algn="ctr"/>
-                      <a:r>
-                        <a:rPr sz="1250" b="0" i="0">
-                          <a:solidFill>
-                            <a:srgbClr val="404040"/>
-                          </a:solidFill>
-                          <a:latin typeface="Microsoft JhengHei"/>
-                        </a:rPr>
-                        <a:t>1.5C</a:t>
-                      </a:r>
-                    </a:p>
-                  </a:txBody>
-                  <a:tcPr marL="63500" marR="50800" marT="25400" marB="25400" anchor="ctr">
-                    <a:solidFill>
-                      <a:srgbClr val="FFFFFF"/>
-                    </a:solidFill>
-                  </a:tcPr>
-                </a:tc>
-                <a:tc>
-                  <a:txBody>
-                    <a:bodyPr wrap="square"/>
-                    <a:lstStyle/>
-                    <a:p>
-                      <a:pPr algn="ctr"/>
-                      <a:r>
-                        <a:rPr sz="1250" b="0" i="0">
-                          <a:solidFill>
-                            <a:srgbClr val="404040"/>
-                          </a:solidFill>
-                          <a:latin typeface="Microsoft JhengHei"/>
-                        </a:rPr>
-                        <a:t>15.6</a:t>
-                      </a:r>
-                    </a:p>
-                  </a:txBody>
-                  <a:tcPr marL="63500" marR="50800" marT="25400" marB="25400" anchor="ctr">
-                    <a:solidFill>
-                      <a:srgbClr val="FFFFFF"/>
-                    </a:solidFill>
-                  </a:tcPr>
-                </a:tc>
-                <a:tc>
-                  <a:txBody>
-                    <a:bodyPr wrap="square"/>
-                    <a:lstStyle/>
-                    <a:p>
-                      <a:pPr algn="ctr"/>
-                      <a:r>
-                        <a:rPr sz="1250" b="0" i="0">
-                          <a:solidFill>
-                            <a:srgbClr val="404040"/>
-                          </a:solidFill>
-                          <a:latin typeface="Microsoft JhengHei"/>
-                        </a:rPr>
-                        <a:t>−14.6</a:t>
-                      </a:r>
-                    </a:p>
-                  </a:txBody>
-                  <a:tcPr marL="63500" marR="50800" marT="25400" marB="25400" anchor="ctr">
-                    <a:solidFill>
-                      <a:srgbClr val="FFFFFF"/>
-                    </a:solidFill>
-                  </a:tcPr>
-                </a:tc>
-                <a:tc>
-                  <a:txBody>
-                    <a:bodyPr wrap="square"/>
-                    <a:lstStyle/>
-                    <a:p>
-                      <a:pPr algn="ctr"/>
-                      <a:r>
-                        <a:rPr sz="1250" b="0" i="0">
-                          <a:solidFill>
-                            <a:srgbClr val="404040"/>
-                          </a:solidFill>
-                          <a:latin typeface="Microsoft JhengHei"/>
-                        </a:rPr>
-                        <a:t>60.3</a:t>
-                      </a:r>
-                    </a:p>
-                  </a:txBody>
-                  <a:tcPr marL="63500" marR="50800" marT="25400" marB="25400" anchor="ctr">
-                    <a:solidFill>
-                      <a:srgbClr val="FFFFFF"/>
-                    </a:solidFill>
-                  </a:tcPr>
-                </a:tc>
-                <a:tc>
-                  <a:txBody>
-                    <a:bodyPr wrap="square"/>
-                    <a:lstStyle/>
-                    <a:p>
-                      <a:pPr algn="ctr"/>
-                      <a:r>
-                        <a:rPr sz="1250" b="0" i="0">
-                          <a:solidFill>
-                            <a:srgbClr val="404040"/>
-                          </a:solidFill>
-                          <a:latin typeface="Microsoft JhengHei"/>
-                        </a:rPr>
-                        <a:t>46.9%</a:t>
-                      </a:r>
-                    </a:p>
-                  </a:txBody>
-                  <a:tcPr marL="63500" marR="50800" marT="25400" marB="25400" anchor="ctr">
-                    <a:solidFill>
-                      <a:srgbClr val="FFFFFF"/>
-                    </a:solidFill>
-                  </a:tcPr>
-                </a:tc>
-                <a:tc>
-                  <a:txBody>
-                    <a:bodyPr wrap="square"/>
-                    <a:lstStyle/>
-                    <a:p>
-                      <a:pPr algn="ctr"/>
-                      <a:r>
-                        <a:rPr sz="1250" b="0" i="0">
-                          <a:solidFill>
-                            <a:srgbClr val="404040"/>
-                          </a:solidFill>
-                          <a:latin typeface="Microsoft JhengHei"/>
-                        </a:rPr>
-                        <a:t>0.59</a:t>
-                      </a:r>
-                    </a:p>
-                  </a:txBody>
-                  <a:tcPr marL="63500" marR="50800" marT="25400" marB="25400" anchor="ctr">
-                    <a:solidFill>
-                      <a:srgbClr val="FFFFFF"/>
-                    </a:solidFill>
-                  </a:tcPr>
-                </a:tc>
-                <a:tc>
-                  <a:txBody>
-                    <a:bodyPr wrap="square"/>
-                    <a:lstStyle/>
-                    <a:p>
-                      <a:pPr algn="ctr"/>
-                      <a:r>
-                        <a:rPr sz="1250" b="0" i="0">
-                          <a:solidFill>
-                            <a:srgbClr val="404040"/>
-                          </a:solidFill>
-                          <a:latin typeface="Microsoft JhengHei"/>
-                        </a:rPr>
-                        <a:t>6.6%</a:t>
-                      </a:r>
-                    </a:p>
-                  </a:txBody>
-                  <a:tcPr marL="63500" marR="50800" marT="25400" marB="25400" anchor="ctr">
-                    <a:solidFill>
-                      <a:srgbClr val="FFFFFF"/>
-                    </a:solidFill>
-                  </a:tcPr>
-                </a:tc>
-              </a:tr>
-              <a:tr h="396240">
-                <a:tc>
-                  <a:txBody>
-                    <a:bodyPr wrap="square"/>
-                    <a:lstStyle/>
-                    <a:p>
-                      <a:pPr algn="ctr"/>
-                      <a:r>
-                        <a:rPr sz="1250" b="0" i="0">
-                          <a:solidFill>
-                            <a:srgbClr val="404040"/>
-                          </a:solidFill>
-                          <a:latin typeface="Microsoft JhengHei"/>
-                        </a:rPr>
-                        <a:t>2.0C</a:t>
-                      </a:r>
-                    </a:p>
-                  </a:txBody>
-                  <a:tcPr marL="63500" marR="50800" marT="25400" marB="25400" anchor="ctr">
-                    <a:solidFill>
-                      <a:srgbClr val="DEEBF7"/>
-                    </a:solidFill>
-                  </a:tcPr>
-                </a:tc>
-                <a:tc>
-                  <a:txBody>
-                    <a:bodyPr wrap="square"/>
-                    <a:lstStyle/>
-                    <a:p>
-                      <a:pPr algn="ctr"/>
-                      <a:r>
-                        <a:rPr sz="1250" b="0" i="0">
-                          <a:solidFill>
-                            <a:srgbClr val="404040"/>
-                          </a:solidFill>
-                          <a:latin typeface="Microsoft JhengHei"/>
-                        </a:rPr>
-                        <a:t>16.2</a:t>
-                      </a:r>
-                    </a:p>
-                  </a:txBody>
-                  <a:tcPr marL="63500" marR="50800" marT="25400" marB="25400" anchor="ctr">
-                    <a:solidFill>
-                      <a:srgbClr val="DEEBF7"/>
-                    </a:solidFill>
-                  </a:tcPr>
-                </a:tc>
-                <a:tc>
-                  <a:txBody>
-                    <a:bodyPr wrap="square"/>
-                    <a:lstStyle/>
-                    <a:p>
-                      <a:pPr algn="ctr"/>
-                      <a:r>
-                        <a:rPr sz="1250" b="0" i="0">
-                          <a:solidFill>
-                            <a:srgbClr val="404040"/>
-                          </a:solidFill>
-                          <a:latin typeface="Microsoft JhengHei"/>
-                        </a:rPr>
-                        <a:t>−14.0</a:t>
-                      </a:r>
-                    </a:p>
-                  </a:txBody>
-                  <a:tcPr marL="63500" marR="50800" marT="25400" marB="25400" anchor="ctr">
-                    <a:solidFill>
-                      <a:srgbClr val="DEEBF7"/>
-                    </a:solidFill>
-                  </a:tcPr>
-                </a:tc>
-                <a:tc>
-                  <a:txBody>
-                    <a:bodyPr wrap="square"/>
-                    <a:lstStyle/>
-                    <a:p>
-                      <a:pPr algn="ctr"/>
-                      <a:r>
-                        <a:rPr sz="1250" b="0" i="0">
-                          <a:solidFill>
-                            <a:srgbClr val="404040"/>
-                          </a:solidFill>
-                          <a:latin typeface="Microsoft JhengHei"/>
-                        </a:rPr>
-                        <a:t>59.0</a:t>
-                      </a:r>
-                    </a:p>
-                  </a:txBody>
-                  <a:tcPr marL="63500" marR="50800" marT="25400" marB="25400" anchor="ctr">
-                    <a:solidFill>
-                      <a:srgbClr val="DEEBF7"/>
-                    </a:solidFill>
-                  </a:tcPr>
-                </a:tc>
-                <a:tc>
-                  <a:txBody>
-                    <a:bodyPr wrap="square"/>
-                    <a:lstStyle/>
-                    <a:p>
-                      <a:pPr algn="ctr"/>
-                      <a:r>
-                        <a:rPr sz="1250" b="0" i="0">
-                          <a:solidFill>
-                            <a:srgbClr val="404040"/>
-                          </a:solidFill>
-                          <a:latin typeface="Microsoft JhengHei"/>
-                        </a:rPr>
-                        <a:t>43.3%</a:t>
-                      </a:r>
-                    </a:p>
-                  </a:txBody>
-                  <a:tcPr marL="63500" marR="50800" marT="25400" marB="25400" anchor="ctr">
-                    <a:solidFill>
-                      <a:srgbClr val="DEEBF7"/>
-                    </a:solidFill>
-                  </a:tcPr>
-                </a:tc>
-                <a:tc>
-                  <a:txBody>
-                    <a:bodyPr wrap="square"/>
-                    <a:lstStyle/>
-                    <a:p>
-                      <a:pPr algn="ctr"/>
-                      <a:r>
-                        <a:rPr sz="1250" b="0" i="0">
-                          <a:solidFill>
-                            <a:srgbClr val="404040"/>
-                          </a:solidFill>
-                          <a:latin typeface="Microsoft JhengHei"/>
-                        </a:rPr>
-                        <a:t>0.52</a:t>
-                      </a:r>
-                    </a:p>
-                  </a:txBody>
-                  <a:tcPr marL="63500" marR="50800" marT="25400" marB="25400" anchor="ctr">
-                    <a:solidFill>
-                      <a:srgbClr val="DEEBF7"/>
-                    </a:solidFill>
-                  </a:tcPr>
-                </a:tc>
-                <a:tc>
-                  <a:txBody>
-                    <a:bodyPr wrap="square"/>
-                    <a:lstStyle/>
-                    <a:p>
-                      <a:pPr algn="ctr"/>
-                      <a:r>
-                        <a:rPr sz="1250" b="0" i="0">
-                          <a:solidFill>
-                            <a:srgbClr val="404040"/>
-                          </a:solidFill>
-                          <a:latin typeface="Microsoft JhengHei"/>
-                        </a:rPr>
-                        <a:t>6.3%</a:t>
-                      </a:r>
-                    </a:p>
-                  </a:txBody>
-                  <a:tcPr marL="63500" marR="50800" marT="25400" marB="25400" anchor="ctr">
-                    <a:solidFill>
-                      <a:srgbClr val="DEEBF7"/>
-                    </a:solidFill>
-                  </a:tcPr>
-                </a:tc>
-              </a:tr>
-              <a:tr h="396240">
-                <a:tc>
-                  <a:txBody>
-                    <a:bodyPr wrap="square"/>
-                    <a:lstStyle/>
-                    <a:p>
-                      <a:pPr algn="ctr"/>
-                      <a:r>
-                        <a:rPr sz="1250" b="0" i="0">
-                          <a:solidFill>
-                            <a:srgbClr val="404040"/>
-                          </a:solidFill>
-                          <a:latin typeface="Microsoft JhengHei"/>
-                        </a:rPr>
-                        <a:t>合併</a:t>
-                      </a:r>
-                    </a:p>
-                  </a:txBody>
-                  <a:tcPr marL="63500" marR="50800" marT="25400" marB="25400" anchor="ctr">
-                    <a:solidFill>
-                      <a:srgbClr val="FFFFFF"/>
-                    </a:solidFill>
-                  </a:tcPr>
-                </a:tc>
-                <a:tc>
-                  <a:txBody>
-                    <a:bodyPr wrap="square"/>
-                    <a:lstStyle/>
-                    <a:p>
-                      <a:pPr algn="ctr"/>
-                      <a:r>
-                        <a:rPr sz="1250" b="0" i="0">
-                          <a:solidFill>
-                            <a:srgbClr val="404040"/>
-                          </a:solidFill>
-                          <a:latin typeface="Microsoft JhengHei"/>
-                        </a:rPr>
-                        <a:t>20.2</a:t>
-                      </a:r>
-                    </a:p>
-                  </a:txBody>
-                  <a:tcPr marL="63500" marR="50800" marT="25400" marB="25400" anchor="ctr">
-                    <a:solidFill>
-                      <a:srgbClr val="FFFFFF"/>
-                    </a:solidFill>
-                  </a:tcPr>
-                </a:tc>
-                <a:tc>
-                  <a:txBody>
-                    <a:bodyPr wrap="square"/>
-                    <a:lstStyle/>
-                    <a:p>
-                      <a:pPr algn="ctr"/>
-                      <a:r>
-                        <a:rPr sz="1250" b="0" i="0">
-                          <a:solidFill>
-                            <a:srgbClr val="404040"/>
-                          </a:solidFill>
-                          <a:latin typeface="Microsoft JhengHei"/>
-                        </a:rPr>
-                        <a:t>−21.6</a:t>
-                      </a:r>
-                    </a:p>
-                  </a:txBody>
-                  <a:tcPr marL="63500" marR="50800" marT="25400" marB="25400" anchor="ctr">
-                    <a:solidFill>
-                      <a:srgbClr val="FFFFFF"/>
-                    </a:solidFill>
-                  </a:tcPr>
-                </a:tc>
-                <a:tc>
-                  <a:txBody>
-                    <a:bodyPr wrap="square"/>
-                    <a:lstStyle/>
-                    <a:p>
-                      <a:pPr algn="ctr"/>
-                      <a:r>
-                        <a:rPr sz="1250" b="0" i="0">
-                          <a:solidFill>
-                            <a:srgbClr val="404040"/>
-                          </a:solidFill>
-                          <a:latin typeface="Microsoft JhengHei"/>
-                        </a:rPr>
-                        <a:t>63.6</a:t>
-                      </a:r>
-                    </a:p>
-                  </a:txBody>
-                  <a:tcPr marL="63500" marR="50800" marT="25400" marB="25400" anchor="ctr">
-                    <a:solidFill>
-                      <a:srgbClr val="FFFFFF"/>
-                    </a:solidFill>
-                  </a:tcPr>
-                </a:tc>
-                <a:tc>
-                  <a:txBody>
-                    <a:bodyPr wrap="square"/>
-                    <a:lstStyle/>
-                    <a:p>
-                      <a:pPr algn="ctr"/>
-                      <a:r>
-                        <a:rPr sz="1250" b="0" i="0">
-                          <a:solidFill>
-                            <a:srgbClr val="404040"/>
-                          </a:solidFill>
-                          <a:latin typeface="Microsoft JhengHei"/>
-                        </a:rPr>
-                        <a:t>53.4%</a:t>
-                      </a:r>
-                    </a:p>
-                  </a:txBody>
-                  <a:tcPr marL="63500" marR="50800" marT="25400" marB="25400" anchor="ctr">
-                    <a:solidFill>
-                      <a:srgbClr val="FFFFFF"/>
-                    </a:solidFill>
-                  </a:tcPr>
-                </a:tc>
-                <a:tc>
-                  <a:txBody>
-                    <a:bodyPr wrap="square"/>
-                    <a:lstStyle/>
-                    <a:p>
-                      <a:pPr algn="ctr"/>
-                      <a:r>
-                        <a:rPr sz="1250" b="0" i="0">
-                          <a:solidFill>
-                            <a:srgbClr val="404040"/>
-                          </a:solidFill>
-                          <a:latin typeface="Microsoft JhengHei"/>
-                        </a:rPr>
-                        <a:t>2.90</a:t>
-                      </a:r>
-                    </a:p>
-                  </a:txBody>
-                  <a:tcPr marL="63500" marR="50800" marT="25400" marB="25400" anchor="ctr">
-                    <a:solidFill>
-                      <a:srgbClr val="FFFFFF"/>
-                    </a:solidFill>
-                  </a:tcPr>
-                </a:tc>
-                <a:tc>
-                  <a:txBody>
-                    <a:bodyPr wrap="square"/>
-                    <a:lstStyle/>
-                    <a:p>
-                      <a:pPr algn="ctr"/>
-                      <a:r>
-                        <a:rPr sz="1250" b="0" i="0">
-                          <a:solidFill>
-                            <a:srgbClr val="404040"/>
-                          </a:solidFill>
-                          <a:latin typeface="Microsoft JhengHei"/>
-                        </a:rPr>
-                        <a:t>—</a:t>
-                      </a:r>
-                    </a:p>
-                  </a:txBody>
-                  <a:tcPr marL="63500" marR="50800" marT="25400" marB="25400" anchor="ctr">
-                    <a:solidFill>
-                      <a:srgbClr val="FFFFFF"/>
-                    </a:solidFill>
-                  </a:tcPr>
-                </a:tc>
-              </a:tr>
-            </a:tbl>
-          </a:graphicData>
-        </a:graphic>
-      </p:graphicFrame>
-      <p:sp>
-        <p:nvSpPr>
-          <p:cNvPr id="11" name="TextBox 10"/>
+              <a:t>圖 4-4　|ΔV/ΔI|–SOC 離線擬合（最低點≈53%，離線 oracle RMSE 6–10%）</a:t>
+            </a:r>
+          </a:p>
+        </p:txBody>
+      </p:sp>
+      <p:sp>
+        <p:nvSpPr>
+          <p:cNvPr id="10" name="Rectangle 9"/>
+          <p:cNvSpPr/>
+          <p:nvPr/>
+        </p:nvSpPr>
+        <p:spPr>
+          <a:xfrm>
+            <a:off x="6761711" y="1196340"/>
+            <a:ext cx="4490258" cy="2773680"/>
+          </a:xfrm>
+          <a:prstGeom prst="rect">
+            <a:avLst/>
+          </a:prstGeom>
+          <a:solidFill>
+            <a:srgbClr val="FFFFFF"/>
+          </a:solidFill>
+          <a:ln w="9525">
+            <a:solidFill>
+              <a:srgbClr val="2E74B5"/>
+            </a:solidFill>
+          </a:ln>
+          <a:effectLst/>
+        </p:spPr>
+        <p:style>
+          <a:lnRef idx="1">
+            <a:schemeClr val="accent1"/>
+          </a:lnRef>
+          <a:fillRef idx="3">
+            <a:schemeClr val="accent1"/>
+          </a:fillRef>
+          <a:effectRef idx="2">
+            <a:schemeClr val="accent1"/>
+          </a:effectRef>
+          <a:fontRef idx="minor">
+            <a:schemeClr val="lt1"/>
+          </a:fontRef>
+        </p:style>
+        <p:txBody>
+          <a:bodyPr rtlCol="0" anchor="ctr"/>
+          <a:lstStyle/>
+          <a:p>
+            <a:pPr algn="ctr"/>
+          </a:p>
+        </p:txBody>
+      </p:sp>
+      <p:pic>
+        <p:nvPicPr>
+          <p:cNvPr id="11" name="Picture 10" descr="fig4-5.png"/>
+          <p:cNvPicPr>
+            <a:picLocks noChangeAspect="1"/>
+          </p:cNvPicPr>
+          <p:nvPr/>
+        </p:nvPicPr>
+        <p:blipFill>
+          <a:blip r:embed="rId3"/>
+          <a:stretch>
+            <a:fillRect/>
+          </a:stretch>
+        </p:blipFill>
+        <p:spPr>
+          <a:xfrm>
+            <a:off x="6799811" y="1234440"/>
+            <a:ext cx="4414058" cy="2697480"/>
+          </a:xfrm>
+          <a:prstGeom prst="rect">
+            <a:avLst/>
+          </a:prstGeom>
+        </p:spPr>
+      </p:pic>
+      <p:sp>
+        <p:nvSpPr>
+          <p:cNvPr id="12" name="TextBox 11"/>
           <p:cNvSpPr txBox="1"/>
           <p:nvPr/>
         </p:nvSpPr>
         <p:spPr>
           <a:xfrm>
-            <a:off x="5760720" y="3886200"/>
-            <a:ext cx="5943600" cy="320040"/>
+            <a:off x="6309360" y="3931920"/>
+            <a:ext cx="5394960" cy="320040"/>
           </a:xfrm>
           <a:prstGeom prst="rect">
             <a:avLst/>
@@ -10478,27 +9555,27 @@
                 </a:solidFill>
                 <a:latin typeface="Microsoft JhengHei"/>
               </a:rPr>
-              <a:t>表 4-3　二次擬合係數與反推精度（mΩ；SOC 以分數代入）</a:t>
-            </a:r>
-          </a:p>
-        </p:txBody>
-      </p:sp>
-      <p:sp>
-        <p:nvSpPr>
-          <p:cNvPr id="12" name="Rectangle 11"/>
+              <a:t>圖 4-5　量測域對照：台架負載端 vs 板端電池端子（常數項差約 24 mΩ）</a:t>
+            </a:r>
+          </a:p>
+        </p:txBody>
+      </p:sp>
+      <p:sp>
+        <p:nvSpPr>
+          <p:cNvPr id="13" name="Rectangle 12"/>
           <p:cNvSpPr/>
           <p:nvPr/>
         </p:nvSpPr>
         <p:spPr>
           <a:xfrm>
-            <a:off x="502920" y="4434840"/>
-            <a:ext cx="11201400" cy="1828800"/>
+            <a:off x="502920" y="4370832"/>
+            <a:ext cx="11201400" cy="1938528"/>
           </a:xfrm>
           <a:prstGeom prst="rect">
             <a:avLst/>
           </a:prstGeom>
           <a:solidFill>
-            <a:srgbClr val="DEEBF7"/>
+            <a:srgbClr val="FDF3E0"/>
           </a:solidFill>
           <a:ln>
             <a:noFill/>
@@ -10529,14 +9606,14 @@
       </p:sp>
       <p:sp>
         <p:nvSpPr>
-          <p:cNvPr id="13" name="Rectangle 12"/>
+          <p:cNvPr id="14" name="Rectangle 13"/>
           <p:cNvSpPr/>
           <p:nvPr/>
         </p:nvSpPr>
         <p:spPr>
           <a:xfrm>
-            <a:off x="502920" y="4434840"/>
-            <a:ext cx="82296" cy="1828800"/>
+            <a:off x="502920" y="4370832"/>
+            <a:ext cx="82296" cy="1938528"/>
           </a:xfrm>
           <a:prstGeom prst="rect">
             <a:avLst/>
@@ -10573,14 +9650,14 @@
       </p:sp>
       <p:sp>
         <p:nvSpPr>
-          <p:cNvPr id="14" name="TextBox 13"/>
+          <p:cNvPr id="15" name="TextBox 14"/>
           <p:cNvSpPr txBox="1"/>
           <p:nvPr/>
         </p:nvSpPr>
         <p:spPr>
           <a:xfrm>
-            <a:off x="704088" y="4544568"/>
-            <a:ext cx="10881360" cy="1645920"/>
+            <a:off x="704088" y="4480560"/>
+            <a:ext cx="10881360" cy="1755648"/>
           </a:xfrm>
           <a:prstGeom prst="rect">
             <a:avLst/>
@@ -10601,11 +9678,11 @@
             <a:r>
               <a:rPr sz="1400" b="1" i="0">
                 <a:solidFill>
-                  <a:srgbClr val="1F3864"/>
-                </a:solidFill>
-                <a:latin typeface="Microsoft JhengHei"/>
-              </a:rPr>
-              <a:t>關鍵觀察</a:t>
+                  <a:srgbClr val="C08A2B"/>
+                </a:solidFill>
+                <a:latin typeface="Microsoft JhengHei"/>
+              </a:rPr>
+              <a:t>核心發現</a:t>
             </a:r>
           </a:p>
           <a:p>
@@ -10621,7 +9698,7 @@
                 </a:solidFill>
                 <a:latin typeface="Microsoft JhengHei"/>
               </a:rPr>
-              <a:t>• 最低點約 SOC 53%，與理論「最小值在 50% 附近」一致</a:t>
+              <a:t>• 量測域錯位：板端 Z 中位 35 mΩ vs 台架 60 mΩ（差 24 mΩ 線材電阻）→ 台架表移植板端整組失效（RMSE≈28%）</a:t>
             </a:r>
           </a:p>
           <a:p>
@@ -10637,7 +9714,7 @@
                 </a:solidFill>
                 <a:latin typeface="Microsoft JhengHei"/>
               </a:rPr>
-              <a:t>• 高倍率殘差低至 ~0.5 mΩ；低倍率 SNR 差、殘差 ~3.5 mΩ</a:t>
+              <a:t>• 拋物線形狀由電芯決定（不變）、常數項由量測鏈決定（平移 24 mΩ）→ 對照表須與部署端「同域」建立</a:t>
             </a:r>
           </a:p>
           <a:p>
@@ -10653,7 +9730,7 @@
                 </a:solidFill>
                 <a:latin typeface="Microsoft JhengHei"/>
               </a:rPr>
-              <a:t>• 反推 RMSE 6–10%；SOC 中段(40–60%)誤差大 → 阻抗平緩 → 反推病態</a:t>
+              <a:t>• 同域重建後線上仍 23–31%：反問題病態 — 曲線跨度僅 ~6 mΩ、噪聲 σ≈2 mΩ（訊號僅噪聲 3 倍）→ 分枝近隨機</a:t>
             </a:r>
           </a:p>
           <a:p>
@@ -10669,7 +9746,7 @@
                 </a:solidFill>
                 <a:latin typeface="Microsoft JhengHei"/>
               </a:rPr>
-              <a:t>• → 正當化「動態阻抗離散校正 + 庫倫內插」混合策略</a:t>
+              <a:t>• ★ 結論：平坦曲線電芯線上單獨反推不可行；僅宜低 SOC 粗校正 + 老化指標 → 正是「評估環境失真」的實測實例</a:t>
             </a:r>
           </a:p>
         </p:txBody>
@@ -10809,7 +9886,7 @@
                 </a:solidFill>
                 <a:latin typeface="Microsoft JhengHei"/>
               </a:rPr>
-              <a:t>六、三方法公平比較框架</a:t>
+              <a:t>六、三方法公平比較（全實測）</a:t>
             </a:r>
           </a:p>
           <a:p>
@@ -10820,7 +9897,7 @@
                 </a:solidFill>
                 <a:latin typeface="Microsoft JhengHei"/>
               </a:rPr>
-              <a:t>精度 × 強健性 × 嵌入式資源（同電池・同協定・同 MCU）</a:t>
+              <a:t>精度 × 強健性 × 嵌入式資源（同電池・同協定・同 MCU・同量測路徑）</a:t>
             </a:r>
           </a:p>
         </p:txBody>
@@ -10904,7 +9981,7 @@
         </p:nvGraphicFramePr>
         <p:xfrm>
           <a:off x="502920" y="1417320"/>
-          <a:ext cx="11201398" cy="2377440"/>
+          <a:ext cx="11201397" cy="2148840"/>
         </p:xfrm>
         <a:graphic>
           <a:graphicData uri="http://schemas.openxmlformats.org/drawingml/2006/table">
@@ -10913,14 +9990,14 @@
                 <a:tableStyleId>{5C22544A-7EE6-4342-B048-85BDC9FD1C3A}</a:tableStyleId>
               </a:tblPr>
               <a:tblGrid>
-                <a:gridCol w="1473868"/>
-                <a:gridCol w="1768642"/>
-                <a:gridCol w="2554705"/>
-                <a:gridCol w="2259931"/>
-                <a:gridCol w="2259931"/>
-                <a:gridCol w="884321"/>
+                <a:gridCol w="1486911"/>
+                <a:gridCol w="1883421"/>
+                <a:gridCol w="2478185"/>
+                <a:gridCol w="2081676"/>
+                <a:gridCol w="2379058"/>
+                <a:gridCol w="892146"/>
               </a:tblGrid>
-              <a:tr h="594360">
+              <a:tr h="537210">
                 <a:tc>
                   <a:txBody>
                     <a:bodyPr wrap="square"/>
@@ -10980,7 +10057,7 @@
                           </a:solidFill>
                           <a:latin typeface="Microsoft JhengHei"/>
                         </a:rPr>
-                        <a:t>強健性（初值錯誤）</a:t>
+                        <a:t>強健性（初值）</a:t>
                       </a:r>
                     </a:p>
                   </a:txBody>
@@ -11003,7 +10080,7 @@
                           </a:solidFill>
                           <a:latin typeface="Microsoft JhengHei"/>
                         </a:rPr>
-                        <a:t>Flash/RAM</a:t>
+                        <a:t>Flash / RAM</a:t>
                       </a:r>
                     </a:p>
                   </a:txBody>
@@ -11026,7 +10103,7 @@
                           </a:solidFill>
                           <a:latin typeface="Microsoft JhengHei"/>
                         </a:rPr>
-                        <a:t>每次更新運算</a:t>
+                        <a:t>每次更新 cycles</a:t>
                       </a:r>
                     </a:p>
                   </a:txBody>
@@ -11060,7 +10137,7 @@
                   </a:tcPr>
                 </a:tc>
               </a:tr>
-              <a:tr h="594360">
+              <a:tr h="537210">
                 <a:tc>
                   <a:txBody>
                     <a:bodyPr wrap="square"/>
@@ -11097,7 +10174,7 @@
                           </a:solidFill>
                           <a:latin typeface="Microsoft JhengHei"/>
                         </a:rPr>
-                        <a:t>[待測]</a:t>
+                        <a:t>1.7–2.0%</a:t>
                       </a:r>
                     </a:p>
                   </a:txBody>
@@ -11120,7 +10197,7 @@
                           </a:solidFill>
                           <a:latin typeface="Microsoft JhengHei"/>
                         </a:rPr>
-                        <a:t>不收斂（無修正）</a:t>
+                        <a:t>不收斂（充飽重錨）</a:t>
                       </a:r>
                     </a:p>
                   </a:txBody>
@@ -11143,7 +10220,7 @@
                           </a:solidFill>
                           <a:latin typeface="Microsoft JhengHei"/>
                         </a:rPr>
-                        <a:t>資源下界</a:t>
+                        <a:t>+1.9 KB / 24 B</a:t>
                       </a:r>
                     </a:p>
                   </a:txBody>
@@ -11166,7 +10243,7 @@
                           </a:solidFill>
                           <a:latin typeface="Microsoft JhengHei"/>
                         </a:rPr>
-                        <a:t>一乘一加</a:t>
+                        <a:t>305（4.8 µs）</a:t>
                       </a:r>
                     </a:p>
                   </a:txBody>
@@ -11200,7 +10277,7 @@
                   </a:tcPr>
                 </a:tc>
               </a:tr>
-              <a:tr h="594360">
+              <a:tr h="537210">
                 <a:tc>
                   <a:txBody>
                     <a:bodyPr wrap="square"/>
@@ -11237,7 +10314,7 @@
                           </a:solidFill>
                           <a:latin typeface="Microsoft JhengHei"/>
                         </a:rPr>
-                        <a:t>[待測]</a:t>
+                        <a:t>0.22–0.90%</a:t>
                       </a:r>
                     </a:p>
                   </a:txBody>
@@ -11260,7 +10337,7 @@
                           </a:solidFill>
                           <a:latin typeface="Microsoft JhengHei"/>
                         </a:rPr>
-                        <a:t>可自初值錯誤收斂</a:t>
+                        <a:t>單步拉回</a:t>
                       </a:r>
                     </a:p>
                   </a:txBody>
@@ -11283,7 +10360,7 @@
                           </a:solidFill>
                           <a:latin typeface="Microsoft JhengHei"/>
                         </a:rPr>
-                        <a:t>最大（另需 OCV 表)</a:t>
+                        <a:t>+2.3 KB / 40 B</a:t>
                       </a:r>
                     </a:p>
                   </a:txBody>
@@ -11306,7 +10383,7 @@
                           </a:solidFill>
                           <a:latin typeface="Microsoft JhengHei"/>
                         </a:rPr>
-                        <a:t>最高（軟浮點）</a:t>
+                        <a:t>15,187（237 µs）</a:t>
                       </a:r>
                     </a:p>
                   </a:txBody>
@@ -11340,7 +10417,7 @@
                   </a:tcPr>
                 </a:tc>
               </a:tr>
-              <a:tr h="594360">
+              <a:tr h="537210">
                 <a:tc>
                   <a:txBody>
                     <a:bodyPr wrap="square"/>
@@ -11377,7 +10454,7 @@
                           </a:solidFill>
                           <a:latin typeface="Microsoft JhengHei"/>
                         </a:rPr>
-                        <a:t>6–10%（實測）</a:t>
+                        <a:t>23–31%（線上）</a:t>
                       </a:r>
                     </a:p>
                   </a:txBody>
@@ -11400,7 +10477,7 @@
                           </a:solidFill>
                           <a:latin typeface="Microsoft JhengHei"/>
                         </a:rPr>
-                        <a:t>首個擾動即重估</a:t>
+                        <a:t>首事件 ≤60 s 重估</a:t>
                       </a:r>
                     </a:p>
                   </a:txBody>
@@ -11423,7 +10500,7 @@
                           </a:solidFill>
                           <a:latin typeface="Microsoft JhengHei"/>
                         </a:rPr>
-                        <a:t>只存幾個係數</a:t>
+                        <a:t>+1.5 KB / 48 B</a:t>
                       </a:r>
                     </a:p>
                   </a:txBody>
@@ -11446,7 +10523,7 @@
                           </a:solidFill>
                           <a:latin typeface="Microsoft JhengHei"/>
                         </a:rPr>
-                        <a:t>差分+二次式</a:t>
+                        <a:t>442 / 6,525</a:t>
                       </a:r>
                     </a:p>
                   </a:txBody>
@@ -11492,7 +10569,7 @@
         </p:nvSpPr>
         <p:spPr>
           <a:xfrm>
-            <a:off x="502920" y="3931920"/>
+            <a:off x="502920" y="3703320"/>
             <a:ext cx="11201400" cy="320040"/>
           </a:xfrm>
           <a:prstGeom prst="rect">
@@ -11514,7 +10591,7 @@
                 </a:solidFill>
                 <a:latin typeface="Microsoft JhengHei"/>
               </a:rPr>
-              <a:t>表 4-4 / 4-6　精度與嵌入式 footprint 比較（動態阻抗為實測，餘 [待測]）</a:t>
+              <a:t>表 4-4／4-6　三法同硬體實測（庫倫負偏源自電流量測鏈刻度；動態阻抗離線 oracle 上界 6–10%；Round 40–41）</a:t>
             </a:r>
           </a:p>
         </p:txBody>
@@ -11527,8 +10604,8 @@
         </p:nvSpPr>
         <p:spPr>
           <a:xfrm>
-            <a:off x="502920" y="4343400"/>
-            <a:ext cx="5486400" cy="1828800"/>
+            <a:off x="502920" y="4114800"/>
+            <a:ext cx="5806440" cy="2194560"/>
           </a:xfrm>
           <a:prstGeom prst="rect">
             <a:avLst/>
@@ -11571,8 +10648,8 @@
         </p:nvSpPr>
         <p:spPr>
           <a:xfrm>
-            <a:off x="502920" y="4343400"/>
-            <a:ext cx="82296" cy="1828800"/>
+            <a:off x="502920" y="4114800"/>
+            <a:ext cx="82296" cy="2194560"/>
           </a:xfrm>
           <a:prstGeom prst="rect">
             <a:avLst/>
@@ -11615,8 +10692,8 @@
         </p:nvSpPr>
         <p:spPr>
           <a:xfrm>
-            <a:off x="704088" y="4453128"/>
-            <a:ext cx="5166360" cy="1645920"/>
+            <a:off x="704088" y="4224528"/>
+            <a:ext cx="5486400" cy="2011680"/>
           </a:xfrm>
           <a:prstGeom prst="rect">
             <a:avLst/>
@@ -11641,7 +10718,7 @@
                 </a:solidFill>
                 <a:latin typeface="Microsoft JhengHei"/>
               </a:rPr>
-              <a:t>精度─資源權衡</a:t>
+              <a:t>誤差三層次（皆非演算法設計錯誤）</a:t>
             </a:r>
           </a:p>
           <a:p>
@@ -11657,7 +10734,7 @@
                 </a:solidFill>
                 <a:latin typeface="Microsoft JhengHei"/>
               </a:rPr>
-              <a:t>• 庫倫計數最省資源，但無自我修正能力</a:t>
+              <a:t>• ① 感測精度：庫倫負偏 ← 兩電流量測鏈刻度差（約 +1.2%）</a:t>
             </a:r>
           </a:p>
           <a:p>
@@ -11673,7 +10750,7 @@
                 </a:solidFill>
                 <a:latin typeface="Microsoft JhengHei"/>
               </a:rPr>
-              <a:t>• EKF 精度/強健性最佳，但 Flash/RAM/運算代價最高</a:t>
+              <a:t>• ② 域一致性：EKF 正偏 / 動態失效 ← 辨識域≠部署域（可消 → 同域後 EKF &lt;1%）</a:t>
             </a:r>
           </a:p>
           <a:p>
@@ -11689,7 +10766,7 @@
                 </a:solidFill>
                 <a:latin typeface="Microsoft JhengHei"/>
               </a:rPr>
-              <a:t>• 動態阻抗居中，且實驗成本最低（複用擾動）</a:t>
+              <a:t>• ③ 反問題條件數：動態同域仍病態 ← 電芯曲線平坦度（不可消）</a:t>
             </a:r>
           </a:p>
         </p:txBody>
@@ -11702,14 +10779,14 @@
         </p:nvSpPr>
         <p:spPr>
           <a:xfrm>
-            <a:off x="6263640" y="4343400"/>
-            <a:ext cx="5440680" cy="1828800"/>
+            <a:off x="6492240" y="4114800"/>
+            <a:ext cx="5212080" cy="2194560"/>
           </a:xfrm>
           <a:prstGeom prst="rect">
             <a:avLst/>
           </a:prstGeom>
           <a:solidFill>
-            <a:srgbClr val="FDF3E0"/>
+            <a:srgbClr val="E6F4EA"/>
           </a:solidFill>
           <a:ln>
             <a:noFill/>
@@ -11746,8 +10823,8 @@
         </p:nvSpPr>
         <p:spPr>
           <a:xfrm>
-            <a:off x="6263640" y="4343400"/>
-            <a:ext cx="82296" cy="1828800"/>
+            <a:off x="6492240" y="4114800"/>
+            <a:ext cx="82296" cy="2194560"/>
           </a:xfrm>
           <a:prstGeom prst="rect">
             <a:avLst/>
@@ -11790,8 +10867,8 @@
         </p:nvSpPr>
         <p:spPr>
           <a:xfrm>
-            <a:off x="6464808" y="4453128"/>
-            <a:ext cx="5120640" cy="1645920"/>
+            <a:off x="6693408" y="4224528"/>
+            <a:ext cx="4892040" cy="2011680"/>
           </a:xfrm>
           <a:prstGeom prst="rect">
             <a:avLst/>
@@ -11812,11 +10889,11 @@
             <a:r>
               <a:rPr sz="1400" b="1" i="0">
                 <a:solidFill>
-                  <a:srgbClr val="C08A2B"/>
-                </a:solidFill>
-                <a:latin typeface="Microsoft JhengHei"/>
-              </a:rPr>
-              <a:t>本研究的填補</a:t>
+                  <a:srgbClr val="2E7D32"/>
+                </a:solidFill>
+                <a:latin typeface="Microsoft JhengHei"/>
+              </a:rPr>
+              <a:t>資源・即時性・強健性</a:t>
             </a:r>
           </a:p>
           <a:p>
@@ -11832,7 +10909,7 @@
                 </a:solidFill>
                 <a:latin typeface="Microsoft JhengHei"/>
               </a:rPr>
-              <a:t>• 在同一硬體實測 Flash/RAM/CPU cycles，</a:t>
+              <a:t>• EKF cycles ≈ 庫倫 50 倍，但折算 237 µs = 每秒預算的 0.024%</a:t>
             </a:r>
           </a:p>
           <a:p>
@@ -11848,7 +10925,7 @@
                 </a:solidFill>
                 <a:latin typeface="Microsoft JhengHei"/>
               </a:rPr>
-              <a:t>• 量化「商用 IC 為何多捨 EKF」之工程權衡</a:t>
+              <a:t>• →「EKF 太重」在 Cortex-M0+ 上不成立，分水嶺在更低階 MCU</a:t>
             </a:r>
           </a:p>
           <a:p>
@@ -11864,7 +10941,7 @@
                 </a:solidFill>
                 <a:latin typeface="Microsoft JhengHei"/>
               </a:rPr>
-              <a:t>• ★ 填補文獻少見之缺口（核心貢獻）</a:t>
+              <a:t>• 噪聲下：庫倫/EKF 皆穩（庫倫略優）、動態阻抗抖動 ≈53%（分枝翻轉）</a:t>
             </a:r>
           </a:p>
         </p:txBody>
@@ -12228,6 +11305,62 @@
                 <a:spcPts val="0"/>
               </a:spcBef>
               <a:spcAft>
+                <a:spcPts val="200"/>
+              </a:spcAft>
+            </a:pPr>
+            <a:r>
+              <a:rPr sz="1300" b="0" i="0">
+                <a:solidFill>
+                  <a:srgbClr val="595959"/>
+                </a:solidFill>
+                <a:latin typeface="Microsoft JhengHei"/>
+              </a:rPr>
+              <a:t>– </a:t>
+            </a:r>
+            <a:r>
+              <a:rPr sz="1300" b="0" i="0">
+                <a:solidFill>
+                  <a:srgbClr val="2E7D32"/>
+                </a:solidFill>
+                <a:latin typeface="Microsoft JhengHei"/>
+              </a:rPr>
+              <a:t>邊際成本可加性 → 並行資源 ≈ 各 footprint 之和</a:t>
+            </a:r>
+          </a:p>
+          <a:p>
+            <a:pPr lvl="1" algn="l">
+              <a:spcBef>
+                <a:spcPts val="0"/>
+              </a:spcBef>
+              <a:spcAft>
+                <a:spcPts val="200"/>
+              </a:spcAft>
+            </a:pPr>
+            <a:r>
+              <a:rPr sz="1300" b="0" i="0">
+                <a:solidFill>
+                  <a:srgbClr val="595959"/>
+                </a:solidFill>
+                <a:latin typeface="Microsoft JhengHei"/>
+              </a:rPr>
+              <a:t>– </a:t>
+            </a:r>
+            <a:r>
+              <a:rPr sz="1300" b="0" i="0">
+                <a:solidFill>
+                  <a:srgbClr val="2E7D32"/>
+                </a:solidFill>
+                <a:latin typeface="Microsoft JhengHei"/>
+              </a:rPr>
+              <a:t>五變體實測：並行 +4.9 KB Flash、+112 B RAM（RAM 嚴格可加）</a:t>
+            </a:r>
+          </a:p>
+          <a:p>
+            <a:pPr lvl="1" algn="l">
+              <a:spcBef>
+                <a:spcPts val="0"/>
+              </a:spcBef>
+              <a:spcAft>
                 <a:spcPts val="0"/>
               </a:spcAft>
             </a:pPr>
@@ -12243,11 +11376,11 @@
             <a:r>
               <a:rPr sz="1300" b="0" i="0">
                 <a:solidFill>
-                  <a:srgbClr val="2E7D32"/>
-                </a:solidFill>
-                <a:latin typeface="Microsoft JhengHei"/>
-              </a:rPr>
-              <a:t>邊際成本可加性 → 並行資源 ≈ 各 footprint 之和</a:t>
+                  <a:srgbClr val="404040"/>
+                </a:solidFill>
+                <a:latin typeface="Microsoft JhengHei"/>
+              </a:rPr>
+              <a:t>即時性：三法並行峰值 344 µs，佔每秒預算 0.034%（餘裕 &gt;3 數量級）</a:t>
             </a:r>
           </a:p>
         </p:txBody>
@@ -12809,7 +11942,7 @@
                 <a:gridCol w="1766454"/>
                 <a:gridCol w="1558636"/>
               </a:tblGrid>
-              <a:tr h="388620">
+              <a:tr h="333102">
                 <a:tc>
                   <a:txBody>
                     <a:bodyPr wrap="square"/>
@@ -12903,7 +12036,7 @@
                   </a:tcPr>
                 </a:tc>
               </a:tr>
-              <a:tr h="388620">
+              <a:tr h="333102">
                 <a:tc>
                   <a:txBody>
                     <a:bodyPr wrap="square"/>
@@ -12997,7 +12130,7 @@
                   </a:tcPr>
                 </a:tc>
               </a:tr>
-              <a:tr h="388620">
+              <a:tr h="333102">
                 <a:tc>
                   <a:txBody>
                     <a:bodyPr wrap="square"/>
@@ -13091,7 +12224,7 @@
                   </a:tcPr>
                 </a:tc>
               </a:tr>
-              <a:tr h="388620">
+              <a:tr h="333102">
                 <a:tc>
                   <a:txBody>
                     <a:bodyPr wrap="square"/>
@@ -13185,7 +12318,7 @@
                   </a:tcPr>
                 </a:tc>
               </a:tr>
-              <a:tr h="388620">
+              <a:tr h="333102">
                 <a:tc>
                   <a:txBody>
                     <a:bodyPr wrap="square"/>
@@ -13279,7 +12412,7 @@
                   </a:tcPr>
                 </a:tc>
               </a:tr>
-              <a:tr h="388620">
+              <a:tr h="333102">
                 <a:tc>
                   <a:txBody>
                     <a:bodyPr wrap="square"/>
@@ -13293,7 +12426,7 @@
                           </a:solidFill>
                           <a:latin typeface="Microsoft JhengHei"/>
                         </a:rPr>
-                        <a:t>38</a:t>
+                        <a:t>40</a:t>
                       </a:r>
                     </a:p>
                   </a:txBody>
@@ -13316,7 +12449,7 @@
                           </a:solidFill>
                           <a:latin typeface="Microsoft JhengHei"/>
                         </a:rPr>
-                        <a:t>06-19</a:t>
+                        <a:t>07-07</a:t>
                       </a:r>
                     </a:p>
                   </a:txBody>
@@ -13339,7 +12472,7 @@
                           </a:solidFill>
                           <a:latin typeface="Microsoft JhengHei"/>
                         </a:rPr>
-                        <a:t>97.03%</a:t>
+                        <a:t>96.07%</a:t>
                       </a:r>
                     </a:p>
                   </a:txBody>
@@ -13362,7 +12495,7 @@
                           </a:solidFill>
                           <a:latin typeface="Microsoft JhengHei"/>
                         </a:rPr>
-                        <a:t>1615.5</a:t>
+                        <a:t>1599.6</a:t>
                       </a:r>
                     </a:p>
                   </a:txBody>
@@ -13373,6 +12506,100 @@
                   </a:tcPr>
                 </a:tc>
               </a:tr>
+              <a:tr h="333108">
+                <a:tc>
+                  <a:txBody>
+                    <a:bodyPr wrap="square"/>
+                    <a:lstStyle/>
+                    <a:p>
+                      <a:pPr algn="ctr"/>
+                      <a:r>
+                        <a:rPr sz="1250" b="0" i="0">
+                          <a:solidFill>
+                            <a:srgbClr val="404040"/>
+                          </a:solidFill>
+                          <a:latin typeface="Microsoft JhengHei"/>
+                        </a:rPr>
+                        <a:t>41</a:t>
+                      </a:r>
+                    </a:p>
+                  </a:txBody>
+                  <a:tcPr marL="63500" marR="50800" marT="25400" marB="25400" anchor="ctr">
+                    <a:solidFill>
+                      <a:srgbClr val="DEEBF7"/>
+                    </a:solidFill>
+                  </a:tcPr>
+                </a:tc>
+                <a:tc>
+                  <a:txBody>
+                    <a:bodyPr wrap="square"/>
+                    <a:lstStyle/>
+                    <a:p>
+                      <a:pPr algn="ctr"/>
+                      <a:r>
+                        <a:rPr sz="1250" b="0" i="0">
+                          <a:solidFill>
+                            <a:srgbClr val="404040"/>
+                          </a:solidFill>
+                          <a:latin typeface="Microsoft JhengHei"/>
+                        </a:rPr>
+                        <a:t>07-08</a:t>
+                      </a:r>
+                    </a:p>
+                  </a:txBody>
+                  <a:tcPr marL="63500" marR="50800" marT="25400" marB="25400" anchor="ctr">
+                    <a:solidFill>
+                      <a:srgbClr val="DEEBF7"/>
+                    </a:solidFill>
+                  </a:tcPr>
+                </a:tc>
+                <a:tc>
+                  <a:txBody>
+                    <a:bodyPr wrap="square"/>
+                    <a:lstStyle/>
+                    <a:p>
+                      <a:pPr algn="ctr"/>
+                      <a:r>
+                        <a:rPr sz="1250" b="0" i="0">
+                          <a:solidFill>
+                            <a:srgbClr val="404040"/>
+                          </a:solidFill>
+                          <a:latin typeface="Microsoft JhengHei"/>
+                        </a:rPr>
+                        <a:t>96.29%</a:t>
+                      </a:r>
+                    </a:p>
+                  </a:txBody>
+                  <a:tcPr marL="63500" marR="50800" marT="25400" marB="25400" anchor="ctr">
+                    <a:solidFill>
+                      <a:srgbClr val="DEEBF7"/>
+                    </a:solidFill>
+                  </a:tcPr>
+                </a:tc>
+                <a:tc>
+                  <a:txBody>
+                    <a:bodyPr wrap="square"/>
+                    <a:lstStyle/>
+                    <a:p>
+                      <a:pPr algn="ctr"/>
+                      <a:r>
+                        <a:rPr sz="1250" b="0" i="0">
+                          <a:solidFill>
+                            <a:srgbClr val="404040"/>
+                          </a:solidFill>
+                          <a:latin typeface="Microsoft JhengHei"/>
+                        </a:rPr>
+                        <a:t>1603.2</a:t>
+                      </a:r>
+                    </a:p>
+                  </a:txBody>
+                  <a:tcPr marL="63500" marR="50800" marT="25400" marB="25400" anchor="ctr">
+                    <a:solidFill>
+                      <a:srgbClr val="DEEBF7"/>
+                    </a:solidFill>
+                  </a:tcPr>
+                </a:tc>
+              </a:tr>
             </a:tbl>
           </a:graphicData>
         </a:graphic>
@@ -13407,7 +12634,7 @@
                 </a:solidFill>
                 <a:latin typeface="Microsoft JhengHei"/>
               </a:rPr>
-              <a:t>表 5-3　0.5C 容量保持率長期趨勢（rounds 1–38）</a:t>
+              <a:t>表 5-3　0.5C 容量保持率長期趨勢（rounds 1–41）</a:t>
             </a:r>
           </a:p>
         </p:txBody>
@@ -13566,7 +12793,7 @@
                 </a:solidFill>
                 <a:latin typeface="Microsoft JhengHei"/>
               </a:rPr>
-              <a:t>• 38 輪累計衰退約 3.7%（真實老化）</a:t>
+              <a:t>• 41 輪累計衰退約 4.6%（真實老化）</a:t>
             </a:r>
           </a:p>
           <a:p>
@@ -13582,7 +12809,7 @@
                 </a:solidFill>
                 <a:latin typeface="Microsoft JhengHei"/>
               </a:rPr>
-              <a:t>• 老化 ≈ 7× 噪聲 → 可乾淨分離</a:t>
+              <a:t>• 老化 ≈ 9× 噪聲 → 可乾淨分離</a:t>
             </a:r>
           </a:p>
           <a:p>
@@ -13598,7 +12825,7 @@
                 </a:solidFill>
                 <a:latin typeface="Microsoft JhengHei"/>
               </a:rPr>
-              <a:t>• → 支撐「逐 cycle 重錨庫倫真值」之正當性，並為 SOH 延伸提供實證基礎</a:t>
+              <a:t>• → 支撐「逐 cycle 重錨庫倫真值」之正當性，並為 SOH 延伸提供實證資料集</a:t>
             </a:r>
           </a:p>
         </p:txBody>
@@ -13833,7 +13060,7 @@
         </p:nvGraphicFramePr>
         <p:xfrm>
           <a:off x="502920" y="1371600"/>
-          <a:ext cx="11201400" cy="2743200"/>
+          <a:ext cx="11201398" cy="2834640"/>
         </p:xfrm>
         <a:graphic>
           <a:graphicData uri="http://schemas.openxmlformats.org/drawingml/2006/table">
@@ -13842,11 +13069,12 @@
                 <a:tableStyleId>{5C22544A-7EE6-4342-B048-85BDC9FD1C3A}</a:tableStyleId>
               </a:tblPr>
               <a:tblGrid>
-                <a:gridCol w="3920490"/>
-                <a:gridCol w="3080385"/>
-                <a:gridCol w="4200525"/>
+                <a:gridCol w="2688336"/>
+                <a:gridCol w="2150668"/>
+                <a:gridCol w="3315614"/>
+                <a:gridCol w="3046780"/>
               </a:tblGrid>
-              <a:tr h="548640">
+              <a:tr h="566928">
                 <a:tc>
                   <a:txBody>
                     <a:bodyPr wrap="square"/>
@@ -13906,7 +13134,30 @@
                           </a:solidFill>
                           <a:latin typeface="Microsoft JhengHei"/>
                         </a:rPr>
-                        <a:t>主要代價</a:t>
+                        <a:t>理由（實測依據）</a:t>
+                      </a:r>
+                    </a:p>
+                  </a:txBody>
+                  <a:tcPr marL="63500" marR="50800" marT="25400" marB="25400" anchor="ctr">
+                    <a:solidFill>
+                      <a:srgbClr val="1F3864"/>
+                    </a:solidFill>
+                  </a:tcPr>
+                </a:tc>
+                <a:tc>
+                  <a:txBody>
+                    <a:bodyPr wrap="square"/>
+                    <a:lstStyle/>
+                    <a:p>
+                      <a:pPr algn="ctr"/>
+                      <a:r>
+                        <a:rPr sz="1300" b="1" i="0">
+                          <a:solidFill>
+                            <a:srgbClr val="FFFFFF"/>
+                          </a:solidFill>
+                          <a:latin typeface="Microsoft JhengHei"/>
+                        </a:rPr>
+                        <a:t>主要代價（實測依據）</a:t>
                       </a:r>
                     </a:p>
                   </a:txBody>
@@ -13917,7 +13168,7 @@
                   </a:tcPr>
                 </a:tc>
               </a:tr>
-              <a:tr h="548640">
+              <a:tr h="566928">
                 <a:tc>
                   <a:txBody>
                     <a:bodyPr wrap="square"/>
@@ -13925,13 +13176,13 @@
                     <a:p>
                       <a:pPr algn="l"/>
                       <a:r>
-                        <a:rPr sz="1350" b="0" i="0">
+                        <a:rPr sz="1200" b="0" i="0">
                           <a:solidFill>
                             <a:srgbClr val="404040"/>
                           </a:solidFill>
                           <a:latin typeface="Microsoft JhengHei"/>
                         </a:rPr>
-                        <a:t>極低成本/算力（8-bit、無 FPU、Flash&lt;8KB）</a:t>
+                        <a:t>極低成本/算力（8-bit、無 FPU、Flash&lt;8 KB）</a:t>
                       </a:r>
                     </a:p>
                   </a:txBody>
@@ -13948,13 +13199,13 @@
                     <a:p>
                       <a:pPr algn="ctr"/>
                       <a:r>
-                        <a:rPr sz="1350" b="0" i="0">
+                        <a:rPr sz="1200" b="0" i="0">
                           <a:solidFill>
                             <a:srgbClr val="404040"/>
                           </a:solidFill>
                           <a:latin typeface="Microsoft JhengHei"/>
                         </a:rPr>
-                        <a:t>庫倫計數 + 靜置 OCV 修正</a:t>
+                        <a:t>庫倫 + 充飽自動重錨</a:t>
                       </a:r>
                     </a:p>
                   </a:txBody>
@@ -13971,13 +13222,36 @@
                     <a:p>
                       <a:pPr algn="ctr"/>
                       <a:r>
-                        <a:rPr sz="1350" b="0" i="0">
+                        <a:rPr sz="1200" b="0" i="0">
                           <a:solidFill>
                             <a:srgbClr val="404040"/>
                           </a:solidFill>
                           <a:latin typeface="Microsoft JhengHei"/>
                         </a:rPr>
-                        <a:t>無自我修正、初值錯誤不收斂</a:t>
+                        <a:t>資源下界 +1.9 KB／305 cyc；重錨 4/4 消除初值偏移</a:t>
+                      </a:r>
+                    </a:p>
+                  </a:txBody>
+                  <a:tcPr marL="63500" marR="50800" marT="25400" marB="25400" anchor="ctr">
+                    <a:solidFill>
+                      <a:srgbClr val="FFFFFF"/>
+                    </a:solidFill>
+                  </a:tcPr>
+                </a:tc>
+                <a:tc>
+                  <a:txBody>
+                    <a:bodyPr wrap="square"/>
+                    <a:lstStyle/>
+                    <a:p>
+                      <a:pPr algn="ctr"/>
+                      <a:r>
+                        <a:rPr sz="1200" b="0" i="0">
+                          <a:solidFill>
+                            <a:srgbClr val="404040"/>
+                          </a:solidFill>
+                          <a:latin typeface="Microsoft JhengHei"/>
+                        </a:rPr>
+                        <a:t>無自我修正；精度上限由電流刻度定（±2%）</a:t>
                       </a:r>
                     </a:p>
                   </a:txBody>
@@ -13988,7 +13262,7 @@
                   </a:tcPr>
                 </a:tc>
               </a:tr>
-              <a:tr h="548640">
+              <a:tr h="566928">
                 <a:tc>
                   <a:txBody>
                     <a:bodyPr wrap="square"/>
@@ -13996,13 +13270,13 @@
                     <a:p>
                       <a:pPr algn="l"/>
                       <a:r>
-                        <a:rPr sz="1350" b="0" i="0">
+                        <a:rPr sz="1200" b="0" i="0">
                           <a:solidFill>
                             <a:srgbClr val="404040"/>
                           </a:solidFill>
                           <a:latin typeface="Microsoft JhengHei"/>
                         </a:rPr>
-                        <a:t>中階、需自初值錯誤恢復、長期免校正</a:t>
+                        <a:t>中階、需自初值恢復、長期免校正</a:t>
                       </a:r>
                     </a:p>
                   </a:txBody>
@@ -14019,7 +13293,7 @@
                     <a:p>
                       <a:pPr algn="ctr"/>
                       <a:r>
-                        <a:rPr sz="1350" b="0" i="0">
+                        <a:rPr sz="1200" b="0" i="0">
                           <a:solidFill>
                             <a:srgbClr val="404040"/>
                           </a:solidFill>
@@ -14042,13 +13316,36 @@
                     <a:p>
                       <a:pPr algn="ctr"/>
                       <a:r>
-                        <a:rPr sz="1350" b="0" i="0">
+                        <a:rPr sz="1200" b="0" i="0">
                           <a:solidFill>
                             <a:srgbClr val="404040"/>
                           </a:solidFill>
                           <a:latin typeface="Microsoft JhengHei"/>
                         </a:rPr>
-                        <a:t>需 OCV 表；運算/Flash/RAM 代價最大</a:t>
+                        <a:t>全倍率最佳 0.22–0.90%；單步收斂；即時性佔 0.024%</a:t>
+                      </a:r>
+                    </a:p>
+                  </a:txBody>
+                  <a:tcPr marL="63500" marR="50800" marT="25400" marB="25400" anchor="ctr">
+                    <a:solidFill>
+                      <a:srgbClr val="DEEBF7"/>
+                    </a:solidFill>
+                  </a:tcPr>
+                </a:tc>
+                <a:tc>
+                  <a:txBody>
+                    <a:bodyPr wrap="square"/>
+                    <a:lstStyle/>
+                    <a:p>
+                      <a:pPr algn="ctr"/>
+                      <a:r>
+                        <a:rPr sz="1200" b="0" i="0">
+                          <a:solidFill>
+                            <a:srgbClr val="404040"/>
+                          </a:solidFill>
+                          <a:latin typeface="Microsoft JhengHei"/>
+                        </a:rPr>
+                        <a:t>需 GITT/OCV 表；Flash 最大 +2.3 KB；參數須同域</a:t>
                       </a:r>
                     </a:p>
                   </a:txBody>
@@ -14059,7 +13356,7 @@
                   </a:tcPr>
                 </a:tc>
               </a:tr>
-              <a:tr h="548640">
+              <a:tr h="566928">
                 <a:tc>
                   <a:txBody>
                     <a:bodyPr wrap="square"/>
@@ -14067,13 +13364,13 @@
                     <a:p>
                       <a:pPr algn="l"/>
                       <a:r>
-                        <a:rPr sz="1350" b="0" i="0">
+                        <a:rPr sz="1200" b="0" i="0">
                           <a:solidFill>
                             <a:srgbClr val="404040"/>
                           </a:solidFill>
                           <a:latin typeface="Microsoft JhengHei"/>
                         </a:rPr>
-                        <a:t>工作中即時、無靜置、實驗成本敏感</a:t>
+                        <a:t>工作中即時、無靜置、成本敏感</a:t>
                       </a:r>
                     </a:p>
                   </a:txBody>
@@ -14090,7 +13387,7 @@
                     <a:p>
                       <a:pPr algn="ctr"/>
                       <a:r>
-                        <a:rPr sz="1350" b="0" i="0">
+                        <a:rPr sz="1200" b="0" i="0">
                           <a:solidFill>
                             <a:srgbClr val="404040"/>
                           </a:solidFill>
@@ -14113,13 +13410,36 @@
                     <a:p>
                       <a:pPr algn="ctr"/>
                       <a:r>
-                        <a:rPr sz="1350" b="0" i="0">
+                        <a:rPr sz="1200" b="0" i="0">
                           <a:solidFill>
                             <a:srgbClr val="404040"/>
                           </a:solidFill>
                           <a:latin typeface="Microsoft JhengHei"/>
                         </a:rPr>
-                        <a:t>中段反推病態；僅事件處獨立估測</a:t>
+                        <a:t>無須初值/靜置、首事件 ≤60 s；建表成本最低</a:t>
+                      </a:r>
+                    </a:p>
+                  </a:txBody>
+                  <a:tcPr marL="63500" marR="50800" marT="25400" marB="25400" anchor="ctr">
+                    <a:solidFill>
+                      <a:srgbClr val="FFFFFF"/>
+                    </a:solidFill>
+                  </a:tcPr>
+                </a:tc>
+                <a:tc>
+                  <a:txBody>
+                    <a:bodyPr wrap="square"/>
+                    <a:lstStyle/>
+                    <a:p>
+                      <a:pPr algn="ctr"/>
+                      <a:r>
+                        <a:rPr sz="1200" b="0" i="0">
+                          <a:solidFill>
+                            <a:srgbClr val="404040"/>
+                          </a:solidFill>
+                          <a:latin typeface="Microsoft JhengHei"/>
+                        </a:rPr>
+                        <a:t>線上單獨反推不可行 23–31%；僅低 SOC 粗校正</a:t>
                       </a:r>
                     </a:p>
                   </a:txBody>
@@ -14130,7 +13450,7 @@
                   </a:tcPr>
                 </a:tc>
               </a:tr>
-              <a:tr h="548640">
+              <a:tr h="566928">
                 <a:tc>
                   <a:txBody>
                     <a:bodyPr wrap="square"/>
@@ -14138,7 +13458,7 @@
                     <a:p>
                       <a:pPr algn="l"/>
                       <a:r>
-                        <a:rPr sz="1350" b="0" i="0">
+                        <a:rPr sz="1200" b="0" i="0">
                           <a:solidFill>
                             <a:srgbClr val="404040"/>
                           </a:solidFill>
@@ -14161,7 +13481,7 @@
                     <a:p>
                       <a:pPr algn="ctr"/>
                       <a:r>
-                        <a:rPr sz="1350" b="0" i="0">
+                        <a:rPr sz="1200" b="0" i="0">
                           <a:solidFill>
                             <a:srgbClr val="404040"/>
                           </a:solidFill>
@@ -14184,13 +13504,36 @@
                     <a:p>
                       <a:pPr algn="ctr"/>
                       <a:r>
-                        <a:rPr sz="1350" b="0" i="0">
+                        <a:rPr sz="1200" b="0" i="0">
                           <a:solidFill>
                             <a:srgbClr val="404040"/>
                           </a:solidFill>
                           <a:latin typeface="Microsoft JhengHei"/>
                         </a:rPr>
-                        <a:t>整合複雜度與資源佔用最高</a:t>
+                        <a:t>互補；並行峰值僅佔每秒預算 0.034%</a:t>
+                      </a:r>
+                    </a:p>
+                  </a:txBody>
+                  <a:tcPr marL="63500" marR="50800" marT="25400" marB="25400" anchor="ctr">
+                    <a:solidFill>
+                      <a:srgbClr val="DEEBF7"/>
+                    </a:solidFill>
+                  </a:tcPr>
+                </a:tc>
+                <a:tc>
+                  <a:txBody>
+                    <a:bodyPr wrap="square"/>
+                    <a:lstStyle/>
+                    <a:p>
+                      <a:pPr algn="ctr"/>
+                      <a:r>
+                        <a:rPr sz="1200" b="0" i="0">
+                          <a:solidFill>
+                            <a:srgbClr val="404040"/>
+                          </a:solidFill>
+                          <a:latin typeface="Microsoft JhengHei"/>
+                        </a:rPr>
+                        <a:t>整合複雜度最高；Flash +4.9 KB（RAM 可加 +112 B）</a:t>
                       </a:r>
                     </a:p>
                   </a:txBody>
@@ -14213,7 +13556,7 @@
         </p:nvSpPr>
         <p:spPr>
           <a:xfrm>
-            <a:off x="502920" y="4251960"/>
+            <a:off x="502920" y="4343400"/>
             <a:ext cx="11201400" cy="320040"/>
           </a:xfrm>
           <a:prstGeom prst="rect">
@@ -14235,7 +13578,7 @@
                 </a:solidFill>
                 <a:latin typeface="Microsoft JhengHei"/>
               </a:rPr>
-              <a:t>表 6-1　SOC 方法選用決策表（動態阻抗為實測，餘待 [待測] 回填升級為定量）</a:t>
+              <a:t>表 6-1　SOC 方法選用決策表（全研究實測結論版；各欄數值均出自同硬體實測）</a:t>
             </a:r>
           </a:p>
         </p:txBody>
@@ -14248,8 +13591,8 @@
         </p:nvSpPr>
         <p:spPr>
           <a:xfrm>
-            <a:off x="502920" y="4709160"/>
-            <a:ext cx="11201400" cy="1463040"/>
+            <a:off x="502920" y="4773168"/>
+            <a:ext cx="11201400" cy="1417320"/>
           </a:xfrm>
           <a:prstGeom prst="rect">
             <a:avLst/>
@@ -14292,8 +13635,8 @@
         </p:nvSpPr>
         <p:spPr>
           <a:xfrm>
-            <a:off x="502920" y="4709160"/>
-            <a:ext cx="82296" cy="1463040"/>
+            <a:off x="502920" y="4773168"/>
+            <a:ext cx="82296" cy="1417320"/>
           </a:xfrm>
           <a:prstGeom prst="rect">
             <a:avLst/>
@@ -14336,8 +13679,8 @@
         </p:nvSpPr>
         <p:spPr>
           <a:xfrm>
-            <a:off x="704088" y="4818888"/>
-            <a:ext cx="10881360" cy="1280160"/>
+            <a:off x="704088" y="4882896"/>
+            <a:ext cx="10881360" cy="1234440"/>
           </a:xfrm>
           <a:prstGeom prst="rect">
             <a:avLst/>
@@ -14362,7 +13705,7 @@
                 </a:solidFill>
                 <a:latin typeface="Microsoft JhengHei"/>
               </a:rPr>
-              <a:t>核心結論</a:t>
+              <a:t>兩個結論</a:t>
             </a:r>
           </a:p>
           <a:p>
@@ -14378,7 +13721,7 @@
                 </a:solidFill>
                 <a:latin typeface="Microsoft JhengHei"/>
               </a:rPr>
-              <a:t>• 不存在單一最優方法 — 最優選擇取決於目標硬體資源約束與應用需求</a:t>
+              <a:t>• 結論一：不存在單一最優方法 — 最優選擇取決於目標硬體資源約束與應用需求</a:t>
             </a:r>
           </a:p>
           <a:p>
@@ -14394,7 +13737,7 @@
                 </a:solidFill>
                 <a:latin typeface="Microsoft JhengHei"/>
               </a:rPr>
-              <a:t>• 本研究價值：將此權衡由「文獻中的定性印象」轉化為「同硬體實測支撐的決策依據」</a:t>
+              <a:t>• 結論二（本研究核心）：演算法的精度上限往往不由演算法決定 — 量測鏈刻度、參數辨識域與部署域的一致性，其誤差貢獻數倍於演算法彼此差距</a:t>
             </a:r>
           </a:p>
         </p:txBody>
@@ -15734,7 +15077,7 @@
                 <a:spcPts val="0"/>
               </a:spcBef>
               <a:spcAft>
-                <a:spcPts val="800"/>
+                <a:spcPts val="700"/>
               </a:spcAft>
             </a:pPr>
             <a:r>
@@ -15753,7 +15096,7 @@
                 </a:solidFill>
                 <a:latin typeface="Microsoft JhengHei"/>
               </a:rPr>
-              <a:t>單一電池化學體系與樣本（僅一顆 NMC）</a:t>
+              <a:t>單一 NMC 電池、室溫、無溫度補償</a:t>
             </a:r>
           </a:p>
           <a:p>
@@ -15762,7 +15105,7 @@
                 <a:spcPts val="0"/>
               </a:spcBef>
               <a:spcAft>
-                <a:spcPts val="800"/>
+                <a:spcPts val="700"/>
               </a:spcAft>
             </a:pPr>
             <a:r>
@@ -15781,7 +15124,7 @@
                 </a:solidFill>
                 <a:latin typeface="Microsoft JhengHei"/>
               </a:rPr>
-              <a:t>室溫、無溫度補償</a:t>
+              <a:t>僅做 SOC，未做 SOH（已測到可分離的 4.6% 老化訊號）</a:t>
             </a:r>
           </a:p>
           <a:p>
@@ -15790,7 +15133,7 @@
                 <a:spcPts val="0"/>
               </a:spcBef>
               <a:spcAft>
-                <a:spcPts val="800"/>
+                <a:spcPts val="700"/>
               </a:spcAft>
             </a:pPr>
             <a:r>
@@ -15809,7 +15152,7 @@
                 </a:solidFill>
                 <a:latin typeface="Microsoft JhengHei"/>
               </a:rPr>
-              <a:t>僅做 SOC，未做 SOH（已測到可分離老化訊號）</a:t>
+              <a:t>rate capability 平坦：對 EKF 有利、對動態阻抗致命，結論不宜外推</a:t>
             </a:r>
           </a:p>
           <a:p>
@@ -15818,7 +15161,7 @@
                 <a:spcPts val="0"/>
               </a:spcBef>
               <a:spcAft>
-                <a:spcPts val="800"/>
+                <a:spcPts val="700"/>
               </a:spcAft>
             </a:pPr>
             <a:r>
@@ -15837,7 +15180,7 @@
                 </a:solidFill>
                 <a:latin typeface="Microsoft JhengHei"/>
               </a:rPr>
-              <a:t>rate capability 平坦為有利條件</a:t>
+              <a:t>EKF 參數/PC 重放為 in-sample，獨立驗證由兩整輪板端實測承擔</a:t>
             </a:r>
           </a:p>
           <a:p>
@@ -15846,7 +15189,7 @@
                 <a:spcPts val="0"/>
               </a:spcBef>
               <a:spcAft>
-                <a:spcPts val="800"/>
+                <a:spcPts val="700"/>
               </a:spcAft>
             </a:pPr>
             <a:r>
@@ -15865,7 +15208,7 @@
                 </a:solidFill>
                 <a:latin typeface="Microsoft JhengHei"/>
               </a:rPr>
-              <a:t>EKF 精度與三法 footprint 部分待實測回填</a:t>
+              <a:t>板端與台架電流鏈約 1.2% 刻度差，絕對精度含此構成</a:t>
             </a:r>
           </a:p>
         </p:txBody>

--- a/DOC/論文撰寫/口試簡報_鋰電池SOC估測.pptx
+++ b/DOC/論文撰寫/口試簡報_鋰電池SOC估測.pptx
@@ -25,6 +25,7 @@
     <p:sldId id="273" r:id="rId24"/>
     <p:sldId id="274" r:id="rId25"/>
     <p:sldId id="275" r:id="rId26"/>
+    <p:sldId id="276" r:id="rId27"/>
   </p:sldIdLst>
   <p:sldSz cx="12191695" cy="6858000" type="screen4x3"/>
   <p:notesSz cx="6858000" cy="9144000"/>
@@ -3727,7 +3728,7 @@
                 </a:solidFill>
                 <a:latin typeface="Microsoft JhengHei"/>
               </a:rPr>
-              <a:t>9 / 20</a:t>
+              <a:t>9 / 21</a:t>
             </a:r>
           </a:p>
         </p:txBody>
@@ -5002,7 +5003,7 @@
                 </a:solidFill>
                 <a:latin typeface="Microsoft JhengHei"/>
               </a:rPr>
-              <a:t>10 / 20</a:t>
+              <a:t>10 / 21</a:t>
             </a:r>
           </a:p>
         </p:txBody>
@@ -6030,7 +6031,7 @@
                 </a:solidFill>
                 <a:latin typeface="Microsoft JhengHei"/>
               </a:rPr>
-              <a:t>11 / 20</a:t>
+              <a:t>11 / 21</a:t>
             </a:r>
           </a:p>
         </p:txBody>
@@ -6812,7 +6813,7 @@
                 </a:solidFill>
                 <a:latin typeface="Microsoft JhengHei"/>
               </a:rPr>
-              <a:t>12 / 20</a:t>
+              <a:t>12 / 21</a:t>
             </a:r>
           </a:p>
         </p:txBody>
@@ -8031,7 +8032,7 @@
                 </a:solidFill>
                 <a:latin typeface="Microsoft JhengHei"/>
               </a:rPr>
-              <a:t>13 / 20</a:t>
+              <a:t>13 / 21</a:t>
             </a:r>
           </a:p>
         </p:txBody>
@@ -8710,7 +8711,7 @@
                 </a:solidFill>
                 <a:latin typeface="Microsoft JhengHei"/>
               </a:rPr>
-              <a:t>14 / 20</a:t>
+              <a:t>14 / 21</a:t>
             </a:r>
           </a:p>
         </p:txBody>
@@ -9345,7 +9346,7 @@
                 </a:solidFill>
                 <a:latin typeface="Microsoft JhengHei"/>
               </a:rPr>
-              <a:t>15 / 20</a:t>
+              <a:t>15 / 21</a:t>
             </a:r>
           </a:p>
         </p:txBody>
@@ -9886,7 +9887,7 @@
                 </a:solidFill>
                 <a:latin typeface="Microsoft JhengHei"/>
               </a:rPr>
-              <a:t>六、三方法公平比較（全實測）</a:t>
+              <a:t>六、三法 SOC 軌跡實測對照</a:t>
             </a:r>
           </a:p>
           <a:p>
@@ -9897,7 +9898,7 @@
                 </a:solidFill>
                 <a:latin typeface="Microsoft JhengHei"/>
               </a:rPr>
-              <a:t>精度 × 強健性 × 嵌入式資源（同電池・同協定・同 MCU・同量測路徑）</a:t>
+              <a:t>同一輪四倍率放電，三法軌跡疊繪台架庫倫真值 — 動態阻抗跳動的三種失效型態</a:t>
             </a:r>
           </a:p>
         </p:txBody>
@@ -9931,7 +9932,7 @@
                 </a:solidFill>
                 <a:latin typeface="Microsoft JhengHei"/>
               </a:rPr>
-              <a:t>鋰電池 SOC 估測方法之比較與嵌入式實作　|　方法比較</a:t>
+              <a:t>鋰電池 SOC 估測方法之比較與嵌入式實作　|　三法SOC軌跡對照</a:t>
             </a:r>
           </a:p>
         </p:txBody>
@@ -9966,7 +9967,968 @@
                 </a:solidFill>
                 <a:latin typeface="Microsoft JhengHei"/>
               </a:rPr>
-              <a:t>16 / 20</a:t>
+              <a:t>16 / 21</a:t>
+            </a:r>
+          </a:p>
+        </p:txBody>
+      </p:sp>
+      <p:sp>
+        <p:nvSpPr>
+          <p:cNvPr id="7" name="Rectangle 6"/>
+          <p:cNvSpPr/>
+          <p:nvPr/>
+        </p:nvSpPr>
+        <p:spPr>
+          <a:xfrm>
+            <a:off x="948146" y="1150620"/>
+            <a:ext cx="5190307" cy="4053839"/>
+          </a:xfrm>
+          <a:prstGeom prst="rect">
+            <a:avLst/>
+          </a:prstGeom>
+          <a:solidFill>
+            <a:srgbClr val="FFFFFF"/>
+          </a:solidFill>
+          <a:ln w="9525">
+            <a:solidFill>
+              <a:srgbClr val="2E74B5"/>
+            </a:solidFill>
+          </a:ln>
+          <a:effectLst/>
+        </p:spPr>
+        <p:style>
+          <a:lnRef idx="1">
+            <a:schemeClr val="accent1"/>
+          </a:lnRef>
+          <a:fillRef idx="3">
+            <a:schemeClr val="accent1"/>
+          </a:fillRef>
+          <a:effectRef idx="2">
+            <a:schemeClr val="accent1"/>
+          </a:effectRef>
+          <a:fontRef idx="minor">
+            <a:schemeClr val="lt1"/>
+          </a:fontRef>
+        </p:style>
+        <p:txBody>
+          <a:bodyPr rtlCol="0" anchor="ctr"/>
+          <a:lstStyle/>
+          <a:p>
+            <a:pPr algn="ctr"/>
+          </a:p>
+        </p:txBody>
+      </p:sp>
+      <p:pic>
+        <p:nvPicPr>
+          <p:cNvPr id="8" name="Picture 7" descr="fig4-6.png"/>
+          <p:cNvPicPr>
+            <a:picLocks noChangeAspect="1"/>
+          </p:cNvPicPr>
+          <p:nvPr/>
+        </p:nvPicPr>
+        <p:blipFill>
+          <a:blip r:embed="rId2"/>
+          <a:stretch>
+            <a:fillRect/>
+          </a:stretch>
+        </p:blipFill>
+        <p:spPr>
+          <a:xfrm>
+            <a:off x="986246" y="1188720"/>
+            <a:ext cx="5114107" cy="3977639"/>
+          </a:xfrm>
+          <a:prstGeom prst="rect">
+            <a:avLst/>
+          </a:prstGeom>
+        </p:spPr>
+      </p:pic>
+      <p:sp>
+        <p:nvSpPr>
+          <p:cNvPr id="9" name="TextBox 8"/>
+          <p:cNvSpPr txBox="1"/>
+          <p:nvPr/>
+        </p:nvSpPr>
+        <p:spPr>
+          <a:xfrm>
+            <a:off x="411480" y="5230368"/>
+            <a:ext cx="6263640" cy="320040"/>
+          </a:xfrm>
+          <a:prstGeom prst="rect">
+            <a:avLst/>
+          </a:prstGeom>
+          <a:noFill/>
+        </p:spPr>
+        <p:txBody>
+          <a:bodyPr wrap="square" anchor="t" lIns="25400" rIns="25400" tIns="25400" bIns="25400">
+            <a:spAutoFit/>
+          </a:bodyPr>
+          <a:lstStyle/>
+          <a:p>
+            <a:pPr algn="ctr"/>
+            <a:r>
+              <a:rPr sz="1100" b="0" i="1">
+                <a:solidFill>
+                  <a:srgbClr val="595959"/>
+                </a:solidFill>
+                <a:latin typeface="Microsoft JhengHei"/>
+              </a:rPr>
+              <a:t>圖 4-6　儀器庫倫真值 vs 板端庫倫／EKF／動態阻抗（Round 41，各面板標 RMSE）</a:t>
+            </a:r>
+          </a:p>
+        </p:txBody>
+      </p:sp>
+      <p:sp>
+        <p:nvSpPr>
+          <p:cNvPr id="10" name="Rectangle 9"/>
+          <p:cNvSpPr/>
+          <p:nvPr/>
+        </p:nvSpPr>
+        <p:spPr>
+          <a:xfrm>
+            <a:off x="6400800" y="1143000"/>
+            <a:ext cx="5349240" cy="1170432"/>
+          </a:xfrm>
+          <a:prstGeom prst="rect">
+            <a:avLst/>
+          </a:prstGeom>
+          <a:solidFill>
+            <a:srgbClr val="FBEAEA"/>
+          </a:solidFill>
+          <a:ln>
+            <a:noFill/>
+          </a:ln>
+          <a:effectLst/>
+        </p:spPr>
+        <p:style>
+          <a:lnRef idx="1">
+            <a:schemeClr val="accent1"/>
+          </a:lnRef>
+          <a:fillRef idx="3">
+            <a:schemeClr val="accent1"/>
+          </a:fillRef>
+          <a:effectRef idx="2">
+            <a:schemeClr val="accent1"/>
+          </a:effectRef>
+          <a:fontRef idx="minor">
+            <a:schemeClr val="lt1"/>
+          </a:fontRef>
+        </p:style>
+        <p:txBody>
+          <a:bodyPr rtlCol="0" anchor="ctr"/>
+          <a:lstStyle/>
+          <a:p>
+            <a:pPr algn="ctr"/>
+          </a:p>
+        </p:txBody>
+      </p:sp>
+      <p:sp>
+        <p:nvSpPr>
+          <p:cNvPr id="11" name="Rectangle 10"/>
+          <p:cNvSpPr/>
+          <p:nvPr/>
+        </p:nvSpPr>
+        <p:spPr>
+          <a:xfrm>
+            <a:off x="6400800" y="1143000"/>
+            <a:ext cx="82296" cy="1170432"/>
+          </a:xfrm>
+          <a:prstGeom prst="rect">
+            <a:avLst/>
+          </a:prstGeom>
+          <a:solidFill>
+            <a:srgbClr val="2E74B5"/>
+          </a:solidFill>
+          <a:ln>
+            <a:noFill/>
+          </a:ln>
+          <a:effectLst/>
+        </p:spPr>
+        <p:style>
+          <a:lnRef idx="1">
+            <a:schemeClr val="accent1"/>
+          </a:lnRef>
+          <a:fillRef idx="3">
+            <a:schemeClr val="accent1"/>
+          </a:fillRef>
+          <a:effectRef idx="2">
+            <a:schemeClr val="accent1"/>
+          </a:effectRef>
+          <a:fontRef idx="minor">
+            <a:schemeClr val="lt1"/>
+          </a:fontRef>
+        </p:style>
+        <p:txBody>
+          <a:bodyPr rtlCol="0" anchor="ctr"/>
+          <a:lstStyle/>
+          <a:p>
+            <a:pPr algn="ctr"/>
+          </a:p>
+        </p:txBody>
+      </p:sp>
+      <p:sp>
+        <p:nvSpPr>
+          <p:cNvPr id="12" name="TextBox 11"/>
+          <p:cNvSpPr txBox="1"/>
+          <p:nvPr/>
+        </p:nvSpPr>
+        <p:spPr>
+          <a:xfrm>
+            <a:off x="6601968" y="1252728"/>
+            <a:ext cx="5029200" cy="987552"/>
+          </a:xfrm>
+          <a:prstGeom prst="rect">
+            <a:avLst/>
+          </a:prstGeom>
+          <a:noFill/>
+        </p:spPr>
+        <p:txBody>
+          <a:bodyPr wrap="square" anchor="t" lIns="25400" rIns="25400" tIns="25400" bIns="25400">
+            <a:spAutoFit/>
+          </a:bodyPr>
+          <a:lstStyle/>
+          <a:p>
+            <a:pPr>
+              <a:spcAft>
+                <a:spcPts val="500"/>
+              </a:spcAft>
+            </a:pPr>
+            <a:r>
+              <a:rPr sz="1400" b="1" i="0">
+                <a:solidFill>
+                  <a:srgbClr val="C03A2B"/>
+                </a:solidFill>
+                <a:latin typeface="Microsoft JhengHei"/>
+              </a:rPr>
+              <a:t>失效 ①　鏡像跳變</a:t>
+            </a:r>
+          </a:p>
+          <a:p>
+            <a:pPr>
+              <a:spcAft>
+                <a:spcPts val="400"/>
+              </a:spcAft>
+            </a:pPr>
+            <a:r>
+              <a:rPr sz="1300" b="0" i="0">
+                <a:solidFill>
+                  <a:srgbClr val="404040"/>
+                </a:solidFill>
+                <a:latin typeface="Microsoft JhengHei"/>
+              </a:rPr>
+              <a:t>• 選錯分枝 → 解落到頂點另一側的鏡像位置</a:t>
+            </a:r>
+          </a:p>
+          <a:p>
+            <a:pPr>
+              <a:spcAft>
+                <a:spcPts val="400"/>
+              </a:spcAft>
+            </a:pPr>
+            <a:r>
+              <a:rPr sz="1300" b="0" i="0">
+                <a:solidFill>
+                  <a:srgbClr val="404040"/>
+                </a:solidFill>
+                <a:latin typeface="Microsoft JhengHei"/>
+              </a:rPr>
+              <a:t>• 真值 90% 時另一根約在 27% → 軌跡瞬間上下對翻</a:t>
+            </a:r>
+          </a:p>
+        </p:txBody>
+      </p:sp>
+      <p:sp>
+        <p:nvSpPr>
+          <p:cNvPr id="13" name="Rectangle 12"/>
+          <p:cNvSpPr/>
+          <p:nvPr/>
+        </p:nvSpPr>
+        <p:spPr>
+          <a:xfrm>
+            <a:off x="6400800" y="2377440"/>
+            <a:ext cx="5349240" cy="1353312"/>
+          </a:xfrm>
+          <a:prstGeom prst="rect">
+            <a:avLst/>
+          </a:prstGeom>
+          <a:solidFill>
+            <a:srgbClr val="FDF3E0"/>
+          </a:solidFill>
+          <a:ln>
+            <a:noFill/>
+          </a:ln>
+          <a:effectLst/>
+        </p:spPr>
+        <p:style>
+          <a:lnRef idx="1">
+            <a:schemeClr val="accent1"/>
+          </a:lnRef>
+          <a:fillRef idx="3">
+            <a:schemeClr val="accent1"/>
+          </a:fillRef>
+          <a:effectRef idx="2">
+            <a:schemeClr val="accent1"/>
+          </a:effectRef>
+          <a:fontRef idx="minor">
+            <a:schemeClr val="lt1"/>
+          </a:fontRef>
+        </p:style>
+        <p:txBody>
+          <a:bodyPr rtlCol="0" anchor="ctr"/>
+          <a:lstStyle/>
+          <a:p>
+            <a:pPr algn="ctr"/>
+          </a:p>
+        </p:txBody>
+      </p:sp>
+      <p:sp>
+        <p:nvSpPr>
+          <p:cNvPr id="14" name="Rectangle 13"/>
+          <p:cNvSpPr/>
+          <p:nvPr/>
+        </p:nvSpPr>
+        <p:spPr>
+          <a:xfrm>
+            <a:off x="6400800" y="2377440"/>
+            <a:ext cx="82296" cy="1353312"/>
+          </a:xfrm>
+          <a:prstGeom prst="rect">
+            <a:avLst/>
+          </a:prstGeom>
+          <a:solidFill>
+            <a:srgbClr val="2E74B5"/>
+          </a:solidFill>
+          <a:ln>
+            <a:noFill/>
+          </a:ln>
+          <a:effectLst/>
+        </p:spPr>
+        <p:style>
+          <a:lnRef idx="1">
+            <a:schemeClr val="accent1"/>
+          </a:lnRef>
+          <a:fillRef idx="3">
+            <a:schemeClr val="accent1"/>
+          </a:fillRef>
+          <a:effectRef idx="2">
+            <a:schemeClr val="accent1"/>
+          </a:effectRef>
+          <a:fontRef idx="minor">
+            <a:schemeClr val="lt1"/>
+          </a:fontRef>
+        </p:style>
+        <p:txBody>
+          <a:bodyPr rtlCol="0" anchor="ctr"/>
+          <a:lstStyle/>
+          <a:p>
+            <a:pPr algn="ctr"/>
+          </a:p>
+        </p:txBody>
+      </p:sp>
+      <p:sp>
+        <p:nvSpPr>
+          <p:cNvPr id="15" name="TextBox 14"/>
+          <p:cNvSpPr txBox="1"/>
+          <p:nvPr/>
+        </p:nvSpPr>
+        <p:spPr>
+          <a:xfrm>
+            <a:off x="6601968" y="2487168"/>
+            <a:ext cx="5029200" cy="1170432"/>
+          </a:xfrm>
+          <a:prstGeom prst="rect">
+            <a:avLst/>
+          </a:prstGeom>
+          <a:noFill/>
+        </p:spPr>
+        <p:txBody>
+          <a:bodyPr wrap="square" anchor="t" lIns="25400" rIns="25400" tIns="25400" bIns="25400">
+            <a:spAutoFit/>
+          </a:bodyPr>
+          <a:lstStyle/>
+          <a:p>
+            <a:pPr>
+              <a:spcAft>
+                <a:spcPts val="500"/>
+              </a:spcAft>
+            </a:pPr>
+            <a:r>
+              <a:rPr sz="1400" b="1" i="0">
+                <a:solidFill>
+                  <a:srgbClr val="C08A2B"/>
+                </a:solidFill>
+                <a:latin typeface="Microsoft JhengHei"/>
+              </a:rPr>
+              <a:t>失效 ②　頂點夾限平台</a:t>
+            </a:r>
+          </a:p>
+          <a:p>
+            <a:pPr>
+              <a:spcAft>
+                <a:spcPts val="400"/>
+              </a:spcAft>
+            </a:pPr>
+            <a:r>
+              <a:rPr sz="1300" b="0" i="0">
+                <a:solidFill>
+                  <a:srgbClr val="404040"/>
+                </a:solidFill>
+                <a:latin typeface="Microsoft JhengHei"/>
+              </a:rPr>
+              <a:t>• 噪聲使 Z 低於曲線最低值 33.4 mΩ → 判別式無實根</a:t>
+            </a:r>
+          </a:p>
+          <a:p>
+            <a:pPr>
+              <a:spcAft>
+                <a:spcPts val="400"/>
+              </a:spcAft>
+            </a:pPr>
+            <a:r>
+              <a:rPr sz="1300" b="0" i="0">
+                <a:solidFill>
+                  <a:srgbClr val="404040"/>
+                </a:solidFill>
+                <a:latin typeface="Microsoft JhengHei"/>
+              </a:rPr>
+              <a:t>• 只能夾限輸出頂點 58.6%；Round 41 中 111／425 事件（26%）落此</a:t>
+            </a:r>
+          </a:p>
+        </p:txBody>
+      </p:sp>
+      <p:sp>
+        <p:nvSpPr>
+          <p:cNvPr id="16" name="Rectangle 15"/>
+          <p:cNvSpPr/>
+          <p:nvPr/>
+        </p:nvSpPr>
+        <p:spPr>
+          <a:xfrm>
+            <a:off x="6400800" y="3794760"/>
+            <a:ext cx="5349240" cy="1170432"/>
+          </a:xfrm>
+          <a:prstGeom prst="rect">
+            <a:avLst/>
+          </a:prstGeom>
+          <a:solidFill>
+            <a:srgbClr val="DEEBF7"/>
+          </a:solidFill>
+          <a:ln>
+            <a:noFill/>
+          </a:ln>
+          <a:effectLst/>
+        </p:spPr>
+        <p:style>
+          <a:lnRef idx="1">
+            <a:schemeClr val="accent1"/>
+          </a:lnRef>
+          <a:fillRef idx="3">
+            <a:schemeClr val="accent1"/>
+          </a:fillRef>
+          <a:effectRef idx="2">
+            <a:schemeClr val="accent1"/>
+          </a:effectRef>
+          <a:fontRef idx="minor">
+            <a:schemeClr val="lt1"/>
+          </a:fontRef>
+        </p:style>
+        <p:txBody>
+          <a:bodyPr rtlCol="0" anchor="ctr"/>
+          <a:lstStyle/>
+          <a:p>
+            <a:pPr algn="ctr"/>
+          </a:p>
+        </p:txBody>
+      </p:sp>
+      <p:sp>
+        <p:nvSpPr>
+          <p:cNvPr id="17" name="Rectangle 16"/>
+          <p:cNvSpPr/>
+          <p:nvPr/>
+        </p:nvSpPr>
+        <p:spPr>
+          <a:xfrm>
+            <a:off x="6400800" y="3794760"/>
+            <a:ext cx="82296" cy="1170432"/>
+          </a:xfrm>
+          <a:prstGeom prst="rect">
+            <a:avLst/>
+          </a:prstGeom>
+          <a:solidFill>
+            <a:srgbClr val="2E74B5"/>
+          </a:solidFill>
+          <a:ln>
+            <a:noFill/>
+          </a:ln>
+          <a:effectLst/>
+        </p:spPr>
+        <p:style>
+          <a:lnRef idx="1">
+            <a:schemeClr val="accent1"/>
+          </a:lnRef>
+          <a:fillRef idx="3">
+            <a:schemeClr val="accent1"/>
+          </a:fillRef>
+          <a:effectRef idx="2">
+            <a:schemeClr val="accent1"/>
+          </a:effectRef>
+          <a:fontRef idx="minor">
+            <a:schemeClr val="lt1"/>
+          </a:fontRef>
+        </p:style>
+        <p:txBody>
+          <a:bodyPr rtlCol="0" anchor="ctr"/>
+          <a:lstStyle/>
+          <a:p>
+            <a:pPr algn="ctr"/>
+          </a:p>
+        </p:txBody>
+      </p:sp>
+      <p:sp>
+        <p:nvSpPr>
+          <p:cNvPr id="18" name="TextBox 17"/>
+          <p:cNvSpPr txBox="1"/>
+          <p:nvPr/>
+        </p:nvSpPr>
+        <p:spPr>
+          <a:xfrm>
+            <a:off x="6601968" y="3904488"/>
+            <a:ext cx="5029200" cy="987552"/>
+          </a:xfrm>
+          <a:prstGeom prst="rect">
+            <a:avLst/>
+          </a:prstGeom>
+          <a:noFill/>
+        </p:spPr>
+        <p:txBody>
+          <a:bodyPr wrap="square" anchor="t" lIns="25400" rIns="25400" tIns="25400" bIns="25400">
+            <a:spAutoFit/>
+          </a:bodyPr>
+          <a:lstStyle/>
+          <a:p>
+            <a:pPr>
+              <a:spcAft>
+                <a:spcPts val="500"/>
+              </a:spcAft>
+            </a:pPr>
+            <a:r>
+              <a:rPr sz="1400" b="1" i="0">
+                <a:solidFill>
+                  <a:srgbClr val="1F3864"/>
+                </a:solidFill>
+                <a:latin typeface="Microsoft JhengHei"/>
+              </a:rPr>
+              <a:t>失效 ③　無不確定度加權</a:t>
+            </a:r>
+          </a:p>
+          <a:p>
+            <a:pPr>
+              <a:spcAft>
+                <a:spcPts val="400"/>
+              </a:spcAft>
+            </a:pPr>
+            <a:r>
+              <a:rPr sz="1300" b="0" i="0">
+                <a:solidFill>
+                  <a:srgbClr val="404040"/>
+                </a:solidFill>
+                <a:latin typeface="Microsoft JhengHei"/>
+              </a:rPr>
+              <a:t>• 每事件獨立重錨、無共變異數機制可降權劣質觀測</a:t>
+            </a:r>
+          </a:p>
+          <a:p>
+            <a:pPr>
+              <a:spcAft>
+                <a:spcPts val="400"/>
+              </a:spcAft>
+            </a:pPr>
+            <a:r>
+              <a:rPr sz="1300" b="0" i="0">
+                <a:solidFill>
+                  <a:srgbClr val="404040"/>
+                </a:solidFill>
+                <a:latin typeface="Microsoft JhengHei"/>
+              </a:rPr>
+              <a:t>• 單一錯誤解原封保留至下一事件（EKF 靠共變異數避免）</a:t>
+            </a:r>
+          </a:p>
+        </p:txBody>
+      </p:sp>
+      <p:sp>
+        <p:nvSpPr>
+          <p:cNvPr id="19" name="Rectangle 18"/>
+          <p:cNvSpPr/>
+          <p:nvPr/>
+        </p:nvSpPr>
+        <p:spPr>
+          <a:xfrm>
+            <a:off x="6400800" y="5029200"/>
+            <a:ext cx="5349240" cy="1188720"/>
+          </a:xfrm>
+          <a:prstGeom prst="rect">
+            <a:avLst/>
+          </a:prstGeom>
+          <a:solidFill>
+            <a:srgbClr val="FDF3E0"/>
+          </a:solidFill>
+          <a:ln>
+            <a:noFill/>
+          </a:ln>
+          <a:effectLst/>
+        </p:spPr>
+        <p:style>
+          <a:lnRef idx="1">
+            <a:schemeClr val="accent1"/>
+          </a:lnRef>
+          <a:fillRef idx="3">
+            <a:schemeClr val="accent1"/>
+          </a:fillRef>
+          <a:effectRef idx="2">
+            <a:schemeClr val="accent1"/>
+          </a:effectRef>
+          <a:fontRef idx="minor">
+            <a:schemeClr val="lt1"/>
+          </a:fontRef>
+        </p:style>
+        <p:txBody>
+          <a:bodyPr rtlCol="0" anchor="ctr"/>
+          <a:lstStyle/>
+          <a:p>
+            <a:pPr algn="ctr"/>
+          </a:p>
+        </p:txBody>
+      </p:sp>
+      <p:sp>
+        <p:nvSpPr>
+          <p:cNvPr id="20" name="Rectangle 19"/>
+          <p:cNvSpPr/>
+          <p:nvPr/>
+        </p:nvSpPr>
+        <p:spPr>
+          <a:xfrm>
+            <a:off x="6400800" y="5029200"/>
+            <a:ext cx="82296" cy="1188720"/>
+          </a:xfrm>
+          <a:prstGeom prst="rect">
+            <a:avLst/>
+          </a:prstGeom>
+          <a:solidFill>
+            <a:srgbClr val="2E74B5"/>
+          </a:solidFill>
+          <a:ln>
+            <a:noFill/>
+          </a:ln>
+          <a:effectLst/>
+        </p:spPr>
+        <p:style>
+          <a:lnRef idx="1">
+            <a:schemeClr val="accent1"/>
+          </a:lnRef>
+          <a:fillRef idx="3">
+            <a:schemeClr val="accent1"/>
+          </a:fillRef>
+          <a:effectRef idx="2">
+            <a:schemeClr val="accent1"/>
+          </a:effectRef>
+          <a:fontRef idx="minor">
+            <a:schemeClr val="lt1"/>
+          </a:fontRef>
+        </p:style>
+        <p:txBody>
+          <a:bodyPr rtlCol="0" anchor="ctr"/>
+          <a:lstStyle/>
+          <a:p>
+            <a:pPr algn="ctr"/>
+          </a:p>
+        </p:txBody>
+      </p:sp>
+      <p:sp>
+        <p:nvSpPr>
+          <p:cNvPr id="21" name="TextBox 20"/>
+          <p:cNvSpPr txBox="1"/>
+          <p:nvPr/>
+        </p:nvSpPr>
+        <p:spPr>
+          <a:xfrm>
+            <a:off x="6601968" y="5138928"/>
+            <a:ext cx="5029200" cy="1005840"/>
+          </a:xfrm>
+          <a:prstGeom prst="rect">
+            <a:avLst/>
+          </a:prstGeom>
+          <a:noFill/>
+        </p:spPr>
+        <p:txBody>
+          <a:bodyPr wrap="square" anchor="t" lIns="25400" rIns="25400" tIns="25400" bIns="25400">
+            <a:spAutoFit/>
+          </a:bodyPr>
+          <a:lstStyle/>
+          <a:p>
+            <a:pPr>
+              <a:spcAft>
+                <a:spcPts val="500"/>
+              </a:spcAft>
+            </a:pPr>
+            <a:r>
+              <a:rPr sz="1400" b="1" i="0">
+                <a:solidFill>
+                  <a:srgbClr val="C08A2B"/>
+                </a:solidFill>
+                <a:latin typeface="Microsoft JhengHei"/>
+              </a:rPr>
+              <a:t>為何是方法本質、非感測器</a:t>
+            </a:r>
+          </a:p>
+          <a:p>
+            <a:pPr>
+              <a:spcAft>
+                <a:spcPts val="400"/>
+              </a:spcAft>
+            </a:pPr>
+            <a:r>
+              <a:rPr sz="1300" b="0" i="0">
+                <a:solidFill>
+                  <a:srgbClr val="404040"/>
+                </a:solidFill>
+                <a:latin typeface="Microsoft JhengHei"/>
+              </a:rPr>
+              <a:t>• 同噪聲抖動：庫倫 0.005%／EKF 0.018%／動態阻抗 53%（差 3–4 級）</a:t>
+            </a:r>
+          </a:p>
+          <a:p>
+            <a:pPr>
+              <a:spcAft>
+                <a:spcPts val="400"/>
+              </a:spcAft>
+            </a:pPr>
+            <a:r>
+              <a:rPr sz="1300" b="0" i="0">
+                <a:solidFill>
+                  <a:srgbClr val="404040"/>
+                </a:solidFill>
+                <a:latin typeface="Microsoft JhengHei"/>
+              </a:rPr>
+              <a:t>• → 病態源自曲線跨度僅噪聲 3 倍，與感測器品質無關</a:t>
+            </a:r>
+          </a:p>
+        </p:txBody>
+      </p:sp>
+    </p:spTree>
+  </p:cSld>
+  <p:clrMapOvr>
+    <a:masterClrMapping/>
+  </p:clrMapOvr>
+</p:sld>
+</file>
+
+<file path=ppt/slides/slide18.xml><?xml version="1.0" encoding="utf-8"?>
+<p:sld xmlns:a="http://schemas.openxmlformats.org/drawingml/2006/main" xmlns:p="http://schemas.openxmlformats.org/presentationml/2006/main" xmlns:r="http://schemas.openxmlformats.org/officeDocument/2006/relationships">
+  <p:cSld>
+    <p:spTree>
+      <p:nvGrpSpPr>
+        <p:cNvPr id="1" name=""/>
+        <p:cNvGrpSpPr/>
+        <p:nvPr/>
+      </p:nvGrpSpPr>
+      <p:grpSpPr/>
+      <p:sp>
+        <p:nvSpPr>
+          <p:cNvPr id="2" name="Rectangle 1"/>
+          <p:cNvSpPr/>
+          <p:nvPr/>
+        </p:nvSpPr>
+        <p:spPr>
+          <a:xfrm>
+            <a:off x="0" y="0"/>
+            <a:ext cx="12191695" cy="932688"/>
+          </a:xfrm>
+          <a:prstGeom prst="rect">
+            <a:avLst/>
+          </a:prstGeom>
+          <a:solidFill>
+            <a:srgbClr val="1F3864"/>
+          </a:solidFill>
+          <a:ln>
+            <a:noFill/>
+          </a:ln>
+          <a:effectLst/>
+        </p:spPr>
+        <p:style>
+          <a:lnRef idx="1">
+            <a:schemeClr val="accent1"/>
+          </a:lnRef>
+          <a:fillRef idx="3">
+            <a:schemeClr val="accent1"/>
+          </a:fillRef>
+          <a:effectRef idx="2">
+            <a:schemeClr val="accent1"/>
+          </a:effectRef>
+          <a:fontRef idx="minor">
+            <a:schemeClr val="lt1"/>
+          </a:fontRef>
+        </p:style>
+        <p:txBody>
+          <a:bodyPr rtlCol="0" anchor="ctr"/>
+          <a:lstStyle/>
+          <a:p>
+            <a:pPr algn="ctr"/>
+          </a:p>
+        </p:txBody>
+      </p:sp>
+      <p:sp>
+        <p:nvSpPr>
+          <p:cNvPr id="3" name="Rectangle 2"/>
+          <p:cNvSpPr/>
+          <p:nvPr/>
+        </p:nvSpPr>
+        <p:spPr>
+          <a:xfrm>
+            <a:off x="0" y="932688"/>
+            <a:ext cx="12191695" cy="64008"/>
+          </a:xfrm>
+          <a:prstGeom prst="rect">
+            <a:avLst/>
+          </a:prstGeom>
+          <a:solidFill>
+            <a:srgbClr val="C08A2B"/>
+          </a:solidFill>
+          <a:ln>
+            <a:noFill/>
+          </a:ln>
+          <a:effectLst/>
+        </p:spPr>
+        <p:style>
+          <a:lnRef idx="1">
+            <a:schemeClr val="accent1"/>
+          </a:lnRef>
+          <a:fillRef idx="3">
+            <a:schemeClr val="accent1"/>
+          </a:fillRef>
+          <a:effectRef idx="2">
+            <a:schemeClr val="accent1"/>
+          </a:effectRef>
+          <a:fontRef idx="minor">
+            <a:schemeClr val="lt1"/>
+          </a:fontRef>
+        </p:style>
+        <p:txBody>
+          <a:bodyPr rtlCol="0" anchor="ctr"/>
+          <a:lstStyle/>
+          <a:p>
+            <a:pPr algn="ctr"/>
+          </a:p>
+        </p:txBody>
+      </p:sp>
+      <p:sp>
+        <p:nvSpPr>
+          <p:cNvPr id="4" name="TextBox 3"/>
+          <p:cNvSpPr txBox="1"/>
+          <p:nvPr/>
+        </p:nvSpPr>
+        <p:spPr>
+          <a:xfrm>
+            <a:off x="502920" y="109728"/>
+            <a:ext cx="10515600" cy="749808"/>
+          </a:xfrm>
+          <a:prstGeom prst="rect">
+            <a:avLst/>
+          </a:prstGeom>
+          <a:noFill/>
+        </p:spPr>
+        <p:txBody>
+          <a:bodyPr wrap="square" anchor="ctr" lIns="25400" rIns="25400" tIns="25400" bIns="25400">
+            <a:spAutoFit/>
+          </a:bodyPr>
+          <a:lstStyle/>
+          <a:p>
+            <a:r>
+              <a:rPr sz="2700" b="1" i="0">
+                <a:solidFill>
+                  <a:srgbClr val="FFFFFF"/>
+                </a:solidFill>
+                <a:latin typeface="Microsoft JhengHei"/>
+              </a:rPr>
+              <a:t>六、三方法公平比較（全實測）</a:t>
+            </a:r>
+          </a:p>
+          <a:p>
+            <a:r>
+              <a:rPr sz="1300" b="0" i="0">
+                <a:solidFill>
+                  <a:srgbClr val="DEEBF7"/>
+                </a:solidFill>
+                <a:latin typeface="Microsoft JhengHei"/>
+              </a:rPr>
+              <a:t>精度 × 強健性 × 嵌入式資源（同電池・同協定・同 MCU・同量測路徑）</a:t>
+            </a:r>
+          </a:p>
+        </p:txBody>
+      </p:sp>
+      <p:sp>
+        <p:nvSpPr>
+          <p:cNvPr id="5" name="TextBox 4"/>
+          <p:cNvSpPr txBox="1"/>
+          <p:nvPr/>
+        </p:nvSpPr>
+        <p:spPr>
+          <a:xfrm>
+            <a:off x="365760" y="6437376"/>
+            <a:ext cx="8229600" cy="365760"/>
+          </a:xfrm>
+          <a:prstGeom prst="rect">
+            <a:avLst/>
+          </a:prstGeom>
+          <a:noFill/>
+        </p:spPr>
+        <p:txBody>
+          <a:bodyPr wrap="square" anchor="ctr" lIns="25400" rIns="25400" tIns="25400" bIns="25400">
+            <a:spAutoFit/>
+          </a:bodyPr>
+          <a:lstStyle/>
+          <a:p>
+            <a:r>
+              <a:rPr sz="1000" b="0" i="0">
+                <a:solidFill>
+                  <a:srgbClr val="595959"/>
+                </a:solidFill>
+                <a:latin typeface="Microsoft JhengHei"/>
+              </a:rPr>
+              <a:t>鋰電池 SOC 估測方法之比較與嵌入式實作　|　方法比較</a:t>
+            </a:r>
+          </a:p>
+        </p:txBody>
+      </p:sp>
+      <p:sp>
+        <p:nvSpPr>
+          <p:cNvPr id="6" name="TextBox 5"/>
+          <p:cNvSpPr txBox="1"/>
+          <p:nvPr/>
+        </p:nvSpPr>
+        <p:spPr>
+          <a:xfrm>
+            <a:off x="11155680" y="6437376"/>
+            <a:ext cx="822960" cy="365760"/>
+          </a:xfrm>
+          <a:prstGeom prst="rect">
+            <a:avLst/>
+          </a:prstGeom>
+          <a:noFill/>
+        </p:spPr>
+        <p:txBody>
+          <a:bodyPr wrap="square" anchor="ctr" lIns="25400" rIns="25400" tIns="25400" bIns="25400">
+            <a:spAutoFit/>
+          </a:bodyPr>
+          <a:lstStyle/>
+          <a:p>
+            <a:pPr algn="r"/>
+            <a:r>
+              <a:rPr sz="1000" b="0" i="0">
+                <a:solidFill>
+                  <a:srgbClr val="595959"/>
+                </a:solidFill>
+                <a:latin typeface="Microsoft JhengHei"/>
+              </a:rPr>
+              <a:t>17 / 21</a:t>
             </a:r>
           </a:p>
         </p:txBody>
@@ -10954,7 +11916,7 @@
 </p:sld>
 </file>
 
-<file path=ppt/slides/slide18.xml><?xml version="1.0" encoding="utf-8"?>
+<file path=ppt/slides/slide19.xml><?xml version="1.0" encoding="utf-8"?>
 <p:sld xmlns:a="http://schemas.openxmlformats.org/drawingml/2006/main" xmlns:p="http://schemas.openxmlformats.org/presentationml/2006/main" xmlns:r="http://schemas.openxmlformats.org/officeDocument/2006/relationships">
   <p:cSld>
     <p:spTree>
@@ -11161,7 +12123,7 @@
                 </a:solidFill>
                 <a:latin typeface="Microsoft JhengHei"/>
               </a:rPr>
-              <a:t>17 / 20</a:t>
+              <a:t>18 / 21</a:t>
             </a:r>
           </a:p>
         </p:txBody>
@@ -12838,7 +13800,7 @@
 </p:sld>
 </file>
 
-<file path=ppt/slides/slide19.xml><?xml version="1.0" encoding="utf-8"?>
+<file path=ppt/slides/slide2.xml><?xml version="1.0" encoding="utf-8"?>
 <p:sld xmlns:a="http://schemas.openxmlformats.org/drawingml/2006/main" xmlns:p="http://schemas.openxmlformats.org/presentationml/2006/main" xmlns:r="http://schemas.openxmlformats.org/officeDocument/2006/relationships">
   <p:cSld>
     <p:spTree>
@@ -12965,18 +13927,7 @@
                 </a:solidFill>
                 <a:latin typeface="Microsoft JhengHei"/>
               </a:rPr>
-              <a:t>八、結論與方法選用決策表</a:t>
-            </a:r>
-          </a:p>
-          <a:p>
-            <a:r>
-              <a:rPr sz="1300" b="0" i="0">
-                <a:solidFill>
-                  <a:srgbClr val="DEEBF7"/>
-                </a:solidFill>
-                <a:latin typeface="Microsoft JhengHei"/>
-              </a:rPr>
-              <a:t>核心命題：嵌入式資源約束下的「精度─成本權衡」</a:t>
+              <a:t>簡報大綱</a:t>
             </a:r>
           </a:p>
         </p:txBody>
@@ -13010,7 +13961,7 @@
                 </a:solidFill>
                 <a:latin typeface="Microsoft JhengHei"/>
               </a:rPr>
-              <a:t>鋰電池 SOC 估測方法之比較與嵌入式實作　|　結論</a:t>
+              <a:t>鋰電池 SOC 估測方法之比較與嵌入式實作　|　簡報大綱</a:t>
             </a:r>
           </a:p>
         </p:txBody>
@@ -13045,7 +13996,995 @@
                 </a:solidFill>
                 <a:latin typeface="Microsoft JhengHei"/>
               </a:rPr>
-              <a:t>18 / 20</a:t>
+              <a:t>1 / 21</a:t>
+            </a:r>
+          </a:p>
+        </p:txBody>
+      </p:sp>
+      <p:sp>
+        <p:nvSpPr>
+          <p:cNvPr id="7" name="Oval 6"/>
+          <p:cNvSpPr/>
+          <p:nvPr/>
+        </p:nvSpPr>
+        <p:spPr>
+          <a:xfrm>
+            <a:off x="777240" y="1325880"/>
+            <a:ext cx="475488" cy="475488"/>
+          </a:xfrm>
+          <a:prstGeom prst="ellipse">
+            <a:avLst/>
+          </a:prstGeom>
+          <a:solidFill>
+            <a:srgbClr val="2E74B5"/>
+          </a:solidFill>
+          <a:ln>
+            <a:noFill/>
+          </a:ln>
+          <a:effectLst/>
+        </p:spPr>
+        <p:style>
+          <a:lnRef idx="1">
+            <a:schemeClr val="accent1"/>
+          </a:lnRef>
+          <a:fillRef idx="3">
+            <a:schemeClr val="accent1"/>
+          </a:fillRef>
+          <a:effectRef idx="2">
+            <a:schemeClr val="accent1"/>
+          </a:effectRef>
+          <a:fontRef idx="minor">
+            <a:schemeClr val="lt1"/>
+          </a:fontRef>
+        </p:style>
+        <p:txBody>
+          <a:bodyPr rtlCol="0" anchor="ctr" wrap="none"/>
+          <a:lstStyle/>
+          <a:p>
+            <a:pPr algn="ctr"/>
+            <a:r>
+              <a:rPr sz="1800" b="1" i="0">
+                <a:solidFill>
+                  <a:srgbClr val="FFFFFF"/>
+                </a:solidFill>
+                <a:latin typeface="Microsoft JhengHei"/>
+              </a:rPr>
+              <a:t>1</a:t>
+            </a:r>
+          </a:p>
+        </p:txBody>
+      </p:sp>
+      <p:sp>
+        <p:nvSpPr>
+          <p:cNvPr id="8" name="TextBox 7"/>
+          <p:cNvSpPr txBox="1"/>
+          <p:nvPr/>
+        </p:nvSpPr>
+        <p:spPr>
+          <a:xfrm>
+            <a:off x="1508760" y="1289304"/>
+            <a:ext cx="10058400" cy="566928"/>
+          </a:xfrm>
+          <a:prstGeom prst="rect">
+            <a:avLst/>
+          </a:prstGeom>
+          <a:noFill/>
+        </p:spPr>
+        <p:txBody>
+          <a:bodyPr wrap="square" anchor="ctr" lIns="25400" rIns="25400" tIns="25400" bIns="25400">
+            <a:spAutoFit/>
+          </a:bodyPr>
+          <a:lstStyle/>
+          <a:p>
+            <a:r>
+              <a:rPr sz="2000" b="1" i="0">
+                <a:solidFill>
+                  <a:srgbClr val="1F3864"/>
+                </a:solidFill>
+                <a:latin typeface="Microsoft JhengHei"/>
+              </a:rPr>
+              <a:t>研究背景與動機　</a:t>
+            </a:r>
+            <a:r>
+              <a:rPr sz="1400" b="0" i="0">
+                <a:solidFill>
+                  <a:srgbClr val="595959"/>
+                </a:solidFill>
+                <a:latin typeface="Microsoft JhengHei"/>
+              </a:rPr>
+              <a:t>　BMS、SOC 角色與兩個研究缺口</a:t>
+            </a:r>
+          </a:p>
+        </p:txBody>
+      </p:sp>
+      <p:sp>
+        <p:nvSpPr>
+          <p:cNvPr id="9" name="Oval 8"/>
+          <p:cNvSpPr/>
+          <p:nvPr/>
+        </p:nvSpPr>
+        <p:spPr>
+          <a:xfrm>
+            <a:off x="777240" y="1952243"/>
+            <a:ext cx="475488" cy="475488"/>
+          </a:xfrm>
+          <a:prstGeom prst="ellipse">
+            <a:avLst/>
+          </a:prstGeom>
+          <a:solidFill>
+            <a:srgbClr val="2E74B5"/>
+          </a:solidFill>
+          <a:ln>
+            <a:noFill/>
+          </a:ln>
+          <a:effectLst/>
+        </p:spPr>
+        <p:style>
+          <a:lnRef idx="1">
+            <a:schemeClr val="accent1"/>
+          </a:lnRef>
+          <a:fillRef idx="3">
+            <a:schemeClr val="accent1"/>
+          </a:fillRef>
+          <a:effectRef idx="2">
+            <a:schemeClr val="accent1"/>
+          </a:effectRef>
+          <a:fontRef idx="minor">
+            <a:schemeClr val="lt1"/>
+          </a:fontRef>
+        </p:style>
+        <p:txBody>
+          <a:bodyPr rtlCol="0" anchor="ctr" wrap="none"/>
+          <a:lstStyle/>
+          <a:p>
+            <a:pPr algn="ctr"/>
+            <a:r>
+              <a:rPr sz="1800" b="1" i="0">
+                <a:solidFill>
+                  <a:srgbClr val="FFFFFF"/>
+                </a:solidFill>
+                <a:latin typeface="Microsoft JhengHei"/>
+              </a:rPr>
+              <a:t>2</a:t>
+            </a:r>
+          </a:p>
+        </p:txBody>
+      </p:sp>
+      <p:sp>
+        <p:nvSpPr>
+          <p:cNvPr id="10" name="TextBox 9"/>
+          <p:cNvSpPr txBox="1"/>
+          <p:nvPr/>
+        </p:nvSpPr>
+        <p:spPr>
+          <a:xfrm>
+            <a:off x="1508760" y="1915667"/>
+            <a:ext cx="10058400" cy="566928"/>
+          </a:xfrm>
+          <a:prstGeom prst="rect">
+            <a:avLst/>
+          </a:prstGeom>
+          <a:noFill/>
+        </p:spPr>
+        <p:txBody>
+          <a:bodyPr wrap="square" anchor="ctr" lIns="25400" rIns="25400" tIns="25400" bIns="25400">
+            <a:spAutoFit/>
+          </a:bodyPr>
+          <a:lstStyle/>
+          <a:p>
+            <a:r>
+              <a:rPr sz="2000" b="1" i="0">
+                <a:solidFill>
+                  <a:srgbClr val="1F3864"/>
+                </a:solidFill>
+                <a:latin typeface="Microsoft JhengHei"/>
+              </a:rPr>
+              <a:t>研究目的與貢獻　</a:t>
+            </a:r>
+            <a:r>
+              <a:rPr sz="1400" b="0" i="0">
+                <a:solidFill>
+                  <a:srgbClr val="595959"/>
+                </a:solidFill>
+                <a:latin typeface="Microsoft JhengHei"/>
+              </a:rPr>
+              <a:t>　同電池・同協定・同 MCU 的公平比較</a:t>
+            </a:r>
+          </a:p>
+        </p:txBody>
+      </p:sp>
+      <p:sp>
+        <p:nvSpPr>
+          <p:cNvPr id="11" name="Oval 10"/>
+          <p:cNvSpPr/>
+          <p:nvPr/>
+        </p:nvSpPr>
+        <p:spPr>
+          <a:xfrm>
+            <a:off x="777240" y="2578608"/>
+            <a:ext cx="475488" cy="475488"/>
+          </a:xfrm>
+          <a:prstGeom prst="ellipse">
+            <a:avLst/>
+          </a:prstGeom>
+          <a:solidFill>
+            <a:srgbClr val="2E74B5"/>
+          </a:solidFill>
+          <a:ln>
+            <a:noFill/>
+          </a:ln>
+          <a:effectLst/>
+        </p:spPr>
+        <p:style>
+          <a:lnRef idx="1">
+            <a:schemeClr val="accent1"/>
+          </a:lnRef>
+          <a:fillRef idx="3">
+            <a:schemeClr val="accent1"/>
+          </a:fillRef>
+          <a:effectRef idx="2">
+            <a:schemeClr val="accent1"/>
+          </a:effectRef>
+          <a:fontRef idx="minor">
+            <a:schemeClr val="lt1"/>
+          </a:fontRef>
+        </p:style>
+        <p:txBody>
+          <a:bodyPr rtlCol="0" anchor="ctr" wrap="none"/>
+          <a:lstStyle/>
+          <a:p>
+            <a:pPr algn="ctr"/>
+            <a:r>
+              <a:rPr sz="1800" b="1" i="0">
+                <a:solidFill>
+                  <a:srgbClr val="FFFFFF"/>
+                </a:solidFill>
+                <a:latin typeface="Microsoft JhengHei"/>
+              </a:rPr>
+              <a:t>3</a:t>
+            </a:r>
+          </a:p>
+        </p:txBody>
+      </p:sp>
+      <p:sp>
+        <p:nvSpPr>
+          <p:cNvPr id="12" name="TextBox 11"/>
+          <p:cNvSpPr txBox="1"/>
+          <p:nvPr/>
+        </p:nvSpPr>
+        <p:spPr>
+          <a:xfrm>
+            <a:off x="1508760" y="2542032"/>
+            <a:ext cx="10058400" cy="566928"/>
+          </a:xfrm>
+          <a:prstGeom prst="rect">
+            <a:avLst/>
+          </a:prstGeom>
+          <a:noFill/>
+        </p:spPr>
+        <p:txBody>
+          <a:bodyPr wrap="square" anchor="ctr" lIns="25400" rIns="25400" tIns="25400" bIns="25400">
+            <a:spAutoFit/>
+          </a:bodyPr>
+          <a:lstStyle/>
+          <a:p>
+            <a:r>
+              <a:rPr sz="2000" b="1" i="0">
+                <a:solidFill>
+                  <a:srgbClr val="1F3864"/>
+                </a:solidFill>
+                <a:latin typeface="Microsoft JhengHei"/>
+              </a:rPr>
+              <a:t>文獻回顧　</a:t>
+            </a:r>
+            <a:r>
+              <a:rPr sz="1400" b="0" i="0">
+                <a:solidFill>
+                  <a:srgbClr val="595959"/>
+                </a:solidFill>
+                <a:latin typeface="Microsoft JhengHei"/>
+              </a:rPr>
+              <a:t>　等效電路模型與 SOC 方法分類</a:t>
+            </a:r>
+          </a:p>
+        </p:txBody>
+      </p:sp>
+      <p:sp>
+        <p:nvSpPr>
+          <p:cNvPr id="13" name="Oval 12"/>
+          <p:cNvSpPr/>
+          <p:nvPr/>
+        </p:nvSpPr>
+        <p:spPr>
+          <a:xfrm>
+            <a:off x="777240" y="3204972"/>
+            <a:ext cx="475488" cy="475488"/>
+          </a:xfrm>
+          <a:prstGeom prst="ellipse">
+            <a:avLst/>
+          </a:prstGeom>
+          <a:solidFill>
+            <a:srgbClr val="2E74B5"/>
+          </a:solidFill>
+          <a:ln>
+            <a:noFill/>
+          </a:ln>
+          <a:effectLst/>
+        </p:spPr>
+        <p:style>
+          <a:lnRef idx="1">
+            <a:schemeClr val="accent1"/>
+          </a:lnRef>
+          <a:fillRef idx="3">
+            <a:schemeClr val="accent1"/>
+          </a:fillRef>
+          <a:effectRef idx="2">
+            <a:schemeClr val="accent1"/>
+          </a:effectRef>
+          <a:fontRef idx="minor">
+            <a:schemeClr val="lt1"/>
+          </a:fontRef>
+        </p:style>
+        <p:txBody>
+          <a:bodyPr rtlCol="0" anchor="ctr" wrap="none"/>
+          <a:lstStyle/>
+          <a:p>
+            <a:pPr algn="ctr"/>
+            <a:r>
+              <a:rPr sz="1800" b="1" i="0">
+                <a:solidFill>
+                  <a:srgbClr val="FFFFFF"/>
+                </a:solidFill>
+                <a:latin typeface="Microsoft JhengHei"/>
+              </a:rPr>
+              <a:t>4</a:t>
+            </a:r>
+          </a:p>
+        </p:txBody>
+      </p:sp>
+      <p:sp>
+        <p:nvSpPr>
+          <p:cNvPr id="14" name="TextBox 13"/>
+          <p:cNvSpPr txBox="1"/>
+          <p:nvPr/>
+        </p:nvSpPr>
+        <p:spPr>
+          <a:xfrm>
+            <a:off x="1508760" y="3168396"/>
+            <a:ext cx="10058400" cy="566928"/>
+          </a:xfrm>
+          <a:prstGeom prst="rect">
+            <a:avLst/>
+          </a:prstGeom>
+          <a:noFill/>
+        </p:spPr>
+        <p:txBody>
+          <a:bodyPr wrap="square" anchor="ctr" lIns="25400" rIns="25400" tIns="25400" bIns="25400">
+            <a:spAutoFit/>
+          </a:bodyPr>
+          <a:lstStyle/>
+          <a:p>
+            <a:r>
+              <a:rPr sz="2000" b="1" i="0">
+                <a:solidFill>
+                  <a:srgbClr val="1F3864"/>
+                </a:solidFill>
+                <a:latin typeface="Microsoft JhengHei"/>
+              </a:rPr>
+              <a:t>測試平台與量測校正　</a:t>
+            </a:r>
+            <a:r>
+              <a:rPr sz="1400" b="0" i="0">
+                <a:solidFill>
+                  <a:srgbClr val="595959"/>
+                </a:solidFill>
+                <a:latin typeface="Microsoft JhengHei"/>
+              </a:rPr>
+              <a:t>　系統架構、韌體骨架、INA226 校正、測試協定</a:t>
+            </a:r>
+          </a:p>
+        </p:txBody>
+      </p:sp>
+      <p:sp>
+        <p:nvSpPr>
+          <p:cNvPr id="15" name="Oval 14"/>
+          <p:cNvSpPr/>
+          <p:nvPr/>
+        </p:nvSpPr>
+        <p:spPr>
+          <a:xfrm>
+            <a:off x="777240" y="3831335"/>
+            <a:ext cx="475488" cy="475488"/>
+          </a:xfrm>
+          <a:prstGeom prst="ellipse">
+            <a:avLst/>
+          </a:prstGeom>
+          <a:solidFill>
+            <a:srgbClr val="2E74B5"/>
+          </a:solidFill>
+          <a:ln>
+            <a:noFill/>
+          </a:ln>
+          <a:effectLst/>
+        </p:spPr>
+        <p:style>
+          <a:lnRef idx="1">
+            <a:schemeClr val="accent1"/>
+          </a:lnRef>
+          <a:fillRef idx="3">
+            <a:schemeClr val="accent1"/>
+          </a:fillRef>
+          <a:effectRef idx="2">
+            <a:schemeClr val="accent1"/>
+          </a:effectRef>
+          <a:fontRef idx="minor">
+            <a:schemeClr val="lt1"/>
+          </a:fontRef>
+        </p:style>
+        <p:txBody>
+          <a:bodyPr rtlCol="0" anchor="ctr" wrap="none"/>
+          <a:lstStyle/>
+          <a:p>
+            <a:pPr algn="ctr"/>
+            <a:r>
+              <a:rPr sz="1800" b="1" i="0">
+                <a:solidFill>
+                  <a:srgbClr val="FFFFFF"/>
+                </a:solidFill>
+                <a:latin typeface="Microsoft JhengHei"/>
+              </a:rPr>
+              <a:t>5</a:t>
+            </a:r>
+          </a:p>
+        </p:txBody>
+      </p:sp>
+      <p:sp>
+        <p:nvSpPr>
+          <p:cNvPr id="16" name="TextBox 15"/>
+          <p:cNvSpPr txBox="1"/>
+          <p:nvPr/>
+        </p:nvSpPr>
+        <p:spPr>
+          <a:xfrm>
+            <a:off x="1508760" y="3794759"/>
+            <a:ext cx="10058400" cy="566928"/>
+          </a:xfrm>
+          <a:prstGeom prst="rect">
+            <a:avLst/>
+          </a:prstGeom>
+          <a:noFill/>
+        </p:spPr>
+        <p:txBody>
+          <a:bodyPr wrap="square" anchor="ctr" lIns="25400" rIns="25400" tIns="25400" bIns="25400">
+            <a:spAutoFit/>
+          </a:bodyPr>
+          <a:lstStyle/>
+          <a:p>
+            <a:r>
+              <a:rPr sz="2000" b="1" i="0">
+                <a:solidFill>
+                  <a:srgbClr val="1F3864"/>
+                </a:solidFill>
+                <a:latin typeface="Microsoft JhengHei"/>
+              </a:rPr>
+              <a:t>三種 SOC 估測方法　</a:t>
+            </a:r>
+            <a:r>
+              <a:rPr sz="1400" b="0" i="0">
+                <a:solidFill>
+                  <a:srgbClr val="595959"/>
+                </a:solidFill>
+                <a:latin typeface="Microsoft JhengHei"/>
+              </a:rPr>
+              <a:t>　庫倫計數、EKF、動態阻抗 — 原理與實作</a:t>
+            </a:r>
+          </a:p>
+        </p:txBody>
+      </p:sp>
+      <p:sp>
+        <p:nvSpPr>
+          <p:cNvPr id="17" name="Oval 16"/>
+          <p:cNvSpPr/>
+          <p:nvPr/>
+        </p:nvSpPr>
+        <p:spPr>
+          <a:xfrm>
+            <a:off x="777240" y="4457700"/>
+            <a:ext cx="475488" cy="475488"/>
+          </a:xfrm>
+          <a:prstGeom prst="ellipse">
+            <a:avLst/>
+          </a:prstGeom>
+          <a:solidFill>
+            <a:srgbClr val="2E74B5"/>
+          </a:solidFill>
+          <a:ln>
+            <a:noFill/>
+          </a:ln>
+          <a:effectLst/>
+        </p:spPr>
+        <p:style>
+          <a:lnRef idx="1">
+            <a:schemeClr val="accent1"/>
+          </a:lnRef>
+          <a:fillRef idx="3">
+            <a:schemeClr val="accent1"/>
+          </a:fillRef>
+          <a:effectRef idx="2">
+            <a:schemeClr val="accent1"/>
+          </a:effectRef>
+          <a:fontRef idx="minor">
+            <a:schemeClr val="lt1"/>
+          </a:fontRef>
+        </p:style>
+        <p:txBody>
+          <a:bodyPr rtlCol="0" anchor="ctr" wrap="none"/>
+          <a:lstStyle/>
+          <a:p>
+            <a:pPr algn="ctr"/>
+            <a:r>
+              <a:rPr sz="1800" b="1" i="0">
+                <a:solidFill>
+                  <a:srgbClr val="FFFFFF"/>
+                </a:solidFill>
+                <a:latin typeface="Microsoft JhengHei"/>
+              </a:rPr>
+              <a:t>6</a:t>
+            </a:r>
+          </a:p>
+        </p:txBody>
+      </p:sp>
+      <p:sp>
+        <p:nvSpPr>
+          <p:cNvPr id="18" name="TextBox 17"/>
+          <p:cNvSpPr txBox="1"/>
+          <p:nvPr/>
+        </p:nvSpPr>
+        <p:spPr>
+          <a:xfrm>
+            <a:off x="1508760" y="4421124"/>
+            <a:ext cx="10058400" cy="566928"/>
+          </a:xfrm>
+          <a:prstGeom prst="rect">
+            <a:avLst/>
+          </a:prstGeom>
+          <a:noFill/>
+        </p:spPr>
+        <p:txBody>
+          <a:bodyPr wrap="square" anchor="ctr" lIns="25400" rIns="25400" tIns="25400" bIns="25400">
+            <a:spAutoFit/>
+          </a:bodyPr>
+          <a:lstStyle/>
+          <a:p>
+            <a:r>
+              <a:rPr sz="2000" b="1" i="0">
+                <a:solidFill>
+                  <a:srgbClr val="1F3864"/>
+                </a:solidFill>
+                <a:latin typeface="Microsoft JhengHei"/>
+              </a:rPr>
+              <a:t>實測結果與方法比較　</a:t>
+            </a:r>
+            <a:r>
+              <a:rPr sz="1400" b="0" i="0">
+                <a:solidFill>
+                  <a:srgbClr val="595959"/>
+                </a:solidFill>
+                <a:latin typeface="Microsoft JhengHei"/>
+              </a:rPr>
+              <a:t>　rate-capability、動態阻抗擬合、精度/資源比較</a:t>
+            </a:r>
+          </a:p>
+        </p:txBody>
+      </p:sp>
+      <p:sp>
+        <p:nvSpPr>
+          <p:cNvPr id="19" name="Oval 18"/>
+          <p:cNvSpPr/>
+          <p:nvPr/>
+        </p:nvSpPr>
+        <p:spPr>
+          <a:xfrm>
+            <a:off x="777240" y="5084064"/>
+            <a:ext cx="475488" cy="475488"/>
+          </a:xfrm>
+          <a:prstGeom prst="ellipse">
+            <a:avLst/>
+          </a:prstGeom>
+          <a:solidFill>
+            <a:srgbClr val="2E74B5"/>
+          </a:solidFill>
+          <a:ln>
+            <a:noFill/>
+          </a:ln>
+          <a:effectLst/>
+        </p:spPr>
+        <p:style>
+          <a:lnRef idx="1">
+            <a:schemeClr val="accent1"/>
+          </a:lnRef>
+          <a:fillRef idx="3">
+            <a:schemeClr val="accent1"/>
+          </a:fillRef>
+          <a:effectRef idx="2">
+            <a:schemeClr val="accent1"/>
+          </a:effectRef>
+          <a:fontRef idx="minor">
+            <a:schemeClr val="lt1"/>
+          </a:fontRef>
+        </p:style>
+        <p:txBody>
+          <a:bodyPr rtlCol="0" anchor="ctr" wrap="none"/>
+          <a:lstStyle/>
+          <a:p>
+            <a:pPr algn="ctr"/>
+            <a:r>
+              <a:rPr sz="1800" b="1" i="0">
+                <a:solidFill>
+                  <a:srgbClr val="FFFFFF"/>
+                </a:solidFill>
+                <a:latin typeface="Microsoft JhengHei"/>
+              </a:rPr>
+              <a:t>7</a:t>
+            </a:r>
+          </a:p>
+        </p:txBody>
+      </p:sp>
+      <p:sp>
+        <p:nvSpPr>
+          <p:cNvPr id="20" name="TextBox 19"/>
+          <p:cNvSpPr txBox="1"/>
+          <p:nvPr/>
+        </p:nvSpPr>
+        <p:spPr>
+          <a:xfrm>
+            <a:off x="1508760" y="5047488"/>
+            <a:ext cx="10058400" cy="566928"/>
+          </a:xfrm>
+          <a:prstGeom prst="rect">
+            <a:avLst/>
+          </a:prstGeom>
+          <a:noFill/>
+        </p:spPr>
+        <p:txBody>
+          <a:bodyPr wrap="square" anchor="ctr" lIns="25400" rIns="25400" tIns="25400" bIns="25400">
+            <a:spAutoFit/>
+          </a:bodyPr>
+          <a:lstStyle/>
+          <a:p>
+            <a:r>
+              <a:rPr sz="2000" b="1" i="0">
+                <a:solidFill>
+                  <a:srgbClr val="1F3864"/>
+                </a:solidFill>
+                <a:latin typeface="Microsoft JhengHei"/>
+              </a:rPr>
+              <a:t>系統整合與長期再現性　</a:t>
+            </a:r>
+            <a:r>
+              <a:rPr sz="1400" b="0" i="0">
+                <a:solidFill>
+                  <a:srgbClr val="595959"/>
+                </a:solidFill>
+                <a:latin typeface="Microsoft JhengHei"/>
+              </a:rPr>
+              <a:t>　三法並行、老化與噪聲分離</a:t>
+            </a:r>
+          </a:p>
+        </p:txBody>
+      </p:sp>
+      <p:sp>
+        <p:nvSpPr>
+          <p:cNvPr id="21" name="Oval 20"/>
+          <p:cNvSpPr/>
+          <p:nvPr/>
+        </p:nvSpPr>
+        <p:spPr>
+          <a:xfrm>
+            <a:off x="777240" y="5710428"/>
+            <a:ext cx="475488" cy="475488"/>
+          </a:xfrm>
+          <a:prstGeom prst="ellipse">
+            <a:avLst/>
+          </a:prstGeom>
+          <a:solidFill>
+            <a:srgbClr val="2E74B5"/>
+          </a:solidFill>
+          <a:ln>
+            <a:noFill/>
+          </a:ln>
+          <a:effectLst/>
+        </p:spPr>
+        <p:style>
+          <a:lnRef idx="1">
+            <a:schemeClr val="accent1"/>
+          </a:lnRef>
+          <a:fillRef idx="3">
+            <a:schemeClr val="accent1"/>
+          </a:fillRef>
+          <a:effectRef idx="2">
+            <a:schemeClr val="accent1"/>
+          </a:effectRef>
+          <a:fontRef idx="minor">
+            <a:schemeClr val="lt1"/>
+          </a:fontRef>
+        </p:style>
+        <p:txBody>
+          <a:bodyPr rtlCol="0" anchor="ctr" wrap="none"/>
+          <a:lstStyle/>
+          <a:p>
+            <a:pPr algn="ctr"/>
+            <a:r>
+              <a:rPr sz="1800" b="1" i="0">
+                <a:solidFill>
+                  <a:srgbClr val="FFFFFF"/>
+                </a:solidFill>
+                <a:latin typeface="Microsoft JhengHei"/>
+              </a:rPr>
+              <a:t>8</a:t>
+            </a:r>
+          </a:p>
+        </p:txBody>
+      </p:sp>
+      <p:sp>
+        <p:nvSpPr>
+          <p:cNvPr id="22" name="TextBox 21"/>
+          <p:cNvSpPr txBox="1"/>
+          <p:nvPr/>
+        </p:nvSpPr>
+        <p:spPr>
+          <a:xfrm>
+            <a:off x="1508760" y="5673852"/>
+            <a:ext cx="10058400" cy="566928"/>
+          </a:xfrm>
+          <a:prstGeom prst="rect">
+            <a:avLst/>
+          </a:prstGeom>
+          <a:noFill/>
+        </p:spPr>
+        <p:txBody>
+          <a:bodyPr wrap="square" anchor="ctr" lIns="25400" rIns="25400" tIns="25400" bIns="25400">
+            <a:spAutoFit/>
+          </a:bodyPr>
+          <a:lstStyle/>
+          <a:p>
+            <a:r>
+              <a:rPr sz="2000" b="1" i="0">
+                <a:solidFill>
+                  <a:srgbClr val="1F3864"/>
+                </a:solidFill>
+                <a:latin typeface="Microsoft JhengHei"/>
+              </a:rPr>
+              <a:t>結論、決策表與未來工作　</a:t>
+            </a:r>
+            <a:r>
+              <a:rPr sz="1400" b="0" i="0">
+                <a:solidFill>
+                  <a:srgbClr val="595959"/>
+                </a:solidFill>
+                <a:latin typeface="Microsoft JhengHei"/>
+              </a:rPr>
+              <a:t>　方法選用建議、SOH 延伸</a:t>
+            </a:r>
+          </a:p>
+        </p:txBody>
+      </p:sp>
+    </p:spTree>
+  </p:cSld>
+  <p:clrMapOvr>
+    <a:masterClrMapping/>
+  </p:clrMapOvr>
+</p:sld>
+</file>
+
+<file path=ppt/slides/slide20.xml><?xml version="1.0" encoding="utf-8"?>
+<p:sld xmlns:a="http://schemas.openxmlformats.org/drawingml/2006/main" xmlns:p="http://schemas.openxmlformats.org/presentationml/2006/main" xmlns:r="http://schemas.openxmlformats.org/officeDocument/2006/relationships">
+  <p:cSld>
+    <p:spTree>
+      <p:nvGrpSpPr>
+        <p:cNvPr id="1" name=""/>
+        <p:cNvGrpSpPr/>
+        <p:nvPr/>
+      </p:nvGrpSpPr>
+      <p:grpSpPr/>
+      <p:sp>
+        <p:nvSpPr>
+          <p:cNvPr id="2" name="Rectangle 1"/>
+          <p:cNvSpPr/>
+          <p:nvPr/>
+        </p:nvSpPr>
+        <p:spPr>
+          <a:xfrm>
+            <a:off x="0" y="0"/>
+            <a:ext cx="12191695" cy="932688"/>
+          </a:xfrm>
+          <a:prstGeom prst="rect">
+            <a:avLst/>
+          </a:prstGeom>
+          <a:solidFill>
+            <a:srgbClr val="1F3864"/>
+          </a:solidFill>
+          <a:ln>
+            <a:noFill/>
+          </a:ln>
+          <a:effectLst/>
+        </p:spPr>
+        <p:style>
+          <a:lnRef idx="1">
+            <a:schemeClr val="accent1"/>
+          </a:lnRef>
+          <a:fillRef idx="3">
+            <a:schemeClr val="accent1"/>
+          </a:fillRef>
+          <a:effectRef idx="2">
+            <a:schemeClr val="accent1"/>
+          </a:effectRef>
+          <a:fontRef idx="minor">
+            <a:schemeClr val="lt1"/>
+          </a:fontRef>
+        </p:style>
+        <p:txBody>
+          <a:bodyPr rtlCol="0" anchor="ctr"/>
+          <a:lstStyle/>
+          <a:p>
+            <a:pPr algn="ctr"/>
+          </a:p>
+        </p:txBody>
+      </p:sp>
+      <p:sp>
+        <p:nvSpPr>
+          <p:cNvPr id="3" name="Rectangle 2"/>
+          <p:cNvSpPr/>
+          <p:nvPr/>
+        </p:nvSpPr>
+        <p:spPr>
+          <a:xfrm>
+            <a:off x="0" y="932688"/>
+            <a:ext cx="12191695" cy="64008"/>
+          </a:xfrm>
+          <a:prstGeom prst="rect">
+            <a:avLst/>
+          </a:prstGeom>
+          <a:solidFill>
+            <a:srgbClr val="C08A2B"/>
+          </a:solidFill>
+          <a:ln>
+            <a:noFill/>
+          </a:ln>
+          <a:effectLst/>
+        </p:spPr>
+        <p:style>
+          <a:lnRef idx="1">
+            <a:schemeClr val="accent1"/>
+          </a:lnRef>
+          <a:fillRef idx="3">
+            <a:schemeClr val="accent1"/>
+          </a:fillRef>
+          <a:effectRef idx="2">
+            <a:schemeClr val="accent1"/>
+          </a:effectRef>
+          <a:fontRef idx="minor">
+            <a:schemeClr val="lt1"/>
+          </a:fontRef>
+        </p:style>
+        <p:txBody>
+          <a:bodyPr rtlCol="0" anchor="ctr"/>
+          <a:lstStyle/>
+          <a:p>
+            <a:pPr algn="ctr"/>
+          </a:p>
+        </p:txBody>
+      </p:sp>
+      <p:sp>
+        <p:nvSpPr>
+          <p:cNvPr id="4" name="TextBox 3"/>
+          <p:cNvSpPr txBox="1"/>
+          <p:nvPr/>
+        </p:nvSpPr>
+        <p:spPr>
+          <a:xfrm>
+            <a:off x="502920" y="109728"/>
+            <a:ext cx="10515600" cy="749808"/>
+          </a:xfrm>
+          <a:prstGeom prst="rect">
+            <a:avLst/>
+          </a:prstGeom>
+          <a:noFill/>
+        </p:spPr>
+        <p:txBody>
+          <a:bodyPr wrap="square" anchor="ctr" lIns="25400" rIns="25400" tIns="25400" bIns="25400">
+            <a:spAutoFit/>
+          </a:bodyPr>
+          <a:lstStyle/>
+          <a:p>
+            <a:r>
+              <a:rPr sz="2700" b="1" i="0">
+                <a:solidFill>
+                  <a:srgbClr val="FFFFFF"/>
+                </a:solidFill>
+                <a:latin typeface="Microsoft JhengHei"/>
+              </a:rPr>
+              <a:t>八、結論：什麼情況該用哪個方法</a:t>
+            </a:r>
+          </a:p>
+          <a:p>
+            <a:r>
+              <a:rPr sz="1300" b="0" i="0">
+                <a:solidFill>
+                  <a:srgbClr val="DEEBF7"/>
+                </a:solidFill>
+                <a:latin typeface="Microsoft JhengHei"/>
+              </a:rPr>
+              <a:t>一句話：在小晶片上，「要多準」跟「要花多少資源」怎麼取捨</a:t>
+            </a:r>
+          </a:p>
+        </p:txBody>
+      </p:sp>
+      <p:sp>
+        <p:nvSpPr>
+          <p:cNvPr id="5" name="TextBox 4"/>
+          <p:cNvSpPr txBox="1"/>
+          <p:nvPr/>
+        </p:nvSpPr>
+        <p:spPr>
+          <a:xfrm>
+            <a:off x="365760" y="6437376"/>
+            <a:ext cx="8229600" cy="365760"/>
+          </a:xfrm>
+          <a:prstGeom prst="rect">
+            <a:avLst/>
+          </a:prstGeom>
+          <a:noFill/>
+        </p:spPr>
+        <p:txBody>
+          <a:bodyPr wrap="square" anchor="ctr" lIns="25400" rIns="25400" tIns="25400" bIns="25400">
+            <a:spAutoFit/>
+          </a:bodyPr>
+          <a:lstStyle/>
+          <a:p>
+            <a:r>
+              <a:rPr sz="1000" b="0" i="0">
+                <a:solidFill>
+                  <a:srgbClr val="595959"/>
+                </a:solidFill>
+                <a:latin typeface="Microsoft JhengHei"/>
+              </a:rPr>
+              <a:t>鋰電池 SOC 估測方法之比較與嵌入式實作　|　結論</a:t>
+            </a:r>
+          </a:p>
+        </p:txBody>
+      </p:sp>
+      <p:sp>
+        <p:nvSpPr>
+          <p:cNvPr id="6" name="TextBox 5"/>
+          <p:cNvSpPr txBox="1"/>
+          <p:nvPr/>
+        </p:nvSpPr>
+        <p:spPr>
+          <a:xfrm>
+            <a:off x="11155680" y="6437376"/>
+            <a:ext cx="822960" cy="365760"/>
+          </a:xfrm>
+          <a:prstGeom prst="rect">
+            <a:avLst/>
+          </a:prstGeom>
+          <a:noFill/>
+        </p:spPr>
+        <p:txBody>
+          <a:bodyPr wrap="square" anchor="ctr" lIns="25400" rIns="25400" tIns="25400" bIns="25400">
+            <a:spAutoFit/>
+          </a:bodyPr>
+          <a:lstStyle/>
+          <a:p>
+            <a:pPr algn="r"/>
+            <a:r>
+              <a:rPr sz="1000" b="0" i="0">
+                <a:solidFill>
+                  <a:srgbClr val="595959"/>
+                </a:solidFill>
+                <a:latin typeface="Microsoft JhengHei"/>
+              </a:rPr>
+              <a:t>19 / 21</a:t>
             </a:r>
           </a:p>
         </p:txBody>
@@ -13088,7 +15027,7 @@
                           </a:solidFill>
                           <a:latin typeface="Microsoft JhengHei"/>
                         </a:rPr>
-                        <a:t>應用約束情境</a:t>
+                        <a:t>產品是什麼情況</a:t>
                       </a:r>
                     </a:p>
                   </a:txBody>
@@ -13111,7 +15050,7 @@
                           </a:solidFill>
                           <a:latin typeface="Microsoft JhengHei"/>
                         </a:rPr>
-                        <a:t>首選方法</a:t>
+                        <a:t>建議用哪個</a:t>
                       </a:r>
                     </a:p>
                   </a:txBody>
@@ -13134,7 +15073,7 @@
                           </a:solidFill>
                           <a:latin typeface="Microsoft JhengHei"/>
                         </a:rPr>
-                        <a:t>理由（實測依據）</a:t>
+                        <a:t>為什麼（都有實測）</a:t>
                       </a:r>
                     </a:p>
                   </a:txBody>
@@ -13157,7 +15096,7 @@
                           </a:solidFill>
                           <a:latin typeface="Microsoft JhengHei"/>
                         </a:rPr>
-                        <a:t>主要代價（實測依據）</a:t>
+                        <a:t>要付出的代價</a:t>
                       </a:r>
                     </a:p>
                   </a:txBody>
@@ -13182,7 +15121,7 @@
                           </a:solidFill>
                           <a:latin typeface="Microsoft JhengHei"/>
                         </a:rPr>
-                        <a:t>極低成本/算力（8-bit、無 FPU、Flash&lt;8 KB）</a:t>
+                        <a:t>晶片很陽春、要省成本（8 位元、無浮點運算、記憶體小）</a:t>
                       </a:r>
                     </a:p>
                   </a:txBody>
@@ -13205,7 +15144,7 @@
                           </a:solidFill>
                           <a:latin typeface="Microsoft JhengHei"/>
                         </a:rPr>
-                        <a:t>庫倫 + 充飽自動重錨</a:t>
+                        <a:t>庫倫計數＋充飽自動歸零</a:t>
                       </a:r>
                     </a:p>
                   </a:txBody>
@@ -13228,7 +15167,7 @@
                           </a:solidFill>
                           <a:latin typeface="Microsoft JhengHei"/>
                         </a:rPr>
-                        <a:t>資源下界 +1.9 KB／305 cyc；重錨 4/4 消除初值偏移</a:t>
+                        <a:t>最省資源；充飽時自動抓回 100%（整輪 4 次全中），開機猜錯也救得回來</a:t>
                       </a:r>
                     </a:p>
                   </a:txBody>
@@ -13251,7 +15190,7 @@
                           </a:solidFill>
                           <a:latin typeface="Microsoft JhengHei"/>
                         </a:rPr>
-                        <a:t>無自我修正；精度上限由電流刻度定（±2%）</a:t>
+                        <a:t>自己不會修正；能多準由電流量測決定（約 ±2%）</a:t>
                       </a:r>
                     </a:p>
                   </a:txBody>
@@ -13276,7 +15215,7 @@
                           </a:solidFill>
                           <a:latin typeface="Microsoft JhengHei"/>
                         </a:rPr>
-                        <a:t>中階、需自初值恢復、長期免校正</a:t>
+                        <a:t>中階晶片；要能從開機錯誤自己回正、長期免校正</a:t>
                       </a:r>
                     </a:p>
                   </a:txBody>
@@ -13299,7 +15238,7 @@
                           </a:solidFill>
                           <a:latin typeface="Microsoft JhengHei"/>
                         </a:rPr>
-                        <a:t>EKF（一階 RC）</a:t>
+                        <a:t>EKF（卡爾曼濾波）</a:t>
                       </a:r>
                     </a:p>
                   </a:txBody>
@@ -13322,7 +15261,7 @@
                           </a:solidFill>
                           <a:latin typeface="Microsoft JhengHei"/>
                         </a:rPr>
-                        <a:t>全倍率最佳 0.22–0.90%；單步收斂；即時性佔 0.024%</a:t>
+                        <a:t>四種放電都最準（都在 1% 內）；開機猜錯一步就拉回；只佔算力萬分之 2</a:t>
                       </a:r>
                     </a:p>
                   </a:txBody>
@@ -13345,7 +15284,7 @@
                           </a:solidFill>
                           <a:latin typeface="Microsoft JhengHei"/>
                         </a:rPr>
-                        <a:t>需 GITT/OCV 表；Flash 最大 +2.3 KB；參數須同域</a:t>
+                        <a:t>要先建一張電壓對照表；最吃記憶體（+2.3 KB）；參數要跟實機同一量測點</a:t>
                       </a:r>
                     </a:p>
                   </a:txBody>
@@ -13370,7 +15309,7 @@
                           </a:solidFill>
                           <a:latin typeface="Microsoft JhengHei"/>
                         </a:rPr>
-                        <a:t>工作中即時、無靜置、成本敏感</a:t>
+                        <a:t>電池在工作中、沒空靜置、又想省成本</a:t>
                       </a:r>
                     </a:p>
                   </a:txBody>
@@ -13393,7 +15332,7 @@
                           </a:solidFill>
                           <a:latin typeface="Microsoft JhengHei"/>
                         </a:rPr>
-                        <a:t>動態阻抗 + 庫倫內插</a:t>
+                        <a:t>動態阻抗＋庫倫補內插</a:t>
                       </a:r>
                     </a:p>
                   </a:txBody>
@@ -13416,7 +15355,7 @@
                           </a:solidFill>
                           <a:latin typeface="Microsoft JhengHei"/>
                         </a:rPr>
-                        <a:t>無須初值/靜置、首事件 ≤60 s；建表成本最低</a:t>
+                        <a:t>不用開機值、不用靜置，一分鐘內就有第一個估計；建表最省事</a:t>
                       </a:r>
                     </a:p>
                   </a:txBody>
@@ -13439,7 +15378,7 @@
                           </a:solidFill>
                           <a:latin typeface="Microsoft JhengHei"/>
                         </a:rPr>
-                        <a:t>線上單獨反推不可行 23–31%；僅低 SOC 粗校正</a:t>
+                        <a:t>單獨線上用會亂跳（誤差 23–31%），只能在低電量端做粗略校正</a:t>
                       </a:r>
                     </a:p>
                   </a:txBody>
@@ -13464,7 +15403,7 @@
                           </a:solidFill>
                           <a:latin typeface="Microsoft JhengHei"/>
                         </a:rPr>
-                        <a:t>高可靠、資源充裕、追求最佳整體</a:t>
+                        <a:t>要求高可靠、資源夠、想要整體最好</a:t>
                       </a:r>
                     </a:p>
                   </a:txBody>
@@ -13487,7 +15426,7 @@
                           </a:solidFill>
                           <a:latin typeface="Microsoft JhengHei"/>
                         </a:rPr>
-                        <a:t>三法混合</a:t>
+                        <a:t>三個方法一起用</a:t>
                       </a:r>
                     </a:p>
                   </a:txBody>
@@ -13510,7 +15449,7 @@
                           </a:solidFill>
                           <a:latin typeface="Microsoft JhengHei"/>
                         </a:rPr>
-                        <a:t>互補；並行峰值僅佔每秒預算 0.034%</a:t>
+                        <a:t>彼此補位；三個同時跑也只佔算力萬分之 3.4</a:t>
                       </a:r>
                     </a:p>
                   </a:txBody>
@@ -13533,7 +15472,7 @@
                           </a:solidFill>
                           <a:latin typeface="Microsoft JhengHei"/>
                         </a:rPr>
-                        <a:t>整合複雜度最高；Flash +4.9 KB（RAM 可加 +112 B）</a:t>
+                        <a:t>整合最複雜；多花約 4.9 KB 記憶體</a:t>
                       </a:r>
                     </a:p>
                   </a:txBody>
@@ -13578,7 +15517,7 @@
                 </a:solidFill>
                 <a:latin typeface="Microsoft JhengHei"/>
               </a:rPr>
-              <a:t>表 6-1　SOC 方法選用決策表（全研究實測結論版；各欄數值均出自同硬體實測）</a:t>
+              <a:t>表 6-1　什麼情況該用哪個方法（每一格的數字都出自同一顆晶片的實測）</a:t>
             </a:r>
           </a:p>
         </p:txBody>
@@ -13705,7 +15644,7 @@
                 </a:solidFill>
                 <a:latin typeface="Microsoft JhengHei"/>
               </a:rPr>
-              <a:t>兩個結論</a:t>
+              <a:t>兩句話總結</a:t>
             </a:r>
           </a:p>
           <a:p>
@@ -13721,7 +15660,7 @@
                 </a:solidFill>
                 <a:latin typeface="Microsoft JhengHei"/>
               </a:rPr>
-              <a:t>• 結論一：不存在單一最優方法 — 最優選擇取決於目標硬體資源約束與應用需求</a:t>
+              <a:t>• 結論一：沒有哪個方法「永遠最好」——選哪個要看你的晶片有多少資源、產品需要什麼</a:t>
             </a:r>
           </a:p>
           <a:p>
@@ -13737,7 +15676,7 @@
                 </a:solidFill>
                 <a:latin typeface="Microsoft JhengHei"/>
               </a:rPr>
-              <a:t>• 結論二（本研究核心）：演算法的精度上限往往不由演算法決定 — 量測鏈刻度、參數辨識域與部署域的一致性，其誤差貢獻數倍於演算法彼此差距</a:t>
+              <a:t>• 結論二（本研究最想講的）：一個方法準不準，常常不是演算法本身決定的——真正關鍵是「量測準不準」和「調參數時的環境跟實機是不是同一個」，這些造成的誤差比三個演算法彼此的差距還大好幾倍</a:t>
             </a:r>
           </a:p>
         </p:txBody>
@@ -13750,7 +15689,7 @@
 </p:sld>
 </file>
 
-<file path=ppt/slides/slide2.xml><?xml version="1.0" encoding="utf-8"?>
+<file path=ppt/slides/slide21.xml><?xml version="1.0" encoding="utf-8"?>
 <p:sld xmlns:a="http://schemas.openxmlformats.org/drawingml/2006/main" xmlns:p="http://schemas.openxmlformats.org/presentationml/2006/main" xmlns:r="http://schemas.openxmlformats.org/officeDocument/2006/relationships">
   <p:cSld>
     <p:spTree>
@@ -13877,7 +15816,7 @@
                 </a:solidFill>
                 <a:latin typeface="Microsoft JhengHei"/>
               </a:rPr>
-              <a:t>簡報大綱</a:t>
+              <a:t>八、研究限制與未來工作</a:t>
             </a:r>
           </a:p>
         </p:txBody>
@@ -13911,7 +15850,7 @@
                 </a:solidFill>
                 <a:latin typeface="Microsoft JhengHei"/>
               </a:rPr>
-              <a:t>鋰電池 SOC 估測方法之比較與嵌入式實作　|　簡報大綱</a:t>
+              <a:t>鋰電池 SOC 估測方法之比較與嵌入式實作　|　未來工作</a:t>
             </a:r>
           </a:p>
         </p:txBody>
@@ -13946,984 +15885,7 @@
                 </a:solidFill>
                 <a:latin typeface="Microsoft JhengHei"/>
               </a:rPr>
-              <a:t>1 / 20</a:t>
-            </a:r>
-          </a:p>
-        </p:txBody>
-      </p:sp>
-      <p:sp>
-        <p:nvSpPr>
-          <p:cNvPr id="7" name="Oval 6"/>
-          <p:cNvSpPr/>
-          <p:nvPr/>
-        </p:nvSpPr>
-        <p:spPr>
-          <a:xfrm>
-            <a:off x="777240" y="1325880"/>
-            <a:ext cx="475488" cy="475488"/>
-          </a:xfrm>
-          <a:prstGeom prst="ellipse">
-            <a:avLst/>
-          </a:prstGeom>
-          <a:solidFill>
-            <a:srgbClr val="2E74B5"/>
-          </a:solidFill>
-          <a:ln>
-            <a:noFill/>
-          </a:ln>
-          <a:effectLst/>
-        </p:spPr>
-        <p:style>
-          <a:lnRef idx="1">
-            <a:schemeClr val="accent1"/>
-          </a:lnRef>
-          <a:fillRef idx="3">
-            <a:schemeClr val="accent1"/>
-          </a:fillRef>
-          <a:effectRef idx="2">
-            <a:schemeClr val="accent1"/>
-          </a:effectRef>
-          <a:fontRef idx="minor">
-            <a:schemeClr val="lt1"/>
-          </a:fontRef>
-        </p:style>
-        <p:txBody>
-          <a:bodyPr rtlCol="0" anchor="ctr" wrap="none"/>
-          <a:lstStyle/>
-          <a:p>
-            <a:pPr algn="ctr"/>
-            <a:r>
-              <a:rPr sz="1800" b="1" i="0">
-                <a:solidFill>
-                  <a:srgbClr val="FFFFFF"/>
-                </a:solidFill>
-                <a:latin typeface="Microsoft JhengHei"/>
-              </a:rPr>
-              <a:t>1</a:t>
-            </a:r>
-          </a:p>
-        </p:txBody>
-      </p:sp>
-      <p:sp>
-        <p:nvSpPr>
-          <p:cNvPr id="8" name="TextBox 7"/>
-          <p:cNvSpPr txBox="1"/>
-          <p:nvPr/>
-        </p:nvSpPr>
-        <p:spPr>
-          <a:xfrm>
-            <a:off x="1508760" y="1289304"/>
-            <a:ext cx="10058400" cy="566928"/>
-          </a:xfrm>
-          <a:prstGeom prst="rect">
-            <a:avLst/>
-          </a:prstGeom>
-          <a:noFill/>
-        </p:spPr>
-        <p:txBody>
-          <a:bodyPr wrap="square" anchor="ctr" lIns="25400" rIns="25400" tIns="25400" bIns="25400">
-            <a:spAutoFit/>
-          </a:bodyPr>
-          <a:lstStyle/>
-          <a:p>
-            <a:r>
-              <a:rPr sz="2000" b="1" i="0">
-                <a:solidFill>
-                  <a:srgbClr val="1F3864"/>
-                </a:solidFill>
-                <a:latin typeface="Microsoft JhengHei"/>
-              </a:rPr>
-              <a:t>研究背景與動機　</a:t>
-            </a:r>
-            <a:r>
-              <a:rPr sz="1400" b="0" i="0">
-                <a:solidFill>
-                  <a:srgbClr val="595959"/>
-                </a:solidFill>
-                <a:latin typeface="Microsoft JhengHei"/>
-              </a:rPr>
-              <a:t>　BMS、SOC 角色與兩個研究缺口</a:t>
-            </a:r>
-          </a:p>
-        </p:txBody>
-      </p:sp>
-      <p:sp>
-        <p:nvSpPr>
-          <p:cNvPr id="9" name="Oval 8"/>
-          <p:cNvSpPr/>
-          <p:nvPr/>
-        </p:nvSpPr>
-        <p:spPr>
-          <a:xfrm>
-            <a:off x="777240" y="1952243"/>
-            <a:ext cx="475488" cy="475488"/>
-          </a:xfrm>
-          <a:prstGeom prst="ellipse">
-            <a:avLst/>
-          </a:prstGeom>
-          <a:solidFill>
-            <a:srgbClr val="2E74B5"/>
-          </a:solidFill>
-          <a:ln>
-            <a:noFill/>
-          </a:ln>
-          <a:effectLst/>
-        </p:spPr>
-        <p:style>
-          <a:lnRef idx="1">
-            <a:schemeClr val="accent1"/>
-          </a:lnRef>
-          <a:fillRef idx="3">
-            <a:schemeClr val="accent1"/>
-          </a:fillRef>
-          <a:effectRef idx="2">
-            <a:schemeClr val="accent1"/>
-          </a:effectRef>
-          <a:fontRef idx="minor">
-            <a:schemeClr val="lt1"/>
-          </a:fontRef>
-        </p:style>
-        <p:txBody>
-          <a:bodyPr rtlCol="0" anchor="ctr" wrap="none"/>
-          <a:lstStyle/>
-          <a:p>
-            <a:pPr algn="ctr"/>
-            <a:r>
-              <a:rPr sz="1800" b="1" i="0">
-                <a:solidFill>
-                  <a:srgbClr val="FFFFFF"/>
-                </a:solidFill>
-                <a:latin typeface="Microsoft JhengHei"/>
-              </a:rPr>
-              <a:t>2</a:t>
-            </a:r>
-          </a:p>
-        </p:txBody>
-      </p:sp>
-      <p:sp>
-        <p:nvSpPr>
-          <p:cNvPr id="10" name="TextBox 9"/>
-          <p:cNvSpPr txBox="1"/>
-          <p:nvPr/>
-        </p:nvSpPr>
-        <p:spPr>
-          <a:xfrm>
-            <a:off x="1508760" y="1915667"/>
-            <a:ext cx="10058400" cy="566928"/>
-          </a:xfrm>
-          <a:prstGeom prst="rect">
-            <a:avLst/>
-          </a:prstGeom>
-          <a:noFill/>
-        </p:spPr>
-        <p:txBody>
-          <a:bodyPr wrap="square" anchor="ctr" lIns="25400" rIns="25400" tIns="25400" bIns="25400">
-            <a:spAutoFit/>
-          </a:bodyPr>
-          <a:lstStyle/>
-          <a:p>
-            <a:r>
-              <a:rPr sz="2000" b="1" i="0">
-                <a:solidFill>
-                  <a:srgbClr val="1F3864"/>
-                </a:solidFill>
-                <a:latin typeface="Microsoft JhengHei"/>
-              </a:rPr>
-              <a:t>研究目的與貢獻　</a:t>
-            </a:r>
-            <a:r>
-              <a:rPr sz="1400" b="0" i="0">
-                <a:solidFill>
-                  <a:srgbClr val="595959"/>
-                </a:solidFill>
-                <a:latin typeface="Microsoft JhengHei"/>
-              </a:rPr>
-              <a:t>　同電池・同協定・同 MCU 的公平比較</a:t>
-            </a:r>
-          </a:p>
-        </p:txBody>
-      </p:sp>
-      <p:sp>
-        <p:nvSpPr>
-          <p:cNvPr id="11" name="Oval 10"/>
-          <p:cNvSpPr/>
-          <p:nvPr/>
-        </p:nvSpPr>
-        <p:spPr>
-          <a:xfrm>
-            <a:off x="777240" y="2578608"/>
-            <a:ext cx="475488" cy="475488"/>
-          </a:xfrm>
-          <a:prstGeom prst="ellipse">
-            <a:avLst/>
-          </a:prstGeom>
-          <a:solidFill>
-            <a:srgbClr val="2E74B5"/>
-          </a:solidFill>
-          <a:ln>
-            <a:noFill/>
-          </a:ln>
-          <a:effectLst/>
-        </p:spPr>
-        <p:style>
-          <a:lnRef idx="1">
-            <a:schemeClr val="accent1"/>
-          </a:lnRef>
-          <a:fillRef idx="3">
-            <a:schemeClr val="accent1"/>
-          </a:fillRef>
-          <a:effectRef idx="2">
-            <a:schemeClr val="accent1"/>
-          </a:effectRef>
-          <a:fontRef idx="minor">
-            <a:schemeClr val="lt1"/>
-          </a:fontRef>
-        </p:style>
-        <p:txBody>
-          <a:bodyPr rtlCol="0" anchor="ctr" wrap="none"/>
-          <a:lstStyle/>
-          <a:p>
-            <a:pPr algn="ctr"/>
-            <a:r>
-              <a:rPr sz="1800" b="1" i="0">
-                <a:solidFill>
-                  <a:srgbClr val="FFFFFF"/>
-                </a:solidFill>
-                <a:latin typeface="Microsoft JhengHei"/>
-              </a:rPr>
-              <a:t>3</a:t>
-            </a:r>
-          </a:p>
-        </p:txBody>
-      </p:sp>
-      <p:sp>
-        <p:nvSpPr>
-          <p:cNvPr id="12" name="TextBox 11"/>
-          <p:cNvSpPr txBox="1"/>
-          <p:nvPr/>
-        </p:nvSpPr>
-        <p:spPr>
-          <a:xfrm>
-            <a:off x="1508760" y="2542032"/>
-            <a:ext cx="10058400" cy="566928"/>
-          </a:xfrm>
-          <a:prstGeom prst="rect">
-            <a:avLst/>
-          </a:prstGeom>
-          <a:noFill/>
-        </p:spPr>
-        <p:txBody>
-          <a:bodyPr wrap="square" anchor="ctr" lIns="25400" rIns="25400" tIns="25400" bIns="25400">
-            <a:spAutoFit/>
-          </a:bodyPr>
-          <a:lstStyle/>
-          <a:p>
-            <a:r>
-              <a:rPr sz="2000" b="1" i="0">
-                <a:solidFill>
-                  <a:srgbClr val="1F3864"/>
-                </a:solidFill>
-                <a:latin typeface="Microsoft JhengHei"/>
-              </a:rPr>
-              <a:t>文獻回顧　</a:t>
-            </a:r>
-            <a:r>
-              <a:rPr sz="1400" b="0" i="0">
-                <a:solidFill>
-                  <a:srgbClr val="595959"/>
-                </a:solidFill>
-                <a:latin typeface="Microsoft JhengHei"/>
-              </a:rPr>
-              <a:t>　等效電路模型與 SOC 方法分類</a:t>
-            </a:r>
-          </a:p>
-        </p:txBody>
-      </p:sp>
-      <p:sp>
-        <p:nvSpPr>
-          <p:cNvPr id="13" name="Oval 12"/>
-          <p:cNvSpPr/>
-          <p:nvPr/>
-        </p:nvSpPr>
-        <p:spPr>
-          <a:xfrm>
-            <a:off x="777240" y="3204972"/>
-            <a:ext cx="475488" cy="475488"/>
-          </a:xfrm>
-          <a:prstGeom prst="ellipse">
-            <a:avLst/>
-          </a:prstGeom>
-          <a:solidFill>
-            <a:srgbClr val="2E74B5"/>
-          </a:solidFill>
-          <a:ln>
-            <a:noFill/>
-          </a:ln>
-          <a:effectLst/>
-        </p:spPr>
-        <p:style>
-          <a:lnRef idx="1">
-            <a:schemeClr val="accent1"/>
-          </a:lnRef>
-          <a:fillRef idx="3">
-            <a:schemeClr val="accent1"/>
-          </a:fillRef>
-          <a:effectRef idx="2">
-            <a:schemeClr val="accent1"/>
-          </a:effectRef>
-          <a:fontRef idx="minor">
-            <a:schemeClr val="lt1"/>
-          </a:fontRef>
-        </p:style>
-        <p:txBody>
-          <a:bodyPr rtlCol="0" anchor="ctr" wrap="none"/>
-          <a:lstStyle/>
-          <a:p>
-            <a:pPr algn="ctr"/>
-            <a:r>
-              <a:rPr sz="1800" b="1" i="0">
-                <a:solidFill>
-                  <a:srgbClr val="FFFFFF"/>
-                </a:solidFill>
-                <a:latin typeface="Microsoft JhengHei"/>
-              </a:rPr>
-              <a:t>4</a:t>
-            </a:r>
-          </a:p>
-        </p:txBody>
-      </p:sp>
-      <p:sp>
-        <p:nvSpPr>
-          <p:cNvPr id="14" name="TextBox 13"/>
-          <p:cNvSpPr txBox="1"/>
-          <p:nvPr/>
-        </p:nvSpPr>
-        <p:spPr>
-          <a:xfrm>
-            <a:off x="1508760" y="3168396"/>
-            <a:ext cx="10058400" cy="566928"/>
-          </a:xfrm>
-          <a:prstGeom prst="rect">
-            <a:avLst/>
-          </a:prstGeom>
-          <a:noFill/>
-        </p:spPr>
-        <p:txBody>
-          <a:bodyPr wrap="square" anchor="ctr" lIns="25400" rIns="25400" tIns="25400" bIns="25400">
-            <a:spAutoFit/>
-          </a:bodyPr>
-          <a:lstStyle/>
-          <a:p>
-            <a:r>
-              <a:rPr sz="2000" b="1" i="0">
-                <a:solidFill>
-                  <a:srgbClr val="1F3864"/>
-                </a:solidFill>
-                <a:latin typeface="Microsoft JhengHei"/>
-              </a:rPr>
-              <a:t>測試平台與量測校正　</a:t>
-            </a:r>
-            <a:r>
-              <a:rPr sz="1400" b="0" i="0">
-                <a:solidFill>
-                  <a:srgbClr val="595959"/>
-                </a:solidFill>
-                <a:latin typeface="Microsoft JhengHei"/>
-              </a:rPr>
-              <a:t>　系統架構、韌體骨架、INA226 校正、測試協定</a:t>
-            </a:r>
-          </a:p>
-        </p:txBody>
-      </p:sp>
-      <p:sp>
-        <p:nvSpPr>
-          <p:cNvPr id="15" name="Oval 14"/>
-          <p:cNvSpPr/>
-          <p:nvPr/>
-        </p:nvSpPr>
-        <p:spPr>
-          <a:xfrm>
-            <a:off x="777240" y="3831335"/>
-            <a:ext cx="475488" cy="475488"/>
-          </a:xfrm>
-          <a:prstGeom prst="ellipse">
-            <a:avLst/>
-          </a:prstGeom>
-          <a:solidFill>
-            <a:srgbClr val="2E74B5"/>
-          </a:solidFill>
-          <a:ln>
-            <a:noFill/>
-          </a:ln>
-          <a:effectLst/>
-        </p:spPr>
-        <p:style>
-          <a:lnRef idx="1">
-            <a:schemeClr val="accent1"/>
-          </a:lnRef>
-          <a:fillRef idx="3">
-            <a:schemeClr val="accent1"/>
-          </a:fillRef>
-          <a:effectRef idx="2">
-            <a:schemeClr val="accent1"/>
-          </a:effectRef>
-          <a:fontRef idx="minor">
-            <a:schemeClr val="lt1"/>
-          </a:fontRef>
-        </p:style>
-        <p:txBody>
-          <a:bodyPr rtlCol="0" anchor="ctr" wrap="none"/>
-          <a:lstStyle/>
-          <a:p>
-            <a:pPr algn="ctr"/>
-            <a:r>
-              <a:rPr sz="1800" b="1" i="0">
-                <a:solidFill>
-                  <a:srgbClr val="FFFFFF"/>
-                </a:solidFill>
-                <a:latin typeface="Microsoft JhengHei"/>
-              </a:rPr>
-              <a:t>5</a:t>
-            </a:r>
-          </a:p>
-        </p:txBody>
-      </p:sp>
-      <p:sp>
-        <p:nvSpPr>
-          <p:cNvPr id="16" name="TextBox 15"/>
-          <p:cNvSpPr txBox="1"/>
-          <p:nvPr/>
-        </p:nvSpPr>
-        <p:spPr>
-          <a:xfrm>
-            <a:off x="1508760" y="3794759"/>
-            <a:ext cx="10058400" cy="566928"/>
-          </a:xfrm>
-          <a:prstGeom prst="rect">
-            <a:avLst/>
-          </a:prstGeom>
-          <a:noFill/>
-        </p:spPr>
-        <p:txBody>
-          <a:bodyPr wrap="square" anchor="ctr" lIns="25400" rIns="25400" tIns="25400" bIns="25400">
-            <a:spAutoFit/>
-          </a:bodyPr>
-          <a:lstStyle/>
-          <a:p>
-            <a:r>
-              <a:rPr sz="2000" b="1" i="0">
-                <a:solidFill>
-                  <a:srgbClr val="1F3864"/>
-                </a:solidFill>
-                <a:latin typeface="Microsoft JhengHei"/>
-              </a:rPr>
-              <a:t>三種 SOC 估測方法　</a:t>
-            </a:r>
-            <a:r>
-              <a:rPr sz="1400" b="0" i="0">
-                <a:solidFill>
-                  <a:srgbClr val="595959"/>
-                </a:solidFill>
-                <a:latin typeface="Microsoft JhengHei"/>
-              </a:rPr>
-              <a:t>　庫倫計數、EKF、動態阻抗 — 原理與實作</a:t>
-            </a:r>
-          </a:p>
-        </p:txBody>
-      </p:sp>
-      <p:sp>
-        <p:nvSpPr>
-          <p:cNvPr id="17" name="Oval 16"/>
-          <p:cNvSpPr/>
-          <p:nvPr/>
-        </p:nvSpPr>
-        <p:spPr>
-          <a:xfrm>
-            <a:off x="777240" y="4457700"/>
-            <a:ext cx="475488" cy="475488"/>
-          </a:xfrm>
-          <a:prstGeom prst="ellipse">
-            <a:avLst/>
-          </a:prstGeom>
-          <a:solidFill>
-            <a:srgbClr val="2E74B5"/>
-          </a:solidFill>
-          <a:ln>
-            <a:noFill/>
-          </a:ln>
-          <a:effectLst/>
-        </p:spPr>
-        <p:style>
-          <a:lnRef idx="1">
-            <a:schemeClr val="accent1"/>
-          </a:lnRef>
-          <a:fillRef idx="3">
-            <a:schemeClr val="accent1"/>
-          </a:fillRef>
-          <a:effectRef idx="2">
-            <a:schemeClr val="accent1"/>
-          </a:effectRef>
-          <a:fontRef idx="minor">
-            <a:schemeClr val="lt1"/>
-          </a:fontRef>
-        </p:style>
-        <p:txBody>
-          <a:bodyPr rtlCol="0" anchor="ctr" wrap="none"/>
-          <a:lstStyle/>
-          <a:p>
-            <a:pPr algn="ctr"/>
-            <a:r>
-              <a:rPr sz="1800" b="1" i="0">
-                <a:solidFill>
-                  <a:srgbClr val="FFFFFF"/>
-                </a:solidFill>
-                <a:latin typeface="Microsoft JhengHei"/>
-              </a:rPr>
-              <a:t>6</a:t>
-            </a:r>
-          </a:p>
-        </p:txBody>
-      </p:sp>
-      <p:sp>
-        <p:nvSpPr>
-          <p:cNvPr id="18" name="TextBox 17"/>
-          <p:cNvSpPr txBox="1"/>
-          <p:nvPr/>
-        </p:nvSpPr>
-        <p:spPr>
-          <a:xfrm>
-            <a:off x="1508760" y="4421124"/>
-            <a:ext cx="10058400" cy="566928"/>
-          </a:xfrm>
-          <a:prstGeom prst="rect">
-            <a:avLst/>
-          </a:prstGeom>
-          <a:noFill/>
-        </p:spPr>
-        <p:txBody>
-          <a:bodyPr wrap="square" anchor="ctr" lIns="25400" rIns="25400" tIns="25400" bIns="25400">
-            <a:spAutoFit/>
-          </a:bodyPr>
-          <a:lstStyle/>
-          <a:p>
-            <a:r>
-              <a:rPr sz="2000" b="1" i="0">
-                <a:solidFill>
-                  <a:srgbClr val="1F3864"/>
-                </a:solidFill>
-                <a:latin typeface="Microsoft JhengHei"/>
-              </a:rPr>
-              <a:t>實測結果與方法比較　</a:t>
-            </a:r>
-            <a:r>
-              <a:rPr sz="1400" b="0" i="0">
-                <a:solidFill>
-                  <a:srgbClr val="595959"/>
-                </a:solidFill>
-                <a:latin typeface="Microsoft JhengHei"/>
-              </a:rPr>
-              <a:t>　rate-capability、動態阻抗擬合、精度/資源比較</a:t>
-            </a:r>
-          </a:p>
-        </p:txBody>
-      </p:sp>
-      <p:sp>
-        <p:nvSpPr>
-          <p:cNvPr id="19" name="Oval 18"/>
-          <p:cNvSpPr/>
-          <p:nvPr/>
-        </p:nvSpPr>
-        <p:spPr>
-          <a:xfrm>
-            <a:off x="777240" y="5084064"/>
-            <a:ext cx="475488" cy="475488"/>
-          </a:xfrm>
-          <a:prstGeom prst="ellipse">
-            <a:avLst/>
-          </a:prstGeom>
-          <a:solidFill>
-            <a:srgbClr val="2E74B5"/>
-          </a:solidFill>
-          <a:ln>
-            <a:noFill/>
-          </a:ln>
-          <a:effectLst/>
-        </p:spPr>
-        <p:style>
-          <a:lnRef idx="1">
-            <a:schemeClr val="accent1"/>
-          </a:lnRef>
-          <a:fillRef idx="3">
-            <a:schemeClr val="accent1"/>
-          </a:fillRef>
-          <a:effectRef idx="2">
-            <a:schemeClr val="accent1"/>
-          </a:effectRef>
-          <a:fontRef idx="minor">
-            <a:schemeClr val="lt1"/>
-          </a:fontRef>
-        </p:style>
-        <p:txBody>
-          <a:bodyPr rtlCol="0" anchor="ctr" wrap="none"/>
-          <a:lstStyle/>
-          <a:p>
-            <a:pPr algn="ctr"/>
-            <a:r>
-              <a:rPr sz="1800" b="1" i="0">
-                <a:solidFill>
-                  <a:srgbClr val="FFFFFF"/>
-                </a:solidFill>
-                <a:latin typeface="Microsoft JhengHei"/>
-              </a:rPr>
-              <a:t>7</a:t>
-            </a:r>
-          </a:p>
-        </p:txBody>
-      </p:sp>
-      <p:sp>
-        <p:nvSpPr>
-          <p:cNvPr id="20" name="TextBox 19"/>
-          <p:cNvSpPr txBox="1"/>
-          <p:nvPr/>
-        </p:nvSpPr>
-        <p:spPr>
-          <a:xfrm>
-            <a:off x="1508760" y="5047488"/>
-            <a:ext cx="10058400" cy="566928"/>
-          </a:xfrm>
-          <a:prstGeom prst="rect">
-            <a:avLst/>
-          </a:prstGeom>
-          <a:noFill/>
-        </p:spPr>
-        <p:txBody>
-          <a:bodyPr wrap="square" anchor="ctr" lIns="25400" rIns="25400" tIns="25400" bIns="25400">
-            <a:spAutoFit/>
-          </a:bodyPr>
-          <a:lstStyle/>
-          <a:p>
-            <a:r>
-              <a:rPr sz="2000" b="1" i="0">
-                <a:solidFill>
-                  <a:srgbClr val="1F3864"/>
-                </a:solidFill>
-                <a:latin typeface="Microsoft JhengHei"/>
-              </a:rPr>
-              <a:t>系統整合與長期再現性　</a:t>
-            </a:r>
-            <a:r>
-              <a:rPr sz="1400" b="0" i="0">
-                <a:solidFill>
-                  <a:srgbClr val="595959"/>
-                </a:solidFill>
-                <a:latin typeface="Microsoft JhengHei"/>
-              </a:rPr>
-              <a:t>　三法並行、老化與噪聲分離</a:t>
-            </a:r>
-          </a:p>
-        </p:txBody>
-      </p:sp>
-      <p:sp>
-        <p:nvSpPr>
-          <p:cNvPr id="21" name="Oval 20"/>
-          <p:cNvSpPr/>
-          <p:nvPr/>
-        </p:nvSpPr>
-        <p:spPr>
-          <a:xfrm>
-            <a:off x="777240" y="5710428"/>
-            <a:ext cx="475488" cy="475488"/>
-          </a:xfrm>
-          <a:prstGeom prst="ellipse">
-            <a:avLst/>
-          </a:prstGeom>
-          <a:solidFill>
-            <a:srgbClr val="2E74B5"/>
-          </a:solidFill>
-          <a:ln>
-            <a:noFill/>
-          </a:ln>
-          <a:effectLst/>
-        </p:spPr>
-        <p:style>
-          <a:lnRef idx="1">
-            <a:schemeClr val="accent1"/>
-          </a:lnRef>
-          <a:fillRef idx="3">
-            <a:schemeClr val="accent1"/>
-          </a:fillRef>
-          <a:effectRef idx="2">
-            <a:schemeClr val="accent1"/>
-          </a:effectRef>
-          <a:fontRef idx="minor">
-            <a:schemeClr val="lt1"/>
-          </a:fontRef>
-        </p:style>
-        <p:txBody>
-          <a:bodyPr rtlCol="0" anchor="ctr" wrap="none"/>
-          <a:lstStyle/>
-          <a:p>
-            <a:pPr algn="ctr"/>
-            <a:r>
-              <a:rPr sz="1800" b="1" i="0">
-                <a:solidFill>
-                  <a:srgbClr val="FFFFFF"/>
-                </a:solidFill>
-                <a:latin typeface="Microsoft JhengHei"/>
-              </a:rPr>
-              <a:t>8</a:t>
-            </a:r>
-          </a:p>
-        </p:txBody>
-      </p:sp>
-      <p:sp>
-        <p:nvSpPr>
-          <p:cNvPr id="22" name="TextBox 21"/>
-          <p:cNvSpPr txBox="1"/>
-          <p:nvPr/>
-        </p:nvSpPr>
-        <p:spPr>
-          <a:xfrm>
-            <a:off x="1508760" y="5673852"/>
-            <a:ext cx="10058400" cy="566928"/>
-          </a:xfrm>
-          <a:prstGeom prst="rect">
-            <a:avLst/>
-          </a:prstGeom>
-          <a:noFill/>
-        </p:spPr>
-        <p:txBody>
-          <a:bodyPr wrap="square" anchor="ctr" lIns="25400" rIns="25400" tIns="25400" bIns="25400">
-            <a:spAutoFit/>
-          </a:bodyPr>
-          <a:lstStyle/>
-          <a:p>
-            <a:r>
-              <a:rPr sz="2000" b="1" i="0">
-                <a:solidFill>
-                  <a:srgbClr val="1F3864"/>
-                </a:solidFill>
-                <a:latin typeface="Microsoft JhengHei"/>
-              </a:rPr>
-              <a:t>結論、決策表與未來工作　</a:t>
-            </a:r>
-            <a:r>
-              <a:rPr sz="1400" b="0" i="0">
-                <a:solidFill>
-                  <a:srgbClr val="595959"/>
-                </a:solidFill>
-                <a:latin typeface="Microsoft JhengHei"/>
-              </a:rPr>
-              <a:t>　方法選用建議、SOH 延伸</a:t>
-            </a:r>
-          </a:p>
-        </p:txBody>
-      </p:sp>
-    </p:spTree>
-  </p:cSld>
-  <p:clrMapOvr>
-    <a:masterClrMapping/>
-  </p:clrMapOvr>
-</p:sld>
-</file>
-
-<file path=ppt/slides/slide20.xml><?xml version="1.0" encoding="utf-8"?>
-<p:sld xmlns:a="http://schemas.openxmlformats.org/drawingml/2006/main" xmlns:p="http://schemas.openxmlformats.org/presentationml/2006/main" xmlns:r="http://schemas.openxmlformats.org/officeDocument/2006/relationships">
-  <p:cSld>
-    <p:spTree>
-      <p:nvGrpSpPr>
-        <p:cNvPr id="1" name=""/>
-        <p:cNvGrpSpPr/>
-        <p:nvPr/>
-      </p:nvGrpSpPr>
-      <p:grpSpPr/>
-      <p:sp>
-        <p:nvSpPr>
-          <p:cNvPr id="2" name="Rectangle 1"/>
-          <p:cNvSpPr/>
-          <p:nvPr/>
-        </p:nvSpPr>
-        <p:spPr>
-          <a:xfrm>
-            <a:off x="0" y="0"/>
-            <a:ext cx="12191695" cy="932688"/>
-          </a:xfrm>
-          <a:prstGeom prst="rect">
-            <a:avLst/>
-          </a:prstGeom>
-          <a:solidFill>
-            <a:srgbClr val="1F3864"/>
-          </a:solidFill>
-          <a:ln>
-            <a:noFill/>
-          </a:ln>
-          <a:effectLst/>
-        </p:spPr>
-        <p:style>
-          <a:lnRef idx="1">
-            <a:schemeClr val="accent1"/>
-          </a:lnRef>
-          <a:fillRef idx="3">
-            <a:schemeClr val="accent1"/>
-          </a:fillRef>
-          <a:effectRef idx="2">
-            <a:schemeClr val="accent1"/>
-          </a:effectRef>
-          <a:fontRef idx="minor">
-            <a:schemeClr val="lt1"/>
-          </a:fontRef>
-        </p:style>
-        <p:txBody>
-          <a:bodyPr rtlCol="0" anchor="ctr"/>
-          <a:lstStyle/>
-          <a:p>
-            <a:pPr algn="ctr"/>
-          </a:p>
-        </p:txBody>
-      </p:sp>
-      <p:sp>
-        <p:nvSpPr>
-          <p:cNvPr id="3" name="Rectangle 2"/>
-          <p:cNvSpPr/>
-          <p:nvPr/>
-        </p:nvSpPr>
-        <p:spPr>
-          <a:xfrm>
-            <a:off x="0" y="932688"/>
-            <a:ext cx="12191695" cy="64008"/>
-          </a:xfrm>
-          <a:prstGeom prst="rect">
-            <a:avLst/>
-          </a:prstGeom>
-          <a:solidFill>
-            <a:srgbClr val="C08A2B"/>
-          </a:solidFill>
-          <a:ln>
-            <a:noFill/>
-          </a:ln>
-          <a:effectLst/>
-        </p:spPr>
-        <p:style>
-          <a:lnRef idx="1">
-            <a:schemeClr val="accent1"/>
-          </a:lnRef>
-          <a:fillRef idx="3">
-            <a:schemeClr val="accent1"/>
-          </a:fillRef>
-          <a:effectRef idx="2">
-            <a:schemeClr val="accent1"/>
-          </a:effectRef>
-          <a:fontRef idx="minor">
-            <a:schemeClr val="lt1"/>
-          </a:fontRef>
-        </p:style>
-        <p:txBody>
-          <a:bodyPr rtlCol="0" anchor="ctr"/>
-          <a:lstStyle/>
-          <a:p>
-            <a:pPr algn="ctr"/>
-          </a:p>
-        </p:txBody>
-      </p:sp>
-      <p:sp>
-        <p:nvSpPr>
-          <p:cNvPr id="4" name="TextBox 3"/>
-          <p:cNvSpPr txBox="1"/>
-          <p:nvPr/>
-        </p:nvSpPr>
-        <p:spPr>
-          <a:xfrm>
-            <a:off x="502920" y="109728"/>
-            <a:ext cx="10515600" cy="749808"/>
-          </a:xfrm>
-          <a:prstGeom prst="rect">
-            <a:avLst/>
-          </a:prstGeom>
-          <a:noFill/>
-        </p:spPr>
-        <p:txBody>
-          <a:bodyPr wrap="square" anchor="ctr" lIns="25400" rIns="25400" tIns="25400" bIns="25400">
-            <a:spAutoFit/>
-          </a:bodyPr>
-          <a:lstStyle/>
-          <a:p>
-            <a:r>
-              <a:rPr sz="2700" b="1" i="0">
-                <a:solidFill>
-                  <a:srgbClr val="FFFFFF"/>
-                </a:solidFill>
-                <a:latin typeface="Microsoft JhengHei"/>
-              </a:rPr>
-              <a:t>八、研究限制與未來工作</a:t>
-            </a:r>
-          </a:p>
-        </p:txBody>
-      </p:sp>
-      <p:sp>
-        <p:nvSpPr>
-          <p:cNvPr id="5" name="TextBox 4"/>
-          <p:cNvSpPr txBox="1"/>
-          <p:nvPr/>
-        </p:nvSpPr>
-        <p:spPr>
-          <a:xfrm>
-            <a:off x="365760" y="6437376"/>
-            <a:ext cx="8229600" cy="365760"/>
-          </a:xfrm>
-          <a:prstGeom prst="rect">
-            <a:avLst/>
-          </a:prstGeom>
-          <a:noFill/>
-        </p:spPr>
-        <p:txBody>
-          <a:bodyPr wrap="square" anchor="ctr" lIns="25400" rIns="25400" tIns="25400" bIns="25400">
-            <a:spAutoFit/>
-          </a:bodyPr>
-          <a:lstStyle/>
-          <a:p>
-            <a:r>
-              <a:rPr sz="1000" b="0" i="0">
-                <a:solidFill>
-                  <a:srgbClr val="595959"/>
-                </a:solidFill>
-                <a:latin typeface="Microsoft JhengHei"/>
-              </a:rPr>
-              <a:t>鋰電池 SOC 估測方法之比較與嵌入式實作　|　未來工作</a:t>
-            </a:r>
-          </a:p>
-        </p:txBody>
-      </p:sp>
-      <p:sp>
-        <p:nvSpPr>
-          <p:cNvPr id="6" name="TextBox 5"/>
-          <p:cNvSpPr txBox="1"/>
-          <p:nvPr/>
-        </p:nvSpPr>
-        <p:spPr>
-          <a:xfrm>
-            <a:off x="11155680" y="6437376"/>
-            <a:ext cx="822960" cy="365760"/>
-          </a:xfrm>
-          <a:prstGeom prst="rect">
-            <a:avLst/>
-          </a:prstGeom>
-          <a:noFill/>
-        </p:spPr>
-        <p:txBody>
-          <a:bodyPr wrap="square" anchor="ctr" lIns="25400" rIns="25400" tIns="25400" bIns="25400">
-            <a:spAutoFit/>
-          </a:bodyPr>
-          <a:lstStyle/>
-          <a:p>
-            <a:pPr algn="r"/>
-            <a:r>
-              <a:rPr sz="1000" b="0" i="0">
-                <a:solidFill>
-                  <a:srgbClr val="595959"/>
-                </a:solidFill>
-                <a:latin typeface="Microsoft JhengHei"/>
-              </a:rPr>
-              <a:t>19 / 20</a:t>
+              <a:t>20 / 21</a:t>
             </a:r>
           </a:p>
         </p:txBody>
@@ -15045,7 +16007,7 @@
                 </a:solidFill>
                 <a:latin typeface="Microsoft JhengHei"/>
               </a:rPr>
-              <a:t>研究限制</a:t>
+              <a:t>這份研究還有哪些限制</a:t>
             </a:r>
           </a:p>
         </p:txBody>
@@ -15096,7 +16058,7 @@
                 </a:solidFill>
                 <a:latin typeface="Microsoft JhengHei"/>
               </a:rPr>
-              <a:t>單一 NMC 電池、室溫、無溫度補償</a:t>
+              <a:t>只測了一顆 NMC 電池、室溫、沒做溫度補償</a:t>
             </a:r>
           </a:p>
           <a:p>
@@ -15124,7 +16086,7 @@
                 </a:solidFill>
                 <a:latin typeface="Microsoft JhengHei"/>
               </a:rPr>
-              <a:t>僅做 SOC，未做 SOH（已測到可分離的 4.6% 老化訊號）</a:t>
+              <a:t>只做電量（SOC），還沒做健康度（SOH）——但已量到能分辨的老化訊號（41 輪掉約 4.6%）</a:t>
             </a:r>
           </a:p>
           <a:p>
@@ -15152,7 +16114,7 @@
                 </a:solidFill>
                 <a:latin typeface="Microsoft JhengHei"/>
               </a:rPr>
-              <a:t>rate capability 平坦：對 EKF 有利、對動態阻抗致命，結論不宜外推</a:t>
+              <a:t>這顆電池「大電流也幾乎不掉電量」：對 EKF 有利、對動態阻抗卻是致命傷，結論不能直接套到別顆電池</a:t>
             </a:r>
           </a:p>
           <a:p>
@@ -15180,7 +16142,7 @@
                 </a:solidFill>
                 <a:latin typeface="Microsoft JhengHei"/>
               </a:rPr>
-              <a:t>EKF 參數/PC 重放為 in-sample，獨立驗證由兩整輪板端實測承擔</a:t>
+              <a:t>EKF 的參數跟電腦驗證用同一份資料（等於自己驗自己）；真正的公正驗證靠兩整輪實機實測</a:t>
             </a:r>
           </a:p>
           <a:p>
@@ -15208,7 +16170,7 @@
                 </a:solidFill>
                 <a:latin typeface="Microsoft JhengHei"/>
               </a:rPr>
-              <a:t>板端與台架電流鏈約 1.2% 刻度差，絕對精度含此構成</a:t>
+              <a:t>板端跟儀器兩套電流量測本身差約 1.2%，看絕對精度時要把這個算進去</a:t>
             </a:r>
           </a:p>
         </p:txBody>
@@ -15330,7 +16292,7 @@
                 </a:solidFill>
                 <a:latin typeface="Microsoft JhengHei"/>
               </a:rPr>
-              <a:t>未來工作</a:t>
+              <a:t>接下來想做什麼</a:t>
             </a:r>
           </a:p>
         </p:txBody>
@@ -15381,7 +16343,7 @@
                 </a:solidFill>
                 <a:latin typeface="Microsoft JhengHei"/>
               </a:rPr>
-              <a:t>SOH 估測延伸</a:t>
+              <a:t>接著做電池「健康度」（SOH）</a:t>
             </a:r>
           </a:p>
           <a:p>
@@ -15409,7 +16371,7 @@
                 </a:solidFill>
                 <a:latin typeface="Microsoft JhengHei"/>
               </a:rPr>
-              <a:t>容量衰退追蹤、內阻成長法、投影法/ICA（複用既有量測）</a:t>
+              <a:t>追容量衰退、用內阻變化估老化——可以直接沿用現在的量測，成本很低</a:t>
             </a:r>
           </a:p>
           <a:p>
@@ -15437,7 +16399,7 @@
                 </a:solidFill>
                 <a:latin typeface="Microsoft JhengHei"/>
               </a:rPr>
-              <a:t>LFP 電池遲滯處理</a:t>
+              <a:t>處理 LFP 電池的電壓遲滯</a:t>
             </a:r>
           </a:p>
           <a:p>
@@ -15465,7 +16427,7 @@
                 </a:solidFill>
                 <a:latin typeface="Microsoft JhengHei"/>
               </a:rPr>
-              <a:t>遲滯狀態模型擴充至 EKF；動態阻抗不依賴 OCV 之對照</a:t>
+              <a:t>把遲滯放進 EKF；動態阻抗不靠電壓對照表，反而有機會</a:t>
             </a:r>
           </a:p>
           <a:p>
@@ -15493,7 +16455,7 @@
                 </a:solidFill>
                 <a:latin typeface="Microsoft JhengHei"/>
               </a:rPr>
-              <a:t>資料驅動融合與雲端 fleet learning</a:t>
+              <a:t>用 AI 融合，多顆電池上雲端一起學</a:t>
             </a:r>
           </a:p>
           <a:p>
@@ -15521,7 +16483,7 @@
                 </a:solidFill>
                 <a:latin typeface="Microsoft JhengHei"/>
               </a:rPr>
-              <a:t>輕量 NN 融合三法輸出；多電池雲端回饋校正</a:t>
+              <a:t>用輕量神經網路把三個方法的輸出融合；多顆電池的資料回雲端互相校正</a:t>
             </a:r>
           </a:p>
         </p:txBody>
@@ -15776,7 +16738,7 @@
                 </a:solidFill>
                 <a:latin typeface="Microsoft JhengHei"/>
               </a:rPr>
-              <a:t>2 / 20</a:t>
+              <a:t>2 / 21</a:t>
             </a:r>
           </a:p>
         </p:txBody>
@@ -16584,7 +17546,7 @@
                 </a:solidFill>
                 <a:latin typeface="Microsoft JhengHei"/>
               </a:rPr>
-              <a:t>3 / 20</a:t>
+              <a:t>3 / 21</a:t>
             </a:r>
           </a:p>
         </p:txBody>
@@ -17318,7 +18280,7 @@
                 </a:solidFill>
                 <a:latin typeface="Microsoft JhengHei"/>
               </a:rPr>
-              <a:t>4 / 20</a:t>
+              <a:t>4 / 21</a:t>
             </a:r>
           </a:p>
         </p:txBody>
@@ -18111,7 +19073,7 @@
                 </a:solidFill>
                 <a:latin typeface="Microsoft JhengHei"/>
               </a:rPr>
-              <a:t>5 / 20</a:t>
+              <a:t>5 / 21</a:t>
             </a:r>
           </a:p>
         </p:txBody>
@@ -19003,7 +19965,7 @@
                 </a:solidFill>
                 <a:latin typeface="Microsoft JhengHei"/>
               </a:rPr>
-              <a:t>6 / 20</a:t>
+              <a:t>6 / 21</a:t>
             </a:r>
           </a:p>
         </p:txBody>
@@ -19491,7 +20453,7 @@
                           </a:solidFill>
                           <a:latin typeface="Microsoft JhengHei"/>
                         </a:rPr>
-                        <a:t>文獻 [1] 主推；無須初值、即時可算、嵌入式友善；複用既有 dV/dI 擾動</a:t>
+                        <a:t>本研究主要方法；無須初值、即時可算、嵌入式友善；複用既有 dV/dI 擾動</a:t>
                       </a:r>
                     </a:p>
                   </a:txBody>
@@ -19856,7 +20818,7 @@
                 </a:solidFill>
                 <a:latin typeface="Microsoft JhengHei"/>
               </a:rPr>
-              <a:t>7 / 20</a:t>
+              <a:t>7 / 21</a:t>
             </a:r>
           </a:p>
         </p:txBody>
@@ -20718,7 +21680,7 @@
                 </a:solidFill>
                 <a:latin typeface="Microsoft JhengHei"/>
               </a:rPr>
-              <a:t>8 / 20</a:t>
+              <a:t>8 / 21</a:t>
             </a:r>
           </a:p>
         </p:txBody>

--- a/DOC/論文撰寫/口試簡報_鋰電池SOC估測.pptx
+++ b/DOC/論文撰寫/口試簡報_鋰電池SOC估測.pptx
@@ -5,29 +5,29 @@
     <p:sldMasterId id="2147483648" r:id="rId1"/>
   </p:sldMasterIdLst>
   <p:sldIdLst>
-    <p:sldId id="256" r:id="rId7"/>
-    <p:sldId id="257" r:id="rId8"/>
-    <p:sldId id="258" r:id="rId9"/>
-    <p:sldId id="259" r:id="rId10"/>
-    <p:sldId id="260" r:id="rId11"/>
-    <p:sldId id="261" r:id="rId12"/>
-    <p:sldId id="262" r:id="rId13"/>
-    <p:sldId id="263" r:id="rId14"/>
-    <p:sldId id="264" r:id="rId15"/>
-    <p:sldId id="265" r:id="rId16"/>
-    <p:sldId id="266" r:id="rId17"/>
-    <p:sldId id="267" r:id="rId18"/>
-    <p:sldId id="268" r:id="rId19"/>
-    <p:sldId id="269" r:id="rId20"/>
-    <p:sldId id="270" r:id="rId21"/>
-    <p:sldId id="271" r:id="rId22"/>
-    <p:sldId id="272" r:id="rId23"/>
-    <p:sldId id="273" r:id="rId24"/>
-    <p:sldId id="274" r:id="rId25"/>
-    <p:sldId id="275" r:id="rId26"/>
-    <p:sldId id="276" r:id="rId27"/>
+    <p:sldId id="256" r:id="rId2"/>
+    <p:sldId id="257" r:id="rId3"/>
+    <p:sldId id="258" r:id="rId4"/>
+    <p:sldId id="259" r:id="rId5"/>
+    <p:sldId id="260" r:id="rId6"/>
+    <p:sldId id="261" r:id="rId7"/>
+    <p:sldId id="262" r:id="rId8"/>
+    <p:sldId id="263" r:id="rId9"/>
+    <p:sldId id="264" r:id="rId10"/>
+    <p:sldId id="265" r:id="rId11"/>
+    <p:sldId id="266" r:id="rId12"/>
+    <p:sldId id="267" r:id="rId13"/>
+    <p:sldId id="268" r:id="rId14"/>
+    <p:sldId id="269" r:id="rId15"/>
+    <p:sldId id="270" r:id="rId16"/>
+    <p:sldId id="271" r:id="rId17"/>
+    <p:sldId id="272" r:id="rId18"/>
+    <p:sldId id="273" r:id="rId19"/>
+    <p:sldId id="274" r:id="rId20"/>
+    <p:sldId id="275" r:id="rId21"/>
+    <p:sldId id="276" r:id="rId22"/>
   </p:sldIdLst>
-  <p:sldSz cx="12191695" cy="6858000" type="screen4x3"/>
+  <p:sldSz cx="12192000" cy="6858000"/>
   <p:notesSz cx="6858000" cy="9144000"/>
   <p:defaultTextStyle>
     <a:defPPr>
@@ -124,6 +124,22 @@
       </a:defRPr>
     </a:lvl9pPr>
   </p:defaultTextStyle>
+  <p:extLst>
+    <p:ext uri="{EFAFB233-063F-42B5-8137-9DF3F51BA10A}">
+      <p15:sldGuideLst xmlns:p15="http://schemas.microsoft.com/office/powerpoint/2012/main">
+        <p15:guide id="1" orient="horz" pos="2160">
+          <p15:clr>
+            <a:srgbClr val="A4A3A4"/>
+          </p15:clr>
+        </p15:guide>
+        <p15:guide id="2" pos="2880">
+          <p15:clr>
+            <a:srgbClr val="A4A3A4"/>
+          </p15:clr>
+        </p15:guide>
+      </p15:sldGuideLst>
+    </p:ext>
+  </p:extLst>
 </p:presentation>
 </file>
 
@@ -165,10 +181,9 @@
           <a:lstStyle/>
           <a:p>
             <a:r>
-              <a:rPr lang="en-US" smtClean="0"/>
+              <a:rPr lang="en-US"/>
               <a:t>Click to edit Master title style</a:t>
             </a:r>
-            <a:endParaRPr lang="en-US"/>
           </a:p>
         </p:txBody>
       </p:sp>
@@ -284,10 +299,9 @@
           </a:lstStyle>
           <a:p>
             <a:r>
-              <a:rPr lang="en-US" smtClean="0"/>
+              <a:rPr lang="en-US"/>
               <a:t>Click to edit Master subtitle style</a:t>
             </a:r>
-            <a:endParaRPr lang="en-US"/>
           </a:p>
         </p:txBody>
       </p:sp>
@@ -308,7 +322,7 @@
           <a:p>
             <a:fld id="{5BCAD085-E8A6-8845-BD4E-CB4CCA059FC4}" type="datetimeFigureOut">
               <a:rPr lang="en-US" smtClean="0"/>
-              <a:t>1/27/13</a:t>
+              <a:t>7/23/2026</a:t>
             </a:fld>
             <a:endParaRPr lang="en-US"/>
           </a:p>
@@ -402,10 +416,9 @@
           <a:lstStyle/>
           <a:p>
             <a:r>
-              <a:rPr lang="en-US" smtClean="0"/>
+              <a:rPr lang="en-US"/>
               <a:t>Click to edit Master title style</a:t>
             </a:r>
-            <a:endParaRPr lang="en-US"/>
           </a:p>
         </p:txBody>
       </p:sp>
@@ -426,38 +439,37 @@
           <a:p>
             <a:pPr lvl="0"/>
             <a:r>
-              <a:rPr lang="en-US" smtClean="0"/>
+              <a:rPr lang="en-US"/>
               <a:t>Click to edit Master text styles</a:t>
             </a:r>
           </a:p>
           <a:p>
             <a:pPr lvl="1"/>
             <a:r>
-              <a:rPr lang="en-US" smtClean="0"/>
+              <a:rPr lang="en-US"/>
               <a:t>Second level</a:t>
             </a:r>
           </a:p>
           <a:p>
             <a:pPr lvl="2"/>
             <a:r>
-              <a:rPr lang="en-US" smtClean="0"/>
+              <a:rPr lang="en-US"/>
               <a:t>Third level</a:t>
             </a:r>
           </a:p>
           <a:p>
             <a:pPr lvl="3"/>
             <a:r>
-              <a:rPr lang="en-US" smtClean="0"/>
+              <a:rPr lang="en-US"/>
               <a:t>Fourth level</a:t>
             </a:r>
           </a:p>
           <a:p>
             <a:pPr lvl="4"/>
             <a:r>
-              <a:rPr lang="en-US" smtClean="0"/>
+              <a:rPr lang="en-US"/>
               <a:t>Fifth level</a:t>
             </a:r>
-            <a:endParaRPr lang="en-US"/>
           </a:p>
         </p:txBody>
       </p:sp>
@@ -478,7 +490,7 @@
           <a:p>
             <a:fld id="{5BCAD085-E8A6-8845-BD4E-CB4CCA059FC4}" type="datetimeFigureOut">
               <a:rPr lang="en-US" smtClean="0"/>
-              <a:t>1/27/13</a:t>
+              <a:t>7/23/2026</a:t>
             </a:fld>
             <a:endParaRPr lang="en-US"/>
           </a:p>
@@ -577,10 +589,9 @@
           <a:lstStyle/>
           <a:p>
             <a:r>
-              <a:rPr lang="en-US" smtClean="0"/>
+              <a:rPr lang="en-US"/>
               <a:t>Click to edit Master title style</a:t>
             </a:r>
-            <a:endParaRPr lang="en-US"/>
           </a:p>
         </p:txBody>
       </p:sp>
@@ -606,38 +617,37 @@
           <a:p>
             <a:pPr lvl="0"/>
             <a:r>
-              <a:rPr lang="en-US" smtClean="0"/>
+              <a:rPr lang="en-US"/>
               <a:t>Click to edit Master text styles</a:t>
             </a:r>
           </a:p>
           <a:p>
             <a:pPr lvl="1"/>
             <a:r>
-              <a:rPr lang="en-US" smtClean="0"/>
+              <a:rPr lang="en-US"/>
               <a:t>Second level</a:t>
             </a:r>
           </a:p>
           <a:p>
             <a:pPr lvl="2"/>
             <a:r>
-              <a:rPr lang="en-US" smtClean="0"/>
+              <a:rPr lang="en-US"/>
               <a:t>Third level</a:t>
             </a:r>
           </a:p>
           <a:p>
             <a:pPr lvl="3"/>
             <a:r>
-              <a:rPr lang="en-US" smtClean="0"/>
+              <a:rPr lang="en-US"/>
               <a:t>Fourth level</a:t>
             </a:r>
           </a:p>
           <a:p>
             <a:pPr lvl="4"/>
             <a:r>
-              <a:rPr lang="en-US" smtClean="0"/>
+              <a:rPr lang="en-US"/>
               <a:t>Fifth level</a:t>
             </a:r>
-            <a:endParaRPr lang="en-US"/>
           </a:p>
         </p:txBody>
       </p:sp>
@@ -658,7 +668,7 @@
           <a:p>
             <a:fld id="{5BCAD085-E8A6-8845-BD4E-CB4CCA059FC4}" type="datetimeFigureOut">
               <a:rPr lang="en-US" smtClean="0"/>
-              <a:t>1/27/13</a:t>
+              <a:t>7/23/2026</a:t>
             </a:fld>
             <a:endParaRPr lang="en-US"/>
           </a:p>
@@ -752,10 +762,9 @@
           <a:lstStyle/>
           <a:p>
             <a:r>
-              <a:rPr lang="en-US" smtClean="0"/>
+              <a:rPr lang="en-US"/>
               <a:t>Click to edit Master title style</a:t>
             </a:r>
-            <a:endParaRPr lang="en-US"/>
           </a:p>
         </p:txBody>
       </p:sp>
@@ -776,38 +785,37 @@
           <a:p>
             <a:pPr lvl="0"/>
             <a:r>
-              <a:rPr lang="en-US" smtClean="0"/>
+              <a:rPr lang="en-US"/>
               <a:t>Click to edit Master text styles</a:t>
             </a:r>
           </a:p>
           <a:p>
             <a:pPr lvl="1"/>
             <a:r>
-              <a:rPr lang="en-US" smtClean="0"/>
+              <a:rPr lang="en-US"/>
               <a:t>Second level</a:t>
             </a:r>
           </a:p>
           <a:p>
             <a:pPr lvl="2"/>
             <a:r>
-              <a:rPr lang="en-US" smtClean="0"/>
+              <a:rPr lang="en-US"/>
               <a:t>Third level</a:t>
             </a:r>
           </a:p>
           <a:p>
             <a:pPr lvl="3"/>
             <a:r>
-              <a:rPr lang="en-US" smtClean="0"/>
+              <a:rPr lang="en-US"/>
               <a:t>Fourth level</a:t>
             </a:r>
           </a:p>
           <a:p>
             <a:pPr lvl="4"/>
             <a:r>
-              <a:rPr lang="en-US" smtClean="0"/>
+              <a:rPr lang="en-US"/>
               <a:t>Fifth level</a:t>
             </a:r>
-            <a:endParaRPr lang="en-US"/>
           </a:p>
         </p:txBody>
       </p:sp>
@@ -828,7 +836,7 @@
           <a:p>
             <a:fld id="{5BCAD085-E8A6-8845-BD4E-CB4CCA059FC4}" type="datetimeFigureOut">
               <a:rPr lang="en-US" smtClean="0"/>
-              <a:t>1/27/13</a:t>
+              <a:t>7/23/2026</a:t>
             </a:fld>
             <a:endParaRPr lang="en-US"/>
           </a:p>
@@ -931,10 +939,9 @@
           </a:lstStyle>
           <a:p>
             <a:r>
-              <a:rPr lang="en-US" smtClean="0"/>
+              <a:rPr lang="en-US"/>
               <a:t>Click to edit Master title style</a:t>
             </a:r>
-            <a:endParaRPr lang="en-US"/>
           </a:p>
         </p:txBody>
       </p:sp>
@@ -1051,7 +1058,7 @@
           <a:p>
             <a:pPr lvl="0"/>
             <a:r>
-              <a:rPr lang="en-US" smtClean="0"/>
+              <a:rPr lang="en-US"/>
               <a:t>Click to edit Master text styles</a:t>
             </a:r>
           </a:p>
@@ -1074,7 +1081,7 @@
           <a:p>
             <a:fld id="{5BCAD085-E8A6-8845-BD4E-CB4CCA059FC4}" type="datetimeFigureOut">
               <a:rPr lang="en-US" smtClean="0"/>
-              <a:t>1/27/13</a:t>
+              <a:t>7/23/2026</a:t>
             </a:fld>
             <a:endParaRPr lang="en-US"/>
           </a:p>
@@ -1168,10 +1175,9 @@
           <a:lstStyle/>
           <a:p>
             <a:r>
-              <a:rPr lang="en-US" smtClean="0"/>
+              <a:rPr lang="en-US"/>
               <a:t>Click to edit Master title style</a:t>
             </a:r>
-            <a:endParaRPr lang="en-US"/>
           </a:p>
         </p:txBody>
       </p:sp>
@@ -1225,38 +1231,37 @@
           <a:p>
             <a:pPr lvl="0"/>
             <a:r>
-              <a:rPr lang="en-US" smtClean="0"/>
+              <a:rPr lang="en-US"/>
               <a:t>Click to edit Master text styles</a:t>
             </a:r>
           </a:p>
           <a:p>
             <a:pPr lvl="1"/>
             <a:r>
-              <a:rPr lang="en-US" smtClean="0"/>
+              <a:rPr lang="en-US"/>
               <a:t>Second level</a:t>
             </a:r>
           </a:p>
           <a:p>
             <a:pPr lvl="2"/>
             <a:r>
-              <a:rPr lang="en-US" smtClean="0"/>
+              <a:rPr lang="en-US"/>
               <a:t>Third level</a:t>
             </a:r>
           </a:p>
           <a:p>
             <a:pPr lvl="3"/>
             <a:r>
-              <a:rPr lang="en-US" smtClean="0"/>
+              <a:rPr lang="en-US"/>
               <a:t>Fourth level</a:t>
             </a:r>
           </a:p>
           <a:p>
             <a:pPr lvl="4"/>
             <a:r>
-              <a:rPr lang="en-US" smtClean="0"/>
+              <a:rPr lang="en-US"/>
               <a:t>Fifth level</a:t>
             </a:r>
-            <a:endParaRPr lang="en-US"/>
           </a:p>
         </p:txBody>
       </p:sp>
@@ -1310,38 +1315,37 @@
           <a:p>
             <a:pPr lvl="0"/>
             <a:r>
-              <a:rPr lang="en-US" smtClean="0"/>
+              <a:rPr lang="en-US"/>
               <a:t>Click to edit Master text styles</a:t>
             </a:r>
           </a:p>
           <a:p>
             <a:pPr lvl="1"/>
             <a:r>
-              <a:rPr lang="en-US" smtClean="0"/>
+              <a:rPr lang="en-US"/>
               <a:t>Second level</a:t>
             </a:r>
           </a:p>
           <a:p>
             <a:pPr lvl="2"/>
             <a:r>
-              <a:rPr lang="en-US" smtClean="0"/>
+              <a:rPr lang="en-US"/>
               <a:t>Third level</a:t>
             </a:r>
           </a:p>
           <a:p>
             <a:pPr lvl="3"/>
             <a:r>
-              <a:rPr lang="en-US" smtClean="0"/>
+              <a:rPr lang="en-US"/>
               <a:t>Fourth level</a:t>
             </a:r>
           </a:p>
           <a:p>
             <a:pPr lvl="4"/>
             <a:r>
-              <a:rPr lang="en-US" smtClean="0"/>
+              <a:rPr lang="en-US"/>
               <a:t>Fifth level</a:t>
             </a:r>
-            <a:endParaRPr lang="en-US"/>
           </a:p>
         </p:txBody>
       </p:sp>
@@ -1362,7 +1366,7 @@
           <a:p>
             <a:fld id="{5BCAD085-E8A6-8845-BD4E-CB4CCA059FC4}" type="datetimeFigureOut">
               <a:rPr lang="en-US" smtClean="0"/>
-              <a:t>1/27/13</a:t>
+              <a:t>7/23/2026</a:t>
             </a:fld>
             <a:endParaRPr lang="en-US"/>
           </a:p>
@@ -1460,10 +1464,9 @@
           </a:lstStyle>
           <a:p>
             <a:r>
-              <a:rPr lang="en-US" smtClean="0"/>
+              <a:rPr lang="en-US"/>
               <a:t>Click to edit Master title style</a:t>
             </a:r>
-            <a:endParaRPr lang="en-US"/>
           </a:p>
         </p:txBody>
       </p:sp>
@@ -1526,7 +1529,7 @@
           <a:p>
             <a:pPr lvl="0"/>
             <a:r>
-              <a:rPr lang="en-US" smtClean="0"/>
+              <a:rPr lang="en-US"/>
               <a:t>Click to edit Master text styles</a:t>
             </a:r>
           </a:p>
@@ -1582,38 +1585,37 @@
           <a:p>
             <a:pPr lvl="0"/>
             <a:r>
-              <a:rPr lang="en-US" smtClean="0"/>
+              <a:rPr lang="en-US"/>
               <a:t>Click to edit Master text styles</a:t>
             </a:r>
           </a:p>
           <a:p>
             <a:pPr lvl="1"/>
             <a:r>
-              <a:rPr lang="en-US" smtClean="0"/>
+              <a:rPr lang="en-US"/>
               <a:t>Second level</a:t>
             </a:r>
           </a:p>
           <a:p>
             <a:pPr lvl="2"/>
             <a:r>
-              <a:rPr lang="en-US" smtClean="0"/>
+              <a:rPr lang="en-US"/>
               <a:t>Third level</a:t>
             </a:r>
           </a:p>
           <a:p>
             <a:pPr lvl="3"/>
             <a:r>
-              <a:rPr lang="en-US" smtClean="0"/>
+              <a:rPr lang="en-US"/>
               <a:t>Fourth level</a:t>
             </a:r>
           </a:p>
           <a:p>
             <a:pPr lvl="4"/>
             <a:r>
-              <a:rPr lang="en-US" smtClean="0"/>
+              <a:rPr lang="en-US"/>
               <a:t>Fifth level</a:t>
             </a:r>
-            <a:endParaRPr lang="en-US"/>
           </a:p>
         </p:txBody>
       </p:sp>
@@ -1676,7 +1678,7 @@
           <a:p>
             <a:pPr lvl="0"/>
             <a:r>
-              <a:rPr lang="en-US" smtClean="0"/>
+              <a:rPr lang="en-US"/>
               <a:t>Click to edit Master text styles</a:t>
             </a:r>
           </a:p>
@@ -1732,38 +1734,37 @@
           <a:p>
             <a:pPr lvl="0"/>
             <a:r>
-              <a:rPr lang="en-US" smtClean="0"/>
+              <a:rPr lang="en-US"/>
               <a:t>Click to edit Master text styles</a:t>
             </a:r>
           </a:p>
           <a:p>
             <a:pPr lvl="1"/>
             <a:r>
-              <a:rPr lang="en-US" smtClean="0"/>
+              <a:rPr lang="en-US"/>
               <a:t>Second level</a:t>
             </a:r>
           </a:p>
           <a:p>
             <a:pPr lvl="2"/>
             <a:r>
-              <a:rPr lang="en-US" smtClean="0"/>
+              <a:rPr lang="en-US"/>
               <a:t>Third level</a:t>
             </a:r>
           </a:p>
           <a:p>
             <a:pPr lvl="3"/>
             <a:r>
-              <a:rPr lang="en-US" smtClean="0"/>
+              <a:rPr lang="en-US"/>
               <a:t>Fourth level</a:t>
             </a:r>
           </a:p>
           <a:p>
             <a:pPr lvl="4"/>
             <a:r>
-              <a:rPr lang="en-US" smtClean="0"/>
+              <a:rPr lang="en-US"/>
               <a:t>Fifth level</a:t>
             </a:r>
-            <a:endParaRPr lang="en-US"/>
           </a:p>
         </p:txBody>
       </p:sp>
@@ -1784,7 +1785,7 @@
           <a:p>
             <a:fld id="{5BCAD085-E8A6-8845-BD4E-CB4CCA059FC4}" type="datetimeFigureOut">
               <a:rPr lang="en-US" smtClean="0"/>
-              <a:t>1/27/13</a:t>
+              <a:t>7/23/2026</a:t>
             </a:fld>
             <a:endParaRPr lang="en-US"/>
           </a:p>
@@ -1878,10 +1879,9 @@
           <a:lstStyle/>
           <a:p>
             <a:r>
-              <a:rPr lang="en-US" smtClean="0"/>
+              <a:rPr lang="en-US"/>
               <a:t>Click to edit Master title style</a:t>
             </a:r>
-            <a:endParaRPr lang="en-US"/>
           </a:p>
         </p:txBody>
       </p:sp>
@@ -1902,7 +1902,7 @@
           <a:p>
             <a:fld id="{5BCAD085-E8A6-8845-BD4E-CB4CCA059FC4}" type="datetimeFigureOut">
               <a:rPr lang="en-US" smtClean="0"/>
-              <a:t>1/27/13</a:t>
+              <a:t>7/23/2026</a:t>
             </a:fld>
             <a:endParaRPr lang="en-US"/>
           </a:p>
@@ -1997,7 +1997,7 @@
           <a:p>
             <a:fld id="{5BCAD085-E8A6-8845-BD4E-CB4CCA059FC4}" type="datetimeFigureOut">
               <a:rPr lang="en-US" smtClean="0"/>
-              <a:t>1/27/13</a:t>
+              <a:t>7/23/2026</a:t>
             </a:fld>
             <a:endParaRPr lang="en-US"/>
           </a:p>
@@ -2100,10 +2100,9 @@
           </a:lstStyle>
           <a:p>
             <a:r>
-              <a:rPr lang="en-US" smtClean="0"/>
+              <a:rPr lang="en-US"/>
               <a:t>Click to edit Master title style</a:t>
             </a:r>
-            <a:endParaRPr lang="en-US"/>
           </a:p>
         </p:txBody>
       </p:sp>
@@ -2157,38 +2156,37 @@
           <a:p>
             <a:pPr lvl="0"/>
             <a:r>
-              <a:rPr lang="en-US" smtClean="0"/>
+              <a:rPr lang="en-US"/>
               <a:t>Click to edit Master text styles</a:t>
             </a:r>
           </a:p>
           <a:p>
             <a:pPr lvl="1"/>
             <a:r>
-              <a:rPr lang="en-US" smtClean="0"/>
+              <a:rPr lang="en-US"/>
               <a:t>Second level</a:t>
             </a:r>
           </a:p>
           <a:p>
             <a:pPr lvl="2"/>
             <a:r>
-              <a:rPr lang="en-US" smtClean="0"/>
+              <a:rPr lang="en-US"/>
               <a:t>Third level</a:t>
             </a:r>
           </a:p>
           <a:p>
             <a:pPr lvl="3"/>
             <a:r>
-              <a:rPr lang="en-US" smtClean="0"/>
+              <a:rPr lang="en-US"/>
               <a:t>Fourth level</a:t>
             </a:r>
           </a:p>
           <a:p>
             <a:pPr lvl="4"/>
             <a:r>
-              <a:rPr lang="en-US" smtClean="0"/>
+              <a:rPr lang="en-US"/>
               <a:t>Fifth level</a:t>
             </a:r>
-            <a:endParaRPr lang="en-US"/>
           </a:p>
         </p:txBody>
       </p:sp>
@@ -2251,7 +2249,7 @@
           <a:p>
             <a:pPr lvl="0"/>
             <a:r>
-              <a:rPr lang="en-US" smtClean="0"/>
+              <a:rPr lang="en-US"/>
               <a:t>Click to edit Master text styles</a:t>
             </a:r>
           </a:p>
@@ -2274,7 +2272,7 @@
           <a:p>
             <a:fld id="{5BCAD085-E8A6-8845-BD4E-CB4CCA059FC4}" type="datetimeFigureOut">
               <a:rPr lang="en-US" smtClean="0"/>
-              <a:t>1/27/13</a:t>
+              <a:t>7/23/2026</a:t>
             </a:fld>
             <a:endParaRPr lang="en-US"/>
           </a:p>
@@ -2377,10 +2375,9 @@
           </a:lstStyle>
           <a:p>
             <a:r>
-              <a:rPr lang="en-US" smtClean="0"/>
+              <a:rPr lang="en-US"/>
               <a:t>Click to edit Master title style</a:t>
             </a:r>
-            <a:endParaRPr lang="en-US"/>
           </a:p>
         </p:txBody>
       </p:sp>
@@ -2504,7 +2501,7 @@
           <a:p>
             <a:pPr lvl="0"/>
             <a:r>
-              <a:rPr lang="en-US" smtClean="0"/>
+              <a:rPr lang="en-US"/>
               <a:t>Click to edit Master text styles</a:t>
             </a:r>
           </a:p>
@@ -2527,7 +2524,7 @@
           <a:p>
             <a:fld id="{5BCAD085-E8A6-8845-BD4E-CB4CCA059FC4}" type="datetimeFigureOut">
               <a:rPr lang="en-US" smtClean="0"/>
-              <a:t>1/27/13</a:t>
+              <a:t>7/23/2026</a:t>
             </a:fld>
             <a:endParaRPr lang="en-US"/>
           </a:p>
@@ -2636,10 +2633,9 @@
           <a:lstStyle/>
           <a:p>
             <a:r>
-              <a:rPr lang="en-US" smtClean="0"/>
+              <a:rPr lang="en-US"/>
               <a:t>Click to edit Master title style</a:t>
             </a:r>
-            <a:endParaRPr lang="en-US"/>
           </a:p>
         </p:txBody>
       </p:sp>
@@ -2670,38 +2666,37 @@
           <a:p>
             <a:pPr lvl="0"/>
             <a:r>
-              <a:rPr lang="en-US" smtClean="0"/>
+              <a:rPr lang="en-US"/>
               <a:t>Click to edit Master text styles</a:t>
             </a:r>
           </a:p>
           <a:p>
             <a:pPr lvl="1"/>
             <a:r>
-              <a:rPr lang="en-US" smtClean="0"/>
+              <a:rPr lang="en-US"/>
               <a:t>Second level</a:t>
             </a:r>
           </a:p>
           <a:p>
             <a:pPr lvl="2"/>
             <a:r>
-              <a:rPr lang="en-US" smtClean="0"/>
+              <a:rPr lang="en-US"/>
               <a:t>Third level</a:t>
             </a:r>
           </a:p>
           <a:p>
             <a:pPr lvl="3"/>
             <a:r>
-              <a:rPr lang="en-US" smtClean="0"/>
+              <a:rPr lang="en-US"/>
               <a:t>Fourth level</a:t>
             </a:r>
           </a:p>
           <a:p>
             <a:pPr lvl="4"/>
             <a:r>
-              <a:rPr lang="en-US" smtClean="0"/>
+              <a:rPr lang="en-US"/>
               <a:t>Fifth level</a:t>
             </a:r>
-            <a:endParaRPr lang="en-US"/>
           </a:p>
         </p:txBody>
       </p:sp>
@@ -2740,7 +2735,7 @@
           <a:p>
             <a:fld id="{5BCAD085-E8A6-8845-BD4E-CB4CCA059FC4}" type="datetimeFigureOut">
               <a:rPr lang="en-US" smtClean="0"/>
-              <a:t>1/27/13</a:t>
+              <a:t>7/23/2026</a:t>
             </a:fld>
             <a:endParaRPr lang="en-US"/>
           </a:p>
@@ -3099,7 +3094,7 @@
 </file>
 
 <file path=ppt/slides/slide1.xml><?xml version="1.0" encoding="utf-8"?>
-<p:sld xmlns:a="http://schemas.openxmlformats.org/drawingml/2006/main" xmlns:p="http://schemas.openxmlformats.org/presentationml/2006/main" xmlns:r="http://schemas.openxmlformats.org/officeDocument/2006/relationships">
+<p:sld xmlns:a="http://schemas.openxmlformats.org/drawingml/2006/main" xmlns:r="http://schemas.openxmlformats.org/officeDocument/2006/relationships" xmlns:p="http://schemas.openxmlformats.org/presentationml/2006/main">
   <p:cSld>
     <p:spTree>
       <p:nvGrpSpPr>
@@ -3107,7 +3102,14 @@
         <p:cNvGrpSpPr/>
         <p:nvPr/>
       </p:nvGrpSpPr>
-      <p:grpSpPr/>
+      <p:grpSpPr>
+        <a:xfrm>
+          <a:off x="0" y="0"/>
+          <a:ext cx="0" cy="0"/>
+          <a:chOff x="0" y="0"/>
+          <a:chExt cx="0" cy="0"/>
+        </a:xfrm>
+      </p:grpSpPr>
       <p:sp>
         <p:nvSpPr>
           <p:cNvPr id="2" name="Rectangle 1"/>
@@ -3149,6 +3151,7 @@
           <a:lstStyle/>
           <a:p>
             <a:pPr algn="ctr"/>
+            <a:endParaRPr/>
           </a:p>
         </p:txBody>
       </p:sp>
@@ -3193,6 +3196,7 @@
           <a:lstStyle/>
           <a:p>
             <a:pPr algn="ctr"/>
+            <a:endParaRPr/>
           </a:p>
         </p:txBody>
       </p:sp>
@@ -3237,6 +3241,7 @@
           <a:lstStyle/>
           <a:p>
             <a:pPr algn="ctr"/>
+            <a:endParaRPr/>
           </a:p>
         </p:txBody>
       </p:sp>
@@ -3281,6 +3286,7 @@
           <a:lstStyle/>
           <a:p>
             <a:pPr algn="ctr"/>
+            <a:endParaRPr/>
           </a:p>
         </p:txBody>
       </p:sp>
@@ -3301,7 +3307,7 @@
           <a:noFill/>
         </p:spPr>
         <p:txBody>
-          <a:bodyPr wrap="square" anchor="t" lIns="25400" rIns="25400" tIns="25400" bIns="25400">
+          <a:bodyPr wrap="square" lIns="25400" tIns="25400" rIns="25400" bIns="25400" anchor="t">
             <a:spAutoFit/>
           </a:bodyPr>
           <a:lstStyle/>
@@ -3335,7 +3341,7 @@
           <a:noFill/>
         </p:spPr>
         <p:txBody>
-          <a:bodyPr wrap="square" anchor="ctr" lIns="25400" rIns="25400" tIns="25400" bIns="25400">
+          <a:bodyPr wrap="square" lIns="25400" tIns="25400" rIns="25400" bIns="25400" anchor="ctr">
             <a:spAutoFit/>
           </a:bodyPr>
           <a:lstStyle/>
@@ -3370,7 +3376,7 @@
           <a:noFill/>
         </p:spPr>
         <p:txBody>
-          <a:bodyPr wrap="square" anchor="ctr" lIns="25400" rIns="25400" tIns="25400" bIns="25400">
+          <a:bodyPr wrap="square" lIns="25400" tIns="25400" rIns="25400" bIns="25400" anchor="ctr">
             <a:spAutoFit/>
           </a:bodyPr>
           <a:lstStyle/>
@@ -3405,7 +3411,7 @@
           <a:noFill/>
         </p:spPr>
         <p:txBody>
-          <a:bodyPr wrap="square" anchor="t" lIns="25400" rIns="25400" tIns="25400" bIns="25400">
+          <a:bodyPr wrap="square" lIns="25400" tIns="25400" rIns="25400" bIns="25400" anchor="t">
             <a:spAutoFit/>
           </a:bodyPr>
           <a:lstStyle/>
@@ -3440,11 +3446,13 @@
           <a:noFill/>
         </p:spPr>
         <p:txBody>
-          <a:bodyPr wrap="square" anchor="t" lIns="25400" rIns="25400" tIns="25400" bIns="25400">
+          <a:bodyPr wrap="square" lIns="25400" tIns="25400" rIns="25400" bIns="25400" anchor="t">
             <a:spAutoFit/>
           </a:bodyPr>
           <a:lstStyle/>
-          <a:p/>
+          <a:p>
+            <a:endParaRPr/>
+          </a:p>
           <a:p>
             <a:pPr algn="ctr">
               <a:spcAft>
@@ -3522,7 +3530,7 @@
 </file>
 
 <file path=ppt/slides/slide10.xml><?xml version="1.0" encoding="utf-8"?>
-<p:sld xmlns:a="http://schemas.openxmlformats.org/drawingml/2006/main" xmlns:p="http://schemas.openxmlformats.org/presentationml/2006/main" xmlns:r="http://schemas.openxmlformats.org/officeDocument/2006/relationships">
+<p:sld xmlns:a="http://schemas.openxmlformats.org/drawingml/2006/main" xmlns:r="http://schemas.openxmlformats.org/officeDocument/2006/relationships" xmlns:p="http://schemas.openxmlformats.org/presentationml/2006/main">
   <p:cSld>
     <p:spTree>
       <p:nvGrpSpPr>
@@ -3530,7 +3538,14 @@
         <p:cNvGrpSpPr/>
         <p:nvPr/>
       </p:nvGrpSpPr>
-      <p:grpSpPr/>
+      <p:grpSpPr>
+        <a:xfrm>
+          <a:off x="0" y="0"/>
+          <a:ext cx="0" cy="0"/>
+          <a:chOff x="0" y="0"/>
+          <a:chExt cx="0" cy="0"/>
+        </a:xfrm>
+      </p:grpSpPr>
       <p:sp>
         <p:nvSpPr>
           <p:cNvPr id="2" name="Rectangle 1"/>
@@ -3572,6 +3587,7 @@
           <a:lstStyle/>
           <a:p>
             <a:pPr algn="ctr"/>
+            <a:endParaRPr/>
           </a:p>
         </p:txBody>
       </p:sp>
@@ -3616,6 +3632,7 @@
           <a:lstStyle/>
           <a:p>
             <a:pPr algn="ctr"/>
+            <a:endParaRPr/>
           </a:p>
         </p:txBody>
       </p:sp>
@@ -3636,7 +3653,7 @@
           <a:noFill/>
         </p:spPr>
         <p:txBody>
-          <a:bodyPr wrap="square" anchor="ctr" lIns="25400" rIns="25400" tIns="25400" bIns="25400">
+          <a:bodyPr wrap="square" lIns="25400" tIns="25400" rIns="25400" bIns="25400" anchor="ctr">
             <a:spAutoFit/>
           </a:bodyPr>
           <a:lstStyle/>
@@ -3681,7 +3698,7 @@
           <a:noFill/>
         </p:spPr>
         <p:txBody>
-          <a:bodyPr wrap="square" anchor="ctr" lIns="25400" rIns="25400" tIns="25400" bIns="25400">
+          <a:bodyPr wrap="square" lIns="25400" tIns="25400" rIns="25400" bIns="25400" anchor="ctr">
             <a:spAutoFit/>
           </a:bodyPr>
           <a:lstStyle/>
@@ -3715,7 +3732,7 @@
           <a:noFill/>
         </p:spPr>
         <p:txBody>
-          <a:bodyPr wrap="square" anchor="ctr" lIns="25400" rIns="25400" tIns="25400" bIns="25400">
+          <a:bodyPr wrap="square" lIns="25400" tIns="25400" rIns="25400" bIns="25400" anchor="ctr">
             <a:spAutoFit/>
           </a:bodyPr>
           <a:lstStyle/>
@@ -3750,7 +3767,7 @@
           <a:noFill/>
         </p:spPr>
         <p:txBody>
-          <a:bodyPr wrap="square" anchor="t" lIns="25400" rIns="25400" tIns="25400" bIns="25400">
+          <a:bodyPr wrap="square" lIns="25400" tIns="25400" rIns="25400" bIns="25400" anchor="t">
             <a:spAutoFit/>
           </a:bodyPr>
           <a:lstStyle/>
@@ -3999,16 +4016,46 @@
                 <a:tableStyleId>{5C22544A-7EE6-4342-B048-85BDC9FD1C3A}</a:tableStyleId>
               </a:tblPr>
               <a:tblGrid>
-                <a:gridCol w="1114697"/>
-                <a:gridCol w="1207588"/>
-                <a:gridCol w="1207588"/>
-                <a:gridCol w="1207588"/>
-                <a:gridCol w="1114697"/>
+                <a:gridCol w="1114697">
+                  <a:extLst>
+                    <a:ext uri="{9D8B030D-6E8A-4147-A177-3AD203B41FA5}">
+                      <a16:colId xmlns:a16="http://schemas.microsoft.com/office/drawing/2014/main" val="20000"/>
+                    </a:ext>
+                  </a:extLst>
+                </a:gridCol>
+                <a:gridCol w="1207588">
+                  <a:extLst>
+                    <a:ext uri="{9D8B030D-6E8A-4147-A177-3AD203B41FA5}">
+                      <a16:colId xmlns:a16="http://schemas.microsoft.com/office/drawing/2014/main" val="20001"/>
+                    </a:ext>
+                  </a:extLst>
+                </a:gridCol>
+                <a:gridCol w="1207588">
+                  <a:extLst>
+                    <a:ext uri="{9D8B030D-6E8A-4147-A177-3AD203B41FA5}">
+                      <a16:colId xmlns:a16="http://schemas.microsoft.com/office/drawing/2014/main" val="20002"/>
+                    </a:ext>
+                  </a:extLst>
+                </a:gridCol>
+                <a:gridCol w="1207588">
+                  <a:extLst>
+                    <a:ext uri="{9D8B030D-6E8A-4147-A177-3AD203B41FA5}">
+                      <a16:colId xmlns:a16="http://schemas.microsoft.com/office/drawing/2014/main" val="20003"/>
+                    </a:ext>
+                  </a:extLst>
+                </a:gridCol>
+                <a:gridCol w="1114697">
+                  <a:extLst>
+                    <a:ext uri="{9D8B030D-6E8A-4147-A177-3AD203B41FA5}">
+                      <a16:colId xmlns:a16="http://schemas.microsoft.com/office/drawing/2014/main" val="20004"/>
+                    </a:ext>
+                  </a:extLst>
+                </a:gridCol>
               </a:tblGrid>
               <a:tr h="457200">
                 <a:tc>
                   <a:txBody>
-                    <a:bodyPr wrap="square"/>
+                    <a:bodyPr/>
                     <a:lstStyle/>
                     <a:p>
                       <a:pPr algn="ctr"/>
@@ -4031,7 +4078,7 @@
                 </a:tc>
                 <a:tc>
                   <a:txBody>
-                    <a:bodyPr wrap="square"/>
+                    <a:bodyPr/>
                     <a:lstStyle/>
                     <a:p>
                       <a:pPr algn="ctr"/>
@@ -4054,7 +4101,7 @@
                 </a:tc>
                 <a:tc>
                   <a:txBody>
-                    <a:bodyPr wrap="square"/>
+                    <a:bodyPr/>
                     <a:lstStyle/>
                     <a:p>
                       <a:pPr algn="ctr"/>
@@ -4077,7 +4124,7 @@
                 </a:tc>
                 <a:tc>
                   <a:txBody>
-                    <a:bodyPr wrap="square"/>
+                    <a:bodyPr/>
                     <a:lstStyle/>
                     <a:p>
                       <a:pPr algn="ctr"/>
@@ -4100,7 +4147,7 @@
                 </a:tc>
                 <a:tc>
                   <a:txBody>
-                    <a:bodyPr wrap="square"/>
+                    <a:bodyPr/>
                     <a:lstStyle/>
                     <a:p>
                       <a:pPr algn="ctr"/>
@@ -4121,11 +4168,16 @@
                     </a:solidFill>
                   </a:tcPr>
                 </a:tc>
+                <a:extLst>
+                  <a:ext uri="{0D108BD9-81ED-4DB2-BD59-A6C34878D82A}">
+                    <a16:rowId xmlns:a16="http://schemas.microsoft.com/office/drawing/2014/main" val="10000"/>
+                  </a:ext>
+                </a:extLst>
               </a:tr>
               <a:tr h="457200">
                 <a:tc>
                   <a:txBody>
-                    <a:bodyPr wrap="square"/>
+                    <a:bodyPr/>
                     <a:lstStyle/>
                     <a:p>
                       <a:pPr algn="ctr"/>
@@ -4148,7 +4200,7 @@
                 </a:tc>
                 <a:tc>
                   <a:txBody>
-                    <a:bodyPr wrap="square"/>
+                    <a:bodyPr/>
                     <a:lstStyle/>
                     <a:p>
                       <a:pPr algn="ctr"/>
@@ -4171,7 +4223,7 @@
                 </a:tc>
                 <a:tc>
                   <a:txBody>
-                    <a:bodyPr wrap="square"/>
+                    <a:bodyPr/>
                     <a:lstStyle/>
                     <a:p>
                       <a:pPr algn="ctr"/>
@@ -4194,7 +4246,7 @@
                 </a:tc>
                 <a:tc>
                   <a:txBody>
-                    <a:bodyPr wrap="square"/>
+                    <a:bodyPr/>
                     <a:lstStyle/>
                     <a:p>
                       <a:pPr algn="ctr"/>
@@ -4217,7 +4269,7 @@
                 </a:tc>
                 <a:tc>
                   <a:txBody>
-                    <a:bodyPr wrap="square"/>
+                    <a:bodyPr/>
                     <a:lstStyle/>
                     <a:p>
                       <a:pPr algn="ctr"/>
@@ -4238,11 +4290,16 @@
                     </a:solidFill>
                   </a:tcPr>
                 </a:tc>
+                <a:extLst>
+                  <a:ext uri="{0D108BD9-81ED-4DB2-BD59-A6C34878D82A}">
+                    <a16:rowId xmlns:a16="http://schemas.microsoft.com/office/drawing/2014/main" val="10001"/>
+                  </a:ext>
+                </a:extLst>
               </a:tr>
               <a:tr h="457200">
                 <a:tc>
                   <a:txBody>
-                    <a:bodyPr wrap="square"/>
+                    <a:bodyPr/>
                     <a:lstStyle/>
                     <a:p>
                       <a:pPr algn="ctr"/>
@@ -4265,7 +4322,7 @@
                 </a:tc>
                 <a:tc>
                   <a:txBody>
-                    <a:bodyPr wrap="square"/>
+                    <a:bodyPr/>
                     <a:lstStyle/>
                     <a:p>
                       <a:pPr algn="ctr"/>
@@ -4288,7 +4345,7 @@
                 </a:tc>
                 <a:tc>
                   <a:txBody>
-                    <a:bodyPr wrap="square"/>
+                    <a:bodyPr/>
                     <a:lstStyle/>
                     <a:p>
                       <a:pPr algn="ctr"/>
@@ -4311,7 +4368,7 @@
                 </a:tc>
                 <a:tc>
                   <a:txBody>
-                    <a:bodyPr wrap="square"/>
+                    <a:bodyPr/>
                     <a:lstStyle/>
                     <a:p>
                       <a:pPr algn="ctr"/>
@@ -4334,7 +4391,7 @@
                 </a:tc>
                 <a:tc>
                   <a:txBody>
-                    <a:bodyPr wrap="square"/>
+                    <a:bodyPr/>
                     <a:lstStyle/>
                     <a:p>
                       <a:pPr algn="ctr"/>
@@ -4355,11 +4412,16 @@
                     </a:solidFill>
                   </a:tcPr>
                 </a:tc>
+                <a:extLst>
+                  <a:ext uri="{0D108BD9-81ED-4DB2-BD59-A6C34878D82A}">
+                    <a16:rowId xmlns:a16="http://schemas.microsoft.com/office/drawing/2014/main" val="10002"/>
+                  </a:ext>
+                </a:extLst>
               </a:tr>
               <a:tr h="457200">
                 <a:tc>
                   <a:txBody>
-                    <a:bodyPr wrap="square"/>
+                    <a:bodyPr/>
                     <a:lstStyle/>
                     <a:p>
                       <a:pPr algn="ctr"/>
@@ -4382,7 +4444,7 @@
                 </a:tc>
                 <a:tc>
                   <a:txBody>
-                    <a:bodyPr wrap="square"/>
+                    <a:bodyPr/>
                     <a:lstStyle/>
                     <a:p>
                       <a:pPr algn="ctr"/>
@@ -4405,7 +4467,7 @@
                 </a:tc>
                 <a:tc>
                   <a:txBody>
-                    <a:bodyPr wrap="square"/>
+                    <a:bodyPr/>
                     <a:lstStyle/>
                     <a:p>
                       <a:pPr algn="ctr"/>
@@ -4428,7 +4490,7 @@
                 </a:tc>
                 <a:tc>
                   <a:txBody>
-                    <a:bodyPr wrap="square"/>
+                    <a:bodyPr/>
                     <a:lstStyle/>
                     <a:p>
                       <a:pPr algn="ctr"/>
@@ -4451,7 +4513,7 @@
                 </a:tc>
                 <a:tc>
                   <a:txBody>
-                    <a:bodyPr wrap="square"/>
+                    <a:bodyPr/>
                     <a:lstStyle/>
                     <a:p>
                       <a:pPr algn="ctr"/>
@@ -4472,11 +4534,16 @@
                     </a:solidFill>
                   </a:tcPr>
                 </a:tc>
+                <a:extLst>
+                  <a:ext uri="{0D108BD9-81ED-4DB2-BD59-A6C34878D82A}">
+                    <a16:rowId xmlns:a16="http://schemas.microsoft.com/office/drawing/2014/main" val="10003"/>
+                  </a:ext>
+                </a:extLst>
               </a:tr>
               <a:tr h="457200">
                 <a:tc>
                   <a:txBody>
-                    <a:bodyPr wrap="square"/>
+                    <a:bodyPr/>
                     <a:lstStyle/>
                     <a:p>
                       <a:pPr algn="ctr"/>
@@ -4499,7 +4566,7 @@
                 </a:tc>
                 <a:tc>
                   <a:txBody>
-                    <a:bodyPr wrap="square"/>
+                    <a:bodyPr/>
                     <a:lstStyle/>
                     <a:p>
                       <a:pPr algn="ctr"/>
@@ -4522,7 +4589,7 @@
                 </a:tc>
                 <a:tc>
                   <a:txBody>
-                    <a:bodyPr wrap="square"/>
+                    <a:bodyPr/>
                     <a:lstStyle/>
                     <a:p>
                       <a:pPr algn="ctr"/>
@@ -4545,7 +4612,7 @@
                 </a:tc>
                 <a:tc>
                   <a:txBody>
-                    <a:bodyPr wrap="square"/>
+                    <a:bodyPr/>
                     <a:lstStyle/>
                     <a:p>
                       <a:pPr algn="ctr"/>
@@ -4568,7 +4635,7 @@
                 </a:tc>
                 <a:tc>
                   <a:txBody>
-                    <a:bodyPr wrap="square"/>
+                    <a:bodyPr/>
                     <a:lstStyle/>
                     <a:p>
                       <a:pPr algn="ctr"/>
@@ -4589,6 +4656,11 @@
                     </a:solidFill>
                   </a:tcPr>
                 </a:tc>
+                <a:extLst>
+                  <a:ext uri="{0D108BD9-81ED-4DB2-BD59-A6C34878D82A}">
+                    <a16:rowId xmlns:a16="http://schemas.microsoft.com/office/drawing/2014/main" val="10004"/>
+                  </a:ext>
+                </a:extLst>
               </a:tr>
             </a:tbl>
           </a:graphicData>
@@ -4611,7 +4683,7 @@
           <a:noFill/>
         </p:spPr>
         <p:txBody>
-          <a:bodyPr wrap="square" anchor="t" lIns="25400" rIns="25400" tIns="25400" bIns="25400">
+          <a:bodyPr wrap="square" lIns="25400" tIns="25400" rIns="25400" bIns="25400" anchor="t">
             <a:spAutoFit/>
           </a:bodyPr>
           <a:lstStyle/>
@@ -4670,6 +4742,7 @@
           <a:lstStyle/>
           <a:p>
             <a:pPr algn="ctr"/>
+            <a:endParaRPr/>
           </a:p>
         </p:txBody>
       </p:sp>
@@ -4714,6 +4787,7 @@
           <a:lstStyle/>
           <a:p>
             <a:pPr algn="ctr"/>
+            <a:endParaRPr/>
           </a:p>
         </p:txBody>
       </p:sp>
@@ -4734,7 +4808,7 @@
           <a:noFill/>
         </p:spPr>
         <p:txBody>
-          <a:bodyPr wrap="square" anchor="t" lIns="25400" rIns="25400" tIns="25400" bIns="25400">
+          <a:bodyPr wrap="square" lIns="25400" tIns="25400" rIns="25400" bIns="25400" anchor="t">
             <a:spAutoFit/>
           </a:bodyPr>
           <a:lstStyle/>
@@ -4797,7 +4871,7 @@
 </file>
 
 <file path=ppt/slides/slide11.xml><?xml version="1.0" encoding="utf-8"?>
-<p:sld xmlns:a="http://schemas.openxmlformats.org/drawingml/2006/main" xmlns:p="http://schemas.openxmlformats.org/presentationml/2006/main" xmlns:r="http://schemas.openxmlformats.org/officeDocument/2006/relationships">
+<p:sld xmlns:a="http://schemas.openxmlformats.org/drawingml/2006/main" xmlns:r="http://schemas.openxmlformats.org/officeDocument/2006/relationships" xmlns:p="http://schemas.openxmlformats.org/presentationml/2006/main">
   <p:cSld>
     <p:spTree>
       <p:nvGrpSpPr>
@@ -4805,7 +4879,14 @@
         <p:cNvGrpSpPr/>
         <p:nvPr/>
       </p:nvGrpSpPr>
-      <p:grpSpPr/>
+      <p:grpSpPr>
+        <a:xfrm>
+          <a:off x="0" y="0"/>
+          <a:ext cx="0" cy="0"/>
+          <a:chOff x="0" y="0"/>
+          <a:chExt cx="0" cy="0"/>
+        </a:xfrm>
+      </p:grpSpPr>
       <p:sp>
         <p:nvSpPr>
           <p:cNvPr id="2" name="Rectangle 1"/>
@@ -4847,6 +4928,7 @@
           <a:lstStyle/>
           <a:p>
             <a:pPr algn="ctr"/>
+            <a:endParaRPr/>
           </a:p>
         </p:txBody>
       </p:sp>
@@ -4891,6 +4973,7 @@
           <a:lstStyle/>
           <a:p>
             <a:pPr algn="ctr"/>
+            <a:endParaRPr/>
           </a:p>
         </p:txBody>
       </p:sp>
@@ -4911,7 +4994,7 @@
           <a:noFill/>
         </p:spPr>
         <p:txBody>
-          <a:bodyPr wrap="square" anchor="ctr" lIns="25400" rIns="25400" tIns="25400" bIns="25400">
+          <a:bodyPr wrap="square" lIns="25400" tIns="25400" rIns="25400" bIns="25400" anchor="ctr">
             <a:spAutoFit/>
           </a:bodyPr>
           <a:lstStyle/>
@@ -4956,7 +5039,7 @@
           <a:noFill/>
         </p:spPr>
         <p:txBody>
-          <a:bodyPr wrap="square" anchor="ctr" lIns="25400" rIns="25400" tIns="25400" bIns="25400">
+          <a:bodyPr wrap="square" lIns="25400" tIns="25400" rIns="25400" bIns="25400" anchor="ctr">
             <a:spAutoFit/>
           </a:bodyPr>
           <a:lstStyle/>
@@ -4990,7 +5073,7 @@
           <a:noFill/>
         </p:spPr>
         <p:txBody>
-          <a:bodyPr wrap="square" anchor="ctr" lIns="25400" rIns="25400" tIns="25400" bIns="25400">
+          <a:bodyPr wrap="square" lIns="25400" tIns="25400" rIns="25400" bIns="25400" anchor="ctr">
             <a:spAutoFit/>
           </a:bodyPr>
           <a:lstStyle/>
@@ -5027,15 +5110,39 @@
                 <a:tableStyleId>{5C22544A-7EE6-4342-B048-85BDC9FD1C3A}</a:tableStyleId>
               </a:tblPr>
               <a:tblGrid>
-                <a:gridCol w="1008126"/>
-                <a:gridCol w="6160770"/>
-                <a:gridCol w="1568195"/>
-                <a:gridCol w="2464308"/>
+                <a:gridCol w="1008126">
+                  <a:extLst>
+                    <a:ext uri="{9D8B030D-6E8A-4147-A177-3AD203B41FA5}">
+                      <a16:colId xmlns:a16="http://schemas.microsoft.com/office/drawing/2014/main" val="20000"/>
+                    </a:ext>
+                  </a:extLst>
+                </a:gridCol>
+                <a:gridCol w="6160770">
+                  <a:extLst>
+                    <a:ext uri="{9D8B030D-6E8A-4147-A177-3AD203B41FA5}">
+                      <a16:colId xmlns:a16="http://schemas.microsoft.com/office/drawing/2014/main" val="20001"/>
+                    </a:ext>
+                  </a:extLst>
+                </a:gridCol>
+                <a:gridCol w="1568195">
+                  <a:extLst>
+                    <a:ext uri="{9D8B030D-6E8A-4147-A177-3AD203B41FA5}">
+                      <a16:colId xmlns:a16="http://schemas.microsoft.com/office/drawing/2014/main" val="20002"/>
+                    </a:ext>
+                  </a:extLst>
+                </a:gridCol>
+                <a:gridCol w="2464308">
+                  <a:extLst>
+                    <a:ext uri="{9D8B030D-6E8A-4147-A177-3AD203B41FA5}">
+                      <a16:colId xmlns:a16="http://schemas.microsoft.com/office/drawing/2014/main" val="20003"/>
+                    </a:ext>
+                  </a:extLst>
+                </a:gridCol>
               </a:tblGrid>
               <a:tr h="457200">
                 <a:tc>
                   <a:txBody>
-                    <a:bodyPr wrap="square"/>
+                    <a:bodyPr/>
                     <a:lstStyle/>
                     <a:p>
                       <a:pPr algn="ctr"/>
@@ -5058,7 +5165,7 @@
                 </a:tc>
                 <a:tc>
                   <a:txBody>
-                    <a:bodyPr wrap="square"/>
+                    <a:bodyPr/>
                     <a:lstStyle/>
                     <a:p>
                       <a:pPr algn="ctr"/>
@@ -5081,7 +5188,7 @@
                 </a:tc>
                 <a:tc>
                   <a:txBody>
-                    <a:bodyPr wrap="square"/>
+                    <a:bodyPr/>
                     <a:lstStyle/>
                     <a:p>
                       <a:pPr algn="ctr"/>
@@ -5104,7 +5211,7 @@
                 </a:tc>
                 <a:tc>
                   <a:txBody>
-                    <a:bodyPr wrap="square"/>
+                    <a:bodyPr/>
                     <a:lstStyle/>
                     <a:p>
                       <a:pPr algn="ctr"/>
@@ -5125,11 +5232,16 @@
                     </a:solidFill>
                   </a:tcPr>
                 </a:tc>
+                <a:extLst>
+                  <a:ext uri="{0D108BD9-81ED-4DB2-BD59-A6C34878D82A}">
+                    <a16:rowId xmlns:a16="http://schemas.microsoft.com/office/drawing/2014/main" val="10000"/>
+                  </a:ext>
+                </a:extLst>
               </a:tr>
               <a:tr h="457200">
                 <a:tc>
                   <a:txBody>
-                    <a:bodyPr wrap="square"/>
+                    <a:bodyPr/>
                     <a:lstStyle/>
                     <a:p>
                       <a:pPr algn="ctr"/>
@@ -5152,7 +5264,7 @@
                 </a:tc>
                 <a:tc>
                   <a:txBody>
-                    <a:bodyPr wrap="square"/>
+                    <a:bodyPr/>
                     <a:lstStyle/>
                     <a:p>
                       <a:pPr algn="ctr"/>
@@ -5175,7 +5287,7 @@
                 </a:tc>
                 <a:tc>
                   <a:txBody>
-                    <a:bodyPr wrap="square"/>
+                    <a:bodyPr/>
                     <a:lstStyle/>
                     <a:p>
                       <a:pPr algn="ctr"/>
@@ -5198,7 +5310,7 @@
                 </a:tc>
                 <a:tc>
                   <a:txBody>
-                    <a:bodyPr wrap="square"/>
+                    <a:bodyPr/>
                     <a:lstStyle/>
                     <a:p>
                       <a:pPr algn="ctr"/>
@@ -5219,11 +5331,16 @@
                     </a:solidFill>
                   </a:tcPr>
                 </a:tc>
+                <a:extLst>
+                  <a:ext uri="{0D108BD9-81ED-4DB2-BD59-A6C34878D82A}">
+                    <a16:rowId xmlns:a16="http://schemas.microsoft.com/office/drawing/2014/main" val="10001"/>
+                  </a:ext>
+                </a:extLst>
               </a:tr>
               <a:tr h="457200">
                 <a:tc>
                   <a:txBody>
-                    <a:bodyPr wrap="square"/>
+                    <a:bodyPr/>
                     <a:lstStyle/>
                     <a:p>
                       <a:pPr algn="ctr"/>
@@ -5246,7 +5363,7 @@
                 </a:tc>
                 <a:tc>
                   <a:txBody>
-                    <a:bodyPr wrap="square"/>
+                    <a:bodyPr/>
                     <a:lstStyle/>
                     <a:p>
                       <a:pPr algn="ctr"/>
@@ -5269,7 +5386,7 @@
                 </a:tc>
                 <a:tc>
                   <a:txBody>
-                    <a:bodyPr wrap="square"/>
+                    <a:bodyPr/>
                     <a:lstStyle/>
                     <a:p>
                       <a:pPr algn="ctr"/>
@@ -5292,7 +5409,7 @@
                 </a:tc>
                 <a:tc>
                   <a:txBody>
-                    <a:bodyPr wrap="square"/>
+                    <a:bodyPr/>
                     <a:lstStyle/>
                     <a:p>
                       <a:pPr algn="ctr"/>
@@ -5313,11 +5430,16 @@
                     </a:solidFill>
                   </a:tcPr>
                 </a:tc>
+                <a:extLst>
+                  <a:ext uri="{0D108BD9-81ED-4DB2-BD59-A6C34878D82A}">
+                    <a16:rowId xmlns:a16="http://schemas.microsoft.com/office/drawing/2014/main" val="10002"/>
+                  </a:ext>
+                </a:extLst>
               </a:tr>
               <a:tr h="457200">
                 <a:tc>
                   <a:txBody>
-                    <a:bodyPr wrap="square"/>
+                    <a:bodyPr/>
                     <a:lstStyle/>
                     <a:p>
                       <a:pPr algn="ctr"/>
@@ -5340,7 +5462,7 @@
                 </a:tc>
                 <a:tc>
                   <a:txBody>
-                    <a:bodyPr wrap="square"/>
+                    <a:bodyPr/>
                     <a:lstStyle/>
                     <a:p>
                       <a:pPr algn="ctr"/>
@@ -5363,7 +5485,7 @@
                 </a:tc>
                 <a:tc>
                   <a:txBody>
-                    <a:bodyPr wrap="square"/>
+                    <a:bodyPr/>
                     <a:lstStyle/>
                     <a:p>
                       <a:pPr algn="ctr"/>
@@ -5386,7 +5508,7 @@
                 </a:tc>
                 <a:tc>
                   <a:txBody>
-                    <a:bodyPr wrap="square"/>
+                    <a:bodyPr/>
                     <a:lstStyle/>
                     <a:p>
                       <a:pPr algn="ctr"/>
@@ -5407,11 +5529,16 @@
                     </a:solidFill>
                   </a:tcPr>
                 </a:tc>
+                <a:extLst>
+                  <a:ext uri="{0D108BD9-81ED-4DB2-BD59-A6C34878D82A}">
+                    <a16:rowId xmlns:a16="http://schemas.microsoft.com/office/drawing/2014/main" val="10003"/>
+                  </a:ext>
+                </a:extLst>
               </a:tr>
               <a:tr h="457200">
                 <a:tc>
                   <a:txBody>
-                    <a:bodyPr wrap="square"/>
+                    <a:bodyPr/>
                     <a:lstStyle/>
                     <a:p>
                       <a:pPr algn="ctr"/>
@@ -5434,7 +5561,7 @@
                 </a:tc>
                 <a:tc>
                   <a:txBody>
-                    <a:bodyPr wrap="square"/>
+                    <a:bodyPr/>
                     <a:lstStyle/>
                     <a:p>
                       <a:pPr algn="ctr"/>
@@ -5457,7 +5584,7 @@
                 </a:tc>
                 <a:tc>
                   <a:txBody>
-                    <a:bodyPr wrap="square"/>
+                    <a:bodyPr/>
                     <a:lstStyle/>
                     <a:p>
                       <a:pPr algn="ctr"/>
@@ -5480,7 +5607,7 @@
                 </a:tc>
                 <a:tc>
                   <a:txBody>
-                    <a:bodyPr wrap="square"/>
+                    <a:bodyPr/>
                     <a:lstStyle/>
                     <a:p>
                       <a:pPr algn="ctr"/>
@@ -5501,6 +5628,11 @@
                     </a:solidFill>
                   </a:tcPr>
                 </a:tc>
+                <a:extLst>
+                  <a:ext uri="{0D108BD9-81ED-4DB2-BD59-A6C34878D82A}">
+                    <a16:rowId xmlns:a16="http://schemas.microsoft.com/office/drawing/2014/main" val="10004"/>
+                  </a:ext>
+                </a:extLst>
               </a:tr>
             </a:tbl>
           </a:graphicData>
@@ -5523,7 +5655,7 @@
           <a:noFill/>
         </p:spPr>
         <p:txBody>
-          <a:bodyPr wrap="square" anchor="t" lIns="25400" rIns="25400" tIns="25400" bIns="25400">
+          <a:bodyPr wrap="square" lIns="25400" tIns="25400" rIns="25400" bIns="25400" anchor="t">
             <a:spAutoFit/>
           </a:bodyPr>
           <a:lstStyle/>
@@ -5682,6 +5814,7 @@
           <a:lstStyle/>
           <a:p>
             <a:pPr algn="ctr"/>
+            <a:endParaRPr/>
           </a:p>
         </p:txBody>
       </p:sp>
@@ -5726,6 +5859,7 @@
           <a:lstStyle/>
           <a:p>
             <a:pPr algn="ctr"/>
+            <a:endParaRPr/>
           </a:p>
         </p:txBody>
       </p:sp>
@@ -5746,7 +5880,7 @@
           <a:noFill/>
         </p:spPr>
         <p:txBody>
-          <a:bodyPr wrap="square" anchor="t" lIns="25400" rIns="25400" tIns="25400" bIns="25400">
+          <a:bodyPr wrap="square" lIns="25400" tIns="25400" rIns="25400" bIns="25400" anchor="t">
             <a:spAutoFit/>
           </a:bodyPr>
           <a:lstStyle/>
@@ -5825,7 +5959,7 @@
 </file>
 
 <file path=ppt/slides/slide12.xml><?xml version="1.0" encoding="utf-8"?>
-<p:sld xmlns:a="http://schemas.openxmlformats.org/drawingml/2006/main" xmlns:p="http://schemas.openxmlformats.org/presentationml/2006/main" xmlns:r="http://schemas.openxmlformats.org/officeDocument/2006/relationships">
+<p:sld xmlns:a="http://schemas.openxmlformats.org/drawingml/2006/main" xmlns:r="http://schemas.openxmlformats.org/officeDocument/2006/relationships" xmlns:p="http://schemas.openxmlformats.org/presentationml/2006/main">
   <p:cSld>
     <p:spTree>
       <p:nvGrpSpPr>
@@ -5833,7 +5967,14 @@
         <p:cNvGrpSpPr/>
         <p:nvPr/>
       </p:nvGrpSpPr>
-      <p:grpSpPr/>
+      <p:grpSpPr>
+        <a:xfrm>
+          <a:off x="0" y="0"/>
+          <a:ext cx="0" cy="0"/>
+          <a:chOff x="0" y="0"/>
+          <a:chExt cx="0" cy="0"/>
+        </a:xfrm>
+      </p:grpSpPr>
       <p:sp>
         <p:nvSpPr>
           <p:cNvPr id="2" name="Rectangle 1"/>
@@ -5875,6 +6016,7 @@
           <a:lstStyle/>
           <a:p>
             <a:pPr algn="ctr"/>
+            <a:endParaRPr/>
           </a:p>
         </p:txBody>
       </p:sp>
@@ -5919,6 +6061,7 @@
           <a:lstStyle/>
           <a:p>
             <a:pPr algn="ctr"/>
+            <a:endParaRPr/>
           </a:p>
         </p:txBody>
       </p:sp>
@@ -5939,7 +6082,7 @@
           <a:noFill/>
         </p:spPr>
         <p:txBody>
-          <a:bodyPr wrap="square" anchor="ctr" lIns="25400" rIns="25400" tIns="25400" bIns="25400">
+          <a:bodyPr wrap="square" lIns="25400" tIns="25400" rIns="25400" bIns="25400" anchor="ctr">
             <a:spAutoFit/>
           </a:bodyPr>
           <a:lstStyle/>
@@ -5984,7 +6127,7 @@
           <a:noFill/>
         </p:spPr>
         <p:txBody>
-          <a:bodyPr wrap="square" anchor="ctr" lIns="25400" rIns="25400" tIns="25400" bIns="25400">
+          <a:bodyPr wrap="square" lIns="25400" tIns="25400" rIns="25400" bIns="25400" anchor="ctr">
             <a:spAutoFit/>
           </a:bodyPr>
           <a:lstStyle/>
@@ -6018,7 +6161,7 @@
           <a:noFill/>
         </p:spPr>
         <p:txBody>
-          <a:bodyPr wrap="square" anchor="ctr" lIns="25400" rIns="25400" tIns="25400" bIns="25400">
+          <a:bodyPr wrap="square" lIns="25400" tIns="25400" rIns="25400" bIns="25400" anchor="ctr">
             <a:spAutoFit/>
           </a:bodyPr>
           <a:lstStyle/>
@@ -6079,6 +6222,7 @@
           <a:lstStyle/>
           <a:p>
             <a:pPr algn="ctr"/>
+            <a:endParaRPr/>
           </a:p>
         </p:txBody>
       </p:sp>
@@ -6123,7 +6267,7 @@
           <a:noFill/>
         </p:spPr>
         <p:txBody>
-          <a:bodyPr wrap="square" anchor="t" lIns="25400" rIns="25400" tIns="25400" bIns="25400">
+          <a:bodyPr wrap="square" lIns="25400" tIns="25400" rIns="25400" bIns="25400" anchor="t">
             <a:spAutoFit/>
           </a:bodyPr>
           <a:lstStyle/>
@@ -6158,7 +6302,7 @@
           <a:noFill/>
         </p:spPr>
         <p:txBody>
-          <a:bodyPr wrap="square" anchor="t" lIns="25400" rIns="25400" tIns="25400" bIns="25400">
+          <a:bodyPr wrap="square" lIns="25400" tIns="25400" rIns="25400" bIns="25400" anchor="t">
             <a:spAutoFit/>
           </a:bodyPr>
           <a:lstStyle/>
@@ -6289,6 +6433,7 @@
           <a:lstStyle/>
           <a:p>
             <a:pPr algn="ctr"/>
+            <a:endParaRPr/>
           </a:p>
         </p:txBody>
       </p:sp>
@@ -6333,6 +6478,7 @@
           <a:lstStyle/>
           <a:p>
             <a:pPr algn="ctr"/>
+            <a:endParaRPr/>
           </a:p>
         </p:txBody>
       </p:sp>
@@ -6353,7 +6499,7 @@
           <a:noFill/>
         </p:spPr>
         <p:txBody>
-          <a:bodyPr wrap="square" anchor="t" lIns="25400" rIns="25400" tIns="25400" bIns="25400">
+          <a:bodyPr wrap="square" lIns="25400" tIns="25400" rIns="25400" bIns="25400" anchor="t">
             <a:spAutoFit/>
           </a:bodyPr>
           <a:lstStyle/>
@@ -6464,6 +6610,7 @@
           <a:lstStyle/>
           <a:p>
             <a:pPr algn="ctr"/>
+            <a:endParaRPr/>
           </a:p>
         </p:txBody>
       </p:sp>
@@ -6508,6 +6655,7 @@
           <a:lstStyle/>
           <a:p>
             <a:pPr algn="ctr"/>
+            <a:endParaRPr/>
           </a:p>
         </p:txBody>
       </p:sp>
@@ -6528,7 +6676,7 @@
           <a:noFill/>
         </p:spPr>
         <p:txBody>
-          <a:bodyPr wrap="square" anchor="t" lIns="25400" rIns="25400" tIns="25400" bIns="25400">
+          <a:bodyPr wrap="square" lIns="25400" tIns="25400" rIns="25400" bIns="25400" anchor="t">
             <a:spAutoFit/>
           </a:bodyPr>
           <a:lstStyle/>
@@ -6607,7 +6755,7 @@
 </file>
 
 <file path=ppt/slides/slide13.xml><?xml version="1.0" encoding="utf-8"?>
-<p:sld xmlns:a="http://schemas.openxmlformats.org/drawingml/2006/main" xmlns:p="http://schemas.openxmlformats.org/presentationml/2006/main" xmlns:r="http://schemas.openxmlformats.org/officeDocument/2006/relationships">
+<p:sld xmlns:a="http://schemas.openxmlformats.org/drawingml/2006/main" xmlns:r="http://schemas.openxmlformats.org/officeDocument/2006/relationships" xmlns:p="http://schemas.openxmlformats.org/presentationml/2006/main">
   <p:cSld>
     <p:spTree>
       <p:nvGrpSpPr>
@@ -6615,7 +6763,14 @@
         <p:cNvGrpSpPr/>
         <p:nvPr/>
       </p:nvGrpSpPr>
-      <p:grpSpPr/>
+      <p:grpSpPr>
+        <a:xfrm>
+          <a:off x="0" y="0"/>
+          <a:ext cx="0" cy="0"/>
+          <a:chOff x="0" y="0"/>
+          <a:chExt cx="0" cy="0"/>
+        </a:xfrm>
+      </p:grpSpPr>
       <p:sp>
         <p:nvSpPr>
           <p:cNvPr id="2" name="Rectangle 1"/>
@@ -6657,6 +6812,7 @@
           <a:lstStyle/>
           <a:p>
             <a:pPr algn="ctr"/>
+            <a:endParaRPr/>
           </a:p>
         </p:txBody>
       </p:sp>
@@ -6701,6 +6857,7 @@
           <a:lstStyle/>
           <a:p>
             <a:pPr algn="ctr"/>
+            <a:endParaRPr/>
           </a:p>
         </p:txBody>
       </p:sp>
@@ -6721,7 +6878,7 @@
           <a:noFill/>
         </p:spPr>
         <p:txBody>
-          <a:bodyPr wrap="square" anchor="ctr" lIns="25400" rIns="25400" tIns="25400" bIns="25400">
+          <a:bodyPr wrap="square" lIns="25400" tIns="25400" rIns="25400" bIns="25400" anchor="ctr">
             <a:spAutoFit/>
           </a:bodyPr>
           <a:lstStyle/>
@@ -6766,7 +6923,7 @@
           <a:noFill/>
         </p:spPr>
         <p:txBody>
-          <a:bodyPr wrap="square" anchor="ctr" lIns="25400" rIns="25400" tIns="25400" bIns="25400">
+          <a:bodyPr wrap="square" lIns="25400" tIns="25400" rIns="25400" bIns="25400" anchor="ctr">
             <a:spAutoFit/>
           </a:bodyPr>
           <a:lstStyle/>
@@ -6800,7 +6957,7 @@
           <a:noFill/>
         </p:spPr>
         <p:txBody>
-          <a:bodyPr wrap="square" anchor="ctr" lIns="25400" rIns="25400" tIns="25400" bIns="25400">
+          <a:bodyPr wrap="square" lIns="25400" tIns="25400" rIns="25400" bIns="25400" anchor="ctr">
             <a:spAutoFit/>
           </a:bodyPr>
           <a:lstStyle/>
@@ -6837,16 +6994,46 @@
                 <a:tableStyleId>{5C22544A-7EE6-4342-B048-85BDC9FD1C3A}</a:tableStyleId>
               </a:tblPr>
               <a:tblGrid>
-                <a:gridCol w="855023"/>
-                <a:gridCol w="1453539"/>
-                <a:gridCol w="1453539"/>
-                <a:gridCol w="1453539"/>
-                <a:gridCol w="1368037"/>
+                <a:gridCol w="855023">
+                  <a:extLst>
+                    <a:ext uri="{9D8B030D-6E8A-4147-A177-3AD203B41FA5}">
+                      <a16:colId xmlns:a16="http://schemas.microsoft.com/office/drawing/2014/main" val="20000"/>
+                    </a:ext>
+                  </a:extLst>
+                </a:gridCol>
+                <a:gridCol w="1453539">
+                  <a:extLst>
+                    <a:ext uri="{9D8B030D-6E8A-4147-A177-3AD203B41FA5}">
+                      <a16:colId xmlns:a16="http://schemas.microsoft.com/office/drawing/2014/main" val="20001"/>
+                    </a:ext>
+                  </a:extLst>
+                </a:gridCol>
+                <a:gridCol w="1453539">
+                  <a:extLst>
+                    <a:ext uri="{9D8B030D-6E8A-4147-A177-3AD203B41FA5}">
+                      <a16:colId xmlns:a16="http://schemas.microsoft.com/office/drawing/2014/main" val="20002"/>
+                    </a:ext>
+                  </a:extLst>
+                </a:gridCol>
+                <a:gridCol w="1453539">
+                  <a:extLst>
+                    <a:ext uri="{9D8B030D-6E8A-4147-A177-3AD203B41FA5}">
+                      <a16:colId xmlns:a16="http://schemas.microsoft.com/office/drawing/2014/main" val="20003"/>
+                    </a:ext>
+                  </a:extLst>
+                </a:gridCol>
+                <a:gridCol w="1368037">
+                  <a:extLst>
+                    <a:ext uri="{9D8B030D-6E8A-4147-A177-3AD203B41FA5}">
+                      <a16:colId xmlns:a16="http://schemas.microsoft.com/office/drawing/2014/main" val="20004"/>
+                    </a:ext>
+                  </a:extLst>
+                </a:gridCol>
               </a:tblGrid>
               <a:tr h="457200">
                 <a:tc>
                   <a:txBody>
-                    <a:bodyPr wrap="square"/>
+                    <a:bodyPr/>
                     <a:lstStyle/>
                     <a:p>
                       <a:pPr algn="ctr"/>
@@ -6869,7 +7056,7 @@
                 </a:tc>
                 <a:tc>
                   <a:txBody>
-                    <a:bodyPr wrap="square"/>
+                    <a:bodyPr/>
                     <a:lstStyle/>
                     <a:p>
                       <a:pPr algn="ctr"/>
@@ -6892,7 +7079,7 @@
                 </a:tc>
                 <a:tc>
                   <a:txBody>
-                    <a:bodyPr wrap="square"/>
+                    <a:bodyPr/>
                     <a:lstStyle/>
                     <a:p>
                       <a:pPr algn="ctr"/>
@@ -6915,7 +7102,7 @@
                 </a:tc>
                 <a:tc>
                   <a:txBody>
-                    <a:bodyPr wrap="square"/>
+                    <a:bodyPr/>
                     <a:lstStyle/>
                     <a:p>
                       <a:pPr algn="ctr"/>
@@ -6938,7 +7125,7 @@
                 </a:tc>
                 <a:tc>
                   <a:txBody>
-                    <a:bodyPr wrap="square"/>
+                    <a:bodyPr/>
                     <a:lstStyle/>
                     <a:p>
                       <a:pPr algn="ctr"/>
@@ -6959,11 +7146,16 @@
                     </a:solidFill>
                   </a:tcPr>
                 </a:tc>
+                <a:extLst>
+                  <a:ext uri="{0D108BD9-81ED-4DB2-BD59-A6C34878D82A}">
+                    <a16:rowId xmlns:a16="http://schemas.microsoft.com/office/drawing/2014/main" val="10000"/>
+                  </a:ext>
+                </a:extLst>
               </a:tr>
               <a:tr h="457200">
                 <a:tc>
                   <a:txBody>
-                    <a:bodyPr wrap="square"/>
+                    <a:bodyPr/>
                     <a:lstStyle/>
                     <a:p>
                       <a:pPr algn="ctr"/>
@@ -6986,7 +7178,7 @@
                 </a:tc>
                 <a:tc>
                   <a:txBody>
-                    <a:bodyPr wrap="square"/>
+                    <a:bodyPr/>
                     <a:lstStyle/>
                     <a:p>
                       <a:pPr algn="ctr"/>
@@ -7009,7 +7201,7 @@
                 </a:tc>
                 <a:tc>
                   <a:txBody>
-                    <a:bodyPr wrap="square"/>
+                    <a:bodyPr/>
                     <a:lstStyle/>
                     <a:p>
                       <a:pPr algn="ctr"/>
@@ -7032,7 +7224,7 @@
                 </a:tc>
                 <a:tc>
                   <a:txBody>
-                    <a:bodyPr wrap="square"/>
+                    <a:bodyPr/>
                     <a:lstStyle/>
                     <a:p>
                       <a:pPr algn="ctr"/>
@@ -7055,7 +7247,7 @@
                 </a:tc>
                 <a:tc>
                   <a:txBody>
-                    <a:bodyPr wrap="square"/>
+                    <a:bodyPr/>
                     <a:lstStyle/>
                     <a:p>
                       <a:pPr algn="ctr"/>
@@ -7076,11 +7268,16 @@
                     </a:solidFill>
                   </a:tcPr>
                 </a:tc>
+                <a:extLst>
+                  <a:ext uri="{0D108BD9-81ED-4DB2-BD59-A6C34878D82A}">
+                    <a16:rowId xmlns:a16="http://schemas.microsoft.com/office/drawing/2014/main" val="10001"/>
+                  </a:ext>
+                </a:extLst>
               </a:tr>
               <a:tr h="457200">
                 <a:tc>
                   <a:txBody>
-                    <a:bodyPr wrap="square"/>
+                    <a:bodyPr/>
                     <a:lstStyle/>
                     <a:p>
                       <a:pPr algn="ctr"/>
@@ -7103,7 +7300,7 @@
                 </a:tc>
                 <a:tc>
                   <a:txBody>
-                    <a:bodyPr wrap="square"/>
+                    <a:bodyPr/>
                     <a:lstStyle/>
                     <a:p>
                       <a:pPr algn="ctr"/>
@@ -7126,7 +7323,7 @@
                 </a:tc>
                 <a:tc>
                   <a:txBody>
-                    <a:bodyPr wrap="square"/>
+                    <a:bodyPr/>
                     <a:lstStyle/>
                     <a:p>
                       <a:pPr algn="ctr"/>
@@ -7149,7 +7346,7 @@
                 </a:tc>
                 <a:tc>
                   <a:txBody>
-                    <a:bodyPr wrap="square"/>
+                    <a:bodyPr/>
                     <a:lstStyle/>
                     <a:p>
                       <a:pPr algn="ctr"/>
@@ -7172,7 +7369,7 @@
                 </a:tc>
                 <a:tc>
                   <a:txBody>
-                    <a:bodyPr wrap="square"/>
+                    <a:bodyPr/>
                     <a:lstStyle/>
                     <a:p>
                       <a:pPr algn="ctr"/>
@@ -7193,11 +7390,16 @@
                     </a:solidFill>
                   </a:tcPr>
                 </a:tc>
+                <a:extLst>
+                  <a:ext uri="{0D108BD9-81ED-4DB2-BD59-A6C34878D82A}">
+                    <a16:rowId xmlns:a16="http://schemas.microsoft.com/office/drawing/2014/main" val="10002"/>
+                  </a:ext>
+                </a:extLst>
               </a:tr>
               <a:tr h="457200">
                 <a:tc>
                   <a:txBody>
-                    <a:bodyPr wrap="square"/>
+                    <a:bodyPr/>
                     <a:lstStyle/>
                     <a:p>
                       <a:pPr algn="ctr"/>
@@ -7220,7 +7422,7 @@
                 </a:tc>
                 <a:tc>
                   <a:txBody>
-                    <a:bodyPr wrap="square"/>
+                    <a:bodyPr/>
                     <a:lstStyle/>
                     <a:p>
                       <a:pPr algn="ctr"/>
@@ -7243,7 +7445,7 @@
                 </a:tc>
                 <a:tc>
                   <a:txBody>
-                    <a:bodyPr wrap="square"/>
+                    <a:bodyPr/>
                     <a:lstStyle/>
                     <a:p>
                       <a:pPr algn="ctr"/>
@@ -7266,7 +7468,7 @@
                 </a:tc>
                 <a:tc>
                   <a:txBody>
-                    <a:bodyPr wrap="square"/>
+                    <a:bodyPr/>
                     <a:lstStyle/>
                     <a:p>
                       <a:pPr algn="ctr"/>
@@ -7289,7 +7491,7 @@
                 </a:tc>
                 <a:tc>
                   <a:txBody>
-                    <a:bodyPr wrap="square"/>
+                    <a:bodyPr/>
                     <a:lstStyle/>
                     <a:p>
                       <a:pPr algn="ctr"/>
@@ -7310,11 +7512,16 @@
                     </a:solidFill>
                   </a:tcPr>
                 </a:tc>
+                <a:extLst>
+                  <a:ext uri="{0D108BD9-81ED-4DB2-BD59-A6C34878D82A}">
+                    <a16:rowId xmlns:a16="http://schemas.microsoft.com/office/drawing/2014/main" val="10003"/>
+                  </a:ext>
+                </a:extLst>
               </a:tr>
               <a:tr h="457200">
                 <a:tc>
                   <a:txBody>
-                    <a:bodyPr wrap="square"/>
+                    <a:bodyPr/>
                     <a:lstStyle/>
                     <a:p>
                       <a:pPr algn="ctr"/>
@@ -7337,7 +7544,7 @@
                 </a:tc>
                 <a:tc>
                   <a:txBody>
-                    <a:bodyPr wrap="square"/>
+                    <a:bodyPr/>
                     <a:lstStyle/>
                     <a:p>
                       <a:pPr algn="ctr"/>
@@ -7360,7 +7567,7 @@
                 </a:tc>
                 <a:tc>
                   <a:txBody>
-                    <a:bodyPr wrap="square"/>
+                    <a:bodyPr/>
                     <a:lstStyle/>
                     <a:p>
                       <a:pPr algn="ctr"/>
@@ -7383,7 +7590,7 @@
                 </a:tc>
                 <a:tc>
                   <a:txBody>
-                    <a:bodyPr wrap="square"/>
+                    <a:bodyPr/>
                     <a:lstStyle/>
                     <a:p>
                       <a:pPr algn="ctr"/>
@@ -7406,7 +7613,7 @@
                 </a:tc>
                 <a:tc>
                   <a:txBody>
-                    <a:bodyPr wrap="square"/>
+                    <a:bodyPr/>
                     <a:lstStyle/>
                     <a:p>
                       <a:pPr algn="ctr"/>
@@ -7427,6 +7634,11 @@
                     </a:solidFill>
                   </a:tcPr>
                 </a:tc>
+                <a:extLst>
+                  <a:ext uri="{0D108BD9-81ED-4DB2-BD59-A6C34878D82A}">
+                    <a16:rowId xmlns:a16="http://schemas.microsoft.com/office/drawing/2014/main" val="10004"/>
+                  </a:ext>
+                </a:extLst>
               </a:tr>
             </a:tbl>
           </a:graphicData>
@@ -7449,7 +7661,7 @@
           <a:noFill/>
         </p:spPr>
         <p:txBody>
-          <a:bodyPr wrap="square" anchor="t" lIns="25400" rIns="25400" tIns="25400" bIns="25400">
+          <a:bodyPr wrap="square" lIns="25400" tIns="25400" rIns="25400" bIns="25400" anchor="t">
             <a:spAutoFit/>
           </a:bodyPr>
           <a:lstStyle/>
@@ -7508,6 +7720,7 @@
           <a:lstStyle/>
           <a:p>
             <a:pPr algn="ctr"/>
+            <a:endParaRPr/>
           </a:p>
         </p:txBody>
       </p:sp>
@@ -7552,6 +7765,7 @@
           <a:lstStyle/>
           <a:p>
             <a:pPr algn="ctr"/>
+            <a:endParaRPr/>
           </a:p>
         </p:txBody>
       </p:sp>
@@ -7572,7 +7786,7 @@
           <a:noFill/>
         </p:spPr>
         <p:txBody>
-          <a:bodyPr wrap="square" anchor="t" lIns="25400" rIns="25400" tIns="25400" bIns="25400">
+          <a:bodyPr wrap="square" lIns="25400" tIns="25400" rIns="25400" bIns="25400" anchor="t">
             <a:spAutoFit/>
           </a:bodyPr>
           <a:lstStyle/>
@@ -7683,6 +7897,7 @@
           <a:lstStyle/>
           <a:p>
             <a:pPr algn="ctr"/>
+            <a:endParaRPr/>
           </a:p>
         </p:txBody>
       </p:sp>
@@ -7727,6 +7942,7 @@
           <a:lstStyle/>
           <a:p>
             <a:pPr algn="ctr"/>
+            <a:endParaRPr/>
           </a:p>
         </p:txBody>
       </p:sp>
@@ -7747,7 +7963,7 @@
           <a:noFill/>
         </p:spPr>
         <p:txBody>
-          <a:bodyPr wrap="square" anchor="t" lIns="25400" rIns="25400" tIns="25400" bIns="25400">
+          <a:bodyPr wrap="square" lIns="25400" tIns="25400" rIns="25400" bIns="25400" anchor="t">
             <a:spAutoFit/>
           </a:bodyPr>
           <a:lstStyle/>
@@ -7826,7 +8042,7 @@
 </file>
 
 <file path=ppt/slides/slide14.xml><?xml version="1.0" encoding="utf-8"?>
-<p:sld xmlns:a="http://schemas.openxmlformats.org/drawingml/2006/main" xmlns:p="http://schemas.openxmlformats.org/presentationml/2006/main" xmlns:r="http://schemas.openxmlformats.org/officeDocument/2006/relationships">
+<p:sld xmlns:a="http://schemas.openxmlformats.org/drawingml/2006/main" xmlns:r="http://schemas.openxmlformats.org/officeDocument/2006/relationships" xmlns:p="http://schemas.openxmlformats.org/presentationml/2006/main">
   <p:cSld>
     <p:spTree>
       <p:nvGrpSpPr>
@@ -7834,7 +8050,14 @@
         <p:cNvGrpSpPr/>
         <p:nvPr/>
       </p:nvGrpSpPr>
-      <p:grpSpPr/>
+      <p:grpSpPr>
+        <a:xfrm>
+          <a:off x="0" y="0"/>
+          <a:ext cx="0" cy="0"/>
+          <a:chOff x="0" y="0"/>
+          <a:chExt cx="0" cy="0"/>
+        </a:xfrm>
+      </p:grpSpPr>
       <p:sp>
         <p:nvSpPr>
           <p:cNvPr id="2" name="Rectangle 1"/>
@@ -7876,6 +8099,7 @@
           <a:lstStyle/>
           <a:p>
             <a:pPr algn="ctr"/>
+            <a:endParaRPr/>
           </a:p>
         </p:txBody>
       </p:sp>
@@ -7920,6 +8144,7 @@
           <a:lstStyle/>
           <a:p>
             <a:pPr algn="ctr"/>
+            <a:endParaRPr/>
           </a:p>
         </p:txBody>
       </p:sp>
@@ -7940,7 +8165,7 @@
           <a:noFill/>
         </p:spPr>
         <p:txBody>
-          <a:bodyPr wrap="square" anchor="ctr" lIns="25400" rIns="25400" tIns="25400" bIns="25400">
+          <a:bodyPr wrap="square" lIns="25400" tIns="25400" rIns="25400" bIns="25400" anchor="ctr">
             <a:spAutoFit/>
           </a:bodyPr>
           <a:lstStyle/>
@@ -7985,7 +8210,7 @@
           <a:noFill/>
         </p:spPr>
         <p:txBody>
-          <a:bodyPr wrap="square" anchor="ctr" lIns="25400" rIns="25400" tIns="25400" bIns="25400">
+          <a:bodyPr wrap="square" lIns="25400" tIns="25400" rIns="25400" bIns="25400" anchor="ctr">
             <a:spAutoFit/>
           </a:bodyPr>
           <a:lstStyle/>
@@ -8019,7 +8244,7 @@
           <a:noFill/>
         </p:spPr>
         <p:txBody>
-          <a:bodyPr wrap="square" anchor="ctr" lIns="25400" rIns="25400" tIns="25400" bIns="25400">
+          <a:bodyPr wrap="square" lIns="25400" tIns="25400" rIns="25400" bIns="25400" anchor="ctr">
             <a:spAutoFit/>
           </a:bodyPr>
           <a:lstStyle/>
@@ -8080,6 +8305,7 @@
           <a:lstStyle/>
           <a:p>
             <a:pPr algn="ctr"/>
+            <a:endParaRPr/>
           </a:p>
         </p:txBody>
       </p:sp>
@@ -8124,7 +8350,7 @@
           <a:noFill/>
         </p:spPr>
         <p:txBody>
-          <a:bodyPr wrap="square" anchor="t" lIns="25400" rIns="25400" tIns="25400" bIns="25400">
+          <a:bodyPr wrap="square" lIns="25400" tIns="25400" rIns="25400" bIns="25400" anchor="t">
             <a:spAutoFit/>
           </a:bodyPr>
           <a:lstStyle/>
@@ -8151,7 +8377,7 @@
         <p:spPr>
           <a:xfrm>
             <a:off x="4754880" y="1280160"/>
-            <a:ext cx="6949440" cy="2743200"/>
+            <a:ext cx="6949440" cy="1392689"/>
           </a:xfrm>
           <a:prstGeom prst="rect">
             <a:avLst/>
@@ -8159,7 +8385,7 @@
           <a:noFill/>
         </p:spPr>
         <p:txBody>
-          <a:bodyPr wrap="square" anchor="t" lIns="25400" rIns="25400" tIns="25400" bIns="25400">
+          <a:bodyPr wrap="square" lIns="25400" tIns="25400" rIns="25400" bIns="25400" anchor="t">
             <a:spAutoFit/>
           </a:bodyPr>
           <a:lstStyle/>
@@ -8173,7 +8399,7 @@
               </a:spcAft>
             </a:pPr>
             <a:r>
-              <a:rPr sz="1600" b="1" i="0">
+              <a:rPr sz="1600" b="1" i="0" dirty="0">
                 <a:solidFill>
                   <a:srgbClr val="2E74B5"/>
                 </a:solidFill>
@@ -8182,13 +8408,40 @@
               <a:t>▪ </a:t>
             </a:r>
             <a:r>
-              <a:rPr sz="1600" b="1" i="0">
+              <a:rPr sz="1600" b="1" i="0" dirty="0" err="1">
                 <a:solidFill>
                   <a:srgbClr val="1F3864"/>
                 </a:solidFill>
                 <a:latin typeface="Microsoft JhengHei"/>
               </a:rPr>
-              <a:t>狀態空間（一階 RC、狀態二維）</a:t>
+              <a:t>狀態空間（一階</a:t>
+            </a:r>
+            <a:r>
+              <a:rPr sz="1600" b="1" i="0" dirty="0">
+                <a:solidFill>
+                  <a:srgbClr val="1F3864"/>
+                </a:solidFill>
+                <a:latin typeface="Microsoft JhengHei"/>
+              </a:rPr>
+              <a:t> </a:t>
+            </a:r>
+            <a:r>
+              <a:rPr sz="1600" b="1" i="0" dirty="0" err="1">
+                <a:solidFill>
+                  <a:srgbClr val="1F3864"/>
+                </a:solidFill>
+                <a:latin typeface="Microsoft JhengHei"/>
+              </a:rPr>
+              <a:t>RC、狀態二維</a:t>
+            </a:r>
+            <a:r>
+              <a:rPr sz="1600" b="1" i="0" dirty="0">
+                <a:solidFill>
+                  <a:srgbClr val="1F3864"/>
+                </a:solidFill>
+                <a:latin typeface="Microsoft JhengHei"/>
+              </a:rPr>
+              <a:t>）</a:t>
             </a:r>
           </a:p>
           <a:p>
@@ -8201,7 +8454,7 @@
               </a:spcAft>
             </a:pPr>
             <a:r>
-              <a:rPr sz="1400" b="0" i="0">
+              <a:rPr sz="1400" b="0" i="0" dirty="0">
                 <a:solidFill>
                   <a:srgbClr val="595959"/>
                 </a:solidFill>
@@ -8210,13 +8463,49 @@
               <a:t>– </a:t>
             </a:r>
             <a:r>
-              <a:rPr sz="1400" b="0" i="0">
+              <a:rPr sz="1400" b="0" i="0" dirty="0">
                 <a:solidFill>
                   <a:srgbClr val="404040"/>
                 </a:solidFill>
                 <a:latin typeface="Times New Roman"/>
               </a:rPr>
-              <a:t>x = [SOC, V₁]ᵀ，輸入 I，輸出 Vt</a:t>
+              <a:t>x = [SOC, V₁]ᵀ，</a:t>
+            </a:r>
+            <a:r>
+              <a:rPr sz="1400" b="0" i="0" dirty="0" err="1">
+                <a:solidFill>
+                  <a:srgbClr val="404040"/>
+                </a:solidFill>
+                <a:latin typeface="Times New Roman"/>
+              </a:rPr>
+              <a:t>輸入</a:t>
+            </a:r>
+            <a:r>
+              <a:rPr sz="1400" b="0" i="0" dirty="0">
+                <a:solidFill>
+                  <a:srgbClr val="404040"/>
+                </a:solidFill>
+                <a:latin typeface="Times New Roman"/>
+              </a:rPr>
+              <a:t> </a:t>
+            </a:r>
+            <a:r>
+              <a:rPr sz="1400" b="0" i="0" dirty="0" err="1">
+                <a:solidFill>
+                  <a:srgbClr val="404040"/>
+                </a:solidFill>
+                <a:latin typeface="Times New Roman"/>
+              </a:rPr>
+              <a:t>I，輸出</a:t>
+            </a:r>
+            <a:r>
+              <a:rPr sz="1400" b="0" i="0" dirty="0">
+                <a:solidFill>
+                  <a:srgbClr val="404040"/>
+                </a:solidFill>
+                <a:latin typeface="Times New Roman"/>
+              </a:rPr>
+              <a:t> Vt</a:t>
             </a:r>
           </a:p>
           <a:p>
@@ -8229,7 +8518,7 @@
               </a:spcAft>
             </a:pPr>
             <a:r>
-              <a:rPr sz="1400" b="0" i="0">
+              <a:rPr sz="1400" b="0" i="0" dirty="0">
                 <a:solidFill>
                   <a:srgbClr val="595959"/>
                 </a:solidFill>
@@ -8238,13 +8527,67 @@
               <a:t>– </a:t>
             </a:r>
             <a:r>
-              <a:rPr sz="1400" b="0" i="0">
+              <a:rPr sz="1400" b="0" i="0" dirty="0">
                 <a:solidFill>
                   <a:srgbClr val="404040"/>
                 </a:solidFill>
                 <a:latin typeface="Times New Roman"/>
               </a:rPr>
-              <a:t>Vt = Voc(SOC) − I·R₀ − V₁，觀測非線性源自 Voc(SOC)</a:t>
+              <a:t>Vt = </a:t>
+            </a:r>
+            <a:r>
+              <a:rPr sz="1400" b="0" i="0" dirty="0" err="1">
+                <a:solidFill>
+                  <a:srgbClr val="404040"/>
+                </a:solidFill>
+                <a:latin typeface="Times New Roman"/>
+              </a:rPr>
+              <a:t>Voc</a:t>
+            </a:r>
+            <a:r>
+              <a:rPr sz="1400" b="0" i="0" dirty="0">
+                <a:solidFill>
+                  <a:srgbClr val="404040"/>
+                </a:solidFill>
+                <a:latin typeface="Times New Roman"/>
+              </a:rPr>
+              <a:t>(SOC) − I·R₀ − V₁，</a:t>
+            </a:r>
+            <a:r>
+              <a:rPr sz="1400" b="0" i="0" dirty="0" err="1">
+                <a:solidFill>
+                  <a:srgbClr val="404040"/>
+                </a:solidFill>
+                <a:latin typeface="Times New Roman"/>
+              </a:rPr>
+              <a:t>觀測非線性源自</a:t>
+            </a:r>
+            <a:r>
+              <a:rPr sz="1400" b="0" i="0" dirty="0">
+                <a:solidFill>
+                  <a:srgbClr val="404040"/>
+                </a:solidFill>
+                <a:latin typeface="Times New Roman"/>
+              </a:rPr>
+              <a:t> </a:t>
+            </a:r>
+            <a:r>
+              <a:rPr sz="1400" b="0" i="0" dirty="0" err="1">
+                <a:solidFill>
+                  <a:srgbClr val="404040"/>
+                </a:solidFill>
+                <a:latin typeface="Times New Roman"/>
+              </a:rPr>
+              <a:t>Voc</a:t>
+            </a:r>
+            <a:r>
+              <a:rPr sz="1400" b="0" i="0" dirty="0">
+                <a:solidFill>
+                  <a:srgbClr val="404040"/>
+                </a:solidFill>
+                <a:latin typeface="Times New Roman"/>
+              </a:rPr>
+              <a:t>(SOC)</a:t>
             </a:r>
           </a:p>
           <a:p>
@@ -8257,7 +8600,7 @@
               </a:spcAft>
             </a:pPr>
             <a:r>
-              <a:rPr sz="1400" b="0" i="0">
+              <a:rPr sz="1400" b="0" i="0" dirty="0">
                 <a:solidFill>
                   <a:srgbClr val="595959"/>
                 </a:solidFill>
@@ -8266,14 +8609,74 @@
               <a:t>– </a:t>
             </a:r>
             <a:r>
-              <a:rPr sz="1400" b="0" i="0">
+              <a:rPr sz="1400" b="0" i="0" dirty="0">
                 <a:solidFill>
                   <a:srgbClr val="404040"/>
                 </a:solidFill>
                 <a:latin typeface="Microsoft JhengHei"/>
               </a:rPr>
-              <a:t>OCV 表由 GITT 實測建立（2026-07-05；20 點 → 平滑成 21 點單調表）；R₀/R₁/τ₁ 由脈衝鬆弛最小平方辨識</a:t>
-            </a:r>
+              <a:t>OCV </a:t>
+            </a:r>
+            <a:r>
+              <a:rPr sz="1400" b="0" i="0" dirty="0" err="1">
+                <a:solidFill>
+                  <a:srgbClr val="404040"/>
+                </a:solidFill>
+                <a:latin typeface="Microsoft JhengHei"/>
+              </a:rPr>
+              <a:t>表由</a:t>
+            </a:r>
+            <a:r>
+              <a:rPr sz="1400" b="0" i="0" dirty="0">
+                <a:solidFill>
+                  <a:srgbClr val="404040"/>
+                </a:solidFill>
+                <a:latin typeface="Microsoft JhengHei"/>
+              </a:rPr>
+              <a:t> GITT </a:t>
+            </a:r>
+            <a:r>
+              <a:rPr sz="1400" b="0" i="0" dirty="0" err="1">
+                <a:solidFill>
+                  <a:srgbClr val="404040"/>
+                </a:solidFill>
+                <a:latin typeface="Microsoft JhengHei"/>
+              </a:rPr>
+              <a:t>實測建立</a:t>
+            </a:r>
+            <a:r>
+              <a:rPr lang="zh-TW" altLang="en-US" sz="1400" b="0" i="0" dirty="0">
+                <a:solidFill>
+                  <a:srgbClr val="404040"/>
+                </a:solidFill>
+                <a:latin typeface="Microsoft JhengHei"/>
+              </a:rPr>
+              <a:t>；</a:t>
+            </a:r>
+            <a:r>
+              <a:rPr sz="1400" b="0" i="0" dirty="0">
+                <a:solidFill>
+                  <a:srgbClr val="404040"/>
+                </a:solidFill>
+                <a:latin typeface="Microsoft JhengHei"/>
+              </a:rPr>
+              <a:t>R₀/R₁/τ₁ </a:t>
+            </a:r>
+            <a:r>
+              <a:rPr sz="1400" b="0" i="0" dirty="0" err="1">
+                <a:solidFill>
+                  <a:srgbClr val="404040"/>
+                </a:solidFill>
+                <a:latin typeface="Microsoft JhengHei"/>
+              </a:rPr>
+              <a:t>由脈衝鬆弛最小平方辨識</a:t>
+            </a:r>
+            <a:endParaRPr sz="1400" b="0" i="0" dirty="0">
+              <a:solidFill>
+                <a:srgbClr val="404040"/>
+              </a:solidFill>
+              <a:latin typeface="Microsoft JhengHei"/>
+            </a:endParaRPr>
           </a:p>
           <a:p>
             <a:pPr algn="l">
@@ -8285,7 +8688,7 @@
               </a:spcAft>
             </a:pPr>
             <a:r>
-              <a:rPr sz="1500" b="1" i="0">
+              <a:rPr sz="1500" b="1" i="0" dirty="0">
                 <a:solidFill>
                   <a:srgbClr val="2E74B5"/>
                 </a:solidFill>
@@ -8294,14 +8697,38 @@
               <a:t>▪ </a:t>
             </a:r>
             <a:r>
-              <a:rPr sz="1500" b="1" i="0">
+              <a:rPr sz="1500" b="1" i="0" dirty="0" err="1">
                 <a:solidFill>
                   <a:srgbClr val="2E7D32"/>
                 </a:solidFill>
                 <a:latin typeface="Microsoft JhengHei"/>
               </a:rPr>
-              <a:t>嵌入式關鍵：狀態二維、觀測一維 → 增益只需一次純量除法、免矩陣求逆</a:t>
-            </a:r>
+              <a:t>嵌入式關鍵：狀態二維、觀測一維</a:t>
+            </a:r>
+            <a:r>
+              <a:rPr sz="1500" b="1" i="0" dirty="0">
+                <a:solidFill>
+                  <a:srgbClr val="2E7D32"/>
+                </a:solidFill>
+                <a:latin typeface="Microsoft JhengHei"/>
+              </a:rPr>
+              <a:t> → </a:t>
+            </a:r>
+            <a:r>
+              <a:rPr sz="1500" b="1" i="0" dirty="0" err="1">
+                <a:solidFill>
+                  <a:srgbClr val="2E7D32"/>
+                </a:solidFill>
+                <a:latin typeface="Microsoft JhengHei"/>
+              </a:rPr>
+              <a:t>增益只需一次純量除法、免矩陣求逆</a:t>
+            </a:r>
+            <a:endParaRPr sz="1500" b="1" i="0" dirty="0">
+              <a:solidFill>
+                <a:srgbClr val="2E7D32"/>
+              </a:solidFill>
+              <a:latin typeface="Microsoft JhengHei"/>
+            </a:endParaRPr>
           </a:p>
         </p:txBody>
       </p:sp>
@@ -8346,6 +8773,7 @@
           <a:lstStyle/>
           <a:p>
             <a:pPr algn="ctr"/>
+            <a:endParaRPr/>
           </a:p>
         </p:txBody>
       </p:sp>
@@ -8390,6 +8818,7 @@
           <a:lstStyle/>
           <a:p>
             <a:pPr algn="ctr"/>
+            <a:endParaRPr/>
           </a:p>
         </p:txBody>
       </p:sp>
@@ -8410,7 +8839,7 @@
           <a:noFill/>
         </p:spPr>
         <p:txBody>
-          <a:bodyPr wrap="square" anchor="t" lIns="25400" rIns="25400" tIns="25400" bIns="25400">
+          <a:bodyPr wrap="square" lIns="25400" tIns="25400" rIns="25400" bIns="25400" anchor="t">
             <a:spAutoFit/>
           </a:bodyPr>
           <a:lstStyle/>
@@ -8505,7 +8934,7 @@
 </file>
 
 <file path=ppt/slides/slide15.xml><?xml version="1.0" encoding="utf-8"?>
-<p:sld xmlns:a="http://schemas.openxmlformats.org/drawingml/2006/main" xmlns:p="http://schemas.openxmlformats.org/presentationml/2006/main" xmlns:r="http://schemas.openxmlformats.org/officeDocument/2006/relationships">
+<p:sld xmlns:a="http://schemas.openxmlformats.org/drawingml/2006/main" xmlns:r="http://schemas.openxmlformats.org/officeDocument/2006/relationships" xmlns:p="http://schemas.openxmlformats.org/presentationml/2006/main">
   <p:cSld>
     <p:spTree>
       <p:nvGrpSpPr>
@@ -8513,7 +8942,14 @@
         <p:cNvGrpSpPr/>
         <p:nvPr/>
       </p:nvGrpSpPr>
-      <p:grpSpPr/>
+      <p:grpSpPr>
+        <a:xfrm>
+          <a:off x="0" y="0"/>
+          <a:ext cx="0" cy="0"/>
+          <a:chOff x="0" y="0"/>
+          <a:chExt cx="0" cy="0"/>
+        </a:xfrm>
+      </p:grpSpPr>
       <p:sp>
         <p:nvSpPr>
           <p:cNvPr id="2" name="Rectangle 1"/>
@@ -8555,6 +8991,7 @@
           <a:lstStyle/>
           <a:p>
             <a:pPr algn="ctr"/>
+            <a:endParaRPr/>
           </a:p>
         </p:txBody>
       </p:sp>
@@ -8599,6 +9036,7 @@
           <a:lstStyle/>
           <a:p>
             <a:pPr algn="ctr"/>
+            <a:endParaRPr/>
           </a:p>
         </p:txBody>
       </p:sp>
@@ -8619,7 +9057,7 @@
           <a:noFill/>
         </p:spPr>
         <p:txBody>
-          <a:bodyPr wrap="square" anchor="ctr" lIns="25400" rIns="25400" tIns="25400" bIns="25400">
+          <a:bodyPr wrap="square" lIns="25400" tIns="25400" rIns="25400" bIns="25400" anchor="ctr">
             <a:spAutoFit/>
           </a:bodyPr>
           <a:lstStyle/>
@@ -8664,7 +9102,7 @@
           <a:noFill/>
         </p:spPr>
         <p:txBody>
-          <a:bodyPr wrap="square" anchor="ctr" lIns="25400" rIns="25400" tIns="25400" bIns="25400">
+          <a:bodyPr wrap="square" lIns="25400" tIns="25400" rIns="25400" bIns="25400" anchor="ctr">
             <a:spAutoFit/>
           </a:bodyPr>
           <a:lstStyle/>
@@ -8698,7 +9136,7 @@
           <a:noFill/>
         </p:spPr>
         <p:txBody>
-          <a:bodyPr wrap="square" anchor="ctr" lIns="25400" rIns="25400" tIns="25400" bIns="25400">
+          <a:bodyPr wrap="square" lIns="25400" tIns="25400" rIns="25400" bIns="25400" anchor="ctr">
             <a:spAutoFit/>
           </a:bodyPr>
           <a:lstStyle/>
@@ -8759,6 +9197,7 @@
           <a:lstStyle/>
           <a:p>
             <a:pPr algn="ctr"/>
+            <a:endParaRPr/>
           </a:p>
         </p:txBody>
       </p:sp>
@@ -8803,7 +9242,7 @@
           <a:noFill/>
         </p:spPr>
         <p:txBody>
-          <a:bodyPr wrap="square" anchor="t" lIns="25400" rIns="25400" tIns="25400" bIns="25400">
+          <a:bodyPr wrap="square" lIns="25400" tIns="25400" rIns="25400" bIns="25400" anchor="t">
             <a:spAutoFit/>
           </a:bodyPr>
           <a:lstStyle/>
@@ -8838,7 +9277,7 @@
           <a:noFill/>
         </p:spPr>
         <p:txBody>
-          <a:bodyPr wrap="square" anchor="t" lIns="25400" rIns="25400" tIns="25400" bIns="25400">
+          <a:bodyPr wrap="square" lIns="25400" tIns="25400" rIns="25400" bIns="25400" anchor="t">
             <a:spAutoFit/>
           </a:bodyPr>
           <a:lstStyle/>
@@ -8997,6 +9436,7 @@
           <a:lstStyle/>
           <a:p>
             <a:pPr algn="ctr"/>
+            <a:endParaRPr/>
           </a:p>
         </p:txBody>
       </p:sp>
@@ -9041,6 +9481,7 @@
           <a:lstStyle/>
           <a:p>
             <a:pPr algn="ctr"/>
+            <a:endParaRPr/>
           </a:p>
         </p:txBody>
       </p:sp>
@@ -9061,7 +9502,7 @@
           <a:noFill/>
         </p:spPr>
         <p:txBody>
-          <a:bodyPr wrap="square" anchor="t" lIns="25400" rIns="25400" tIns="25400" bIns="25400">
+          <a:bodyPr wrap="square" lIns="25400" tIns="25400" rIns="25400" bIns="25400" anchor="t">
             <a:spAutoFit/>
           </a:bodyPr>
           <a:lstStyle/>
@@ -9140,7 +9581,7 @@
 </file>
 
 <file path=ppt/slides/slide16.xml><?xml version="1.0" encoding="utf-8"?>
-<p:sld xmlns:a="http://schemas.openxmlformats.org/drawingml/2006/main" xmlns:p="http://schemas.openxmlformats.org/presentationml/2006/main" xmlns:r="http://schemas.openxmlformats.org/officeDocument/2006/relationships">
+<p:sld xmlns:a="http://schemas.openxmlformats.org/drawingml/2006/main" xmlns:r="http://schemas.openxmlformats.org/officeDocument/2006/relationships" xmlns:p="http://schemas.openxmlformats.org/presentationml/2006/main">
   <p:cSld>
     <p:spTree>
       <p:nvGrpSpPr>
@@ -9148,7 +9589,14 @@
         <p:cNvGrpSpPr/>
         <p:nvPr/>
       </p:nvGrpSpPr>
-      <p:grpSpPr/>
+      <p:grpSpPr>
+        <a:xfrm>
+          <a:off x="0" y="0"/>
+          <a:ext cx="0" cy="0"/>
+          <a:chOff x="0" y="0"/>
+          <a:chExt cx="0" cy="0"/>
+        </a:xfrm>
+      </p:grpSpPr>
       <p:sp>
         <p:nvSpPr>
           <p:cNvPr id="2" name="Rectangle 1"/>
@@ -9190,6 +9638,7 @@
           <a:lstStyle/>
           <a:p>
             <a:pPr algn="ctr"/>
+            <a:endParaRPr/>
           </a:p>
         </p:txBody>
       </p:sp>
@@ -9234,6 +9683,7 @@
           <a:lstStyle/>
           <a:p>
             <a:pPr algn="ctr"/>
+            <a:endParaRPr/>
           </a:p>
         </p:txBody>
       </p:sp>
@@ -9254,7 +9704,7 @@
           <a:noFill/>
         </p:spPr>
         <p:txBody>
-          <a:bodyPr wrap="square" anchor="ctr" lIns="25400" rIns="25400" tIns="25400" bIns="25400">
+          <a:bodyPr wrap="square" lIns="25400" tIns="25400" rIns="25400" bIns="25400" anchor="ctr">
             <a:spAutoFit/>
           </a:bodyPr>
           <a:lstStyle/>
@@ -9299,7 +9749,7 @@
           <a:noFill/>
         </p:spPr>
         <p:txBody>
-          <a:bodyPr wrap="square" anchor="ctr" lIns="25400" rIns="25400" tIns="25400" bIns="25400">
+          <a:bodyPr wrap="square" lIns="25400" tIns="25400" rIns="25400" bIns="25400" anchor="ctr">
             <a:spAutoFit/>
           </a:bodyPr>
           <a:lstStyle/>
@@ -9333,7 +9783,7 @@
           <a:noFill/>
         </p:spPr>
         <p:txBody>
-          <a:bodyPr wrap="square" anchor="ctr" lIns="25400" rIns="25400" tIns="25400" bIns="25400">
+          <a:bodyPr wrap="square" lIns="25400" tIns="25400" rIns="25400" bIns="25400" anchor="ctr">
             <a:spAutoFit/>
           </a:bodyPr>
           <a:lstStyle/>
@@ -9394,6 +9844,7 @@
           <a:lstStyle/>
           <a:p>
             <a:pPr algn="ctr"/>
+            <a:endParaRPr/>
           </a:p>
         </p:txBody>
       </p:sp>
@@ -9438,7 +9889,7 @@
           <a:noFill/>
         </p:spPr>
         <p:txBody>
-          <a:bodyPr wrap="square" anchor="t" lIns="25400" rIns="25400" tIns="25400" bIns="25400">
+          <a:bodyPr wrap="square" lIns="25400" tIns="25400" rIns="25400" bIns="25400" anchor="t">
             <a:spAutoFit/>
           </a:bodyPr>
           <a:lstStyle/>
@@ -9499,6 +9950,7 @@
           <a:lstStyle/>
           <a:p>
             <a:pPr algn="ctr"/>
+            <a:endParaRPr/>
           </a:p>
         </p:txBody>
       </p:sp>
@@ -9543,7 +9995,7 @@
           <a:noFill/>
         </p:spPr>
         <p:txBody>
-          <a:bodyPr wrap="square" anchor="t" lIns="25400" rIns="25400" tIns="25400" bIns="25400">
+          <a:bodyPr wrap="square" lIns="25400" tIns="25400" rIns="25400" bIns="25400" anchor="t">
             <a:spAutoFit/>
           </a:bodyPr>
           <a:lstStyle/>
@@ -9602,6 +10054,7 @@
           <a:lstStyle/>
           <a:p>
             <a:pPr algn="ctr"/>
+            <a:endParaRPr/>
           </a:p>
         </p:txBody>
       </p:sp>
@@ -9646,6 +10099,7 @@
           <a:lstStyle/>
           <a:p>
             <a:pPr algn="ctr"/>
+            <a:endParaRPr/>
           </a:p>
         </p:txBody>
       </p:sp>
@@ -9666,7 +10120,7 @@
           <a:noFill/>
         </p:spPr>
         <p:txBody>
-          <a:bodyPr wrap="square" anchor="t" lIns="25400" rIns="25400" tIns="25400" bIns="25400">
+          <a:bodyPr wrap="square" lIns="25400" tIns="25400" rIns="25400" bIns="25400" anchor="t">
             <a:spAutoFit/>
           </a:bodyPr>
           <a:lstStyle/>
@@ -9761,7 +10215,7 @@
 </file>
 
 <file path=ppt/slides/slide17.xml><?xml version="1.0" encoding="utf-8"?>
-<p:sld xmlns:a="http://schemas.openxmlformats.org/drawingml/2006/main" xmlns:p="http://schemas.openxmlformats.org/presentationml/2006/main" xmlns:r="http://schemas.openxmlformats.org/officeDocument/2006/relationships">
+<p:sld xmlns:a="http://schemas.openxmlformats.org/drawingml/2006/main" xmlns:r="http://schemas.openxmlformats.org/officeDocument/2006/relationships" xmlns:p="http://schemas.openxmlformats.org/presentationml/2006/main">
   <p:cSld>
     <p:spTree>
       <p:nvGrpSpPr>
@@ -9769,7 +10223,14 @@
         <p:cNvGrpSpPr/>
         <p:nvPr/>
       </p:nvGrpSpPr>
-      <p:grpSpPr/>
+      <p:grpSpPr>
+        <a:xfrm>
+          <a:off x="0" y="0"/>
+          <a:ext cx="0" cy="0"/>
+          <a:chOff x="0" y="0"/>
+          <a:chExt cx="0" cy="0"/>
+        </a:xfrm>
+      </p:grpSpPr>
       <p:sp>
         <p:nvSpPr>
           <p:cNvPr id="2" name="Rectangle 1"/>
@@ -9811,6 +10272,7 @@
           <a:lstStyle/>
           <a:p>
             <a:pPr algn="ctr"/>
+            <a:endParaRPr/>
           </a:p>
         </p:txBody>
       </p:sp>
@@ -9855,6 +10317,7 @@
           <a:lstStyle/>
           <a:p>
             <a:pPr algn="ctr"/>
+            <a:endParaRPr/>
           </a:p>
         </p:txBody>
       </p:sp>
@@ -9875,7 +10338,7 @@
           <a:noFill/>
         </p:spPr>
         <p:txBody>
-          <a:bodyPr wrap="square" anchor="ctr" lIns="25400" rIns="25400" tIns="25400" bIns="25400">
+          <a:bodyPr wrap="square" lIns="25400" tIns="25400" rIns="25400" bIns="25400" anchor="ctr">
             <a:spAutoFit/>
           </a:bodyPr>
           <a:lstStyle/>
@@ -9920,7 +10383,7 @@
           <a:noFill/>
         </p:spPr>
         <p:txBody>
-          <a:bodyPr wrap="square" anchor="ctr" lIns="25400" rIns="25400" tIns="25400" bIns="25400">
+          <a:bodyPr wrap="square" lIns="25400" tIns="25400" rIns="25400" bIns="25400" anchor="ctr">
             <a:spAutoFit/>
           </a:bodyPr>
           <a:lstStyle/>
@@ -9954,7 +10417,7 @@
           <a:noFill/>
         </p:spPr>
         <p:txBody>
-          <a:bodyPr wrap="square" anchor="ctr" lIns="25400" rIns="25400" tIns="25400" bIns="25400">
+          <a:bodyPr wrap="square" lIns="25400" tIns="25400" rIns="25400" bIns="25400" anchor="ctr">
             <a:spAutoFit/>
           </a:bodyPr>
           <a:lstStyle/>
@@ -10015,6 +10478,7 @@
           <a:lstStyle/>
           <a:p>
             <a:pPr algn="ctr"/>
+            <a:endParaRPr/>
           </a:p>
         </p:txBody>
       </p:sp>
@@ -10059,7 +10523,7 @@
           <a:noFill/>
         </p:spPr>
         <p:txBody>
-          <a:bodyPr wrap="square" anchor="t" lIns="25400" rIns="25400" tIns="25400" bIns="25400">
+          <a:bodyPr wrap="square" lIns="25400" tIns="25400" rIns="25400" bIns="25400" anchor="t">
             <a:spAutoFit/>
           </a:bodyPr>
           <a:lstStyle/>
@@ -10085,8 +10549,8 @@
         </p:nvSpPr>
         <p:spPr>
           <a:xfrm>
-            <a:off x="6400800" y="1143000"/>
-            <a:ext cx="5349240" cy="1170432"/>
+            <a:off x="6400800" y="1060704"/>
+            <a:ext cx="5349240" cy="1024128"/>
           </a:xfrm>
           <a:prstGeom prst="rect">
             <a:avLst/>
@@ -10118,6 +10582,7 @@
           <a:lstStyle/>
           <a:p>
             <a:pPr algn="ctr"/>
+            <a:endParaRPr/>
           </a:p>
         </p:txBody>
       </p:sp>
@@ -10129,8 +10594,8 @@
         </p:nvSpPr>
         <p:spPr>
           <a:xfrm>
-            <a:off x="6400800" y="1143000"/>
-            <a:ext cx="82296" cy="1170432"/>
+            <a:off x="6400800" y="1060704"/>
+            <a:ext cx="82296" cy="1024128"/>
           </a:xfrm>
           <a:prstGeom prst="rect">
             <a:avLst/>
@@ -10162,6 +10627,7 @@
           <a:lstStyle/>
           <a:p>
             <a:pPr algn="ctr"/>
+            <a:endParaRPr/>
           </a:p>
         </p:txBody>
       </p:sp>
@@ -10173,8 +10639,8 @@
         </p:nvSpPr>
         <p:spPr>
           <a:xfrm>
-            <a:off x="6601968" y="1252728"/>
-            <a:ext cx="5029200" cy="987552"/>
+            <a:off x="6601968" y="1170432"/>
+            <a:ext cx="5029200" cy="841248"/>
           </a:xfrm>
           <a:prstGeom prst="rect">
             <a:avLst/>
@@ -10182,7 +10648,7 @@
           <a:noFill/>
         </p:spPr>
         <p:txBody>
-          <a:bodyPr wrap="square" anchor="t" lIns="25400" rIns="25400" tIns="25400" bIns="25400">
+          <a:bodyPr wrap="square" lIns="25400" tIns="25400" rIns="25400" bIns="25400" anchor="t">
             <a:spAutoFit/>
           </a:bodyPr>
           <a:lstStyle/>
@@ -10199,7 +10665,7 @@
                 </a:solidFill>
                 <a:latin typeface="Microsoft JhengHei"/>
               </a:rPr>
-              <a:t>失效 ①　鏡像跳變</a:t>
+              <a:t>失效①　選錯邊（鏡像跳變）</a:t>
             </a:r>
           </a:p>
           <a:p>
@@ -10215,7 +10681,7 @@
                 </a:solidFill>
                 <a:latin typeface="Microsoft JhengHei"/>
               </a:rPr>
-              <a:t>• 選錯分枝 → 解落到頂點另一側的鏡像位置</a:t>
+              <a:t>• 阻抗對 SOC 呈 U 形，一個阻抗值對到左右兩個 SOC</a:t>
             </a:r>
           </a:p>
           <a:p>
@@ -10231,7 +10697,7 @@
                 </a:solidFill>
                 <a:latin typeface="Microsoft JhengHei"/>
               </a:rPr>
-              <a:t>• 真值 90% 時另一根約在 27% → 軌跡瞬間上下對翻</a:t>
+              <a:t>• 選錯邊：真值 90% 被讀成 27%，估測值上下對翻</a:t>
             </a:r>
           </a:p>
         </p:txBody>
@@ -10244,8 +10710,8 @@
         </p:nvSpPr>
         <p:spPr>
           <a:xfrm>
-            <a:off x="6400800" y="2377440"/>
-            <a:ext cx="5349240" cy="1353312"/>
+            <a:off x="6400800" y="2139696"/>
+            <a:ext cx="5349240" cy="1097280"/>
           </a:xfrm>
           <a:prstGeom prst="rect">
             <a:avLst/>
@@ -10277,6 +10743,7 @@
           <a:lstStyle/>
           <a:p>
             <a:pPr algn="ctr"/>
+            <a:endParaRPr/>
           </a:p>
         </p:txBody>
       </p:sp>
@@ -10288,8 +10755,8 @@
         </p:nvSpPr>
         <p:spPr>
           <a:xfrm>
-            <a:off x="6400800" y="2377440"/>
-            <a:ext cx="82296" cy="1353312"/>
+            <a:off x="6400800" y="2139696"/>
+            <a:ext cx="82296" cy="1097280"/>
           </a:xfrm>
           <a:prstGeom prst="rect">
             <a:avLst/>
@@ -10321,6 +10788,7 @@
           <a:lstStyle/>
           <a:p>
             <a:pPr algn="ctr"/>
+            <a:endParaRPr/>
           </a:p>
         </p:txBody>
       </p:sp>
@@ -10332,8 +10800,8 @@
         </p:nvSpPr>
         <p:spPr>
           <a:xfrm>
-            <a:off x="6601968" y="2487168"/>
-            <a:ext cx="5029200" cy="1170432"/>
+            <a:off x="6601968" y="2249424"/>
+            <a:ext cx="5029200" cy="914400"/>
           </a:xfrm>
           <a:prstGeom prst="rect">
             <a:avLst/>
@@ -10341,7 +10809,7 @@
           <a:noFill/>
         </p:spPr>
         <p:txBody>
-          <a:bodyPr wrap="square" anchor="t" lIns="25400" rIns="25400" tIns="25400" bIns="25400">
+          <a:bodyPr wrap="square" lIns="25400" tIns="25400" rIns="25400" bIns="25400" anchor="t">
             <a:spAutoFit/>
           </a:bodyPr>
           <a:lstStyle/>
@@ -10358,7 +10826,7 @@
                 </a:solidFill>
                 <a:latin typeface="Microsoft JhengHei"/>
               </a:rPr>
-              <a:t>失效 ②　頂點夾限平台</a:t>
+              <a:t>失效②　卡在最低點（頂點夾限）</a:t>
             </a:r>
           </a:p>
           <a:p>
@@ -10374,7 +10842,7 @@
                 </a:solidFill>
                 <a:latin typeface="Microsoft JhengHei"/>
               </a:rPr>
-              <a:t>• 噪聲使 Z 低於曲線最低值 33.4 mΩ → 判別式無實根</a:t>
+              <a:t>• 噪聲讓阻抗掉到 U 形最低點以下 → 方程式無解</a:t>
             </a:r>
           </a:p>
           <a:p>
@@ -10390,7 +10858,7 @@
                 </a:solidFill>
                 <a:latin typeface="Microsoft JhengHei"/>
               </a:rPr>
-              <a:t>• 只能夾限輸出頂點 58.6%；Round 41 中 111／425 事件（26%）落此</a:t>
+              <a:t>• 只能卡在最低點 58.6%；Round 41 有 26% 事件如此</a:t>
             </a:r>
           </a:p>
         </p:txBody>
@@ -10403,8 +10871,8 @@
         </p:nvSpPr>
         <p:spPr>
           <a:xfrm>
-            <a:off x="6400800" y="3794760"/>
-            <a:ext cx="5349240" cy="1170432"/>
+            <a:off x="6400800" y="3291840"/>
+            <a:ext cx="5349240" cy="1042415"/>
           </a:xfrm>
           <a:prstGeom prst="rect">
             <a:avLst/>
@@ -10436,6 +10904,7 @@
           <a:lstStyle/>
           <a:p>
             <a:pPr algn="ctr"/>
+            <a:endParaRPr/>
           </a:p>
         </p:txBody>
       </p:sp>
@@ -10447,8 +10916,8 @@
         </p:nvSpPr>
         <p:spPr>
           <a:xfrm>
-            <a:off x="6400800" y="3794760"/>
-            <a:ext cx="82296" cy="1170432"/>
+            <a:off x="6400800" y="3291840"/>
+            <a:ext cx="82296" cy="1042415"/>
           </a:xfrm>
           <a:prstGeom prst="rect">
             <a:avLst/>
@@ -10480,6 +10949,7 @@
           <a:lstStyle/>
           <a:p>
             <a:pPr algn="ctr"/>
+            <a:endParaRPr/>
           </a:p>
         </p:txBody>
       </p:sp>
@@ -10491,8 +10961,8 @@
         </p:nvSpPr>
         <p:spPr>
           <a:xfrm>
-            <a:off x="6601968" y="3904488"/>
-            <a:ext cx="5029200" cy="987552"/>
+            <a:off x="6601968" y="3401568"/>
+            <a:ext cx="5029200" cy="859535"/>
           </a:xfrm>
           <a:prstGeom prst="rect">
             <a:avLst/>
@@ -10500,7 +10970,7 @@
           <a:noFill/>
         </p:spPr>
         <p:txBody>
-          <a:bodyPr wrap="square" anchor="t" lIns="25400" rIns="25400" tIns="25400" bIns="25400">
+          <a:bodyPr wrap="square" lIns="25400" tIns="25400" rIns="25400" bIns="25400" anchor="t">
             <a:spAutoFit/>
           </a:bodyPr>
           <a:lstStyle/>
@@ -10517,7 +10987,7 @@
                 </a:solidFill>
                 <a:latin typeface="Microsoft JhengHei"/>
               </a:rPr>
-              <a:t>失效 ③　無不確定度加權</a:t>
+              <a:t>失效③　沒有記憶（無不確定度加權）</a:t>
             </a:r>
           </a:p>
           <a:p>
@@ -10533,7 +11003,7 @@
                 </a:solidFill>
                 <a:latin typeface="Microsoft JhengHei"/>
               </a:rPr>
-              <a:t>• 每事件獨立重錨、無共變異數機制可降權劣質觀測</a:t>
+              <a:t>• 每次從頭猜、不管準不準，猜錯就原封留到下次</a:t>
             </a:r>
           </a:p>
           <a:p>
@@ -10549,7 +11019,7 @@
                 </a:solidFill>
                 <a:latin typeface="Microsoft JhengHei"/>
               </a:rPr>
-              <a:t>• 單一錯誤解原封保留至下一事件（EKF 靠共變異數避免）</a:t>
+              <a:t>• EKF 有記憶：參考過去、對可疑值打折，故不會這樣</a:t>
             </a:r>
           </a:p>
         </p:txBody>
@@ -10562,8 +11032,8 @@
         </p:nvSpPr>
         <p:spPr>
           <a:xfrm>
-            <a:off x="6400800" y="5029200"/>
-            <a:ext cx="5349240" cy="1188720"/>
+            <a:off x="6400800" y="4389120"/>
+            <a:ext cx="5349240" cy="1874519"/>
           </a:xfrm>
           <a:prstGeom prst="rect">
             <a:avLst/>
@@ -10595,6 +11065,7 @@
           <a:lstStyle/>
           <a:p>
             <a:pPr algn="ctr"/>
+            <a:endParaRPr/>
           </a:p>
         </p:txBody>
       </p:sp>
@@ -10606,8 +11077,8 @@
         </p:nvSpPr>
         <p:spPr>
           <a:xfrm>
-            <a:off x="6400800" y="5029200"/>
-            <a:ext cx="82296" cy="1188720"/>
+            <a:off x="6400800" y="4389120"/>
+            <a:ext cx="82296" cy="1874519"/>
           </a:xfrm>
           <a:prstGeom prst="rect">
             <a:avLst/>
@@ -10639,6 +11110,7 @@
           <a:lstStyle/>
           <a:p>
             <a:pPr algn="ctr"/>
+            <a:endParaRPr/>
           </a:p>
         </p:txBody>
       </p:sp>
@@ -10650,8 +11122,8 @@
         </p:nvSpPr>
         <p:spPr>
           <a:xfrm>
-            <a:off x="6601968" y="5138928"/>
-            <a:ext cx="5029200" cy="1005840"/>
+            <a:off x="6601968" y="4498848"/>
+            <a:ext cx="5029200" cy="1691639"/>
           </a:xfrm>
           <a:prstGeom prst="rect">
             <a:avLst/>
@@ -10659,7 +11131,7 @@
           <a:noFill/>
         </p:spPr>
         <p:txBody>
-          <a:bodyPr wrap="square" anchor="t" lIns="25400" rIns="25400" tIns="25400" bIns="25400">
+          <a:bodyPr wrap="square" lIns="25400" tIns="25400" rIns="25400" bIns="25400" anchor="t">
             <a:spAutoFit/>
           </a:bodyPr>
           <a:lstStyle/>
@@ -10676,7 +11148,7 @@
                 </a:solidFill>
                 <a:latin typeface="Microsoft JhengHei"/>
               </a:rPr>
-              <a:t>為何是方法本質、非感測器</a:t>
+              <a:t>根因：曲線太平放大噪聲（非感測器）</a:t>
             </a:r>
           </a:p>
           <a:p>
@@ -10692,7 +11164,7 @@
                 </a:solidFill>
                 <a:latin typeface="Microsoft JhengHei"/>
               </a:rPr>
-              <a:t>• 同噪聲抖動：庫倫 0.005%／EKF 0.018%／動態阻抗 53%（差 3–4 級）</a:t>
+              <a:t>• 整段 SOC，Z 只變約 6 mΩ；單次噪聲 σ≈2 mΩ → 訊號僅噪聲 3 倍</a:t>
             </a:r>
           </a:p>
           <a:p>
@@ -10708,7 +11180,23 @@
                 </a:solidFill>
                 <a:latin typeface="Microsoft JhengHei"/>
               </a:rPr>
-              <a:t>• → 病態源自曲線跨度僅噪聲 3 倍，與感測器品質無關</a:t>
+              <a:t>• 曲線太平 → 阻抗抖 1 mΩ，反查 SOC 就抖十幾 %；中段 40–60% 最糟</a:t>
+            </a:r>
+          </a:p>
+          <a:p>
+            <a:pPr>
+              <a:spcAft>
+                <a:spcPts val="400"/>
+              </a:spcAft>
+            </a:pPr>
+            <a:r>
+              <a:rPr sz="1300" b="0" i="0">
+                <a:solidFill>
+                  <a:srgbClr val="404040"/>
+                </a:solidFill>
+                <a:latin typeface="Microsoft JhengHei"/>
+              </a:rPr>
+              <a:t>• 證據：同噪聲下庫倫抖 0.005%、EKF 0.018%、動態阻抗 53%</a:t>
             </a:r>
           </a:p>
         </p:txBody>
@@ -10722,7 +11210,7 @@
 </file>
 
 <file path=ppt/slides/slide18.xml><?xml version="1.0" encoding="utf-8"?>
-<p:sld xmlns:a="http://schemas.openxmlformats.org/drawingml/2006/main" xmlns:p="http://schemas.openxmlformats.org/presentationml/2006/main" xmlns:r="http://schemas.openxmlformats.org/officeDocument/2006/relationships">
+<p:sld xmlns:a="http://schemas.openxmlformats.org/drawingml/2006/main" xmlns:r="http://schemas.openxmlformats.org/officeDocument/2006/relationships" xmlns:p="http://schemas.openxmlformats.org/presentationml/2006/main">
   <p:cSld>
     <p:spTree>
       <p:nvGrpSpPr>
@@ -10730,7 +11218,14 @@
         <p:cNvGrpSpPr/>
         <p:nvPr/>
       </p:nvGrpSpPr>
-      <p:grpSpPr/>
+      <p:grpSpPr>
+        <a:xfrm>
+          <a:off x="0" y="0"/>
+          <a:ext cx="0" cy="0"/>
+          <a:chOff x="0" y="0"/>
+          <a:chExt cx="0" cy="0"/>
+        </a:xfrm>
+      </p:grpSpPr>
       <p:sp>
         <p:nvSpPr>
           <p:cNvPr id="2" name="Rectangle 1"/>
@@ -10772,6 +11267,7 @@
           <a:lstStyle/>
           <a:p>
             <a:pPr algn="ctr"/>
+            <a:endParaRPr/>
           </a:p>
         </p:txBody>
       </p:sp>
@@ -10816,6 +11312,7 @@
           <a:lstStyle/>
           <a:p>
             <a:pPr algn="ctr"/>
+            <a:endParaRPr/>
           </a:p>
         </p:txBody>
       </p:sp>
@@ -10836,7 +11333,7 @@
           <a:noFill/>
         </p:spPr>
         <p:txBody>
-          <a:bodyPr wrap="square" anchor="ctr" lIns="25400" rIns="25400" tIns="25400" bIns="25400">
+          <a:bodyPr wrap="square" lIns="25400" tIns="25400" rIns="25400" bIns="25400" anchor="ctr">
             <a:spAutoFit/>
           </a:bodyPr>
           <a:lstStyle/>
@@ -10881,7 +11378,7 @@
           <a:noFill/>
         </p:spPr>
         <p:txBody>
-          <a:bodyPr wrap="square" anchor="ctr" lIns="25400" rIns="25400" tIns="25400" bIns="25400">
+          <a:bodyPr wrap="square" lIns="25400" tIns="25400" rIns="25400" bIns="25400" anchor="ctr">
             <a:spAutoFit/>
           </a:bodyPr>
           <a:lstStyle/>
@@ -10915,7 +11412,7 @@
           <a:noFill/>
         </p:spPr>
         <p:txBody>
-          <a:bodyPr wrap="square" anchor="ctr" lIns="25400" rIns="25400" tIns="25400" bIns="25400">
+          <a:bodyPr wrap="square" lIns="25400" tIns="25400" rIns="25400" bIns="25400" anchor="ctr">
             <a:spAutoFit/>
           </a:bodyPr>
           <a:lstStyle/>
@@ -10952,17 +11449,53 @@
                 <a:tableStyleId>{5C22544A-7EE6-4342-B048-85BDC9FD1C3A}</a:tableStyleId>
               </a:tblPr>
               <a:tblGrid>
-                <a:gridCol w="1486911"/>
-                <a:gridCol w="1883421"/>
-                <a:gridCol w="2478185"/>
-                <a:gridCol w="2081676"/>
-                <a:gridCol w="2379058"/>
-                <a:gridCol w="892146"/>
+                <a:gridCol w="1486911">
+                  <a:extLst>
+                    <a:ext uri="{9D8B030D-6E8A-4147-A177-3AD203B41FA5}">
+                      <a16:colId xmlns:a16="http://schemas.microsoft.com/office/drawing/2014/main" val="20000"/>
+                    </a:ext>
+                  </a:extLst>
+                </a:gridCol>
+                <a:gridCol w="1883421">
+                  <a:extLst>
+                    <a:ext uri="{9D8B030D-6E8A-4147-A177-3AD203B41FA5}">
+                      <a16:colId xmlns:a16="http://schemas.microsoft.com/office/drawing/2014/main" val="20001"/>
+                    </a:ext>
+                  </a:extLst>
+                </a:gridCol>
+                <a:gridCol w="2478185">
+                  <a:extLst>
+                    <a:ext uri="{9D8B030D-6E8A-4147-A177-3AD203B41FA5}">
+                      <a16:colId xmlns:a16="http://schemas.microsoft.com/office/drawing/2014/main" val="20002"/>
+                    </a:ext>
+                  </a:extLst>
+                </a:gridCol>
+                <a:gridCol w="2081676">
+                  <a:extLst>
+                    <a:ext uri="{9D8B030D-6E8A-4147-A177-3AD203B41FA5}">
+                      <a16:colId xmlns:a16="http://schemas.microsoft.com/office/drawing/2014/main" val="20003"/>
+                    </a:ext>
+                  </a:extLst>
+                </a:gridCol>
+                <a:gridCol w="2379058">
+                  <a:extLst>
+                    <a:ext uri="{9D8B030D-6E8A-4147-A177-3AD203B41FA5}">
+                      <a16:colId xmlns:a16="http://schemas.microsoft.com/office/drawing/2014/main" val="20004"/>
+                    </a:ext>
+                  </a:extLst>
+                </a:gridCol>
+                <a:gridCol w="892146">
+                  <a:extLst>
+                    <a:ext uri="{9D8B030D-6E8A-4147-A177-3AD203B41FA5}">
+                      <a16:colId xmlns:a16="http://schemas.microsoft.com/office/drawing/2014/main" val="20005"/>
+                    </a:ext>
+                  </a:extLst>
+                </a:gridCol>
               </a:tblGrid>
               <a:tr h="537210">
                 <a:tc>
                   <a:txBody>
-                    <a:bodyPr wrap="square"/>
+                    <a:bodyPr/>
                     <a:lstStyle/>
                     <a:p>
                       <a:pPr algn="l"/>
@@ -10985,7 +11518,7 @@
                 </a:tc>
                 <a:tc>
                   <a:txBody>
-                    <a:bodyPr wrap="square"/>
+                    <a:bodyPr/>
                     <a:lstStyle/>
                     <a:p>
                       <a:pPr algn="ctr"/>
@@ -11008,7 +11541,7 @@
                 </a:tc>
                 <a:tc>
                   <a:txBody>
-                    <a:bodyPr wrap="square"/>
+                    <a:bodyPr/>
                     <a:lstStyle/>
                     <a:p>
                       <a:pPr algn="ctr"/>
@@ -11031,7 +11564,7 @@
                 </a:tc>
                 <a:tc>
                   <a:txBody>
-                    <a:bodyPr wrap="square"/>
+                    <a:bodyPr/>
                     <a:lstStyle/>
                     <a:p>
                       <a:pPr algn="ctr"/>
@@ -11054,7 +11587,7 @@
                 </a:tc>
                 <a:tc>
                   <a:txBody>
-                    <a:bodyPr wrap="square"/>
+                    <a:bodyPr/>
                     <a:lstStyle/>
                     <a:p>
                       <a:pPr algn="ctr"/>
@@ -11077,7 +11610,7 @@
                 </a:tc>
                 <a:tc>
                   <a:txBody>
-                    <a:bodyPr wrap="square"/>
+                    <a:bodyPr/>
                     <a:lstStyle/>
                     <a:p>
                       <a:pPr algn="ctr"/>
@@ -11098,11 +11631,16 @@
                     </a:solidFill>
                   </a:tcPr>
                 </a:tc>
+                <a:extLst>
+                  <a:ext uri="{0D108BD9-81ED-4DB2-BD59-A6C34878D82A}">
+                    <a16:rowId xmlns:a16="http://schemas.microsoft.com/office/drawing/2014/main" val="10000"/>
+                  </a:ext>
+                </a:extLst>
               </a:tr>
               <a:tr h="537210">
                 <a:tc>
                   <a:txBody>
-                    <a:bodyPr wrap="square"/>
+                    <a:bodyPr/>
                     <a:lstStyle/>
                     <a:p>
                       <a:pPr algn="l"/>
@@ -11125,7 +11663,7 @@
                 </a:tc>
                 <a:tc>
                   <a:txBody>
-                    <a:bodyPr wrap="square"/>
+                    <a:bodyPr/>
                     <a:lstStyle/>
                     <a:p>
                       <a:pPr algn="ctr"/>
@@ -11148,7 +11686,7 @@
                 </a:tc>
                 <a:tc>
                   <a:txBody>
-                    <a:bodyPr wrap="square"/>
+                    <a:bodyPr/>
                     <a:lstStyle/>
                     <a:p>
                       <a:pPr algn="ctr"/>
@@ -11171,7 +11709,7 @@
                 </a:tc>
                 <a:tc>
                   <a:txBody>
-                    <a:bodyPr wrap="square"/>
+                    <a:bodyPr/>
                     <a:lstStyle/>
                     <a:p>
                       <a:pPr algn="ctr"/>
@@ -11194,7 +11732,7 @@
                 </a:tc>
                 <a:tc>
                   <a:txBody>
-                    <a:bodyPr wrap="square"/>
+                    <a:bodyPr/>
                     <a:lstStyle/>
                     <a:p>
                       <a:pPr algn="ctr"/>
@@ -11217,7 +11755,7 @@
                 </a:tc>
                 <a:tc>
                   <a:txBody>
-                    <a:bodyPr wrap="square"/>
+                    <a:bodyPr/>
                     <a:lstStyle/>
                     <a:p>
                       <a:pPr algn="ctr"/>
@@ -11238,11 +11776,16 @@
                     </a:solidFill>
                   </a:tcPr>
                 </a:tc>
+                <a:extLst>
+                  <a:ext uri="{0D108BD9-81ED-4DB2-BD59-A6C34878D82A}">
+                    <a16:rowId xmlns:a16="http://schemas.microsoft.com/office/drawing/2014/main" val="10001"/>
+                  </a:ext>
+                </a:extLst>
               </a:tr>
               <a:tr h="537210">
                 <a:tc>
                   <a:txBody>
-                    <a:bodyPr wrap="square"/>
+                    <a:bodyPr/>
                     <a:lstStyle/>
                     <a:p>
                       <a:pPr algn="l"/>
@@ -11265,7 +11808,7 @@
                 </a:tc>
                 <a:tc>
                   <a:txBody>
-                    <a:bodyPr wrap="square"/>
+                    <a:bodyPr/>
                     <a:lstStyle/>
                     <a:p>
                       <a:pPr algn="ctr"/>
@@ -11288,7 +11831,7 @@
                 </a:tc>
                 <a:tc>
                   <a:txBody>
-                    <a:bodyPr wrap="square"/>
+                    <a:bodyPr/>
                     <a:lstStyle/>
                     <a:p>
                       <a:pPr algn="ctr"/>
@@ -11311,7 +11854,7 @@
                 </a:tc>
                 <a:tc>
                   <a:txBody>
-                    <a:bodyPr wrap="square"/>
+                    <a:bodyPr/>
                     <a:lstStyle/>
                     <a:p>
                       <a:pPr algn="ctr"/>
@@ -11334,7 +11877,7 @@
                 </a:tc>
                 <a:tc>
                   <a:txBody>
-                    <a:bodyPr wrap="square"/>
+                    <a:bodyPr/>
                     <a:lstStyle/>
                     <a:p>
                       <a:pPr algn="ctr"/>
@@ -11357,7 +11900,7 @@
                 </a:tc>
                 <a:tc>
                   <a:txBody>
-                    <a:bodyPr wrap="square"/>
+                    <a:bodyPr/>
                     <a:lstStyle/>
                     <a:p>
                       <a:pPr algn="ctr"/>
@@ -11378,11 +11921,16 @@
                     </a:solidFill>
                   </a:tcPr>
                 </a:tc>
+                <a:extLst>
+                  <a:ext uri="{0D108BD9-81ED-4DB2-BD59-A6C34878D82A}">
+                    <a16:rowId xmlns:a16="http://schemas.microsoft.com/office/drawing/2014/main" val="10002"/>
+                  </a:ext>
+                </a:extLst>
               </a:tr>
               <a:tr h="537210">
                 <a:tc>
                   <a:txBody>
-                    <a:bodyPr wrap="square"/>
+                    <a:bodyPr/>
                     <a:lstStyle/>
                     <a:p>
                       <a:pPr algn="l"/>
@@ -11405,7 +11953,7 @@
                 </a:tc>
                 <a:tc>
                   <a:txBody>
-                    <a:bodyPr wrap="square"/>
+                    <a:bodyPr/>
                     <a:lstStyle/>
                     <a:p>
                       <a:pPr algn="ctr"/>
@@ -11428,7 +11976,7 @@
                 </a:tc>
                 <a:tc>
                   <a:txBody>
-                    <a:bodyPr wrap="square"/>
+                    <a:bodyPr/>
                     <a:lstStyle/>
                     <a:p>
                       <a:pPr algn="ctr"/>
@@ -11451,7 +11999,7 @@
                 </a:tc>
                 <a:tc>
                   <a:txBody>
-                    <a:bodyPr wrap="square"/>
+                    <a:bodyPr/>
                     <a:lstStyle/>
                     <a:p>
                       <a:pPr algn="ctr"/>
@@ -11474,7 +12022,7 @@
                 </a:tc>
                 <a:tc>
                   <a:txBody>
-                    <a:bodyPr wrap="square"/>
+                    <a:bodyPr/>
                     <a:lstStyle/>
                     <a:p>
                       <a:pPr algn="ctr"/>
@@ -11497,7 +12045,7 @@
                 </a:tc>
                 <a:tc>
                   <a:txBody>
-                    <a:bodyPr wrap="square"/>
+                    <a:bodyPr/>
                     <a:lstStyle/>
                     <a:p>
                       <a:pPr algn="ctr"/>
@@ -11518,6 +12066,11 @@
                     </a:solidFill>
                   </a:tcPr>
                 </a:tc>
+                <a:extLst>
+                  <a:ext uri="{0D108BD9-81ED-4DB2-BD59-A6C34878D82A}">
+                    <a16:rowId xmlns:a16="http://schemas.microsoft.com/office/drawing/2014/main" val="10003"/>
+                  </a:ext>
+                </a:extLst>
               </a:tr>
             </a:tbl>
           </a:graphicData>
@@ -11540,7 +12093,7 @@
           <a:noFill/>
         </p:spPr>
         <p:txBody>
-          <a:bodyPr wrap="square" anchor="t" lIns="25400" rIns="25400" tIns="25400" bIns="25400">
+          <a:bodyPr wrap="square" lIns="25400" tIns="25400" rIns="25400" bIns="25400" anchor="t">
             <a:spAutoFit/>
           </a:bodyPr>
           <a:lstStyle/>
@@ -11599,6 +12152,7 @@
           <a:lstStyle/>
           <a:p>
             <a:pPr algn="ctr"/>
+            <a:endParaRPr/>
           </a:p>
         </p:txBody>
       </p:sp>
@@ -11643,6 +12197,7 @@
           <a:lstStyle/>
           <a:p>
             <a:pPr algn="ctr"/>
+            <a:endParaRPr/>
           </a:p>
         </p:txBody>
       </p:sp>
@@ -11663,7 +12218,7 @@
           <a:noFill/>
         </p:spPr>
         <p:txBody>
-          <a:bodyPr wrap="square" anchor="t" lIns="25400" rIns="25400" tIns="25400" bIns="25400">
+          <a:bodyPr wrap="square" lIns="25400" tIns="25400" rIns="25400" bIns="25400" anchor="t">
             <a:spAutoFit/>
           </a:bodyPr>
           <a:lstStyle/>
@@ -11774,6 +12329,7 @@
           <a:lstStyle/>
           <a:p>
             <a:pPr algn="ctr"/>
+            <a:endParaRPr/>
           </a:p>
         </p:txBody>
       </p:sp>
@@ -11818,6 +12374,7 @@
           <a:lstStyle/>
           <a:p>
             <a:pPr algn="ctr"/>
+            <a:endParaRPr/>
           </a:p>
         </p:txBody>
       </p:sp>
@@ -11838,7 +12395,7 @@
           <a:noFill/>
         </p:spPr>
         <p:txBody>
-          <a:bodyPr wrap="square" anchor="t" lIns="25400" rIns="25400" tIns="25400" bIns="25400">
+          <a:bodyPr wrap="square" lIns="25400" tIns="25400" rIns="25400" bIns="25400" anchor="t">
             <a:spAutoFit/>
           </a:bodyPr>
           <a:lstStyle/>
@@ -11917,7 +12474,7 @@
 </file>
 
 <file path=ppt/slides/slide19.xml><?xml version="1.0" encoding="utf-8"?>
-<p:sld xmlns:a="http://schemas.openxmlformats.org/drawingml/2006/main" xmlns:p="http://schemas.openxmlformats.org/presentationml/2006/main" xmlns:r="http://schemas.openxmlformats.org/officeDocument/2006/relationships">
+<p:sld xmlns:a="http://schemas.openxmlformats.org/drawingml/2006/main" xmlns:r="http://schemas.openxmlformats.org/officeDocument/2006/relationships" xmlns:p="http://schemas.openxmlformats.org/presentationml/2006/main">
   <p:cSld>
     <p:spTree>
       <p:nvGrpSpPr>
@@ -11925,7 +12482,14 @@
         <p:cNvGrpSpPr/>
         <p:nvPr/>
       </p:nvGrpSpPr>
-      <p:grpSpPr/>
+      <p:grpSpPr>
+        <a:xfrm>
+          <a:off x="0" y="0"/>
+          <a:ext cx="0" cy="0"/>
+          <a:chOff x="0" y="0"/>
+          <a:chExt cx="0" cy="0"/>
+        </a:xfrm>
+      </p:grpSpPr>
       <p:sp>
         <p:nvSpPr>
           <p:cNvPr id="2" name="Rectangle 1"/>
@@ -11967,6 +12531,7 @@
           <a:lstStyle/>
           <a:p>
             <a:pPr algn="ctr"/>
+            <a:endParaRPr/>
           </a:p>
         </p:txBody>
       </p:sp>
@@ -12011,6 +12576,7 @@
           <a:lstStyle/>
           <a:p>
             <a:pPr algn="ctr"/>
+            <a:endParaRPr/>
           </a:p>
         </p:txBody>
       </p:sp>
@@ -12031,7 +12597,7 @@
           <a:noFill/>
         </p:spPr>
         <p:txBody>
-          <a:bodyPr wrap="square" anchor="ctr" lIns="25400" rIns="25400" tIns="25400" bIns="25400">
+          <a:bodyPr wrap="square" lIns="25400" tIns="25400" rIns="25400" bIns="25400" anchor="ctr">
             <a:spAutoFit/>
           </a:bodyPr>
           <a:lstStyle/>
@@ -12076,7 +12642,7 @@
           <a:noFill/>
         </p:spPr>
         <p:txBody>
-          <a:bodyPr wrap="square" anchor="ctr" lIns="25400" rIns="25400" tIns="25400" bIns="25400">
+          <a:bodyPr wrap="square" lIns="25400" tIns="25400" rIns="25400" bIns="25400" anchor="ctr">
             <a:spAutoFit/>
           </a:bodyPr>
           <a:lstStyle/>
@@ -12110,7 +12676,7 @@
           <a:noFill/>
         </p:spPr>
         <p:txBody>
-          <a:bodyPr wrap="square" anchor="ctr" lIns="25400" rIns="25400" tIns="25400" bIns="25400">
+          <a:bodyPr wrap="square" lIns="25400" tIns="25400" rIns="25400" bIns="25400" anchor="ctr">
             <a:spAutoFit/>
           </a:bodyPr>
           <a:lstStyle/>
@@ -12145,7 +12711,7 @@
           <a:noFill/>
         </p:spPr>
         <p:txBody>
-          <a:bodyPr wrap="square" anchor="t" lIns="25400" rIns="25400" tIns="25400" bIns="25400">
+          <a:bodyPr wrap="square" lIns="25400" tIns="25400" rIns="25400" bIns="25400" anchor="t">
             <a:spAutoFit/>
           </a:bodyPr>
           <a:lstStyle/>
@@ -12366,15 +12932,39 @@
                 <a:tableStyleId>{5C22544A-7EE6-4342-B048-85BDC9FD1C3A}</a:tableStyleId>
               </a:tblPr>
               <a:tblGrid>
-                <a:gridCol w="1002323"/>
-                <a:gridCol w="1603716"/>
-                <a:gridCol w="1303020"/>
-                <a:gridCol w="1303020"/>
+                <a:gridCol w="1002323">
+                  <a:extLst>
+                    <a:ext uri="{9D8B030D-6E8A-4147-A177-3AD203B41FA5}">
+                      <a16:colId xmlns:a16="http://schemas.microsoft.com/office/drawing/2014/main" val="20000"/>
+                    </a:ext>
+                  </a:extLst>
+                </a:gridCol>
+                <a:gridCol w="1603716">
+                  <a:extLst>
+                    <a:ext uri="{9D8B030D-6E8A-4147-A177-3AD203B41FA5}">
+                      <a16:colId xmlns:a16="http://schemas.microsoft.com/office/drawing/2014/main" val="20001"/>
+                    </a:ext>
+                  </a:extLst>
+                </a:gridCol>
+                <a:gridCol w="1303020">
+                  <a:extLst>
+                    <a:ext uri="{9D8B030D-6E8A-4147-A177-3AD203B41FA5}">
+                      <a16:colId xmlns:a16="http://schemas.microsoft.com/office/drawing/2014/main" val="20002"/>
+                    </a:ext>
+                  </a:extLst>
+                </a:gridCol>
+                <a:gridCol w="1303020">
+                  <a:extLst>
+                    <a:ext uri="{9D8B030D-6E8A-4147-A177-3AD203B41FA5}">
+                      <a16:colId xmlns:a16="http://schemas.microsoft.com/office/drawing/2014/main" val="20003"/>
+                    </a:ext>
+                  </a:extLst>
+                </a:gridCol>
               </a:tblGrid>
               <a:tr h="402336">
                 <a:tc>
                   <a:txBody>
-                    <a:bodyPr wrap="square"/>
+                    <a:bodyPr/>
                     <a:lstStyle/>
                     <a:p>
                       <a:pPr algn="ctr"/>
@@ -12397,7 +12987,7 @@
                 </a:tc>
                 <a:tc>
                   <a:txBody>
-                    <a:bodyPr wrap="square"/>
+                    <a:bodyPr/>
                     <a:lstStyle/>
                     <a:p>
                       <a:pPr algn="ctr"/>
@@ -12420,7 +13010,7 @@
                 </a:tc>
                 <a:tc>
                   <a:txBody>
-                    <a:bodyPr wrap="square"/>
+                    <a:bodyPr/>
                     <a:lstStyle/>
                     <a:p>
                       <a:pPr algn="ctr"/>
@@ -12443,7 +13033,7 @@
                 </a:tc>
                 <a:tc>
                   <a:txBody>
-                    <a:bodyPr wrap="square"/>
+                    <a:bodyPr/>
                     <a:lstStyle/>
                     <a:p>
                       <a:pPr algn="ctr"/>
@@ -12464,11 +13054,16 @@
                     </a:solidFill>
                   </a:tcPr>
                 </a:tc>
+                <a:extLst>
+                  <a:ext uri="{0D108BD9-81ED-4DB2-BD59-A6C34878D82A}">
+                    <a16:rowId xmlns:a16="http://schemas.microsoft.com/office/drawing/2014/main" val="10000"/>
+                  </a:ext>
+                </a:extLst>
               </a:tr>
               <a:tr h="402336">
                 <a:tc>
                   <a:txBody>
-                    <a:bodyPr wrap="square"/>
+                    <a:bodyPr/>
                     <a:lstStyle/>
                     <a:p>
                       <a:pPr algn="ctr"/>
@@ -12491,7 +13086,7 @@
                 </a:tc>
                 <a:tc>
                   <a:txBody>
-                    <a:bodyPr wrap="square"/>
+                    <a:bodyPr/>
                     <a:lstStyle/>
                     <a:p>
                       <a:pPr algn="ctr"/>
@@ -12514,7 +13109,7 @@
                 </a:tc>
                 <a:tc>
                   <a:txBody>
-                    <a:bodyPr wrap="square"/>
+                    <a:bodyPr/>
                     <a:lstStyle/>
                     <a:p>
                       <a:pPr algn="ctr"/>
@@ -12537,7 +13132,7 @@
                 </a:tc>
                 <a:tc>
                   <a:txBody>
-                    <a:bodyPr wrap="square"/>
+                    <a:bodyPr/>
                     <a:lstStyle/>
                     <a:p>
                       <a:pPr algn="ctr"/>
@@ -12558,11 +13153,16 @@
                     </a:solidFill>
                   </a:tcPr>
                 </a:tc>
+                <a:extLst>
+                  <a:ext uri="{0D108BD9-81ED-4DB2-BD59-A6C34878D82A}">
+                    <a16:rowId xmlns:a16="http://schemas.microsoft.com/office/drawing/2014/main" val="10001"/>
+                  </a:ext>
+                </a:extLst>
               </a:tr>
               <a:tr h="402336">
                 <a:tc>
                   <a:txBody>
-                    <a:bodyPr wrap="square"/>
+                    <a:bodyPr/>
                     <a:lstStyle/>
                     <a:p>
                       <a:pPr algn="ctr"/>
@@ -12585,7 +13185,7 @@
                 </a:tc>
                 <a:tc>
                   <a:txBody>
-                    <a:bodyPr wrap="square"/>
+                    <a:bodyPr/>
                     <a:lstStyle/>
                     <a:p>
                       <a:pPr algn="ctr"/>
@@ -12608,7 +13208,7 @@
                 </a:tc>
                 <a:tc>
                   <a:txBody>
-                    <a:bodyPr wrap="square"/>
+                    <a:bodyPr/>
                     <a:lstStyle/>
                     <a:p>
                       <a:pPr algn="ctr"/>
@@ -12631,7 +13231,7 @@
                 </a:tc>
                 <a:tc>
                   <a:txBody>
-                    <a:bodyPr wrap="square"/>
+                    <a:bodyPr/>
                     <a:lstStyle/>
                     <a:p>
                       <a:pPr algn="ctr"/>
@@ -12652,11 +13252,16 @@
                     </a:solidFill>
                   </a:tcPr>
                 </a:tc>
+                <a:extLst>
+                  <a:ext uri="{0D108BD9-81ED-4DB2-BD59-A6C34878D82A}">
+                    <a16:rowId xmlns:a16="http://schemas.microsoft.com/office/drawing/2014/main" val="10002"/>
+                  </a:ext>
+                </a:extLst>
               </a:tr>
               <a:tr h="402336">
                 <a:tc>
                   <a:txBody>
-                    <a:bodyPr wrap="square"/>
+                    <a:bodyPr/>
                     <a:lstStyle/>
                     <a:p>
                       <a:pPr algn="ctr"/>
@@ -12679,7 +13284,7 @@
                 </a:tc>
                 <a:tc>
                   <a:txBody>
-                    <a:bodyPr wrap="square"/>
+                    <a:bodyPr/>
                     <a:lstStyle/>
                     <a:p>
                       <a:pPr algn="ctr"/>
@@ -12702,7 +13307,7 @@
                 </a:tc>
                 <a:tc>
                   <a:txBody>
-                    <a:bodyPr wrap="square"/>
+                    <a:bodyPr/>
                     <a:lstStyle/>
                     <a:p>
                       <a:pPr algn="ctr"/>
@@ -12725,7 +13330,7 @@
                 </a:tc>
                 <a:tc>
                   <a:txBody>
-                    <a:bodyPr wrap="square"/>
+                    <a:bodyPr/>
                     <a:lstStyle/>
                     <a:p>
                       <a:pPr algn="ctr"/>
@@ -12746,11 +13351,16 @@
                     </a:solidFill>
                   </a:tcPr>
                 </a:tc>
+                <a:extLst>
+                  <a:ext uri="{0D108BD9-81ED-4DB2-BD59-A6C34878D82A}">
+                    <a16:rowId xmlns:a16="http://schemas.microsoft.com/office/drawing/2014/main" val="10003"/>
+                  </a:ext>
+                </a:extLst>
               </a:tr>
               <a:tr h="402336">
                 <a:tc>
                   <a:txBody>
-                    <a:bodyPr wrap="square"/>
+                    <a:bodyPr/>
                     <a:lstStyle/>
                     <a:p>
                       <a:pPr algn="ctr"/>
@@ -12773,7 +13383,7 @@
                 </a:tc>
                 <a:tc>
                   <a:txBody>
-                    <a:bodyPr wrap="square"/>
+                    <a:bodyPr/>
                     <a:lstStyle/>
                     <a:p>
                       <a:pPr algn="ctr"/>
@@ -12796,7 +13406,7 @@
                 </a:tc>
                 <a:tc>
                   <a:txBody>
-                    <a:bodyPr wrap="square"/>
+                    <a:bodyPr/>
                     <a:lstStyle/>
                     <a:p>
                       <a:pPr algn="ctr"/>
@@ -12819,7 +13429,7 @@
                 </a:tc>
                 <a:tc>
                   <a:txBody>
-                    <a:bodyPr wrap="square"/>
+                    <a:bodyPr/>
                     <a:lstStyle/>
                     <a:p>
                       <a:pPr algn="ctr"/>
@@ -12840,6 +13450,11 @@
                     </a:solidFill>
                   </a:tcPr>
                 </a:tc>
+                <a:extLst>
+                  <a:ext uri="{0D108BD9-81ED-4DB2-BD59-A6C34878D82A}">
+                    <a16:rowId xmlns:a16="http://schemas.microsoft.com/office/drawing/2014/main" val="10004"/>
+                  </a:ext>
+                </a:extLst>
               </a:tr>
             </a:tbl>
           </a:graphicData>
@@ -12862,7 +13477,7 @@
           <a:noFill/>
         </p:spPr>
         <p:txBody>
-          <a:bodyPr wrap="square" anchor="t" lIns="25400" rIns="25400" tIns="25400" bIns="25400">
+          <a:bodyPr wrap="square" lIns="25400" tIns="25400" rIns="25400" bIns="25400" anchor="t">
             <a:spAutoFit/>
           </a:bodyPr>
           <a:lstStyle/>
@@ -12899,15 +13514,39 @@
                 <a:tableStyleId>{5C22544A-7EE6-4342-B048-85BDC9FD1C3A}</a:tableStyleId>
               </a:tblPr>
               <a:tblGrid>
-                <a:gridCol w="1039090"/>
-                <a:gridCol w="1350818"/>
-                <a:gridCol w="1766454"/>
-                <a:gridCol w="1558636"/>
+                <a:gridCol w="1039090">
+                  <a:extLst>
+                    <a:ext uri="{9D8B030D-6E8A-4147-A177-3AD203B41FA5}">
+                      <a16:colId xmlns:a16="http://schemas.microsoft.com/office/drawing/2014/main" val="20000"/>
+                    </a:ext>
+                  </a:extLst>
+                </a:gridCol>
+                <a:gridCol w="1350818">
+                  <a:extLst>
+                    <a:ext uri="{9D8B030D-6E8A-4147-A177-3AD203B41FA5}">
+                      <a16:colId xmlns:a16="http://schemas.microsoft.com/office/drawing/2014/main" val="20001"/>
+                    </a:ext>
+                  </a:extLst>
+                </a:gridCol>
+                <a:gridCol w="1766454">
+                  <a:extLst>
+                    <a:ext uri="{9D8B030D-6E8A-4147-A177-3AD203B41FA5}">
+                      <a16:colId xmlns:a16="http://schemas.microsoft.com/office/drawing/2014/main" val="20002"/>
+                    </a:ext>
+                  </a:extLst>
+                </a:gridCol>
+                <a:gridCol w="1558636">
+                  <a:extLst>
+                    <a:ext uri="{9D8B030D-6E8A-4147-A177-3AD203B41FA5}">
+                      <a16:colId xmlns:a16="http://schemas.microsoft.com/office/drawing/2014/main" val="20003"/>
+                    </a:ext>
+                  </a:extLst>
+                </a:gridCol>
               </a:tblGrid>
               <a:tr h="333102">
                 <a:tc>
                   <a:txBody>
-                    <a:bodyPr wrap="square"/>
+                    <a:bodyPr/>
                     <a:lstStyle/>
                     <a:p>
                       <a:pPr algn="ctr"/>
@@ -12930,7 +13569,7 @@
                 </a:tc>
                 <a:tc>
                   <a:txBody>
-                    <a:bodyPr wrap="square"/>
+                    <a:bodyPr/>
                     <a:lstStyle/>
                     <a:p>
                       <a:pPr algn="ctr"/>
@@ -12953,7 +13592,7 @@
                 </a:tc>
                 <a:tc>
                   <a:txBody>
-                    <a:bodyPr wrap="square"/>
+                    <a:bodyPr/>
                     <a:lstStyle/>
                     <a:p>
                       <a:pPr algn="ctr"/>
@@ -12976,7 +13615,7 @@
                 </a:tc>
                 <a:tc>
                   <a:txBody>
-                    <a:bodyPr wrap="square"/>
+                    <a:bodyPr/>
                     <a:lstStyle/>
                     <a:p>
                       <a:pPr algn="ctr"/>
@@ -12997,11 +13636,16 @@
                     </a:solidFill>
                   </a:tcPr>
                 </a:tc>
+                <a:extLst>
+                  <a:ext uri="{0D108BD9-81ED-4DB2-BD59-A6C34878D82A}">
+                    <a16:rowId xmlns:a16="http://schemas.microsoft.com/office/drawing/2014/main" val="10000"/>
+                  </a:ext>
+                </a:extLst>
               </a:tr>
               <a:tr h="333102">
                 <a:tc>
                   <a:txBody>
-                    <a:bodyPr wrap="square"/>
+                    <a:bodyPr/>
                     <a:lstStyle/>
                     <a:p>
                       <a:pPr algn="ctr"/>
@@ -13024,7 +13668,7 @@
                 </a:tc>
                 <a:tc>
                   <a:txBody>
-                    <a:bodyPr wrap="square"/>
+                    <a:bodyPr/>
                     <a:lstStyle/>
                     <a:p>
                       <a:pPr algn="ctr"/>
@@ -13047,7 +13691,7 @@
                 </a:tc>
                 <a:tc>
                   <a:txBody>
-                    <a:bodyPr wrap="square"/>
+                    <a:bodyPr/>
                     <a:lstStyle/>
                     <a:p>
                       <a:pPr algn="ctr"/>
@@ -13070,7 +13714,7 @@
                 </a:tc>
                 <a:tc>
                   <a:txBody>
-                    <a:bodyPr wrap="square"/>
+                    <a:bodyPr/>
                     <a:lstStyle/>
                     <a:p>
                       <a:pPr algn="ctr"/>
@@ -13091,11 +13735,16 @@
                     </a:solidFill>
                   </a:tcPr>
                 </a:tc>
+                <a:extLst>
+                  <a:ext uri="{0D108BD9-81ED-4DB2-BD59-A6C34878D82A}">
+                    <a16:rowId xmlns:a16="http://schemas.microsoft.com/office/drawing/2014/main" val="10001"/>
+                  </a:ext>
+                </a:extLst>
               </a:tr>
               <a:tr h="333102">
                 <a:tc>
                   <a:txBody>
-                    <a:bodyPr wrap="square"/>
+                    <a:bodyPr/>
                     <a:lstStyle/>
                     <a:p>
                       <a:pPr algn="ctr"/>
@@ -13118,7 +13767,7 @@
                 </a:tc>
                 <a:tc>
                   <a:txBody>
-                    <a:bodyPr wrap="square"/>
+                    <a:bodyPr/>
                     <a:lstStyle/>
                     <a:p>
                       <a:pPr algn="ctr"/>
@@ -13141,7 +13790,7 @@
                 </a:tc>
                 <a:tc>
                   <a:txBody>
-                    <a:bodyPr wrap="square"/>
+                    <a:bodyPr/>
                     <a:lstStyle/>
                     <a:p>
                       <a:pPr algn="ctr"/>
@@ -13164,7 +13813,7 @@
                 </a:tc>
                 <a:tc>
                   <a:txBody>
-                    <a:bodyPr wrap="square"/>
+                    <a:bodyPr/>
                     <a:lstStyle/>
                     <a:p>
                       <a:pPr algn="ctr"/>
@@ -13185,11 +13834,16 @@
                     </a:solidFill>
                   </a:tcPr>
                 </a:tc>
+                <a:extLst>
+                  <a:ext uri="{0D108BD9-81ED-4DB2-BD59-A6C34878D82A}">
+                    <a16:rowId xmlns:a16="http://schemas.microsoft.com/office/drawing/2014/main" val="10002"/>
+                  </a:ext>
+                </a:extLst>
               </a:tr>
               <a:tr h="333102">
                 <a:tc>
                   <a:txBody>
-                    <a:bodyPr wrap="square"/>
+                    <a:bodyPr/>
                     <a:lstStyle/>
                     <a:p>
                       <a:pPr algn="ctr"/>
@@ -13212,7 +13866,7 @@
                 </a:tc>
                 <a:tc>
                   <a:txBody>
-                    <a:bodyPr wrap="square"/>
+                    <a:bodyPr/>
                     <a:lstStyle/>
                     <a:p>
                       <a:pPr algn="ctr"/>
@@ -13235,7 +13889,7 @@
                 </a:tc>
                 <a:tc>
                   <a:txBody>
-                    <a:bodyPr wrap="square"/>
+                    <a:bodyPr/>
                     <a:lstStyle/>
                     <a:p>
                       <a:pPr algn="ctr"/>
@@ -13258,7 +13912,7 @@
                 </a:tc>
                 <a:tc>
                   <a:txBody>
-                    <a:bodyPr wrap="square"/>
+                    <a:bodyPr/>
                     <a:lstStyle/>
                     <a:p>
                       <a:pPr algn="ctr"/>
@@ -13279,11 +13933,16 @@
                     </a:solidFill>
                   </a:tcPr>
                 </a:tc>
+                <a:extLst>
+                  <a:ext uri="{0D108BD9-81ED-4DB2-BD59-A6C34878D82A}">
+                    <a16:rowId xmlns:a16="http://schemas.microsoft.com/office/drawing/2014/main" val="10003"/>
+                  </a:ext>
+                </a:extLst>
               </a:tr>
               <a:tr h="333102">
                 <a:tc>
                   <a:txBody>
-                    <a:bodyPr wrap="square"/>
+                    <a:bodyPr/>
                     <a:lstStyle/>
                     <a:p>
                       <a:pPr algn="ctr"/>
@@ -13306,7 +13965,7 @@
                 </a:tc>
                 <a:tc>
                   <a:txBody>
-                    <a:bodyPr wrap="square"/>
+                    <a:bodyPr/>
                     <a:lstStyle/>
                     <a:p>
                       <a:pPr algn="ctr"/>
@@ -13329,7 +13988,7 @@
                 </a:tc>
                 <a:tc>
                   <a:txBody>
-                    <a:bodyPr wrap="square"/>
+                    <a:bodyPr/>
                     <a:lstStyle/>
                     <a:p>
                       <a:pPr algn="ctr"/>
@@ -13352,7 +14011,7 @@
                 </a:tc>
                 <a:tc>
                   <a:txBody>
-                    <a:bodyPr wrap="square"/>
+                    <a:bodyPr/>
                     <a:lstStyle/>
                     <a:p>
                       <a:pPr algn="ctr"/>
@@ -13373,11 +14032,16 @@
                     </a:solidFill>
                   </a:tcPr>
                 </a:tc>
+                <a:extLst>
+                  <a:ext uri="{0D108BD9-81ED-4DB2-BD59-A6C34878D82A}">
+                    <a16:rowId xmlns:a16="http://schemas.microsoft.com/office/drawing/2014/main" val="10004"/>
+                  </a:ext>
+                </a:extLst>
               </a:tr>
               <a:tr h="333102">
                 <a:tc>
                   <a:txBody>
-                    <a:bodyPr wrap="square"/>
+                    <a:bodyPr/>
                     <a:lstStyle/>
                     <a:p>
                       <a:pPr algn="ctr"/>
@@ -13400,7 +14064,7 @@
                 </a:tc>
                 <a:tc>
                   <a:txBody>
-                    <a:bodyPr wrap="square"/>
+                    <a:bodyPr/>
                     <a:lstStyle/>
                     <a:p>
                       <a:pPr algn="ctr"/>
@@ -13423,7 +14087,7 @@
                 </a:tc>
                 <a:tc>
                   <a:txBody>
-                    <a:bodyPr wrap="square"/>
+                    <a:bodyPr/>
                     <a:lstStyle/>
                     <a:p>
                       <a:pPr algn="ctr"/>
@@ -13446,7 +14110,7 @@
                 </a:tc>
                 <a:tc>
                   <a:txBody>
-                    <a:bodyPr wrap="square"/>
+                    <a:bodyPr/>
                     <a:lstStyle/>
                     <a:p>
                       <a:pPr algn="ctr"/>
@@ -13467,11 +14131,16 @@
                     </a:solidFill>
                   </a:tcPr>
                 </a:tc>
+                <a:extLst>
+                  <a:ext uri="{0D108BD9-81ED-4DB2-BD59-A6C34878D82A}">
+                    <a16:rowId xmlns:a16="http://schemas.microsoft.com/office/drawing/2014/main" val="10005"/>
+                  </a:ext>
+                </a:extLst>
               </a:tr>
               <a:tr h="333108">
                 <a:tc>
                   <a:txBody>
-                    <a:bodyPr wrap="square"/>
+                    <a:bodyPr/>
                     <a:lstStyle/>
                     <a:p>
                       <a:pPr algn="ctr"/>
@@ -13494,7 +14163,7 @@
                 </a:tc>
                 <a:tc>
                   <a:txBody>
-                    <a:bodyPr wrap="square"/>
+                    <a:bodyPr/>
                     <a:lstStyle/>
                     <a:p>
                       <a:pPr algn="ctr"/>
@@ -13517,7 +14186,7 @@
                 </a:tc>
                 <a:tc>
                   <a:txBody>
-                    <a:bodyPr wrap="square"/>
+                    <a:bodyPr/>
                     <a:lstStyle/>
                     <a:p>
                       <a:pPr algn="ctr"/>
@@ -13540,7 +14209,7 @@
                 </a:tc>
                 <a:tc>
                   <a:txBody>
-                    <a:bodyPr wrap="square"/>
+                    <a:bodyPr/>
                     <a:lstStyle/>
                     <a:p>
                       <a:pPr algn="ctr"/>
@@ -13561,6 +14230,11 @@
                     </a:solidFill>
                   </a:tcPr>
                 </a:tc>
+                <a:extLst>
+                  <a:ext uri="{0D108BD9-81ED-4DB2-BD59-A6C34878D82A}">
+                    <a16:rowId xmlns:a16="http://schemas.microsoft.com/office/drawing/2014/main" val="10006"/>
+                  </a:ext>
+                </a:extLst>
               </a:tr>
             </a:tbl>
           </a:graphicData>
@@ -13583,7 +14257,7 @@
           <a:noFill/>
         </p:spPr>
         <p:txBody>
-          <a:bodyPr wrap="square" anchor="t" lIns="25400" rIns="25400" tIns="25400" bIns="25400">
+          <a:bodyPr wrap="square" lIns="25400" tIns="25400" rIns="25400" bIns="25400" anchor="t">
             <a:spAutoFit/>
           </a:bodyPr>
           <a:lstStyle/>
@@ -13642,6 +14316,7 @@
           <a:lstStyle/>
           <a:p>
             <a:pPr algn="ctr"/>
+            <a:endParaRPr/>
           </a:p>
         </p:txBody>
       </p:sp>
@@ -13686,6 +14361,7 @@
           <a:lstStyle/>
           <a:p>
             <a:pPr algn="ctr"/>
+            <a:endParaRPr/>
           </a:p>
         </p:txBody>
       </p:sp>
@@ -13706,7 +14382,7 @@
           <a:noFill/>
         </p:spPr>
         <p:txBody>
-          <a:bodyPr wrap="square" anchor="t" lIns="25400" rIns="25400" tIns="25400" bIns="25400">
+          <a:bodyPr wrap="square" lIns="25400" tIns="25400" rIns="25400" bIns="25400" anchor="t">
             <a:spAutoFit/>
           </a:bodyPr>
           <a:lstStyle/>
@@ -13801,7 +14477,7 @@
 </file>
 
 <file path=ppt/slides/slide2.xml><?xml version="1.0" encoding="utf-8"?>
-<p:sld xmlns:a="http://schemas.openxmlformats.org/drawingml/2006/main" xmlns:p="http://schemas.openxmlformats.org/presentationml/2006/main" xmlns:r="http://schemas.openxmlformats.org/officeDocument/2006/relationships">
+<p:sld xmlns:a="http://schemas.openxmlformats.org/drawingml/2006/main" xmlns:r="http://schemas.openxmlformats.org/officeDocument/2006/relationships" xmlns:p="http://schemas.openxmlformats.org/presentationml/2006/main">
   <p:cSld>
     <p:spTree>
       <p:nvGrpSpPr>
@@ -13809,7 +14485,14 @@
         <p:cNvGrpSpPr/>
         <p:nvPr/>
       </p:nvGrpSpPr>
-      <p:grpSpPr/>
+      <p:grpSpPr>
+        <a:xfrm>
+          <a:off x="0" y="0"/>
+          <a:ext cx="0" cy="0"/>
+          <a:chOff x="0" y="0"/>
+          <a:chExt cx="0" cy="0"/>
+        </a:xfrm>
+      </p:grpSpPr>
       <p:sp>
         <p:nvSpPr>
           <p:cNvPr id="2" name="Rectangle 1"/>
@@ -13851,6 +14534,7 @@
           <a:lstStyle/>
           <a:p>
             <a:pPr algn="ctr"/>
+            <a:endParaRPr/>
           </a:p>
         </p:txBody>
       </p:sp>
@@ -13895,6 +14579,7 @@
           <a:lstStyle/>
           <a:p>
             <a:pPr algn="ctr"/>
+            <a:endParaRPr/>
           </a:p>
         </p:txBody>
       </p:sp>
@@ -13915,7 +14600,7 @@
           <a:noFill/>
         </p:spPr>
         <p:txBody>
-          <a:bodyPr wrap="square" anchor="ctr" lIns="25400" rIns="25400" tIns="25400" bIns="25400">
+          <a:bodyPr wrap="square" lIns="25400" tIns="25400" rIns="25400" bIns="25400" anchor="ctr">
             <a:spAutoFit/>
           </a:bodyPr>
           <a:lstStyle/>
@@ -13949,7 +14634,7 @@
           <a:noFill/>
         </p:spPr>
         <p:txBody>
-          <a:bodyPr wrap="square" anchor="ctr" lIns="25400" rIns="25400" tIns="25400" bIns="25400">
+          <a:bodyPr wrap="square" lIns="25400" tIns="25400" rIns="25400" bIns="25400" anchor="ctr">
             <a:spAutoFit/>
           </a:bodyPr>
           <a:lstStyle/>
@@ -13983,7 +14668,7 @@
           <a:noFill/>
         </p:spPr>
         <p:txBody>
-          <a:bodyPr wrap="square" anchor="ctr" lIns="25400" rIns="25400" tIns="25400" bIns="25400">
+          <a:bodyPr wrap="square" lIns="25400" tIns="25400" rIns="25400" bIns="25400" anchor="ctr">
             <a:spAutoFit/>
           </a:bodyPr>
           <a:lstStyle/>
@@ -14038,7 +14723,7 @@
           </a:fontRef>
         </p:style>
         <p:txBody>
-          <a:bodyPr rtlCol="0" anchor="ctr" wrap="none"/>
+          <a:bodyPr wrap="none" rtlCol="0" anchor="ctr"/>
           <a:lstStyle/>
           <a:p>
             <a:pPr algn="ctr"/>
@@ -14071,7 +14756,7 @@
           <a:noFill/>
         </p:spPr>
         <p:txBody>
-          <a:bodyPr wrap="square" anchor="ctr" lIns="25400" rIns="25400" tIns="25400" bIns="25400">
+          <a:bodyPr wrap="square" lIns="25400" tIns="25400" rIns="25400" bIns="25400" anchor="ctr">
             <a:spAutoFit/>
           </a:bodyPr>
           <a:lstStyle/>
@@ -14134,7 +14819,7 @@
           </a:fontRef>
         </p:style>
         <p:txBody>
-          <a:bodyPr rtlCol="0" anchor="ctr" wrap="none"/>
+          <a:bodyPr wrap="none" rtlCol="0" anchor="ctr"/>
           <a:lstStyle/>
           <a:p>
             <a:pPr algn="ctr"/>
@@ -14167,7 +14852,7 @@
           <a:noFill/>
         </p:spPr>
         <p:txBody>
-          <a:bodyPr wrap="square" anchor="ctr" lIns="25400" rIns="25400" tIns="25400" bIns="25400">
+          <a:bodyPr wrap="square" lIns="25400" tIns="25400" rIns="25400" bIns="25400" anchor="ctr">
             <a:spAutoFit/>
           </a:bodyPr>
           <a:lstStyle/>
@@ -14230,7 +14915,7 @@
           </a:fontRef>
         </p:style>
         <p:txBody>
-          <a:bodyPr rtlCol="0" anchor="ctr" wrap="none"/>
+          <a:bodyPr wrap="none" rtlCol="0" anchor="ctr"/>
           <a:lstStyle/>
           <a:p>
             <a:pPr algn="ctr"/>
@@ -14263,7 +14948,7 @@
           <a:noFill/>
         </p:spPr>
         <p:txBody>
-          <a:bodyPr wrap="square" anchor="ctr" lIns="25400" rIns="25400" tIns="25400" bIns="25400">
+          <a:bodyPr wrap="square" lIns="25400" tIns="25400" rIns="25400" bIns="25400" anchor="ctr">
             <a:spAutoFit/>
           </a:bodyPr>
           <a:lstStyle/>
@@ -14326,7 +15011,7 @@
           </a:fontRef>
         </p:style>
         <p:txBody>
-          <a:bodyPr rtlCol="0" anchor="ctr" wrap="none"/>
+          <a:bodyPr wrap="none" rtlCol="0" anchor="ctr"/>
           <a:lstStyle/>
           <a:p>
             <a:pPr algn="ctr"/>
@@ -14359,7 +15044,7 @@
           <a:noFill/>
         </p:spPr>
         <p:txBody>
-          <a:bodyPr wrap="square" anchor="ctr" lIns="25400" rIns="25400" tIns="25400" bIns="25400">
+          <a:bodyPr wrap="square" lIns="25400" tIns="25400" rIns="25400" bIns="25400" anchor="ctr">
             <a:spAutoFit/>
           </a:bodyPr>
           <a:lstStyle/>
@@ -14422,7 +15107,7 @@
           </a:fontRef>
         </p:style>
         <p:txBody>
-          <a:bodyPr rtlCol="0" anchor="ctr" wrap="none"/>
+          <a:bodyPr wrap="none" rtlCol="0" anchor="ctr"/>
           <a:lstStyle/>
           <a:p>
             <a:pPr algn="ctr"/>
@@ -14455,7 +15140,7 @@
           <a:noFill/>
         </p:spPr>
         <p:txBody>
-          <a:bodyPr wrap="square" anchor="ctr" lIns="25400" rIns="25400" tIns="25400" bIns="25400">
+          <a:bodyPr wrap="square" lIns="25400" tIns="25400" rIns="25400" bIns="25400" anchor="ctr">
             <a:spAutoFit/>
           </a:bodyPr>
           <a:lstStyle/>
@@ -14518,7 +15203,7 @@
           </a:fontRef>
         </p:style>
         <p:txBody>
-          <a:bodyPr rtlCol="0" anchor="ctr" wrap="none"/>
+          <a:bodyPr wrap="none" rtlCol="0" anchor="ctr"/>
           <a:lstStyle/>
           <a:p>
             <a:pPr algn="ctr"/>
@@ -14551,7 +15236,7 @@
           <a:noFill/>
         </p:spPr>
         <p:txBody>
-          <a:bodyPr wrap="square" anchor="ctr" lIns="25400" rIns="25400" tIns="25400" bIns="25400">
+          <a:bodyPr wrap="square" lIns="25400" tIns="25400" rIns="25400" bIns="25400" anchor="ctr">
             <a:spAutoFit/>
           </a:bodyPr>
           <a:lstStyle/>
@@ -14614,7 +15299,7 @@
           </a:fontRef>
         </p:style>
         <p:txBody>
-          <a:bodyPr rtlCol="0" anchor="ctr" wrap="none"/>
+          <a:bodyPr wrap="none" rtlCol="0" anchor="ctr"/>
           <a:lstStyle/>
           <a:p>
             <a:pPr algn="ctr"/>
@@ -14647,7 +15332,7 @@
           <a:noFill/>
         </p:spPr>
         <p:txBody>
-          <a:bodyPr wrap="square" anchor="ctr" lIns="25400" rIns="25400" tIns="25400" bIns="25400">
+          <a:bodyPr wrap="square" lIns="25400" tIns="25400" rIns="25400" bIns="25400" anchor="ctr">
             <a:spAutoFit/>
           </a:bodyPr>
           <a:lstStyle/>
@@ -14710,7 +15395,7 @@
           </a:fontRef>
         </p:style>
         <p:txBody>
-          <a:bodyPr rtlCol="0" anchor="ctr" wrap="none"/>
+          <a:bodyPr wrap="none" rtlCol="0" anchor="ctr"/>
           <a:lstStyle/>
           <a:p>
             <a:pPr algn="ctr"/>
@@ -14743,7 +15428,7 @@
           <a:noFill/>
         </p:spPr>
         <p:txBody>
-          <a:bodyPr wrap="square" anchor="ctr" lIns="25400" rIns="25400" tIns="25400" bIns="25400">
+          <a:bodyPr wrap="square" lIns="25400" tIns="25400" rIns="25400" bIns="25400" anchor="ctr">
             <a:spAutoFit/>
           </a:bodyPr>
           <a:lstStyle/>
@@ -14778,7 +15463,7 @@
 </file>
 
 <file path=ppt/slides/slide20.xml><?xml version="1.0" encoding="utf-8"?>
-<p:sld xmlns:a="http://schemas.openxmlformats.org/drawingml/2006/main" xmlns:p="http://schemas.openxmlformats.org/presentationml/2006/main" xmlns:r="http://schemas.openxmlformats.org/officeDocument/2006/relationships">
+<p:sld xmlns:a="http://schemas.openxmlformats.org/drawingml/2006/main" xmlns:r="http://schemas.openxmlformats.org/officeDocument/2006/relationships" xmlns:p="http://schemas.openxmlformats.org/presentationml/2006/main">
   <p:cSld>
     <p:spTree>
       <p:nvGrpSpPr>
@@ -14786,7 +15471,14 @@
         <p:cNvGrpSpPr/>
         <p:nvPr/>
       </p:nvGrpSpPr>
-      <p:grpSpPr/>
+      <p:grpSpPr>
+        <a:xfrm>
+          <a:off x="0" y="0"/>
+          <a:ext cx="0" cy="0"/>
+          <a:chOff x="0" y="0"/>
+          <a:chExt cx="0" cy="0"/>
+        </a:xfrm>
+      </p:grpSpPr>
       <p:sp>
         <p:nvSpPr>
           <p:cNvPr id="2" name="Rectangle 1"/>
@@ -14828,6 +15520,7 @@
           <a:lstStyle/>
           <a:p>
             <a:pPr algn="ctr"/>
+            <a:endParaRPr/>
           </a:p>
         </p:txBody>
       </p:sp>
@@ -14872,6 +15565,7 @@
           <a:lstStyle/>
           <a:p>
             <a:pPr algn="ctr"/>
+            <a:endParaRPr/>
           </a:p>
         </p:txBody>
       </p:sp>
@@ -14892,7 +15586,7 @@
           <a:noFill/>
         </p:spPr>
         <p:txBody>
-          <a:bodyPr wrap="square" anchor="ctr" lIns="25400" rIns="25400" tIns="25400" bIns="25400">
+          <a:bodyPr wrap="square" lIns="25400" tIns="25400" rIns="25400" bIns="25400" anchor="ctr">
             <a:spAutoFit/>
           </a:bodyPr>
           <a:lstStyle/>
@@ -14937,7 +15631,7 @@
           <a:noFill/>
         </p:spPr>
         <p:txBody>
-          <a:bodyPr wrap="square" anchor="ctr" lIns="25400" rIns="25400" tIns="25400" bIns="25400">
+          <a:bodyPr wrap="square" lIns="25400" tIns="25400" rIns="25400" bIns="25400" anchor="ctr">
             <a:spAutoFit/>
           </a:bodyPr>
           <a:lstStyle/>
@@ -14971,7 +15665,7 @@
           <a:noFill/>
         </p:spPr>
         <p:txBody>
-          <a:bodyPr wrap="square" anchor="ctr" lIns="25400" rIns="25400" tIns="25400" bIns="25400">
+          <a:bodyPr wrap="square" lIns="25400" tIns="25400" rIns="25400" bIns="25400" anchor="ctr">
             <a:spAutoFit/>
           </a:bodyPr>
           <a:lstStyle/>
@@ -15008,15 +15702,39 @@
                 <a:tableStyleId>{5C22544A-7EE6-4342-B048-85BDC9FD1C3A}</a:tableStyleId>
               </a:tblPr>
               <a:tblGrid>
-                <a:gridCol w="2688336"/>
-                <a:gridCol w="2150668"/>
-                <a:gridCol w="3315614"/>
-                <a:gridCol w="3046780"/>
+                <a:gridCol w="2688336">
+                  <a:extLst>
+                    <a:ext uri="{9D8B030D-6E8A-4147-A177-3AD203B41FA5}">
+                      <a16:colId xmlns:a16="http://schemas.microsoft.com/office/drawing/2014/main" val="20000"/>
+                    </a:ext>
+                  </a:extLst>
+                </a:gridCol>
+                <a:gridCol w="2150668">
+                  <a:extLst>
+                    <a:ext uri="{9D8B030D-6E8A-4147-A177-3AD203B41FA5}">
+                      <a16:colId xmlns:a16="http://schemas.microsoft.com/office/drawing/2014/main" val="20001"/>
+                    </a:ext>
+                  </a:extLst>
+                </a:gridCol>
+                <a:gridCol w="3315614">
+                  <a:extLst>
+                    <a:ext uri="{9D8B030D-6E8A-4147-A177-3AD203B41FA5}">
+                      <a16:colId xmlns:a16="http://schemas.microsoft.com/office/drawing/2014/main" val="20002"/>
+                    </a:ext>
+                  </a:extLst>
+                </a:gridCol>
+                <a:gridCol w="3046780">
+                  <a:extLst>
+                    <a:ext uri="{9D8B030D-6E8A-4147-A177-3AD203B41FA5}">
+                      <a16:colId xmlns:a16="http://schemas.microsoft.com/office/drawing/2014/main" val="20003"/>
+                    </a:ext>
+                  </a:extLst>
+                </a:gridCol>
               </a:tblGrid>
               <a:tr h="566928">
                 <a:tc>
                   <a:txBody>
-                    <a:bodyPr wrap="square"/>
+                    <a:bodyPr/>
                     <a:lstStyle/>
                     <a:p>
                       <a:pPr algn="l"/>
@@ -15039,7 +15757,7 @@
                 </a:tc>
                 <a:tc>
                   <a:txBody>
-                    <a:bodyPr wrap="square"/>
+                    <a:bodyPr/>
                     <a:lstStyle/>
                     <a:p>
                       <a:pPr algn="ctr"/>
@@ -15062,7 +15780,7 @@
                 </a:tc>
                 <a:tc>
                   <a:txBody>
-                    <a:bodyPr wrap="square"/>
+                    <a:bodyPr/>
                     <a:lstStyle/>
                     <a:p>
                       <a:pPr algn="ctr"/>
@@ -15085,7 +15803,7 @@
                 </a:tc>
                 <a:tc>
                   <a:txBody>
-                    <a:bodyPr wrap="square"/>
+                    <a:bodyPr/>
                     <a:lstStyle/>
                     <a:p>
                       <a:pPr algn="ctr"/>
@@ -15106,11 +15824,16 @@
                     </a:solidFill>
                   </a:tcPr>
                 </a:tc>
+                <a:extLst>
+                  <a:ext uri="{0D108BD9-81ED-4DB2-BD59-A6C34878D82A}">
+                    <a16:rowId xmlns:a16="http://schemas.microsoft.com/office/drawing/2014/main" val="10000"/>
+                  </a:ext>
+                </a:extLst>
               </a:tr>
               <a:tr h="566928">
                 <a:tc>
                   <a:txBody>
-                    <a:bodyPr wrap="square"/>
+                    <a:bodyPr/>
                     <a:lstStyle/>
                     <a:p>
                       <a:pPr algn="l"/>
@@ -15133,7 +15856,7 @@
                 </a:tc>
                 <a:tc>
                   <a:txBody>
-                    <a:bodyPr wrap="square"/>
+                    <a:bodyPr/>
                     <a:lstStyle/>
                     <a:p>
                       <a:pPr algn="ctr"/>
@@ -15156,7 +15879,7 @@
                 </a:tc>
                 <a:tc>
                   <a:txBody>
-                    <a:bodyPr wrap="square"/>
+                    <a:bodyPr/>
                     <a:lstStyle/>
                     <a:p>
                       <a:pPr algn="ctr"/>
@@ -15179,7 +15902,7 @@
                 </a:tc>
                 <a:tc>
                   <a:txBody>
-                    <a:bodyPr wrap="square"/>
+                    <a:bodyPr/>
                     <a:lstStyle/>
                     <a:p>
                       <a:pPr algn="ctr"/>
@@ -15200,11 +15923,16 @@
                     </a:solidFill>
                   </a:tcPr>
                 </a:tc>
+                <a:extLst>
+                  <a:ext uri="{0D108BD9-81ED-4DB2-BD59-A6C34878D82A}">
+                    <a16:rowId xmlns:a16="http://schemas.microsoft.com/office/drawing/2014/main" val="10001"/>
+                  </a:ext>
+                </a:extLst>
               </a:tr>
               <a:tr h="566928">
                 <a:tc>
                   <a:txBody>
-                    <a:bodyPr wrap="square"/>
+                    <a:bodyPr/>
                     <a:lstStyle/>
                     <a:p>
                       <a:pPr algn="l"/>
@@ -15227,7 +15955,7 @@
                 </a:tc>
                 <a:tc>
                   <a:txBody>
-                    <a:bodyPr wrap="square"/>
+                    <a:bodyPr/>
                     <a:lstStyle/>
                     <a:p>
                       <a:pPr algn="ctr"/>
@@ -15250,7 +15978,7 @@
                 </a:tc>
                 <a:tc>
                   <a:txBody>
-                    <a:bodyPr wrap="square"/>
+                    <a:bodyPr/>
                     <a:lstStyle/>
                     <a:p>
                       <a:pPr algn="ctr"/>
@@ -15273,7 +16001,7 @@
                 </a:tc>
                 <a:tc>
                   <a:txBody>
-                    <a:bodyPr wrap="square"/>
+                    <a:bodyPr/>
                     <a:lstStyle/>
                     <a:p>
                       <a:pPr algn="ctr"/>
@@ -15294,11 +16022,16 @@
                     </a:solidFill>
                   </a:tcPr>
                 </a:tc>
+                <a:extLst>
+                  <a:ext uri="{0D108BD9-81ED-4DB2-BD59-A6C34878D82A}">
+                    <a16:rowId xmlns:a16="http://schemas.microsoft.com/office/drawing/2014/main" val="10002"/>
+                  </a:ext>
+                </a:extLst>
               </a:tr>
               <a:tr h="566928">
                 <a:tc>
                   <a:txBody>
-                    <a:bodyPr wrap="square"/>
+                    <a:bodyPr/>
                     <a:lstStyle/>
                     <a:p>
                       <a:pPr algn="l"/>
@@ -15321,7 +16054,7 @@
                 </a:tc>
                 <a:tc>
                   <a:txBody>
-                    <a:bodyPr wrap="square"/>
+                    <a:bodyPr/>
                     <a:lstStyle/>
                     <a:p>
                       <a:pPr algn="ctr"/>
@@ -15344,7 +16077,7 @@
                 </a:tc>
                 <a:tc>
                   <a:txBody>
-                    <a:bodyPr wrap="square"/>
+                    <a:bodyPr/>
                     <a:lstStyle/>
                     <a:p>
                       <a:pPr algn="ctr"/>
@@ -15367,7 +16100,7 @@
                 </a:tc>
                 <a:tc>
                   <a:txBody>
-                    <a:bodyPr wrap="square"/>
+                    <a:bodyPr/>
                     <a:lstStyle/>
                     <a:p>
                       <a:pPr algn="ctr"/>
@@ -15388,11 +16121,16 @@
                     </a:solidFill>
                   </a:tcPr>
                 </a:tc>
+                <a:extLst>
+                  <a:ext uri="{0D108BD9-81ED-4DB2-BD59-A6C34878D82A}">
+                    <a16:rowId xmlns:a16="http://schemas.microsoft.com/office/drawing/2014/main" val="10003"/>
+                  </a:ext>
+                </a:extLst>
               </a:tr>
               <a:tr h="566928">
                 <a:tc>
                   <a:txBody>
-                    <a:bodyPr wrap="square"/>
+                    <a:bodyPr/>
                     <a:lstStyle/>
                     <a:p>
                       <a:pPr algn="l"/>
@@ -15415,7 +16153,7 @@
                 </a:tc>
                 <a:tc>
                   <a:txBody>
-                    <a:bodyPr wrap="square"/>
+                    <a:bodyPr/>
                     <a:lstStyle/>
                     <a:p>
                       <a:pPr algn="ctr"/>
@@ -15438,7 +16176,7 @@
                 </a:tc>
                 <a:tc>
                   <a:txBody>
-                    <a:bodyPr wrap="square"/>
+                    <a:bodyPr/>
                     <a:lstStyle/>
                     <a:p>
                       <a:pPr algn="ctr"/>
@@ -15461,7 +16199,7 @@
                 </a:tc>
                 <a:tc>
                   <a:txBody>
-                    <a:bodyPr wrap="square"/>
+                    <a:bodyPr/>
                     <a:lstStyle/>
                     <a:p>
                       <a:pPr algn="ctr"/>
@@ -15482,6 +16220,11 @@
                     </a:solidFill>
                   </a:tcPr>
                 </a:tc>
+                <a:extLst>
+                  <a:ext uri="{0D108BD9-81ED-4DB2-BD59-A6C34878D82A}">
+                    <a16:rowId xmlns:a16="http://schemas.microsoft.com/office/drawing/2014/main" val="10004"/>
+                  </a:ext>
+                </a:extLst>
               </a:tr>
             </a:tbl>
           </a:graphicData>
@@ -15504,7 +16247,7 @@
           <a:noFill/>
         </p:spPr>
         <p:txBody>
-          <a:bodyPr wrap="square" anchor="t" lIns="25400" rIns="25400" tIns="25400" bIns="25400">
+          <a:bodyPr wrap="square" lIns="25400" tIns="25400" rIns="25400" bIns="25400" anchor="t">
             <a:spAutoFit/>
           </a:bodyPr>
           <a:lstStyle/>
@@ -15563,6 +16306,7 @@
           <a:lstStyle/>
           <a:p>
             <a:pPr algn="ctr"/>
+            <a:endParaRPr/>
           </a:p>
         </p:txBody>
       </p:sp>
@@ -15607,6 +16351,7 @@
           <a:lstStyle/>
           <a:p>
             <a:pPr algn="ctr"/>
+            <a:endParaRPr/>
           </a:p>
         </p:txBody>
       </p:sp>
@@ -15627,7 +16372,7 @@
           <a:noFill/>
         </p:spPr>
         <p:txBody>
-          <a:bodyPr wrap="square" anchor="t" lIns="25400" rIns="25400" tIns="25400" bIns="25400">
+          <a:bodyPr wrap="square" lIns="25400" tIns="25400" rIns="25400" bIns="25400" anchor="t">
             <a:spAutoFit/>
           </a:bodyPr>
           <a:lstStyle/>
@@ -15690,7 +16435,7 @@
 </file>
 
 <file path=ppt/slides/slide21.xml><?xml version="1.0" encoding="utf-8"?>
-<p:sld xmlns:a="http://schemas.openxmlformats.org/drawingml/2006/main" xmlns:p="http://schemas.openxmlformats.org/presentationml/2006/main" xmlns:r="http://schemas.openxmlformats.org/officeDocument/2006/relationships">
+<p:sld xmlns:a="http://schemas.openxmlformats.org/drawingml/2006/main" xmlns:r="http://schemas.openxmlformats.org/officeDocument/2006/relationships" xmlns:p="http://schemas.openxmlformats.org/presentationml/2006/main">
   <p:cSld>
     <p:spTree>
       <p:nvGrpSpPr>
@@ -15698,7 +16443,14 @@
         <p:cNvGrpSpPr/>
         <p:nvPr/>
       </p:nvGrpSpPr>
-      <p:grpSpPr/>
+      <p:grpSpPr>
+        <a:xfrm>
+          <a:off x="0" y="0"/>
+          <a:ext cx="0" cy="0"/>
+          <a:chOff x="0" y="0"/>
+          <a:chExt cx="0" cy="0"/>
+        </a:xfrm>
+      </p:grpSpPr>
       <p:sp>
         <p:nvSpPr>
           <p:cNvPr id="2" name="Rectangle 1"/>
@@ -15740,6 +16492,7 @@
           <a:lstStyle/>
           <a:p>
             <a:pPr algn="ctr"/>
+            <a:endParaRPr/>
           </a:p>
         </p:txBody>
       </p:sp>
@@ -15784,6 +16537,7 @@
           <a:lstStyle/>
           <a:p>
             <a:pPr algn="ctr"/>
+            <a:endParaRPr/>
           </a:p>
         </p:txBody>
       </p:sp>
@@ -15804,7 +16558,7 @@
           <a:noFill/>
         </p:spPr>
         <p:txBody>
-          <a:bodyPr wrap="square" anchor="ctr" lIns="25400" rIns="25400" tIns="25400" bIns="25400">
+          <a:bodyPr wrap="square" lIns="25400" tIns="25400" rIns="25400" bIns="25400" anchor="ctr">
             <a:spAutoFit/>
           </a:bodyPr>
           <a:lstStyle/>
@@ -15838,7 +16592,7 @@
           <a:noFill/>
         </p:spPr>
         <p:txBody>
-          <a:bodyPr wrap="square" anchor="ctr" lIns="25400" rIns="25400" tIns="25400" bIns="25400">
+          <a:bodyPr wrap="square" lIns="25400" tIns="25400" rIns="25400" bIns="25400" anchor="ctr">
             <a:spAutoFit/>
           </a:bodyPr>
           <a:lstStyle/>
@@ -15872,7 +16626,7 @@
           <a:noFill/>
         </p:spPr>
         <p:txBody>
-          <a:bodyPr wrap="square" anchor="ctr" lIns="25400" rIns="25400" tIns="25400" bIns="25400">
+          <a:bodyPr wrap="square" lIns="25400" tIns="25400" rIns="25400" bIns="25400" anchor="ctr">
             <a:spAutoFit/>
           </a:bodyPr>
           <a:lstStyle/>
@@ -15931,6 +16685,7 @@
           <a:lstStyle/>
           <a:p>
             <a:pPr algn="ctr"/>
+            <a:endParaRPr/>
           </a:p>
         </p:txBody>
       </p:sp>
@@ -15975,6 +16730,7 @@
           <a:lstStyle/>
           <a:p>
             <a:pPr algn="ctr"/>
+            <a:endParaRPr/>
           </a:p>
         </p:txBody>
       </p:sp>
@@ -15995,7 +16751,7 @@
           <a:noFill/>
         </p:spPr>
         <p:txBody>
-          <a:bodyPr wrap="square" anchor="ctr" lIns="25400" rIns="25400" tIns="25400" bIns="25400">
+          <a:bodyPr wrap="square" lIns="25400" tIns="25400" rIns="25400" bIns="25400" anchor="ctr">
             <a:spAutoFit/>
           </a:bodyPr>
           <a:lstStyle/>
@@ -16029,7 +16785,7 @@
           <a:noFill/>
         </p:spPr>
         <p:txBody>
-          <a:bodyPr wrap="square" anchor="t" lIns="25400" rIns="25400" tIns="25400" bIns="25400">
+          <a:bodyPr wrap="square" lIns="25400" tIns="25400" rIns="25400" bIns="25400" anchor="t">
             <a:spAutoFit/>
           </a:bodyPr>
           <a:lstStyle/>
@@ -16216,6 +16972,7 @@
           <a:lstStyle/>
           <a:p>
             <a:pPr algn="ctr"/>
+            <a:endParaRPr/>
           </a:p>
         </p:txBody>
       </p:sp>
@@ -16260,6 +17017,7 @@
           <a:lstStyle/>
           <a:p>
             <a:pPr algn="ctr"/>
+            <a:endParaRPr/>
           </a:p>
         </p:txBody>
       </p:sp>
@@ -16280,7 +17038,7 @@
           <a:noFill/>
         </p:spPr>
         <p:txBody>
-          <a:bodyPr wrap="square" anchor="ctr" lIns="25400" rIns="25400" tIns="25400" bIns="25400">
+          <a:bodyPr wrap="square" lIns="25400" tIns="25400" rIns="25400" bIns="25400" anchor="ctr">
             <a:spAutoFit/>
           </a:bodyPr>
           <a:lstStyle/>
@@ -16314,7 +17072,7 @@
           <a:noFill/>
         </p:spPr>
         <p:txBody>
-          <a:bodyPr wrap="square" anchor="t" lIns="25400" rIns="25400" tIns="25400" bIns="25400">
+          <a:bodyPr wrap="square" lIns="25400" tIns="25400" rIns="25400" bIns="25400" anchor="t">
             <a:spAutoFit/>
           </a:bodyPr>
           <a:lstStyle/>
@@ -16505,7 +17263,7 @@
           <a:noFill/>
         </p:spPr>
         <p:txBody>
-          <a:bodyPr wrap="square" anchor="ctr" lIns="25400" rIns="25400" tIns="25400" bIns="25400">
+          <a:bodyPr wrap="square" lIns="25400" tIns="25400" rIns="25400" bIns="25400" anchor="ctr">
             <a:spAutoFit/>
           </a:bodyPr>
           <a:lstStyle/>
@@ -16532,7 +17290,7 @@
 </file>
 
 <file path=ppt/slides/slide3.xml><?xml version="1.0" encoding="utf-8"?>
-<p:sld xmlns:a="http://schemas.openxmlformats.org/drawingml/2006/main" xmlns:p="http://schemas.openxmlformats.org/presentationml/2006/main" xmlns:r="http://schemas.openxmlformats.org/officeDocument/2006/relationships">
+<p:sld xmlns:a="http://schemas.openxmlformats.org/drawingml/2006/main" xmlns:r="http://schemas.openxmlformats.org/officeDocument/2006/relationships" xmlns:p="http://schemas.openxmlformats.org/presentationml/2006/main">
   <p:cSld>
     <p:spTree>
       <p:nvGrpSpPr>
@@ -16540,7 +17298,14 @@
         <p:cNvGrpSpPr/>
         <p:nvPr/>
       </p:nvGrpSpPr>
-      <p:grpSpPr/>
+      <p:grpSpPr>
+        <a:xfrm>
+          <a:off x="0" y="0"/>
+          <a:ext cx="0" cy="0"/>
+          <a:chOff x="0" y="0"/>
+          <a:chExt cx="0" cy="0"/>
+        </a:xfrm>
+      </p:grpSpPr>
       <p:sp>
         <p:nvSpPr>
           <p:cNvPr id="2" name="Rectangle 1"/>
@@ -16582,6 +17347,7 @@
           <a:lstStyle/>
           <a:p>
             <a:pPr algn="ctr"/>
+            <a:endParaRPr/>
           </a:p>
         </p:txBody>
       </p:sp>
@@ -16626,6 +17392,7 @@
           <a:lstStyle/>
           <a:p>
             <a:pPr algn="ctr"/>
+            <a:endParaRPr/>
           </a:p>
         </p:txBody>
       </p:sp>
@@ -16646,7 +17413,7 @@
           <a:noFill/>
         </p:spPr>
         <p:txBody>
-          <a:bodyPr wrap="square" anchor="ctr" lIns="25400" rIns="25400" tIns="25400" bIns="25400">
+          <a:bodyPr wrap="square" lIns="25400" tIns="25400" rIns="25400" bIns="25400" anchor="ctr">
             <a:spAutoFit/>
           </a:bodyPr>
           <a:lstStyle/>
@@ -16691,7 +17458,7 @@
           <a:noFill/>
         </p:spPr>
         <p:txBody>
-          <a:bodyPr wrap="square" anchor="ctr" lIns="25400" rIns="25400" tIns="25400" bIns="25400">
+          <a:bodyPr wrap="square" lIns="25400" tIns="25400" rIns="25400" bIns="25400" anchor="ctr">
             <a:spAutoFit/>
           </a:bodyPr>
           <a:lstStyle/>
@@ -16725,7 +17492,7 @@
           <a:noFill/>
         </p:spPr>
         <p:txBody>
-          <a:bodyPr wrap="square" anchor="ctr" lIns="25400" rIns="25400" tIns="25400" bIns="25400">
+          <a:bodyPr wrap="square" lIns="25400" tIns="25400" rIns="25400" bIns="25400" anchor="ctr">
             <a:spAutoFit/>
           </a:bodyPr>
           <a:lstStyle/>
@@ -16760,7 +17527,7 @@
           <a:noFill/>
         </p:spPr>
         <p:txBody>
-          <a:bodyPr wrap="square" anchor="t" lIns="25400" rIns="25400" tIns="25400" bIns="25400">
+          <a:bodyPr wrap="square" lIns="25400" tIns="25400" rIns="25400" bIns="25400" anchor="t">
             <a:spAutoFit/>
           </a:bodyPr>
           <a:lstStyle/>
@@ -17022,6 +17789,7 @@
           <a:lstStyle/>
           <a:p>
             <a:pPr algn="ctr"/>
+            <a:endParaRPr/>
           </a:p>
         </p:txBody>
       </p:sp>
@@ -17066,6 +17834,7 @@
           <a:lstStyle/>
           <a:p>
             <a:pPr algn="ctr"/>
+            <a:endParaRPr/>
           </a:p>
         </p:txBody>
       </p:sp>
@@ -17086,7 +17855,7 @@
           <a:noFill/>
         </p:spPr>
         <p:txBody>
-          <a:bodyPr wrap="square" anchor="t" lIns="25400" rIns="25400" tIns="25400" bIns="25400">
+          <a:bodyPr wrap="square" lIns="25400" tIns="25400" rIns="25400" bIns="25400" anchor="t">
             <a:spAutoFit/>
           </a:bodyPr>
           <a:lstStyle/>
@@ -17197,6 +17966,7 @@
           <a:lstStyle/>
           <a:p>
             <a:pPr algn="ctr"/>
+            <a:endParaRPr/>
           </a:p>
         </p:txBody>
       </p:sp>
@@ -17241,6 +18011,7 @@
           <a:lstStyle/>
           <a:p>
             <a:pPr algn="ctr"/>
+            <a:endParaRPr/>
           </a:p>
         </p:txBody>
       </p:sp>
@@ -17261,7 +18032,7 @@
           <a:noFill/>
         </p:spPr>
         <p:txBody>
-          <a:bodyPr wrap="square" anchor="t" lIns="25400" rIns="25400" tIns="25400" bIns="25400">
+          <a:bodyPr wrap="square" lIns="25400" tIns="25400" rIns="25400" bIns="25400" anchor="t">
             <a:spAutoFit/>
           </a:bodyPr>
           <a:lstStyle/>
@@ -17340,7 +18111,7 @@
 </file>
 
 <file path=ppt/slides/slide4.xml><?xml version="1.0" encoding="utf-8"?>
-<p:sld xmlns:a="http://schemas.openxmlformats.org/drawingml/2006/main" xmlns:p="http://schemas.openxmlformats.org/presentationml/2006/main" xmlns:r="http://schemas.openxmlformats.org/officeDocument/2006/relationships">
+<p:sld xmlns:a="http://schemas.openxmlformats.org/drawingml/2006/main" xmlns:r="http://schemas.openxmlformats.org/officeDocument/2006/relationships" xmlns:p="http://schemas.openxmlformats.org/presentationml/2006/main">
   <p:cSld>
     <p:spTree>
       <p:nvGrpSpPr>
@@ -17348,7 +18119,14 @@
         <p:cNvGrpSpPr/>
         <p:nvPr/>
       </p:nvGrpSpPr>
-      <p:grpSpPr/>
+      <p:grpSpPr>
+        <a:xfrm>
+          <a:off x="0" y="0"/>
+          <a:ext cx="0" cy="0"/>
+          <a:chOff x="0" y="0"/>
+          <a:chExt cx="0" cy="0"/>
+        </a:xfrm>
+      </p:grpSpPr>
       <p:sp>
         <p:nvSpPr>
           <p:cNvPr id="2" name="Rectangle 1"/>
@@ -17390,6 +18168,7 @@
           <a:lstStyle/>
           <a:p>
             <a:pPr algn="ctr"/>
+            <a:endParaRPr/>
           </a:p>
         </p:txBody>
       </p:sp>
@@ -17434,6 +18213,7 @@
           <a:lstStyle/>
           <a:p>
             <a:pPr algn="ctr"/>
+            <a:endParaRPr/>
           </a:p>
         </p:txBody>
       </p:sp>
@@ -17454,7 +18234,7 @@
           <a:noFill/>
         </p:spPr>
         <p:txBody>
-          <a:bodyPr wrap="square" anchor="ctr" lIns="25400" rIns="25400" tIns="25400" bIns="25400">
+          <a:bodyPr wrap="square" lIns="25400" tIns="25400" rIns="25400" bIns="25400" anchor="ctr">
             <a:spAutoFit/>
           </a:bodyPr>
           <a:lstStyle/>
@@ -17499,7 +18279,7 @@
           <a:noFill/>
         </p:spPr>
         <p:txBody>
-          <a:bodyPr wrap="square" anchor="ctr" lIns="25400" rIns="25400" tIns="25400" bIns="25400">
+          <a:bodyPr wrap="square" lIns="25400" tIns="25400" rIns="25400" bIns="25400" anchor="ctr">
             <a:spAutoFit/>
           </a:bodyPr>
           <a:lstStyle/>
@@ -17533,7 +18313,7 @@
           <a:noFill/>
         </p:spPr>
         <p:txBody>
-          <a:bodyPr wrap="square" anchor="ctr" lIns="25400" rIns="25400" tIns="25400" bIns="25400">
+          <a:bodyPr wrap="square" lIns="25400" tIns="25400" rIns="25400" bIns="25400" anchor="ctr">
             <a:spAutoFit/>
           </a:bodyPr>
           <a:lstStyle/>
@@ -17592,6 +18372,7 @@
           <a:lstStyle/>
           <a:p>
             <a:pPr algn="ctr"/>
+            <a:endParaRPr/>
           </a:p>
         </p:txBody>
       </p:sp>
@@ -17636,6 +18417,7 @@
           <a:lstStyle/>
           <a:p>
             <a:pPr algn="ctr"/>
+            <a:endParaRPr/>
           </a:p>
         </p:txBody>
       </p:sp>
@@ -17656,7 +18438,7 @@
           <a:noFill/>
         </p:spPr>
         <p:txBody>
-          <a:bodyPr wrap="square" anchor="ctr" lIns="25400" rIns="25400" tIns="25400" bIns="25400">
+          <a:bodyPr wrap="square" lIns="25400" tIns="25400" rIns="25400" bIns="25400" anchor="ctr">
             <a:spAutoFit/>
           </a:bodyPr>
           <a:lstStyle/>
@@ -17690,7 +18472,7 @@
           <a:noFill/>
         </p:spPr>
         <p:txBody>
-          <a:bodyPr wrap="square" anchor="t" lIns="25400" rIns="25400" tIns="25400" bIns="25400">
+          <a:bodyPr wrap="square" lIns="25400" tIns="25400" rIns="25400" bIns="25400" anchor="t">
             <a:spAutoFit/>
           </a:bodyPr>
           <a:lstStyle/>
@@ -17849,6 +18631,7 @@
           <a:lstStyle/>
           <a:p>
             <a:pPr algn="ctr"/>
+            <a:endParaRPr/>
           </a:p>
         </p:txBody>
       </p:sp>
@@ -17893,6 +18676,7 @@
           <a:lstStyle/>
           <a:p>
             <a:pPr algn="ctr"/>
+            <a:endParaRPr/>
           </a:p>
         </p:txBody>
       </p:sp>
@@ -17913,7 +18697,7 @@
           <a:noFill/>
         </p:spPr>
         <p:txBody>
-          <a:bodyPr wrap="square" anchor="ctr" lIns="25400" rIns="25400" tIns="25400" bIns="25400">
+          <a:bodyPr wrap="square" lIns="25400" tIns="25400" rIns="25400" bIns="25400" anchor="ctr">
             <a:spAutoFit/>
           </a:bodyPr>
           <a:lstStyle/>
@@ -17947,7 +18731,7 @@
           <a:noFill/>
         </p:spPr>
         <p:txBody>
-          <a:bodyPr wrap="square" anchor="t" lIns="25400" rIns="25400" tIns="25400" bIns="25400">
+          <a:bodyPr wrap="square" lIns="25400" tIns="25400" rIns="25400" bIns="25400" anchor="t">
             <a:spAutoFit/>
           </a:bodyPr>
           <a:lstStyle/>
@@ -18074,7 +18858,7 @@
 </file>
 
 <file path=ppt/slides/slide5.xml><?xml version="1.0" encoding="utf-8"?>
-<p:sld xmlns:a="http://schemas.openxmlformats.org/drawingml/2006/main" xmlns:p="http://schemas.openxmlformats.org/presentationml/2006/main" xmlns:r="http://schemas.openxmlformats.org/officeDocument/2006/relationships">
+<p:sld xmlns:a="http://schemas.openxmlformats.org/drawingml/2006/main" xmlns:r="http://schemas.openxmlformats.org/officeDocument/2006/relationships" xmlns:p="http://schemas.openxmlformats.org/presentationml/2006/main">
   <p:cSld>
     <p:spTree>
       <p:nvGrpSpPr>
@@ -18082,7 +18866,14 @@
         <p:cNvGrpSpPr/>
         <p:nvPr/>
       </p:nvGrpSpPr>
-      <p:grpSpPr/>
+      <p:grpSpPr>
+        <a:xfrm>
+          <a:off x="0" y="0"/>
+          <a:ext cx="0" cy="0"/>
+          <a:chOff x="0" y="0"/>
+          <a:chExt cx="0" cy="0"/>
+        </a:xfrm>
+      </p:grpSpPr>
       <p:sp>
         <p:nvSpPr>
           <p:cNvPr id="2" name="Rectangle 1"/>
@@ -18124,6 +18915,7 @@
           <a:lstStyle/>
           <a:p>
             <a:pPr algn="ctr"/>
+            <a:endParaRPr/>
           </a:p>
         </p:txBody>
       </p:sp>
@@ -18168,6 +18960,7 @@
           <a:lstStyle/>
           <a:p>
             <a:pPr algn="ctr"/>
+            <a:endParaRPr/>
           </a:p>
         </p:txBody>
       </p:sp>
@@ -18188,7 +18981,7 @@
           <a:noFill/>
         </p:spPr>
         <p:txBody>
-          <a:bodyPr wrap="square" anchor="ctr" lIns="25400" rIns="25400" tIns="25400" bIns="25400">
+          <a:bodyPr wrap="square" lIns="25400" tIns="25400" rIns="25400" bIns="25400" anchor="ctr">
             <a:spAutoFit/>
           </a:bodyPr>
           <a:lstStyle/>
@@ -18233,7 +19026,7 @@
           <a:noFill/>
         </p:spPr>
         <p:txBody>
-          <a:bodyPr wrap="square" anchor="ctr" lIns="25400" rIns="25400" tIns="25400" bIns="25400">
+          <a:bodyPr wrap="square" lIns="25400" tIns="25400" rIns="25400" bIns="25400" anchor="ctr">
             <a:spAutoFit/>
           </a:bodyPr>
           <a:lstStyle/>
@@ -18267,7 +19060,7 @@
           <a:noFill/>
         </p:spPr>
         <p:txBody>
-          <a:bodyPr wrap="square" anchor="ctr" lIns="25400" rIns="25400" tIns="25400" bIns="25400">
+          <a:bodyPr wrap="square" lIns="25400" tIns="25400" rIns="25400" bIns="25400" anchor="ctr">
             <a:spAutoFit/>
           </a:bodyPr>
           <a:lstStyle/>
@@ -18302,7 +19095,7 @@
           <a:noFill/>
         </p:spPr>
         <p:txBody>
-          <a:bodyPr wrap="square" anchor="t" lIns="25400" rIns="25400" tIns="25400" bIns="25400">
+          <a:bodyPr wrap="square" lIns="25400" tIns="25400" rIns="25400" bIns="25400" anchor="t">
             <a:spAutoFit/>
           </a:bodyPr>
           <a:lstStyle/>
@@ -18370,6 +19163,7 @@
           <a:lstStyle/>
           <a:p>
             <a:pPr algn="ctr"/>
+            <a:endParaRPr/>
           </a:p>
         </p:txBody>
       </p:sp>
@@ -18414,6 +19208,7 @@
           <a:lstStyle/>
           <a:p>
             <a:pPr algn="ctr"/>
+            <a:endParaRPr/>
           </a:p>
         </p:txBody>
       </p:sp>
@@ -18434,7 +19229,7 @@
           <a:noFill/>
         </p:spPr>
         <p:txBody>
-          <a:bodyPr wrap="square" anchor="ctr" lIns="25400" rIns="25400" tIns="25400" bIns="25400">
+          <a:bodyPr wrap="square" lIns="25400" tIns="25400" rIns="25400" bIns="25400" anchor="ctr">
             <a:spAutoFit/>
           </a:bodyPr>
           <a:lstStyle/>
@@ -18479,7 +19274,7 @@
           <a:noFill/>
         </p:spPr>
         <p:txBody>
-          <a:bodyPr wrap="square" anchor="t" lIns="25400" rIns="25400" tIns="25400" bIns="25400">
+          <a:bodyPr wrap="square" lIns="25400" tIns="25400" rIns="25400" bIns="25400" anchor="t">
             <a:spAutoFit/>
           </a:bodyPr>
           <a:lstStyle/>
@@ -18547,6 +19342,7 @@
           <a:lstStyle/>
           <a:p>
             <a:pPr algn="ctr"/>
+            <a:endParaRPr/>
           </a:p>
         </p:txBody>
       </p:sp>
@@ -18591,6 +19387,7 @@
           <a:lstStyle/>
           <a:p>
             <a:pPr algn="ctr"/>
+            <a:endParaRPr/>
           </a:p>
         </p:txBody>
       </p:sp>
@@ -18611,7 +19408,7 @@
           <a:noFill/>
         </p:spPr>
         <p:txBody>
-          <a:bodyPr wrap="square" anchor="ctr" lIns="25400" rIns="25400" tIns="25400" bIns="25400">
+          <a:bodyPr wrap="square" lIns="25400" tIns="25400" rIns="25400" bIns="25400" anchor="ctr">
             <a:spAutoFit/>
           </a:bodyPr>
           <a:lstStyle/>
@@ -18656,7 +19453,7 @@
           <a:noFill/>
         </p:spPr>
         <p:txBody>
-          <a:bodyPr wrap="square" anchor="t" lIns="25400" rIns="25400" tIns="25400" bIns="25400">
+          <a:bodyPr wrap="square" lIns="25400" tIns="25400" rIns="25400" bIns="25400" anchor="t">
             <a:spAutoFit/>
           </a:bodyPr>
           <a:lstStyle/>
@@ -18724,6 +19521,7 @@
           <a:lstStyle/>
           <a:p>
             <a:pPr algn="ctr"/>
+            <a:endParaRPr/>
           </a:p>
         </p:txBody>
       </p:sp>
@@ -18768,6 +19566,7 @@
           <a:lstStyle/>
           <a:p>
             <a:pPr algn="ctr"/>
+            <a:endParaRPr/>
           </a:p>
         </p:txBody>
       </p:sp>
@@ -18788,7 +19587,7 @@
           <a:noFill/>
         </p:spPr>
         <p:txBody>
-          <a:bodyPr wrap="square" anchor="ctr" lIns="25400" rIns="25400" tIns="25400" bIns="25400">
+          <a:bodyPr wrap="square" lIns="25400" tIns="25400" rIns="25400" bIns="25400" anchor="ctr">
             <a:spAutoFit/>
           </a:bodyPr>
           <a:lstStyle/>
@@ -18833,7 +19632,7 @@
           <a:noFill/>
         </p:spPr>
         <p:txBody>
-          <a:bodyPr wrap="square" anchor="t" lIns="25400" rIns="25400" tIns="25400" bIns="25400">
+          <a:bodyPr wrap="square" lIns="25400" tIns="25400" rIns="25400" bIns="25400" anchor="t">
             <a:spAutoFit/>
           </a:bodyPr>
           <a:lstStyle/>
@@ -18867,7 +19666,7 @@
 </file>
 
 <file path=ppt/slides/slide6.xml><?xml version="1.0" encoding="utf-8"?>
-<p:sld xmlns:a="http://schemas.openxmlformats.org/drawingml/2006/main" xmlns:p="http://schemas.openxmlformats.org/presentationml/2006/main" xmlns:r="http://schemas.openxmlformats.org/officeDocument/2006/relationships">
+<p:sld xmlns:a="http://schemas.openxmlformats.org/drawingml/2006/main" xmlns:r="http://schemas.openxmlformats.org/officeDocument/2006/relationships" xmlns:p="http://schemas.openxmlformats.org/presentationml/2006/main">
   <p:cSld>
     <p:spTree>
       <p:nvGrpSpPr>
@@ -18875,7 +19674,14 @@
         <p:cNvGrpSpPr/>
         <p:nvPr/>
       </p:nvGrpSpPr>
-      <p:grpSpPr/>
+      <p:grpSpPr>
+        <a:xfrm>
+          <a:off x="0" y="0"/>
+          <a:ext cx="0" cy="0"/>
+          <a:chOff x="0" y="0"/>
+          <a:chExt cx="0" cy="0"/>
+        </a:xfrm>
+      </p:grpSpPr>
       <p:sp>
         <p:nvSpPr>
           <p:cNvPr id="2" name="Rectangle 1"/>
@@ -18917,6 +19723,7 @@
           <a:lstStyle/>
           <a:p>
             <a:pPr algn="ctr"/>
+            <a:endParaRPr/>
           </a:p>
         </p:txBody>
       </p:sp>
@@ -18961,6 +19768,7 @@
           <a:lstStyle/>
           <a:p>
             <a:pPr algn="ctr"/>
+            <a:endParaRPr/>
           </a:p>
         </p:txBody>
       </p:sp>
@@ -18981,7 +19789,7 @@
           <a:noFill/>
         </p:spPr>
         <p:txBody>
-          <a:bodyPr wrap="square" anchor="ctr" lIns="25400" rIns="25400" tIns="25400" bIns="25400">
+          <a:bodyPr wrap="square" lIns="25400" tIns="25400" rIns="25400" bIns="25400" anchor="ctr">
             <a:spAutoFit/>
           </a:bodyPr>
           <a:lstStyle/>
@@ -19026,7 +19834,7 @@
           <a:noFill/>
         </p:spPr>
         <p:txBody>
-          <a:bodyPr wrap="square" anchor="ctr" lIns="25400" rIns="25400" tIns="25400" bIns="25400">
+          <a:bodyPr wrap="square" lIns="25400" tIns="25400" rIns="25400" bIns="25400" anchor="ctr">
             <a:spAutoFit/>
           </a:bodyPr>
           <a:lstStyle/>
@@ -19060,7 +19868,7 @@
           <a:noFill/>
         </p:spPr>
         <p:txBody>
-          <a:bodyPr wrap="square" anchor="ctr" lIns="25400" rIns="25400" tIns="25400" bIns="25400">
+          <a:bodyPr wrap="square" lIns="25400" tIns="25400" rIns="25400" bIns="25400" anchor="ctr">
             <a:spAutoFit/>
           </a:bodyPr>
           <a:lstStyle/>
@@ -19121,6 +19929,7 @@
           <a:lstStyle/>
           <a:p>
             <a:pPr algn="ctr"/>
+            <a:endParaRPr/>
           </a:p>
         </p:txBody>
       </p:sp>
@@ -19165,7 +19974,7 @@
           <a:noFill/>
         </p:spPr>
         <p:txBody>
-          <a:bodyPr wrap="square" anchor="t" lIns="25400" rIns="25400" tIns="25400" bIns="25400">
+          <a:bodyPr wrap="square" lIns="25400" tIns="25400" rIns="25400" bIns="25400" anchor="t">
             <a:spAutoFit/>
           </a:bodyPr>
           <a:lstStyle/>
@@ -19202,15 +20011,39 @@
                 <a:tableStyleId>{5C22544A-7EE6-4342-B048-85BDC9FD1C3A}</a:tableStyleId>
               </a:tblPr>
               <a:tblGrid>
-                <a:gridCol w="1804416"/>
-                <a:gridCol w="811987"/>
-                <a:gridCol w="1804416"/>
-                <a:gridCol w="2345740"/>
+                <a:gridCol w="1804416">
+                  <a:extLst>
+                    <a:ext uri="{9D8B030D-6E8A-4147-A177-3AD203B41FA5}">
+                      <a16:colId xmlns:a16="http://schemas.microsoft.com/office/drawing/2014/main" val="20000"/>
+                    </a:ext>
+                  </a:extLst>
+                </a:gridCol>
+                <a:gridCol w="811987">
+                  <a:extLst>
+                    <a:ext uri="{9D8B030D-6E8A-4147-A177-3AD203B41FA5}">
+                      <a16:colId xmlns:a16="http://schemas.microsoft.com/office/drawing/2014/main" val="20001"/>
+                    </a:ext>
+                  </a:extLst>
+                </a:gridCol>
+                <a:gridCol w="1804416">
+                  <a:extLst>
+                    <a:ext uri="{9D8B030D-6E8A-4147-A177-3AD203B41FA5}">
+                      <a16:colId xmlns:a16="http://schemas.microsoft.com/office/drawing/2014/main" val="20002"/>
+                    </a:ext>
+                  </a:extLst>
+                </a:gridCol>
+                <a:gridCol w="2345740">
+                  <a:extLst>
+                    <a:ext uri="{9D8B030D-6E8A-4147-A177-3AD203B41FA5}">
+                      <a16:colId xmlns:a16="http://schemas.microsoft.com/office/drawing/2014/main" val="20003"/>
+                    </a:ext>
+                  </a:extLst>
+                </a:gridCol>
               </a:tblGrid>
               <a:tr h="365760">
                 <a:tc>
                   <a:txBody>
-                    <a:bodyPr wrap="square"/>
+                    <a:bodyPr/>
                     <a:lstStyle/>
                     <a:p>
                       <a:pPr algn="l"/>
@@ -19233,7 +20066,7 @@
                 </a:tc>
                 <a:tc>
                   <a:txBody>
-                    <a:bodyPr wrap="square"/>
+                    <a:bodyPr/>
                     <a:lstStyle/>
                     <a:p>
                       <a:pPr algn="ctr"/>
@@ -19256,7 +20089,7 @@
                 </a:tc>
                 <a:tc>
                   <a:txBody>
-                    <a:bodyPr wrap="square"/>
+                    <a:bodyPr/>
                     <a:lstStyle/>
                     <a:p>
                       <a:pPr algn="ctr"/>
@@ -19279,7 +20112,7 @@
                 </a:tc>
                 <a:tc>
                   <a:txBody>
-                    <a:bodyPr wrap="square"/>
+                    <a:bodyPr/>
                     <a:lstStyle/>
                     <a:p>
                       <a:pPr algn="ctr"/>
@@ -19300,11 +20133,16 @@
                     </a:solidFill>
                   </a:tcPr>
                 </a:tc>
+                <a:extLst>
+                  <a:ext uri="{0D108BD9-81ED-4DB2-BD59-A6C34878D82A}">
+                    <a16:rowId xmlns:a16="http://schemas.microsoft.com/office/drawing/2014/main" val="10000"/>
+                  </a:ext>
+                </a:extLst>
               </a:tr>
               <a:tr h="365760">
                 <a:tc>
                   <a:txBody>
-                    <a:bodyPr wrap="square"/>
+                    <a:bodyPr/>
                     <a:lstStyle/>
                     <a:p>
                       <a:pPr algn="l"/>
@@ -19327,7 +20165,7 @@
                 </a:tc>
                 <a:tc>
                   <a:txBody>
-                    <a:bodyPr wrap="square"/>
+                    <a:bodyPr/>
                     <a:lstStyle/>
                     <a:p>
                       <a:pPr algn="ctr"/>
@@ -19350,7 +20188,7 @@
                 </a:tc>
                 <a:tc>
                   <a:txBody>
-                    <a:bodyPr wrap="square"/>
+                    <a:bodyPr/>
                     <a:lstStyle/>
                     <a:p>
                       <a:pPr algn="ctr"/>
@@ -19373,7 +20211,7 @@
                 </a:tc>
                 <a:tc>
                   <a:txBody>
-                    <a:bodyPr wrap="square"/>
+                    <a:bodyPr/>
                     <a:lstStyle/>
                     <a:p>
                       <a:pPr algn="ctr"/>
@@ -19394,11 +20232,16 @@
                     </a:solidFill>
                   </a:tcPr>
                 </a:tc>
+                <a:extLst>
+                  <a:ext uri="{0D108BD9-81ED-4DB2-BD59-A6C34878D82A}">
+                    <a16:rowId xmlns:a16="http://schemas.microsoft.com/office/drawing/2014/main" val="10001"/>
+                  </a:ext>
+                </a:extLst>
               </a:tr>
               <a:tr h="365760">
                 <a:tc>
                   <a:txBody>
-                    <a:bodyPr wrap="square"/>
+                    <a:bodyPr/>
                     <a:lstStyle/>
                     <a:p>
                       <a:pPr algn="l"/>
@@ -19421,7 +20264,7 @@
                 </a:tc>
                 <a:tc>
                   <a:txBody>
-                    <a:bodyPr wrap="square"/>
+                    <a:bodyPr/>
                     <a:lstStyle/>
                     <a:p>
                       <a:pPr algn="ctr"/>
@@ -19444,7 +20287,7 @@
                 </a:tc>
                 <a:tc>
                   <a:txBody>
-                    <a:bodyPr wrap="square"/>
+                    <a:bodyPr/>
                     <a:lstStyle/>
                     <a:p>
                       <a:pPr algn="ctr"/>
@@ -19467,7 +20310,7 @@
                 </a:tc>
                 <a:tc>
                   <a:txBody>
-                    <a:bodyPr wrap="square"/>
+                    <a:bodyPr/>
                     <a:lstStyle/>
                     <a:p>
                       <a:pPr algn="ctr"/>
@@ -19488,11 +20331,16 @@
                     </a:solidFill>
                   </a:tcPr>
                 </a:tc>
+                <a:extLst>
+                  <a:ext uri="{0D108BD9-81ED-4DB2-BD59-A6C34878D82A}">
+                    <a16:rowId xmlns:a16="http://schemas.microsoft.com/office/drawing/2014/main" val="10002"/>
+                  </a:ext>
+                </a:extLst>
               </a:tr>
               <a:tr h="365760">
                 <a:tc>
                   <a:txBody>
-                    <a:bodyPr wrap="square"/>
+                    <a:bodyPr/>
                     <a:lstStyle/>
                     <a:p>
                       <a:pPr algn="l"/>
@@ -19515,7 +20363,7 @@
                 </a:tc>
                 <a:tc>
                   <a:txBody>
-                    <a:bodyPr wrap="square"/>
+                    <a:bodyPr/>
                     <a:lstStyle/>
                     <a:p>
                       <a:pPr algn="ctr"/>
@@ -19538,7 +20386,7 @@
                 </a:tc>
                 <a:tc>
                   <a:txBody>
-                    <a:bodyPr wrap="square"/>
+                    <a:bodyPr/>
                     <a:lstStyle/>
                     <a:p>
                       <a:pPr algn="ctr"/>
@@ -19561,7 +20409,7 @@
                 </a:tc>
                 <a:tc>
                   <a:txBody>
-                    <a:bodyPr wrap="square"/>
+                    <a:bodyPr/>
                     <a:lstStyle/>
                     <a:p>
                       <a:pPr algn="ctr"/>
@@ -19582,6 +20430,11 @@
                     </a:solidFill>
                   </a:tcPr>
                 </a:tc>
+                <a:extLst>
+                  <a:ext uri="{0D108BD9-81ED-4DB2-BD59-A6C34878D82A}">
+                    <a16:rowId xmlns:a16="http://schemas.microsoft.com/office/drawing/2014/main" val="10003"/>
+                  </a:ext>
+                </a:extLst>
               </a:tr>
             </a:tbl>
           </a:graphicData>
@@ -19604,7 +20457,7 @@
           <a:noFill/>
         </p:spPr>
         <p:txBody>
-          <a:bodyPr wrap="square" anchor="t" lIns="25400" rIns="25400" tIns="25400" bIns="25400">
+          <a:bodyPr wrap="square" lIns="25400" tIns="25400" rIns="25400" bIns="25400" anchor="t">
             <a:spAutoFit/>
           </a:bodyPr>
           <a:lstStyle/>
@@ -19759,7 +20612,7 @@
 </file>
 
 <file path=ppt/slides/slide7.xml><?xml version="1.0" encoding="utf-8"?>
-<p:sld xmlns:a="http://schemas.openxmlformats.org/drawingml/2006/main" xmlns:p="http://schemas.openxmlformats.org/presentationml/2006/main" xmlns:r="http://schemas.openxmlformats.org/officeDocument/2006/relationships">
+<p:sld xmlns:a="http://schemas.openxmlformats.org/drawingml/2006/main" xmlns:r="http://schemas.openxmlformats.org/officeDocument/2006/relationships" xmlns:p="http://schemas.openxmlformats.org/presentationml/2006/main">
   <p:cSld>
     <p:spTree>
       <p:nvGrpSpPr>
@@ -19767,7 +20620,14 @@
         <p:cNvGrpSpPr/>
         <p:nvPr/>
       </p:nvGrpSpPr>
-      <p:grpSpPr/>
+      <p:grpSpPr>
+        <a:xfrm>
+          <a:off x="0" y="0"/>
+          <a:ext cx="0" cy="0"/>
+          <a:chOff x="0" y="0"/>
+          <a:chExt cx="0" cy="0"/>
+        </a:xfrm>
+      </p:grpSpPr>
       <p:sp>
         <p:nvSpPr>
           <p:cNvPr id="2" name="Rectangle 1"/>
@@ -19809,6 +20669,7 @@
           <a:lstStyle/>
           <a:p>
             <a:pPr algn="ctr"/>
+            <a:endParaRPr/>
           </a:p>
         </p:txBody>
       </p:sp>
@@ -19853,6 +20714,7 @@
           <a:lstStyle/>
           <a:p>
             <a:pPr algn="ctr"/>
+            <a:endParaRPr/>
           </a:p>
         </p:txBody>
       </p:sp>
@@ -19873,7 +20735,7 @@
           <a:noFill/>
         </p:spPr>
         <p:txBody>
-          <a:bodyPr wrap="square" anchor="ctr" lIns="25400" rIns="25400" tIns="25400" bIns="25400">
+          <a:bodyPr wrap="square" lIns="25400" tIns="25400" rIns="25400" bIns="25400" anchor="ctr">
             <a:spAutoFit/>
           </a:bodyPr>
           <a:lstStyle/>
@@ -19918,7 +20780,7 @@
           <a:noFill/>
         </p:spPr>
         <p:txBody>
-          <a:bodyPr wrap="square" anchor="ctr" lIns="25400" rIns="25400" tIns="25400" bIns="25400">
+          <a:bodyPr wrap="square" lIns="25400" tIns="25400" rIns="25400" bIns="25400" anchor="ctr">
             <a:spAutoFit/>
           </a:bodyPr>
           <a:lstStyle/>
@@ -19952,7 +20814,7 @@
           <a:noFill/>
         </p:spPr>
         <p:txBody>
-          <a:bodyPr wrap="square" anchor="ctr" lIns="25400" rIns="25400" tIns="25400" bIns="25400">
+          <a:bodyPr wrap="square" lIns="25400" tIns="25400" rIns="25400" bIns="25400" anchor="ctr">
             <a:spAutoFit/>
           </a:bodyPr>
           <a:lstStyle/>
@@ -19989,15 +20851,39 @@
                 <a:tableStyleId>{5C22544A-7EE6-4342-B048-85BDC9FD1C3A}</a:tableStyleId>
               </a:tblPr>
               <a:tblGrid>
-                <a:gridCol w="1952537"/>
-                <a:gridCol w="1233181"/>
-                <a:gridCol w="1335946"/>
-                <a:gridCol w="6679733"/>
+                <a:gridCol w="1952537">
+                  <a:extLst>
+                    <a:ext uri="{9D8B030D-6E8A-4147-A177-3AD203B41FA5}">
+                      <a16:colId xmlns:a16="http://schemas.microsoft.com/office/drawing/2014/main" val="20000"/>
+                    </a:ext>
+                  </a:extLst>
+                </a:gridCol>
+                <a:gridCol w="1233181">
+                  <a:extLst>
+                    <a:ext uri="{9D8B030D-6E8A-4147-A177-3AD203B41FA5}">
+                      <a16:colId xmlns:a16="http://schemas.microsoft.com/office/drawing/2014/main" val="20001"/>
+                    </a:ext>
+                  </a:extLst>
+                </a:gridCol>
+                <a:gridCol w="1335946">
+                  <a:extLst>
+                    <a:ext uri="{9D8B030D-6E8A-4147-A177-3AD203B41FA5}">
+                      <a16:colId xmlns:a16="http://schemas.microsoft.com/office/drawing/2014/main" val="20002"/>
+                    </a:ext>
+                  </a:extLst>
+                </a:gridCol>
+                <a:gridCol w="6679733">
+                  <a:extLst>
+                    <a:ext uri="{9D8B030D-6E8A-4147-A177-3AD203B41FA5}">
+                      <a16:colId xmlns:a16="http://schemas.microsoft.com/office/drawing/2014/main" val="20003"/>
+                    </a:ext>
+                  </a:extLst>
+                </a:gridCol>
               </a:tblGrid>
               <a:tr h="548640">
                 <a:tc>
                   <a:txBody>
-                    <a:bodyPr wrap="square"/>
+                    <a:bodyPr/>
                     <a:lstStyle/>
                     <a:p>
                       <a:pPr algn="l"/>
@@ -20020,7 +20906,7 @@
                 </a:tc>
                 <a:tc>
                   <a:txBody>
-                    <a:bodyPr wrap="square"/>
+                    <a:bodyPr/>
                     <a:lstStyle/>
                     <a:p>
                       <a:pPr algn="ctr"/>
@@ -20043,7 +20929,7 @@
                 </a:tc>
                 <a:tc>
                   <a:txBody>
-                    <a:bodyPr wrap="square"/>
+                    <a:bodyPr/>
                     <a:lstStyle/>
                     <a:p>
                       <a:pPr algn="ctr"/>
@@ -20066,7 +20952,7 @@
                 </a:tc>
                 <a:tc>
                   <a:txBody>
-                    <a:bodyPr wrap="square"/>
+                    <a:bodyPr/>
                     <a:lstStyle/>
                     <a:p>
                       <a:pPr algn="ctr"/>
@@ -20087,11 +20973,16 @@
                     </a:solidFill>
                   </a:tcPr>
                 </a:tc>
+                <a:extLst>
+                  <a:ext uri="{0D108BD9-81ED-4DB2-BD59-A6C34878D82A}">
+                    <a16:rowId xmlns:a16="http://schemas.microsoft.com/office/drawing/2014/main" val="10000"/>
+                  </a:ext>
+                </a:extLst>
               </a:tr>
               <a:tr h="548640">
                 <a:tc>
                   <a:txBody>
-                    <a:bodyPr wrap="square"/>
+                    <a:bodyPr/>
                     <a:lstStyle/>
                     <a:p>
                       <a:pPr algn="l"/>
@@ -20114,7 +21005,7 @@
                 </a:tc>
                 <a:tc>
                   <a:txBody>
-                    <a:bodyPr wrap="square"/>
+                    <a:bodyPr/>
                     <a:lstStyle/>
                     <a:p>
                       <a:pPr algn="ctr"/>
@@ -20137,7 +21028,7 @@
                 </a:tc>
                 <a:tc>
                   <a:txBody>
-                    <a:bodyPr wrap="square"/>
+                    <a:bodyPr/>
                     <a:lstStyle/>
                     <a:p>
                       <a:pPr algn="ctr"/>
@@ -20160,7 +21051,7 @@
                 </a:tc>
                 <a:tc>
                   <a:txBody>
-                    <a:bodyPr wrap="square"/>
+                    <a:bodyPr/>
                     <a:lstStyle/>
                     <a:p>
                       <a:pPr algn="ctr"/>
@@ -20181,11 +21072,16 @@
                     </a:solidFill>
                   </a:tcPr>
                 </a:tc>
+                <a:extLst>
+                  <a:ext uri="{0D108BD9-81ED-4DB2-BD59-A6C34878D82A}">
+                    <a16:rowId xmlns:a16="http://schemas.microsoft.com/office/drawing/2014/main" val="10001"/>
+                  </a:ext>
+                </a:extLst>
               </a:tr>
               <a:tr h="548640">
                 <a:tc>
                   <a:txBody>
-                    <a:bodyPr wrap="square"/>
+                    <a:bodyPr/>
                     <a:lstStyle/>
                     <a:p>
                       <a:pPr algn="l"/>
@@ -20208,7 +21104,7 @@
                 </a:tc>
                 <a:tc>
                   <a:txBody>
-                    <a:bodyPr wrap="square"/>
+                    <a:bodyPr/>
                     <a:lstStyle/>
                     <a:p>
                       <a:pPr algn="ctr"/>
@@ -20231,7 +21127,7 @@
                 </a:tc>
                 <a:tc>
                   <a:txBody>
-                    <a:bodyPr wrap="square"/>
+                    <a:bodyPr/>
                     <a:lstStyle/>
                     <a:p>
                       <a:pPr algn="ctr"/>
@@ -20254,7 +21150,7 @@
                 </a:tc>
                 <a:tc>
                   <a:txBody>
-                    <a:bodyPr wrap="square"/>
+                    <a:bodyPr/>
                     <a:lstStyle/>
                     <a:p>
                       <a:pPr algn="ctr"/>
@@ -20275,11 +21171,16 @@
                     </a:solidFill>
                   </a:tcPr>
                 </a:tc>
+                <a:extLst>
+                  <a:ext uri="{0D108BD9-81ED-4DB2-BD59-A6C34878D82A}">
+                    <a16:rowId xmlns:a16="http://schemas.microsoft.com/office/drawing/2014/main" val="10002"/>
+                  </a:ext>
+                </a:extLst>
               </a:tr>
               <a:tr h="548640">
                 <a:tc>
                   <a:txBody>
-                    <a:bodyPr wrap="square"/>
+                    <a:bodyPr/>
                     <a:lstStyle/>
                     <a:p>
                       <a:pPr algn="l"/>
@@ -20302,7 +21203,7 @@
                 </a:tc>
                 <a:tc>
                   <a:txBody>
-                    <a:bodyPr wrap="square"/>
+                    <a:bodyPr/>
                     <a:lstStyle/>
                     <a:p>
                       <a:pPr algn="ctr"/>
@@ -20325,7 +21226,7 @@
                 </a:tc>
                 <a:tc>
                   <a:txBody>
-                    <a:bodyPr wrap="square"/>
+                    <a:bodyPr/>
                     <a:lstStyle/>
                     <a:p>
                       <a:pPr algn="ctr"/>
@@ -20348,7 +21249,7 @@
                 </a:tc>
                 <a:tc>
                   <a:txBody>
-                    <a:bodyPr wrap="square"/>
+                    <a:bodyPr/>
                     <a:lstStyle/>
                     <a:p>
                       <a:pPr algn="ctr"/>
@@ -20369,11 +21270,16 @@
                     </a:solidFill>
                   </a:tcPr>
                 </a:tc>
+                <a:extLst>
+                  <a:ext uri="{0D108BD9-81ED-4DB2-BD59-A6C34878D82A}">
+                    <a16:rowId xmlns:a16="http://schemas.microsoft.com/office/drawing/2014/main" val="10003"/>
+                  </a:ext>
+                </a:extLst>
               </a:tr>
               <a:tr h="548640">
                 <a:tc>
                   <a:txBody>
-                    <a:bodyPr wrap="square"/>
+                    <a:bodyPr/>
                     <a:lstStyle/>
                     <a:p>
                       <a:pPr algn="l"/>
@@ -20396,7 +21302,7 @@
                 </a:tc>
                 <a:tc>
                   <a:txBody>
-                    <a:bodyPr wrap="square"/>
+                    <a:bodyPr/>
                     <a:lstStyle/>
                     <a:p>
                       <a:pPr algn="ctr"/>
@@ -20419,7 +21325,7 @@
                 </a:tc>
                 <a:tc>
                   <a:txBody>
-                    <a:bodyPr wrap="square"/>
+                    <a:bodyPr/>
                     <a:lstStyle/>
                     <a:p>
                       <a:pPr algn="ctr"/>
@@ -20442,7 +21348,7 @@
                 </a:tc>
                 <a:tc>
                   <a:txBody>
-                    <a:bodyPr wrap="square"/>
+                    <a:bodyPr/>
                     <a:lstStyle/>
                     <a:p>
                       <a:pPr algn="ctr"/>
@@ -20463,6 +21369,11 @@
                     </a:solidFill>
                   </a:tcPr>
                 </a:tc>
+                <a:extLst>
+                  <a:ext uri="{0D108BD9-81ED-4DB2-BD59-A6C34878D82A}">
+                    <a16:rowId xmlns:a16="http://schemas.microsoft.com/office/drawing/2014/main" val="10004"/>
+                  </a:ext>
+                </a:extLst>
               </a:tr>
             </a:tbl>
           </a:graphicData>
@@ -20485,7 +21396,7 @@
           <a:noFill/>
         </p:spPr>
         <p:txBody>
-          <a:bodyPr wrap="square" anchor="t" lIns="25400" rIns="25400" tIns="25400" bIns="25400">
+          <a:bodyPr wrap="square" lIns="25400" tIns="25400" rIns="25400" bIns="25400" anchor="t">
             <a:spAutoFit/>
           </a:bodyPr>
           <a:lstStyle/>
@@ -20612,7 +21523,7 @@
 </file>
 
 <file path=ppt/slides/slide8.xml><?xml version="1.0" encoding="utf-8"?>
-<p:sld xmlns:a="http://schemas.openxmlformats.org/drawingml/2006/main" xmlns:p="http://schemas.openxmlformats.org/presentationml/2006/main" xmlns:r="http://schemas.openxmlformats.org/officeDocument/2006/relationships">
+<p:sld xmlns:a="http://schemas.openxmlformats.org/drawingml/2006/main" xmlns:r="http://schemas.openxmlformats.org/officeDocument/2006/relationships" xmlns:p="http://schemas.openxmlformats.org/presentationml/2006/main">
   <p:cSld>
     <p:spTree>
       <p:nvGrpSpPr>
@@ -20620,7 +21531,14 @@
         <p:cNvGrpSpPr/>
         <p:nvPr/>
       </p:nvGrpSpPr>
-      <p:grpSpPr/>
+      <p:grpSpPr>
+        <a:xfrm>
+          <a:off x="0" y="0"/>
+          <a:ext cx="0" cy="0"/>
+          <a:chOff x="0" y="0"/>
+          <a:chExt cx="0" cy="0"/>
+        </a:xfrm>
+      </p:grpSpPr>
       <p:sp>
         <p:nvSpPr>
           <p:cNvPr id="2" name="Rectangle 1"/>
@@ -20662,6 +21580,7 @@
           <a:lstStyle/>
           <a:p>
             <a:pPr algn="ctr"/>
+            <a:endParaRPr/>
           </a:p>
         </p:txBody>
       </p:sp>
@@ -20706,6 +21625,7 @@
           <a:lstStyle/>
           <a:p>
             <a:pPr algn="ctr"/>
+            <a:endParaRPr/>
           </a:p>
         </p:txBody>
       </p:sp>
@@ -20726,7 +21646,7 @@
           <a:noFill/>
         </p:spPr>
         <p:txBody>
-          <a:bodyPr wrap="square" anchor="ctr" lIns="25400" rIns="25400" tIns="25400" bIns="25400">
+          <a:bodyPr wrap="square" lIns="25400" tIns="25400" rIns="25400" bIns="25400" anchor="ctr">
             <a:spAutoFit/>
           </a:bodyPr>
           <a:lstStyle/>
@@ -20771,7 +21691,7 @@
           <a:noFill/>
         </p:spPr>
         <p:txBody>
-          <a:bodyPr wrap="square" anchor="ctr" lIns="25400" rIns="25400" tIns="25400" bIns="25400">
+          <a:bodyPr wrap="square" lIns="25400" tIns="25400" rIns="25400" bIns="25400" anchor="ctr">
             <a:spAutoFit/>
           </a:bodyPr>
           <a:lstStyle/>
@@ -20805,7 +21725,7 @@
           <a:noFill/>
         </p:spPr>
         <p:txBody>
-          <a:bodyPr wrap="square" anchor="ctr" lIns="25400" rIns="25400" tIns="25400" bIns="25400">
+          <a:bodyPr wrap="square" lIns="25400" tIns="25400" rIns="25400" bIns="25400" anchor="ctr">
             <a:spAutoFit/>
           </a:bodyPr>
           <a:lstStyle/>
@@ -20866,6 +21786,7 @@
           <a:lstStyle/>
           <a:p>
             <a:pPr algn="ctr"/>
+            <a:endParaRPr/>
           </a:p>
         </p:txBody>
       </p:sp>
@@ -20910,7 +21831,7 @@
           <a:noFill/>
         </p:spPr>
         <p:txBody>
-          <a:bodyPr wrap="square" anchor="t" lIns="25400" rIns="25400" tIns="25400" bIns="25400">
+          <a:bodyPr wrap="square" lIns="25400" tIns="25400" rIns="25400" bIns="25400" anchor="t">
             <a:spAutoFit/>
           </a:bodyPr>
           <a:lstStyle/>
@@ -20947,13 +21868,25 @@
                 <a:tableStyleId>{5C22544A-7EE6-4342-B048-85BDC9FD1C3A}</a:tableStyleId>
               </a:tblPr>
               <a:tblGrid>
-                <a:gridCol w="1371600"/>
-                <a:gridCol w="2926080"/>
+                <a:gridCol w="1371600">
+                  <a:extLst>
+                    <a:ext uri="{9D8B030D-6E8A-4147-A177-3AD203B41FA5}">
+                      <a16:colId xmlns:a16="http://schemas.microsoft.com/office/drawing/2014/main" val="20000"/>
+                    </a:ext>
+                  </a:extLst>
+                </a:gridCol>
+                <a:gridCol w="2926080">
+                  <a:extLst>
+                    <a:ext uri="{9D8B030D-6E8A-4147-A177-3AD203B41FA5}">
+                      <a16:colId xmlns:a16="http://schemas.microsoft.com/office/drawing/2014/main" val="20001"/>
+                    </a:ext>
+                  </a:extLst>
+                </a:gridCol>
               </a:tblGrid>
               <a:tr h="470262">
                 <a:tc>
                   <a:txBody>
-                    <a:bodyPr wrap="square"/>
+                    <a:bodyPr/>
                     <a:lstStyle/>
                     <a:p>
                       <a:pPr algn="l"/>
@@ -20976,7 +21909,7 @@
                 </a:tc>
                 <a:tc>
                   <a:txBody>
-                    <a:bodyPr wrap="square"/>
+                    <a:bodyPr/>
                     <a:lstStyle/>
                     <a:p>
                       <a:pPr algn="ctr"/>
@@ -20997,11 +21930,16 @@
                     </a:solidFill>
                   </a:tcPr>
                 </a:tc>
+                <a:extLst>
+                  <a:ext uri="{0D108BD9-81ED-4DB2-BD59-A6C34878D82A}">
+                    <a16:rowId xmlns:a16="http://schemas.microsoft.com/office/drawing/2014/main" val="10000"/>
+                  </a:ext>
+                </a:extLst>
               </a:tr>
               <a:tr h="470262">
                 <a:tc>
                   <a:txBody>
-                    <a:bodyPr wrap="square"/>
+                    <a:bodyPr/>
                     <a:lstStyle/>
                     <a:p>
                       <a:pPr algn="l"/>
@@ -21024,7 +21962,7 @@
                 </a:tc>
                 <a:tc>
                   <a:txBody>
-                    <a:bodyPr wrap="square"/>
+                    <a:bodyPr/>
                     <a:lstStyle/>
                     <a:p>
                       <a:pPr algn="ctr"/>
@@ -21045,11 +21983,16 @@
                     </a:solidFill>
                   </a:tcPr>
                 </a:tc>
+                <a:extLst>
+                  <a:ext uri="{0D108BD9-81ED-4DB2-BD59-A6C34878D82A}">
+                    <a16:rowId xmlns:a16="http://schemas.microsoft.com/office/drawing/2014/main" val="10001"/>
+                  </a:ext>
+                </a:extLst>
               </a:tr>
               <a:tr h="470262">
                 <a:tc>
                   <a:txBody>
-                    <a:bodyPr wrap="square"/>
+                    <a:bodyPr/>
                     <a:lstStyle/>
                     <a:p>
                       <a:pPr algn="l"/>
@@ -21072,7 +22015,7 @@
                 </a:tc>
                 <a:tc>
                   <a:txBody>
-                    <a:bodyPr wrap="square"/>
+                    <a:bodyPr/>
                     <a:lstStyle/>
                     <a:p>
                       <a:pPr algn="ctr"/>
@@ -21093,11 +22036,16 @@
                     </a:solidFill>
                   </a:tcPr>
                 </a:tc>
+                <a:extLst>
+                  <a:ext uri="{0D108BD9-81ED-4DB2-BD59-A6C34878D82A}">
+                    <a16:rowId xmlns:a16="http://schemas.microsoft.com/office/drawing/2014/main" val="10002"/>
+                  </a:ext>
+                </a:extLst>
               </a:tr>
               <a:tr h="470262">
                 <a:tc>
                   <a:txBody>
-                    <a:bodyPr wrap="square"/>
+                    <a:bodyPr/>
                     <a:lstStyle/>
                     <a:p>
                       <a:pPr algn="l"/>
@@ -21120,7 +22068,7 @@
                 </a:tc>
                 <a:tc>
                   <a:txBody>
-                    <a:bodyPr wrap="square"/>
+                    <a:bodyPr/>
                     <a:lstStyle/>
                     <a:p>
                       <a:pPr algn="ctr"/>
@@ -21141,11 +22089,16 @@
                     </a:solidFill>
                   </a:tcPr>
                 </a:tc>
+                <a:extLst>
+                  <a:ext uri="{0D108BD9-81ED-4DB2-BD59-A6C34878D82A}">
+                    <a16:rowId xmlns:a16="http://schemas.microsoft.com/office/drawing/2014/main" val="10003"/>
+                  </a:ext>
+                </a:extLst>
               </a:tr>
               <a:tr h="470262">
                 <a:tc>
                   <a:txBody>
-                    <a:bodyPr wrap="square"/>
+                    <a:bodyPr/>
                     <a:lstStyle/>
                     <a:p>
                       <a:pPr algn="l"/>
@@ -21168,7 +22121,7 @@
                 </a:tc>
                 <a:tc>
                   <a:txBody>
-                    <a:bodyPr wrap="square"/>
+                    <a:bodyPr/>
                     <a:lstStyle/>
                     <a:p>
                       <a:pPr algn="ctr"/>
@@ -21189,11 +22142,16 @@
                     </a:solidFill>
                   </a:tcPr>
                 </a:tc>
+                <a:extLst>
+                  <a:ext uri="{0D108BD9-81ED-4DB2-BD59-A6C34878D82A}">
+                    <a16:rowId xmlns:a16="http://schemas.microsoft.com/office/drawing/2014/main" val="10004"/>
+                  </a:ext>
+                </a:extLst>
               </a:tr>
               <a:tr h="470262">
                 <a:tc>
                   <a:txBody>
-                    <a:bodyPr wrap="square"/>
+                    <a:bodyPr/>
                     <a:lstStyle/>
                     <a:p>
                       <a:pPr algn="l"/>
@@ -21216,7 +22174,7 @@
                 </a:tc>
                 <a:tc>
                   <a:txBody>
-                    <a:bodyPr wrap="square"/>
+                    <a:bodyPr/>
                     <a:lstStyle/>
                     <a:p>
                       <a:pPr algn="ctr"/>
@@ -21237,11 +22195,16 @@
                     </a:solidFill>
                   </a:tcPr>
                 </a:tc>
+                <a:extLst>
+                  <a:ext uri="{0D108BD9-81ED-4DB2-BD59-A6C34878D82A}">
+                    <a16:rowId xmlns:a16="http://schemas.microsoft.com/office/drawing/2014/main" val="10005"/>
+                  </a:ext>
+                </a:extLst>
               </a:tr>
               <a:tr h="470268">
                 <a:tc>
                   <a:txBody>
-                    <a:bodyPr wrap="square"/>
+                    <a:bodyPr/>
                     <a:lstStyle/>
                     <a:p>
                       <a:pPr algn="l"/>
@@ -21264,7 +22227,7 @@
                 </a:tc>
                 <a:tc>
                   <a:txBody>
-                    <a:bodyPr wrap="square"/>
+                    <a:bodyPr/>
                     <a:lstStyle/>
                     <a:p>
                       <a:pPr algn="ctr"/>
@@ -21285,6 +22248,11 @@
                     </a:solidFill>
                   </a:tcPr>
                 </a:tc>
+                <a:extLst>
+                  <a:ext uri="{0D108BD9-81ED-4DB2-BD59-A6C34878D82A}">
+                    <a16:rowId xmlns:a16="http://schemas.microsoft.com/office/drawing/2014/main" val="10006"/>
+                  </a:ext>
+                </a:extLst>
               </a:tr>
             </a:tbl>
           </a:graphicData>
@@ -21331,6 +22299,7 @@
           <a:lstStyle/>
           <a:p>
             <a:pPr algn="ctr"/>
+            <a:endParaRPr/>
           </a:p>
         </p:txBody>
       </p:sp>
@@ -21375,6 +22344,7 @@
           <a:lstStyle/>
           <a:p>
             <a:pPr algn="ctr"/>
+            <a:endParaRPr/>
           </a:p>
         </p:txBody>
       </p:sp>
@@ -21395,7 +22365,7 @@
           <a:noFill/>
         </p:spPr>
         <p:txBody>
-          <a:bodyPr wrap="square" anchor="t" lIns="25400" rIns="25400" tIns="25400" bIns="25400">
+          <a:bodyPr wrap="square" lIns="25400" tIns="25400" rIns="25400" bIns="25400" anchor="t">
             <a:spAutoFit/>
           </a:bodyPr>
           <a:lstStyle/>
@@ -21474,7 +22444,7 @@
 </file>
 
 <file path=ppt/slides/slide9.xml><?xml version="1.0" encoding="utf-8"?>
-<p:sld xmlns:a="http://schemas.openxmlformats.org/drawingml/2006/main" xmlns:p="http://schemas.openxmlformats.org/presentationml/2006/main" xmlns:r="http://schemas.openxmlformats.org/officeDocument/2006/relationships">
+<p:sld xmlns:a="http://schemas.openxmlformats.org/drawingml/2006/main" xmlns:r="http://schemas.openxmlformats.org/officeDocument/2006/relationships" xmlns:p="http://schemas.openxmlformats.org/presentationml/2006/main">
   <p:cSld>
     <p:spTree>
       <p:nvGrpSpPr>
@@ -21482,7 +22452,14 @@
         <p:cNvGrpSpPr/>
         <p:nvPr/>
       </p:nvGrpSpPr>
-      <p:grpSpPr/>
+      <p:grpSpPr>
+        <a:xfrm>
+          <a:off x="0" y="0"/>
+          <a:ext cx="0" cy="0"/>
+          <a:chOff x="0" y="0"/>
+          <a:chExt cx="0" cy="0"/>
+        </a:xfrm>
+      </p:grpSpPr>
       <p:sp>
         <p:nvSpPr>
           <p:cNvPr id="2" name="Rectangle 1"/>
@@ -21524,6 +22501,7 @@
           <a:lstStyle/>
           <a:p>
             <a:pPr algn="ctr"/>
+            <a:endParaRPr/>
           </a:p>
         </p:txBody>
       </p:sp>
@@ -21568,6 +22546,7 @@
           <a:lstStyle/>
           <a:p>
             <a:pPr algn="ctr"/>
+            <a:endParaRPr/>
           </a:p>
         </p:txBody>
       </p:sp>
@@ -21588,7 +22567,7 @@
           <a:noFill/>
         </p:spPr>
         <p:txBody>
-          <a:bodyPr wrap="square" anchor="ctr" lIns="25400" rIns="25400" tIns="25400" bIns="25400">
+          <a:bodyPr wrap="square" lIns="25400" tIns="25400" rIns="25400" bIns="25400" anchor="ctr">
             <a:spAutoFit/>
           </a:bodyPr>
           <a:lstStyle/>
@@ -21633,7 +22612,7 @@
           <a:noFill/>
         </p:spPr>
         <p:txBody>
-          <a:bodyPr wrap="square" anchor="ctr" lIns="25400" rIns="25400" tIns="25400" bIns="25400">
+          <a:bodyPr wrap="square" lIns="25400" tIns="25400" rIns="25400" bIns="25400" anchor="ctr">
             <a:spAutoFit/>
           </a:bodyPr>
           <a:lstStyle/>
@@ -21667,7 +22646,7 @@
           <a:noFill/>
         </p:spPr>
         <p:txBody>
-          <a:bodyPr wrap="square" anchor="ctr" lIns="25400" rIns="25400" tIns="25400" bIns="25400">
+          <a:bodyPr wrap="square" lIns="25400" tIns="25400" rIns="25400" bIns="25400" anchor="ctr">
             <a:spAutoFit/>
           </a:bodyPr>
           <a:lstStyle/>
@@ -21724,7 +22703,7 @@
           </a:fontRef>
         </p:style>
         <p:txBody>
-          <a:bodyPr rtlCol="0" anchor="ctr" wrap="square" lIns="38100" rIns="38100" tIns="25400" bIns="25400"/>
+          <a:bodyPr wrap="square" lIns="38100" tIns="25400" rIns="38100" bIns="25400" rtlCol="0" anchor="ctr"/>
           <a:lstStyle/>
           <a:p>
             <a:pPr algn="ctr"/>
@@ -21793,6 +22772,7 @@
           <a:lstStyle/>
           <a:p>
             <a:pPr algn="ctr"/>
+            <a:endParaRPr/>
           </a:p>
         </p:txBody>
       </p:sp>
@@ -21835,7 +22815,7 @@
           </a:fontRef>
         </p:style>
         <p:txBody>
-          <a:bodyPr rtlCol="0" anchor="ctr" wrap="square" lIns="38100" rIns="38100" tIns="25400" bIns="25400"/>
+          <a:bodyPr wrap="square" lIns="38100" tIns="25400" rIns="38100" bIns="25400" rtlCol="0" anchor="ctr"/>
           <a:lstStyle/>
           <a:p>
             <a:pPr algn="ctr"/>
@@ -21904,6 +22884,7 @@
           <a:lstStyle/>
           <a:p>
             <a:pPr algn="ctr"/>
+            <a:endParaRPr/>
           </a:p>
         </p:txBody>
       </p:sp>
@@ -21946,7 +22927,7 @@
           </a:fontRef>
         </p:style>
         <p:txBody>
-          <a:bodyPr rtlCol="0" anchor="ctr" wrap="square" lIns="38100" rIns="38100" tIns="25400" bIns="25400"/>
+          <a:bodyPr wrap="square" lIns="38100" tIns="25400" rIns="38100" bIns="25400" rtlCol="0" anchor="ctr"/>
           <a:lstStyle/>
           <a:p>
             <a:pPr algn="ctr"/>
@@ -22015,6 +22996,7 @@
           <a:lstStyle/>
           <a:p>
             <a:pPr algn="ctr"/>
+            <a:endParaRPr/>
           </a:p>
         </p:txBody>
       </p:sp>
@@ -22035,7 +23017,7 @@
           <a:noFill/>
         </p:spPr>
         <p:txBody>
-          <a:bodyPr wrap="square" anchor="t" lIns="25400" rIns="25400" tIns="25400" bIns="25400">
+          <a:bodyPr wrap="square" lIns="25400" tIns="25400" rIns="25400" bIns="25400" anchor="t">
             <a:spAutoFit/>
           </a:bodyPr>
           <a:lstStyle/>
@@ -22091,7 +23073,7 @@
           </a:fontRef>
         </p:style>
         <p:txBody>
-          <a:bodyPr rtlCol="0" anchor="ctr" wrap="square" lIns="38100" rIns="38100" tIns="25400" bIns="25400"/>
+          <a:bodyPr wrap="square" lIns="38100" tIns="25400" rIns="38100" bIns="25400" rtlCol="0" anchor="ctr"/>
           <a:lstStyle/>
           <a:p>
             <a:pPr algn="ctr"/>
@@ -22160,6 +23142,7 @@
           <a:lstStyle/>
           <a:p>
             <a:pPr algn="ctr"/>
+            <a:endParaRPr/>
           </a:p>
         </p:txBody>
       </p:sp>
@@ -22202,7 +23185,7 @@
           </a:fontRef>
         </p:style>
         <p:txBody>
-          <a:bodyPr rtlCol="0" anchor="ctr" wrap="square" lIns="38100" rIns="38100" tIns="25400" bIns="25400"/>
+          <a:bodyPr wrap="square" lIns="38100" tIns="25400" rIns="38100" bIns="25400" rtlCol="0" anchor="ctr"/>
           <a:lstStyle/>
           <a:p>
             <a:pPr algn="ctr"/>
@@ -22271,6 +23254,7 @@
           <a:lstStyle/>
           <a:p>
             <a:pPr algn="ctr"/>
+            <a:endParaRPr/>
           </a:p>
         </p:txBody>
       </p:sp>
@@ -22313,7 +23297,7 @@
           </a:fontRef>
         </p:style>
         <p:txBody>
-          <a:bodyPr rtlCol="0" anchor="ctr" wrap="square" lIns="38100" rIns="38100" tIns="25400" bIns="25400"/>
+          <a:bodyPr wrap="square" lIns="38100" tIns="25400" rIns="38100" bIns="25400" rtlCol="0" anchor="ctr"/>
           <a:lstStyle/>
           <a:p>
             <a:pPr algn="ctr"/>
@@ -22382,6 +23366,7 @@
           <a:lstStyle/>
           <a:p>
             <a:pPr algn="ctr"/>
+            <a:endParaRPr/>
           </a:p>
         </p:txBody>
       </p:sp>
@@ -22424,7 +23409,7 @@
           </a:fontRef>
         </p:style>
         <p:txBody>
-          <a:bodyPr rtlCol="0" anchor="ctr" wrap="square" lIns="38100" rIns="38100" tIns="25400" bIns="25400"/>
+          <a:bodyPr wrap="square" lIns="38100" tIns="25400" rIns="38100" bIns="25400" rtlCol="0" anchor="ctr"/>
           <a:lstStyle/>
           <a:p>
             <a:pPr algn="ctr"/>
@@ -22493,6 +23478,7 @@
           <a:lstStyle/>
           <a:p>
             <a:pPr algn="ctr"/>
+            <a:endParaRPr/>
           </a:p>
         </p:txBody>
       </p:sp>
@@ -22535,7 +23521,7 @@
           </a:fontRef>
         </p:style>
         <p:txBody>
-          <a:bodyPr rtlCol="0" anchor="ctr" wrap="square" lIns="38100" rIns="38100" tIns="25400" bIns="25400"/>
+          <a:bodyPr wrap="square" lIns="38100" tIns="25400" rIns="38100" bIns="25400" rtlCol="0" anchor="ctr"/>
           <a:lstStyle/>
           <a:p>
             <a:pPr algn="ctr"/>
@@ -22604,6 +23590,7 @@
           <a:lstStyle/>
           <a:p>
             <a:pPr algn="ctr"/>
+            <a:endParaRPr/>
           </a:p>
         </p:txBody>
       </p:sp>
@@ -22646,7 +23633,7 @@
           </a:fontRef>
         </p:style>
         <p:txBody>
-          <a:bodyPr rtlCol="0" anchor="ctr" wrap="square" lIns="38100" rIns="38100" tIns="25400" bIns="25400"/>
+          <a:bodyPr wrap="square" lIns="38100" tIns="25400" rIns="38100" bIns="25400" rtlCol="0" anchor="ctr"/>
           <a:lstStyle/>
           <a:p>
             <a:pPr algn="ctr"/>
@@ -22715,6 +23702,7 @@
           <a:lstStyle/>
           <a:p>
             <a:pPr algn="ctr"/>
+            <a:endParaRPr/>
           </a:p>
         </p:txBody>
       </p:sp>
@@ -22759,6 +23747,7 @@
           <a:lstStyle/>
           <a:p>
             <a:pPr algn="ctr"/>
+            <a:endParaRPr/>
           </a:p>
         </p:txBody>
       </p:sp>
@@ -22779,7 +23768,7 @@
           <a:noFill/>
         </p:spPr>
         <p:txBody>
-          <a:bodyPr wrap="square" anchor="t" lIns="25400" rIns="25400" tIns="25400" bIns="25400">
+          <a:bodyPr wrap="square" lIns="25400" tIns="25400" rIns="25400" bIns="25400" anchor="t">
             <a:spAutoFit/>
           </a:bodyPr>
           <a:lstStyle/>

--- a/DOC/論文撰寫/口試簡報_鋰電池SOC估測.pptx
+++ b/DOC/論文撰寫/口試簡報_鋰電池SOC估測.pptx
@@ -322,7 +322,7 @@
           <a:p>
             <a:fld id="{5BCAD085-E8A6-8845-BD4E-CB4CCA059FC4}" type="datetimeFigureOut">
               <a:rPr lang="en-US" smtClean="0"/>
-              <a:t>7/23/2026</a:t>
+              <a:t>7/27/2026</a:t>
             </a:fld>
             <a:endParaRPr lang="en-US"/>
           </a:p>
@@ -490,7 +490,7 @@
           <a:p>
             <a:fld id="{5BCAD085-E8A6-8845-BD4E-CB4CCA059FC4}" type="datetimeFigureOut">
               <a:rPr lang="en-US" smtClean="0"/>
-              <a:t>7/23/2026</a:t>
+              <a:t>7/27/2026</a:t>
             </a:fld>
             <a:endParaRPr lang="en-US"/>
           </a:p>
@@ -668,7 +668,7 @@
           <a:p>
             <a:fld id="{5BCAD085-E8A6-8845-BD4E-CB4CCA059FC4}" type="datetimeFigureOut">
               <a:rPr lang="en-US" smtClean="0"/>
-              <a:t>7/23/2026</a:t>
+              <a:t>7/27/2026</a:t>
             </a:fld>
             <a:endParaRPr lang="en-US"/>
           </a:p>
@@ -836,7 +836,7 @@
           <a:p>
             <a:fld id="{5BCAD085-E8A6-8845-BD4E-CB4CCA059FC4}" type="datetimeFigureOut">
               <a:rPr lang="en-US" smtClean="0"/>
-              <a:t>7/23/2026</a:t>
+              <a:t>7/27/2026</a:t>
             </a:fld>
             <a:endParaRPr lang="en-US"/>
           </a:p>
@@ -1081,7 +1081,7 @@
           <a:p>
             <a:fld id="{5BCAD085-E8A6-8845-BD4E-CB4CCA059FC4}" type="datetimeFigureOut">
               <a:rPr lang="en-US" smtClean="0"/>
-              <a:t>7/23/2026</a:t>
+              <a:t>7/27/2026</a:t>
             </a:fld>
             <a:endParaRPr lang="en-US"/>
           </a:p>
@@ -1366,7 +1366,7 @@
           <a:p>
             <a:fld id="{5BCAD085-E8A6-8845-BD4E-CB4CCA059FC4}" type="datetimeFigureOut">
               <a:rPr lang="en-US" smtClean="0"/>
-              <a:t>7/23/2026</a:t>
+              <a:t>7/27/2026</a:t>
             </a:fld>
             <a:endParaRPr lang="en-US"/>
           </a:p>
@@ -1785,7 +1785,7 @@
           <a:p>
             <a:fld id="{5BCAD085-E8A6-8845-BD4E-CB4CCA059FC4}" type="datetimeFigureOut">
               <a:rPr lang="en-US" smtClean="0"/>
-              <a:t>7/23/2026</a:t>
+              <a:t>7/27/2026</a:t>
             </a:fld>
             <a:endParaRPr lang="en-US"/>
           </a:p>
@@ -1902,7 +1902,7 @@
           <a:p>
             <a:fld id="{5BCAD085-E8A6-8845-BD4E-CB4CCA059FC4}" type="datetimeFigureOut">
               <a:rPr lang="en-US" smtClean="0"/>
-              <a:t>7/23/2026</a:t>
+              <a:t>7/27/2026</a:t>
             </a:fld>
             <a:endParaRPr lang="en-US"/>
           </a:p>
@@ -1997,7 +1997,7 @@
           <a:p>
             <a:fld id="{5BCAD085-E8A6-8845-BD4E-CB4CCA059FC4}" type="datetimeFigureOut">
               <a:rPr lang="en-US" smtClean="0"/>
-              <a:t>7/23/2026</a:t>
+              <a:t>7/27/2026</a:t>
             </a:fld>
             <a:endParaRPr lang="en-US"/>
           </a:p>
@@ -2272,7 +2272,7 @@
           <a:p>
             <a:fld id="{5BCAD085-E8A6-8845-BD4E-CB4CCA059FC4}" type="datetimeFigureOut">
               <a:rPr lang="en-US" smtClean="0"/>
-              <a:t>7/23/2026</a:t>
+              <a:t>7/27/2026</a:t>
             </a:fld>
             <a:endParaRPr lang="en-US"/>
           </a:p>
@@ -2524,7 +2524,7 @@
           <a:p>
             <a:fld id="{5BCAD085-E8A6-8845-BD4E-CB4CCA059FC4}" type="datetimeFigureOut">
               <a:rPr lang="en-US" smtClean="0"/>
-              <a:t>7/23/2026</a:t>
+              <a:t>7/27/2026</a:t>
             </a:fld>
             <a:endParaRPr lang="en-US"/>
           </a:p>
@@ -2735,7 +2735,7 @@
           <a:p>
             <a:fld id="{5BCAD085-E8A6-8845-BD4E-CB4CCA059FC4}" type="datetimeFigureOut">
               <a:rPr lang="en-US" smtClean="0"/>
-              <a:t>7/23/2026</a:t>
+              <a:t>7/27/2026</a:t>
             </a:fld>
             <a:endParaRPr lang="en-US"/>
           </a:p>
@@ -3299,7 +3299,7 @@
         <p:spPr>
           <a:xfrm>
             <a:off x="914400" y="502920"/>
-            <a:ext cx="10332720" cy="548640"/>
+            <a:ext cx="10332720" cy="328295"/>
           </a:xfrm>
           <a:prstGeom prst="rect">
             <a:avLst/>
@@ -3313,14 +3313,66 @@
           <a:lstStyle/>
           <a:p>
             <a:r>
-              <a:rPr sz="1800" b="0" i="0">
+              <a:rPr sz="1800" b="0" i="0" dirty="0" err="1">
                 <a:solidFill>
                   <a:srgbClr val="DEEBF7"/>
                 </a:solidFill>
                 <a:latin typeface="Microsoft JhengHei"/>
               </a:rPr>
-              <a:t>中原大學　電機工程學系　碩士學位論文</a:t>
-            </a:r>
+              <a:t>中原大學</a:t>
+            </a:r>
+            <a:r>
+              <a:rPr sz="1800" b="0" i="0" dirty="0">
+                <a:solidFill>
+                  <a:srgbClr val="DEEBF7"/>
+                </a:solidFill>
+                <a:latin typeface="Microsoft JhengHei"/>
+              </a:rPr>
+              <a:t>　</a:t>
+            </a:r>
+            <a:r>
+              <a:rPr lang="zh-TW" altLang="en-US" dirty="0">
+                <a:solidFill>
+                  <a:srgbClr val="DEEBF7"/>
+                </a:solidFill>
+                <a:latin typeface="微軟正黑體" panose="020B0604030504040204" pitchFamily="34" charset="-120"/>
+                <a:ea typeface="微軟正黑體" panose="020B0604030504040204" pitchFamily="34" charset="-120"/>
+              </a:rPr>
+              <a:t>資訊</a:t>
+            </a:r>
+            <a:r>
+              <a:rPr dirty="0" err="1">
+                <a:solidFill>
+                  <a:srgbClr val="DEEBF7"/>
+                </a:solidFill>
+                <a:latin typeface="Microsoft JhengHei"/>
+              </a:rPr>
+              <a:t>工程學系</a:t>
+            </a:r>
+            <a:r>
+              <a:rPr dirty="0">
+                <a:solidFill>
+                  <a:srgbClr val="DEEBF7"/>
+                </a:solidFill>
+                <a:latin typeface="Microsoft JhengHei"/>
+              </a:rPr>
+              <a:t>　</a:t>
+            </a:r>
+            <a:r>
+              <a:rPr sz="1800" b="0" i="0" dirty="0" err="1">
+                <a:solidFill>
+                  <a:srgbClr val="DEEBF7"/>
+                </a:solidFill>
+                <a:latin typeface="Microsoft JhengHei"/>
+              </a:rPr>
+              <a:t>碩士學位論文</a:t>
+            </a:r>
+            <a:endParaRPr sz="1800" b="0" i="0" dirty="0">
+              <a:solidFill>
+                <a:srgbClr val="DEEBF7"/>
+              </a:solidFill>
+              <a:latin typeface="Microsoft JhengHei"/>
+            </a:endParaRPr>
           </a:p>
         </p:txBody>
       </p:sp>

--- a/DOC/論文撰寫/口試簡報_鋰電池SOC估測.pptx
+++ b/DOC/論文撰寫/口試簡報_鋰電池SOC估測.pptx
@@ -5699,7 +5699,7 @@
         <p:spPr>
           <a:xfrm>
             <a:off x="502920" y="3977639"/>
-            <a:ext cx="5577840" cy="2377440"/>
+            <a:ext cx="5577840" cy="1061829"/>
           </a:xfrm>
           <a:prstGeom prst="rect">
             <a:avLst/>
@@ -5721,7 +5721,7 @@
               </a:spcAft>
             </a:pPr>
             <a:r>
-              <a:rPr sz="1400" b="1" i="0">
+              <a:rPr sz="1400" b="1" i="0" dirty="0">
                 <a:solidFill>
                   <a:srgbClr val="2E74B5"/>
                 </a:solidFill>
@@ -5730,14 +5730,83 @@
               <a:t>▪ </a:t>
             </a:r>
             <a:r>
-              <a:rPr sz="1400" b="1" i="0">
+              <a:rPr sz="1400" b="1" i="0" dirty="0">
                 <a:solidFill>
                   <a:srgbClr val="1F3864"/>
                 </a:solidFill>
                 <a:latin typeface="Microsoft JhengHei"/>
               </a:rPr>
-              <a:t>CC-CV 充電終止：V ≥ Vcv 且電流衰減至 0.1C 以下</a:t>
-            </a:r>
+              <a:t>CC-CV </a:t>
+            </a:r>
+            <a:r>
+              <a:rPr sz="1400" b="1" i="0" dirty="0" err="1">
+                <a:solidFill>
+                  <a:srgbClr val="1F3864"/>
+                </a:solidFill>
+                <a:latin typeface="Microsoft JhengHei"/>
+              </a:rPr>
+              <a:t>充電終止：V</a:t>
+            </a:r>
+            <a:r>
+              <a:rPr sz="1400" b="1" i="0" dirty="0">
+                <a:solidFill>
+                  <a:srgbClr val="1F3864"/>
+                </a:solidFill>
+                <a:latin typeface="Microsoft JhengHei"/>
+              </a:rPr>
+              <a:t> ≥ </a:t>
+            </a:r>
+            <a:r>
+              <a:rPr sz="1400" b="1" i="0" dirty="0" err="1">
+                <a:solidFill>
+                  <a:srgbClr val="1F3864"/>
+                </a:solidFill>
+                <a:latin typeface="Microsoft JhengHei"/>
+              </a:rPr>
+              <a:t>Vcv</a:t>
+            </a:r>
+            <a:r>
+              <a:rPr sz="1400" b="1" i="0" dirty="0">
+                <a:solidFill>
+                  <a:srgbClr val="1F3864"/>
+                </a:solidFill>
+                <a:latin typeface="Microsoft JhengHei"/>
+              </a:rPr>
+              <a:t> </a:t>
+            </a:r>
+            <a:r>
+              <a:rPr sz="1400" b="1" i="0" dirty="0" err="1">
+                <a:solidFill>
+                  <a:srgbClr val="1F3864"/>
+                </a:solidFill>
+                <a:latin typeface="Microsoft JhengHei"/>
+              </a:rPr>
+              <a:t>且電流衰減至</a:t>
+            </a:r>
+            <a:r>
+              <a:rPr sz="1400" b="1" i="0" dirty="0">
+                <a:solidFill>
+                  <a:srgbClr val="1F3864"/>
+                </a:solidFill>
+                <a:latin typeface="Microsoft JhengHei"/>
+              </a:rPr>
+              <a:t> 0.1C </a:t>
+            </a:r>
+            <a:r>
+              <a:rPr sz="1400" b="1" i="0" dirty="0" err="1">
+                <a:solidFill>
+                  <a:srgbClr val="1F3864"/>
+                </a:solidFill>
+                <a:latin typeface="Microsoft JhengHei"/>
+              </a:rPr>
+              <a:t>以下</a:t>
+            </a:r>
+            <a:endParaRPr sz="1400" b="1" i="0" dirty="0">
+              <a:solidFill>
+                <a:srgbClr val="1F3864"/>
+              </a:solidFill>
+              <a:latin typeface="Microsoft JhengHei"/>
+            </a:endParaRPr>
           </a:p>
           <a:p>
             <a:pPr algn="l">
@@ -5749,7 +5818,7 @@
               </a:spcAft>
             </a:pPr>
             <a:r>
-              <a:rPr sz="1400" b="1" i="0">
+              <a:rPr sz="1400" b="1" i="0" dirty="0">
                 <a:solidFill>
                   <a:srgbClr val="2E74B5"/>
                 </a:solidFill>
@@ -5758,13 +5827,76 @@
               <a:t>▪ </a:t>
             </a:r>
             <a:r>
-              <a:rPr sz="1400" b="1" i="0">
+              <a:rPr sz="1400" b="1" i="0" dirty="0" err="1">
                 <a:solidFill>
                   <a:srgbClr val="1F3864"/>
                 </a:solidFill>
                 <a:latin typeface="Microsoft JhengHei"/>
               </a:rPr>
-              <a:t>放電中注入 dV/dI 擾動：</a:t>
+              <a:t>放電中注入</a:t>
+            </a:r>
+            <a:r>
+              <a:rPr sz="1400" b="1" i="0" dirty="0">
+                <a:solidFill>
+                  <a:srgbClr val="1F3864"/>
+                </a:solidFill>
+                <a:latin typeface="Microsoft JhengHei"/>
+              </a:rPr>
+              <a:t> </a:t>
+            </a:r>
+            <a:r>
+              <a:rPr sz="1400" b="1" i="0" dirty="0" err="1">
+                <a:solidFill>
+                  <a:srgbClr val="1F3864"/>
+                </a:solidFill>
+                <a:latin typeface="Microsoft JhengHei"/>
+              </a:rPr>
+              <a:t>dV</a:t>
+            </a:r>
+            <a:r>
+              <a:rPr sz="1400" b="1" i="0" dirty="0">
+                <a:solidFill>
+                  <a:srgbClr val="1F3864"/>
+                </a:solidFill>
+                <a:latin typeface="Microsoft JhengHei"/>
+              </a:rPr>
+              <a:t>/</a:t>
+            </a:r>
+            <a:r>
+              <a:rPr sz="1400" b="1" i="0" dirty="0" err="1">
+                <a:solidFill>
+                  <a:srgbClr val="1F3864"/>
+                </a:solidFill>
+                <a:latin typeface="Microsoft JhengHei"/>
+              </a:rPr>
+              <a:t>dI</a:t>
+            </a:r>
+            <a:r>
+              <a:rPr sz="1400" b="1" i="0" dirty="0">
+                <a:solidFill>
+                  <a:srgbClr val="1F3864"/>
+                </a:solidFill>
+                <a:latin typeface="Microsoft JhengHei"/>
+              </a:rPr>
+              <a:t> </a:t>
+            </a:r>
+            <a:r>
+              <a:rPr sz="1400" b="1" i="0" dirty="0" err="1">
+                <a:solidFill>
+                  <a:srgbClr val="1F3864"/>
+                </a:solidFill>
+                <a:latin typeface="Microsoft JhengHei"/>
+              </a:rPr>
+              <a:t>擾動</a:t>
+            </a:r>
+            <a:r>
+              <a:rPr sz="1400" b="1" i="0" dirty="0">
+                <a:solidFill>
+                  <a:srgbClr val="1F3864"/>
+                </a:solidFill>
+                <a:latin typeface="Microsoft JhengHei"/>
+              </a:rPr>
+              <a:t>：</a:t>
             </a:r>
           </a:p>
           <a:p>
@@ -5777,22 +5909,76 @@
               </a:spcAft>
             </a:pPr>
             <a:r>
+              <a:rPr sz="1300" b="0" i="0" dirty="0">
+                <a:solidFill>
+                  <a:srgbClr val="595959"/>
+                </a:solidFill>
+                <a:latin typeface="Microsoft JhengHei"/>
+              </a:rPr>
+              <a:t>– </a:t>
+            </a:r>
+            <a:r>
+              <a:rPr sz="1300" b="0" i="0" dirty="0">
+                <a:solidFill>
+                  <a:srgbClr val="404040"/>
+                </a:solidFill>
+                <a:latin typeface="Microsoft JhengHei"/>
+              </a:rPr>
+              <a:t>每 60 s </a:t>
+            </a:r>
+            <a:r>
+              <a:rPr sz="1300" b="0" i="0" dirty="0" err="1">
+                <a:solidFill>
+                  <a:srgbClr val="404040"/>
+                </a:solidFill>
+                <a:latin typeface="Microsoft JhengHei"/>
+              </a:rPr>
+              <a:t>步降至</a:t>
+            </a:r>
+            <a:r>
+              <a:rPr sz="1300" b="0" i="0" dirty="0">
+                <a:solidFill>
+                  <a:srgbClr val="404040"/>
+                </a:solidFill>
+                <a:latin typeface="Microsoft JhengHei"/>
+              </a:rPr>
+              <a:t> 0.2C、</a:t>
+            </a:r>
+            <a:r>
+              <a:rPr lang="zh-TW" altLang="en-US" sz="1300" b="0" i="0">
+                <a:solidFill>
+                  <a:srgbClr val="404040"/>
+                </a:solidFill>
+                <a:latin typeface="Microsoft JhengHei"/>
+              </a:rPr>
+              <a:t>持續</a:t>
+            </a:r>
+            <a:r>
               <a:rPr sz="1300" b="0" i="0">
                 <a:solidFill>
-                  <a:srgbClr val="595959"/>
-                </a:solidFill>
-                <a:latin typeface="Microsoft JhengHei"/>
-              </a:rPr>
-              <a:t>– </a:t>
-            </a:r>
-            <a:r>
-              <a:rPr sz="1300" b="0" i="0">
-                <a:solidFill>
                   <a:srgbClr val="404040"/>
                 </a:solidFill>
                 <a:latin typeface="Microsoft JhengHei"/>
               </a:rPr>
-              <a:t>每 60 s 步降至 0.2C、dwell 1 s，取前後穩態算 ΔV/ΔI</a:t>
+              <a:t>1 </a:t>
+            </a:r>
+            <a:r>
+              <a:rPr sz="1300" b="0" i="0" dirty="0" err="1">
+                <a:solidFill>
+                  <a:srgbClr val="404040"/>
+                </a:solidFill>
+                <a:latin typeface="Microsoft JhengHei"/>
+              </a:rPr>
+              <a:t>s，取前後穩態算</a:t>
+            </a:r>
+            <a:r>
+              <a:rPr sz="1300" b="0" i="0" dirty="0">
+                <a:solidFill>
+                  <a:srgbClr val="404040"/>
+                </a:solidFill>
+                <a:latin typeface="Microsoft JhengHei"/>
+              </a:rPr>
+              <a:t> ΔV/ΔI</a:t>
             </a:r>
           </a:p>
           <a:p>
@@ -5805,7 +5991,7 @@
               </a:spcAft>
             </a:pPr>
             <a:r>
-              <a:rPr sz="1300" b="0" i="0">
+              <a:rPr sz="1300" b="0" i="0" dirty="0">
                 <a:solidFill>
                   <a:srgbClr val="595959"/>
                 </a:solidFill>
@@ -5814,14 +6000,38 @@
               <a:t>– </a:t>
             </a:r>
             <a:r>
-              <a:rPr sz="1300" b="0" i="0">
+              <a:rPr sz="1300" b="0" i="0" dirty="0" err="1">
                 <a:solidFill>
                   <a:srgbClr val="404040"/>
                 </a:solidFill>
                 <a:latin typeface="Microsoft JhengHei"/>
               </a:rPr>
-              <a:t>直接服務動態阻抗法；庫倫涵蓋擾動秒數，避免約 3% 低估</a:t>
-            </a:r>
+              <a:t>直接服務動態阻抗法；庫倫涵蓋擾動秒數，避免約</a:t>
+            </a:r>
+            <a:r>
+              <a:rPr sz="1300" b="0" i="0" dirty="0">
+                <a:solidFill>
+                  <a:srgbClr val="404040"/>
+                </a:solidFill>
+                <a:latin typeface="Microsoft JhengHei"/>
+              </a:rPr>
+              <a:t> 3% </a:t>
+            </a:r>
+            <a:r>
+              <a:rPr sz="1300" b="0" i="0" dirty="0" err="1">
+                <a:solidFill>
+                  <a:srgbClr val="404040"/>
+                </a:solidFill>
+                <a:latin typeface="Microsoft JhengHei"/>
+              </a:rPr>
+              <a:t>低估</a:t>
+            </a:r>
+            <a:endParaRPr sz="1300" b="0" i="0" dirty="0">
+              <a:solidFill>
+                <a:srgbClr val="404040"/>
+              </a:solidFill>
+              <a:latin typeface="Microsoft JhengHei"/>
+            </a:endParaRPr>
           </a:p>
         </p:txBody>
       </p:sp>
@@ -16829,7 +17039,7 @@
         <p:spPr>
           <a:xfrm>
             <a:off x="731520" y="1965960"/>
-            <a:ext cx="5074920" cy="3566160"/>
+            <a:ext cx="5074920" cy="2349361"/>
           </a:xfrm>
           <a:prstGeom prst="rect">
             <a:avLst/>
@@ -16851,7 +17061,7 @@
               </a:spcAft>
             </a:pPr>
             <a:r>
-              <a:rPr sz="1400" b="0" i="0">
+              <a:rPr sz="1400" b="0" i="0" dirty="0">
                 <a:solidFill>
                   <a:srgbClr val="2E74B5"/>
                 </a:solidFill>
@@ -16860,14 +17070,20 @@
               <a:t>▪ </a:t>
             </a:r>
             <a:r>
-              <a:rPr sz="1400" b="0" i="0">
+              <a:rPr sz="1400" b="0" i="0" dirty="0" err="1">
                 <a:solidFill>
                   <a:srgbClr val="404040"/>
                 </a:solidFill>
                 <a:latin typeface="Microsoft JhengHei"/>
               </a:rPr>
-              <a:t>只測了一顆 NMC 電池、室溫、沒做溫度補償</a:t>
-            </a:r>
+              <a:t>只測了一顆電池、室溫、沒做溫度補償</a:t>
+            </a:r>
+            <a:endParaRPr sz="1400" b="0" i="0" dirty="0">
+              <a:solidFill>
+                <a:srgbClr val="404040"/>
+              </a:solidFill>
+              <a:latin typeface="Microsoft JhengHei"/>
+            </a:endParaRPr>
           </a:p>
           <a:p>
             <a:pPr algn="l">
@@ -16879,7 +17095,7 @@
               </a:spcAft>
             </a:pPr>
             <a:r>
-              <a:rPr sz="1400" b="0" i="0">
+              <a:rPr sz="1400" b="0" i="0" dirty="0">
                 <a:solidFill>
                   <a:srgbClr val="2E74B5"/>
                 </a:solidFill>
@@ -16888,13 +17104,58 @@
               <a:t>▪ </a:t>
             </a:r>
             <a:r>
-              <a:rPr sz="1400" b="0" i="0">
+              <a:rPr sz="1400" b="0" i="0" dirty="0" err="1">
                 <a:solidFill>
                   <a:srgbClr val="404040"/>
                 </a:solidFill>
                 <a:latin typeface="Microsoft JhengHei"/>
               </a:rPr>
-              <a:t>只做電量（SOC），還沒做健康度（SOH）——但已量到能分辨的老化訊號（41 輪掉約 4.6%）</a:t>
+              <a:t>只做電量（SOC</a:t>
+            </a:r>
+            <a:r>
+              <a:rPr sz="1400" b="0" i="0" dirty="0">
+                <a:solidFill>
+                  <a:srgbClr val="404040"/>
+                </a:solidFill>
+                <a:latin typeface="Microsoft JhengHei"/>
+              </a:rPr>
+              <a:t>），</a:t>
+            </a:r>
+            <a:r>
+              <a:rPr sz="1400" b="0" i="0" dirty="0" err="1">
+                <a:solidFill>
+                  <a:srgbClr val="404040"/>
+                </a:solidFill>
+                <a:latin typeface="Microsoft JhengHei"/>
+              </a:rPr>
+              <a:t>還沒做健康度（SOH</a:t>
+            </a:r>
+            <a:r>
+              <a:rPr sz="1400" b="0" i="0" dirty="0">
+                <a:solidFill>
+                  <a:srgbClr val="404040"/>
+                </a:solidFill>
+                <a:latin typeface="Microsoft JhengHei"/>
+              </a:rPr>
+              <a:t>）——但已量到能分辨的老化訊號（41 </a:t>
+            </a:r>
+            <a:r>
+              <a:rPr sz="1400" b="0" i="0" dirty="0" err="1">
+                <a:solidFill>
+                  <a:srgbClr val="404040"/>
+                </a:solidFill>
+                <a:latin typeface="Microsoft JhengHei"/>
+              </a:rPr>
+              <a:t>輪掉約</a:t>
+            </a:r>
+            <a:r>
+              <a:rPr sz="1400" b="0" i="0" dirty="0">
+                <a:solidFill>
+                  <a:srgbClr val="404040"/>
+                </a:solidFill>
+                <a:latin typeface="Microsoft JhengHei"/>
+              </a:rPr>
+              <a:t> 4.6%）</a:t>
             </a:r>
           </a:p>
           <a:p>
@@ -16907,7 +17168,7 @@
               </a:spcAft>
             </a:pPr>
             <a:r>
-              <a:rPr sz="1400" b="0" i="0">
+              <a:rPr sz="1400" b="0" i="0" dirty="0">
                 <a:solidFill>
                   <a:srgbClr val="2E74B5"/>
                 </a:solidFill>
@@ -16916,14 +17177,38 @@
               <a:t>▪ </a:t>
             </a:r>
             <a:r>
-              <a:rPr sz="1400" b="0" i="0">
+              <a:rPr sz="1400" b="0" i="0" dirty="0" err="1">
                 <a:solidFill>
                   <a:srgbClr val="404040"/>
                 </a:solidFill>
                 <a:latin typeface="Microsoft JhengHei"/>
               </a:rPr>
-              <a:t>這顆電池「大電流也幾乎不掉電量」：對 EKF 有利、對動態阻抗卻是致命傷，結論不能直接套到別顆電池</a:t>
-            </a:r>
+              <a:t>這顆電池「大電流也幾乎不掉電量</a:t>
+            </a:r>
+            <a:r>
+              <a:rPr sz="1400" b="0" i="0" dirty="0">
+                <a:solidFill>
+                  <a:srgbClr val="404040"/>
+                </a:solidFill>
+                <a:latin typeface="Microsoft JhengHei"/>
+              </a:rPr>
+              <a:t>」：對 EKF </a:t>
+            </a:r>
+            <a:r>
+              <a:rPr sz="1400" b="0" i="0" dirty="0" err="1">
+                <a:solidFill>
+                  <a:srgbClr val="404040"/>
+                </a:solidFill>
+                <a:latin typeface="Microsoft JhengHei"/>
+              </a:rPr>
+              <a:t>有利、對動態阻抗卻是致命傷，結論不能直接套到別顆電池</a:t>
+            </a:r>
+            <a:endParaRPr sz="1400" b="0" i="0" dirty="0">
+              <a:solidFill>
+                <a:srgbClr val="404040"/>
+              </a:solidFill>
+              <a:latin typeface="Microsoft JhengHei"/>
+            </a:endParaRPr>
           </a:p>
           <a:p>
             <a:pPr algn="l">
@@ -16935,7 +17220,7 @@
               </a:spcAft>
             </a:pPr>
             <a:r>
-              <a:rPr sz="1400" b="0" i="0">
+              <a:rPr sz="1400" b="0" i="0" dirty="0">
                 <a:solidFill>
                   <a:srgbClr val="2E74B5"/>
                 </a:solidFill>
@@ -16944,14 +17229,47 @@
               <a:t>▪ </a:t>
             </a:r>
             <a:r>
-              <a:rPr sz="1400" b="0" i="0">
+              <a:rPr sz="1400" b="0" i="0" dirty="0">
                 <a:solidFill>
                   <a:srgbClr val="404040"/>
                 </a:solidFill>
                 <a:latin typeface="Microsoft JhengHei"/>
               </a:rPr>
-              <a:t>EKF 的參數跟電腦驗證用同一份資料（等於自己驗自己）；真正的公正驗證靠兩整輪實機實測</a:t>
-            </a:r>
+              <a:t>EKF </a:t>
+            </a:r>
+            <a:r>
+              <a:rPr sz="1400" b="0" i="0" dirty="0" err="1">
+                <a:solidFill>
+                  <a:srgbClr val="404040"/>
+                </a:solidFill>
+                <a:latin typeface="Microsoft JhengHei"/>
+              </a:rPr>
+              <a:t>的參數跟電腦驗證用同一份資料（等於自己驗自己</a:t>
+            </a:r>
+            <a:r>
+              <a:rPr sz="1400" b="0" i="0" dirty="0">
+                <a:solidFill>
+                  <a:srgbClr val="404040"/>
+                </a:solidFill>
+                <a:latin typeface="Microsoft JhengHei"/>
+              </a:rPr>
+              <a:t>）；</a:t>
+            </a:r>
+            <a:r>
+              <a:rPr sz="1400" b="0" i="0" dirty="0" err="1">
+                <a:solidFill>
+                  <a:srgbClr val="404040"/>
+                </a:solidFill>
+                <a:latin typeface="Microsoft JhengHei"/>
+              </a:rPr>
+              <a:t>真正的公正驗證靠兩整輪實機實測</a:t>
+            </a:r>
+            <a:endParaRPr sz="1400" b="0" i="0" dirty="0">
+              <a:solidFill>
+                <a:srgbClr val="404040"/>
+              </a:solidFill>
+              <a:latin typeface="Microsoft JhengHei"/>
+            </a:endParaRPr>
           </a:p>
           <a:p>
             <a:pPr algn="l">
@@ -16963,7 +17281,7 @@
               </a:spcAft>
             </a:pPr>
             <a:r>
-              <a:rPr sz="1400" b="0" i="0">
+              <a:rPr sz="1400" b="0" i="0" dirty="0">
                 <a:solidFill>
                   <a:srgbClr val="2E74B5"/>
                 </a:solidFill>
@@ -16972,14 +17290,38 @@
               <a:t>▪ </a:t>
             </a:r>
             <a:r>
-              <a:rPr sz="1400" b="0" i="0">
+              <a:rPr sz="1400" b="0" i="0" dirty="0" err="1">
                 <a:solidFill>
                   <a:srgbClr val="404040"/>
                 </a:solidFill>
                 <a:latin typeface="Microsoft JhengHei"/>
               </a:rPr>
-              <a:t>板端跟儀器兩套電流量測本身差約 1.2%，看絕對精度時要把這個算進去</a:t>
-            </a:r>
+              <a:t>板端跟儀器兩套電流量測本身差約</a:t>
+            </a:r>
+            <a:r>
+              <a:rPr sz="1400" b="0" i="0" dirty="0">
+                <a:solidFill>
+                  <a:srgbClr val="404040"/>
+                </a:solidFill>
+                <a:latin typeface="Microsoft JhengHei"/>
+              </a:rPr>
+              <a:t> 1.2%，</a:t>
+            </a:r>
+            <a:r>
+              <a:rPr sz="1400" b="0" i="0" dirty="0" err="1">
+                <a:solidFill>
+                  <a:srgbClr val="404040"/>
+                </a:solidFill>
+                <a:latin typeface="Microsoft JhengHei"/>
+              </a:rPr>
+              <a:t>看絕對精度時要把這個算進去</a:t>
+            </a:r>
+            <a:endParaRPr sz="1400" b="0" i="0" dirty="0">
+              <a:solidFill>
+                <a:srgbClr val="404040"/>
+              </a:solidFill>
+              <a:latin typeface="Microsoft JhengHei"/>
+            </a:endParaRPr>
           </a:p>
         </p:txBody>
       </p:sp>
@@ -18076,7 +18418,7 @@
         <p:spPr>
           <a:xfrm>
             <a:off x="7744968" y="3767328"/>
-            <a:ext cx="3840480" cy="2103120"/>
+            <a:ext cx="3840480" cy="1033616"/>
           </a:xfrm>
           <a:prstGeom prst="rect">
             <a:avLst/>
@@ -18095,7 +18437,7 @@
               </a:spcAft>
             </a:pPr>
             <a:r>
-              <a:rPr sz="1400" b="1" i="0">
+              <a:rPr sz="1400" b="1" i="0" dirty="0" err="1">
                 <a:solidFill>
                   <a:srgbClr val="C08A2B"/>
                 </a:solidFill>
@@ -18103,6 +18445,12 @@
               </a:rPr>
               <a:t>研究範圍界定</a:t>
             </a:r>
+            <a:endParaRPr sz="1400" b="1" i="0" dirty="0">
+              <a:solidFill>
+                <a:srgbClr val="C08A2B"/>
+              </a:solidFill>
+              <a:latin typeface="Microsoft JhengHei"/>
+            </a:endParaRPr>
           </a:p>
           <a:p>
             <a:pPr>
@@ -18111,14 +18459,47 @@
               </a:spcAft>
             </a:pPr>
             <a:r>
-              <a:rPr sz="1300" b="0" i="0">
+              <a:rPr sz="1300" b="0" i="0" dirty="0">
                 <a:solidFill>
                   <a:srgbClr val="404040"/>
                 </a:solidFill>
                 <a:latin typeface="Microsoft JhengHei"/>
               </a:rPr>
-              <a:t>• 本研究聚焦 SOC 估測</a:t>
-            </a:r>
+              <a:t>• </a:t>
+            </a:r>
+            <a:r>
+              <a:rPr sz="1300" b="0" i="0" dirty="0" err="1">
+                <a:solidFill>
+                  <a:srgbClr val="404040"/>
+                </a:solidFill>
+                <a:latin typeface="Microsoft JhengHei"/>
+              </a:rPr>
+              <a:t>本研究聚焦</a:t>
+            </a:r>
+            <a:r>
+              <a:rPr sz="1300" b="0" i="0" dirty="0">
+                <a:solidFill>
+                  <a:srgbClr val="404040"/>
+                </a:solidFill>
+                <a:latin typeface="Microsoft JhengHei"/>
+              </a:rPr>
+              <a:t> SOC </a:t>
+            </a:r>
+            <a:r>
+              <a:rPr sz="1300" b="0" i="0" dirty="0" err="1">
+                <a:solidFill>
+                  <a:srgbClr val="404040"/>
+                </a:solidFill>
+                <a:latin typeface="Microsoft JhengHei"/>
+              </a:rPr>
+              <a:t>估測</a:t>
+            </a:r>
+            <a:endParaRPr sz="1300" b="0" i="0" dirty="0">
+              <a:solidFill>
+                <a:srgbClr val="404040"/>
+              </a:solidFill>
+              <a:latin typeface="Microsoft JhengHei"/>
+            </a:endParaRPr>
           </a:p>
           <a:p>
             <a:pPr>
@@ -18127,13 +18508,31 @@
               </a:spcAft>
             </a:pPr>
             <a:r>
-              <a:rPr sz="1300" b="0" i="0">
+              <a:rPr sz="1300" b="0" i="0" dirty="0">
                 <a:solidFill>
                   <a:srgbClr val="404040"/>
                 </a:solidFill>
                 <a:latin typeface="Microsoft JhengHei"/>
               </a:rPr>
-              <a:t>• SOH 列為未來工作（第六章）</a:t>
+              <a:t>• SOH </a:t>
+            </a:r>
+            <a:r>
+              <a:rPr sz="1300" b="0" i="0" dirty="0" err="1">
+                <a:solidFill>
+                  <a:srgbClr val="404040"/>
+                </a:solidFill>
+                <a:latin typeface="Microsoft JhengHei"/>
+              </a:rPr>
+              <a:t>列為未來工作（第六章</a:t>
+            </a:r>
+            <a:r>
+              <a:rPr sz="1300" b="0" i="0" dirty="0">
+                <a:solidFill>
+                  <a:srgbClr val="404040"/>
+                </a:solidFill>
+                <a:latin typeface="Microsoft JhengHei"/>
+              </a:rPr>
+              <a:t>）</a:t>
             </a:r>
           </a:p>
           <a:p>
@@ -18143,14 +18542,65 @@
               </a:spcAft>
             </a:pPr>
             <a:r>
-              <a:rPr sz="1300" b="0" i="0">
+              <a:rPr sz="1300" b="0" i="0" dirty="0">
                 <a:solidFill>
                   <a:srgbClr val="404040"/>
                 </a:solidFill>
                 <a:latin typeface="Microsoft JhengHei"/>
               </a:rPr>
-              <a:t>• 單顆 NMC 2000 mAh、室溫、不做溫補</a:t>
-            </a:r>
+              <a:t>• </a:t>
+            </a:r>
+            <a:r>
+              <a:rPr sz="1300" b="0" i="0" dirty="0" err="1">
+                <a:solidFill>
+                  <a:srgbClr val="404040"/>
+                </a:solidFill>
+                <a:latin typeface="Microsoft JhengHei"/>
+              </a:rPr>
+              <a:t>單顆</a:t>
+            </a:r>
+            <a:r>
+              <a:rPr sz="1300" b="0" i="0" dirty="0">
+                <a:solidFill>
+                  <a:srgbClr val="404040"/>
+                </a:solidFill>
+                <a:latin typeface="Microsoft JhengHei"/>
+              </a:rPr>
+              <a:t> </a:t>
+            </a:r>
+            <a:r>
+              <a:rPr lang="en-US" altLang="zh-TW" sz="1300" b="0" i="0" dirty="0">
+                <a:solidFill>
+                  <a:srgbClr val="404040"/>
+                </a:solidFill>
+                <a:latin typeface="Microsoft JhengHei"/>
+              </a:rPr>
+              <a:t>Li-ion </a:t>
+            </a:r>
+            <a:r>
+              <a:rPr sz="1300" b="0" i="0" dirty="0">
+                <a:solidFill>
+                  <a:srgbClr val="404040"/>
+                </a:solidFill>
+                <a:latin typeface="Microsoft JhengHei"/>
+              </a:rPr>
+              <a:t>2000 </a:t>
+            </a:r>
+            <a:r>
+              <a:rPr sz="1300" b="0" i="0" dirty="0" err="1">
+                <a:solidFill>
+                  <a:srgbClr val="404040"/>
+                </a:solidFill>
+                <a:latin typeface="Microsoft JhengHei"/>
+              </a:rPr>
+              <a:t>mAh、室溫、不做溫補</a:t>
+            </a:r>
+            <a:endParaRPr sz="1300" b="0" i="0" dirty="0">
+              <a:solidFill>
+                <a:srgbClr val="404040"/>
+              </a:solidFill>
+              <a:latin typeface="Microsoft JhengHei"/>
+            </a:endParaRPr>
           </a:p>
         </p:txBody>
       </p:sp>
@@ -21207,13 +21657,58 @@
                     <a:p>
                       <a:pPr algn="ctr"/>
                       <a:r>
-                        <a:rPr sz="1400" b="0" i="0">
+                        <a:rPr sz="1400" b="0" i="0" dirty="0" err="1">
                           <a:solidFill>
                             <a:srgbClr val="404040"/>
                           </a:solidFill>
                           <a:latin typeface="Microsoft JhengHei"/>
                         </a:rPr>
-                        <a:t>需長時間靜置，與 rate-capability 協定相斥；改以 GITT 表供 EKF 用</a:t>
+                        <a:t>需長時間靜置，與</a:t>
+                      </a:r>
+                      <a:r>
+                        <a:rPr sz="1400" b="0" i="0" dirty="0">
+                          <a:solidFill>
+                            <a:srgbClr val="404040"/>
+                          </a:solidFill>
+                          <a:latin typeface="Microsoft JhengHei"/>
+                        </a:rPr>
+                        <a:t> rate-capability </a:t>
+                      </a:r>
+                      <a:r>
+                        <a:rPr sz="1400" b="0" i="0" dirty="0" err="1">
+                          <a:solidFill>
+                            <a:srgbClr val="404040"/>
+                          </a:solidFill>
+                          <a:latin typeface="Microsoft JhengHei"/>
+                        </a:rPr>
+                        <a:t>協定相斥；改以</a:t>
+                      </a:r>
+                      <a:r>
+                        <a:rPr sz="1400" b="0" i="0" dirty="0">
+                          <a:solidFill>
+                            <a:srgbClr val="404040"/>
+                          </a:solidFill>
+                          <a:latin typeface="Microsoft JhengHei"/>
+                        </a:rPr>
+                        <a:t> GITT </a:t>
+                      </a:r>
+                      <a:r>
+                        <a:rPr sz="1400" b="0" i="0" dirty="0" err="1">
+                          <a:solidFill>
+                            <a:srgbClr val="404040"/>
+                          </a:solidFill>
+                          <a:latin typeface="Microsoft JhengHei"/>
+                        </a:rPr>
+                        <a:t>表供</a:t>
+                      </a:r>
+                      <a:r>
+                        <a:rPr sz="1400" b="0" i="0" dirty="0">
+                          <a:solidFill>
+                            <a:srgbClr val="404040"/>
+                          </a:solidFill>
+                          <a:latin typeface="Microsoft JhengHei"/>
+                        </a:rPr>
+                        <a:t> EKF 用</a:t>
                       </a:r>
                     </a:p>
                   </a:txBody>
@@ -21405,14 +21900,74 @@
                     <a:p>
                       <a:pPr algn="ctr"/>
                       <a:r>
-                        <a:rPr sz="1400" b="0" i="0">
+                        <a:rPr sz="1400" b="0" i="0" dirty="0" err="1">
                           <a:solidFill>
                             <a:srgbClr val="404040"/>
                           </a:solidFill>
                           <a:latin typeface="Microsoft JhengHei"/>
                         </a:rPr>
-                        <a:t>本研究主要方法；無須初值、即時可算、嵌入式友善；複用既有 dV/dI 擾動</a:t>
+                        <a:t>本研究主要方法；無須初值、即時可算、嵌入式友善；複用既有</a:t>
                       </a:r>
+                      <a:r>
+                        <a:rPr sz="1400" b="0" i="0" dirty="0">
+                          <a:solidFill>
+                            <a:srgbClr val="404040"/>
+                          </a:solidFill>
+                          <a:latin typeface="Microsoft JhengHei"/>
+                        </a:rPr>
+                        <a:t> </a:t>
+                      </a:r>
+                      <a:r>
+                        <a:rPr sz="1400" b="0" i="0" dirty="0" err="1">
+                          <a:solidFill>
+                            <a:srgbClr val="404040"/>
+                          </a:solidFill>
+                          <a:latin typeface="Microsoft JhengHei"/>
+                        </a:rPr>
+                        <a:t>dV</a:t>
+                      </a:r>
+                      <a:r>
+                        <a:rPr sz="1400" b="0" i="0" dirty="0">
+                          <a:solidFill>
+                            <a:srgbClr val="404040"/>
+                          </a:solidFill>
+                          <a:latin typeface="Microsoft JhengHei"/>
+                        </a:rPr>
+                        <a:t>/</a:t>
+                      </a:r>
+                      <a:r>
+                        <a:rPr sz="1400" b="0" i="0" dirty="0" err="1">
+                          <a:solidFill>
+                            <a:srgbClr val="404040"/>
+                          </a:solidFill>
+                          <a:latin typeface="Microsoft JhengHei"/>
+                        </a:rPr>
+                        <a:t>dI</a:t>
+                      </a:r>
+                      <a:r>
+                        <a:rPr sz="1400" b="0" i="0" dirty="0">
+                          <a:solidFill>
+                            <a:srgbClr val="404040"/>
+                          </a:solidFill>
+                          <a:latin typeface="Microsoft JhengHei"/>
+                        </a:rPr>
+                        <a:t> </a:t>
+                      </a:r>
+                      <a:r>
+                        <a:rPr sz="1400" b="0" i="0" dirty="0" err="1">
+                          <a:solidFill>
+                            <a:srgbClr val="404040"/>
+                          </a:solidFill>
+                          <a:latin typeface="Microsoft JhengHei"/>
+                        </a:rPr>
+                        <a:t>擾動</a:t>
+                      </a:r>
+                      <a:endParaRPr sz="1400" b="0" i="0" dirty="0">
+                        <a:solidFill>
+                          <a:srgbClr val="404040"/>
+                        </a:solidFill>
+                        <a:latin typeface="Microsoft JhengHei"/>
+                      </a:endParaRPr>
                     </a:p>
                   </a:txBody>
                   <a:tcPr marL="63500" marR="50800" marT="25400" marB="25400" anchor="ctr">
@@ -21907,7 +22462,13 @@
           <p:cNvGraphicFramePr>
             <a:graphicFrameLocks noGrp="1"/>
           </p:cNvGraphicFramePr>
-          <p:nvPr/>
+          <p:nvPr>
+            <p:extLst>
+              <p:ext uri="{D42A27DB-BD31-4B8C-83A1-F6EECF244321}">
+                <p14:modId xmlns:p14="http://schemas.microsoft.com/office/powerpoint/2010/main" val="4163495825"/>
+              </p:ext>
+            </p:extLst>
+          </p:nvPr>
         </p:nvGraphicFramePr>
         <p:xfrm>
           <a:off x="7406640" y="1417320"/>
@@ -22231,7 +22792,7 @@
                     <a:p>
                       <a:pPr algn="ctr"/>
                       <a:r>
-                        <a:rPr sz="1300" b="0" i="0">
+                        <a:rPr sz="1300" b="0" i="0" dirty="0">
                           <a:solidFill>
                             <a:srgbClr val="404040"/>
                           </a:solidFill>
@@ -22284,13 +22845,22 @@
                     <a:p>
                       <a:pPr algn="ctr"/>
                       <a:r>
-                        <a:rPr sz="1300" b="0" i="0">
+                        <a:rPr lang="en-US" altLang="zh-TW" sz="1300" b="0" i="0" dirty="0">
                           <a:solidFill>
                             <a:srgbClr val="404040"/>
                           </a:solidFill>
                           <a:latin typeface="Microsoft JhengHei"/>
                         </a:rPr>
-                        <a:t>NMC 2000 mAh，4.2/2.5 V</a:t>
+                        <a:t>Li-ion </a:t>
+                      </a:r>
+                      <a:r>
+                        <a:rPr sz="1300" b="0" i="0" dirty="0">
+                          <a:solidFill>
+                            <a:srgbClr val="404040"/>
+                          </a:solidFill>
+                          <a:latin typeface="Microsoft JhengHei"/>
+                        </a:rPr>
+                        <a:t>2000 mAh，4.2/2.5 V</a:t>
                       </a:r>
                     </a:p>
                   </a:txBody>
